--- a/slides/04-skills-custom-agents.pptx
+++ b/slides/04-skills-custom-agents.pptx
@@ -736,91 +736,91 @@
 </file>
 
 <file path=ppt/notesSlides/notesSlide12.xml><?xml version="1.0" encoding="utf-8"?>
-<p:notes xmlns:a="http://schemas.openxmlformats.org/drawingml/2006/main" xmlns:r="http://schemas.openxmlformats.org/officeDocument/2006/relationships" xmlns:p="http://schemas.openxmlformats.org/presentationml/2006/main">
-  <p:cSld>
-    <p:spTree>
-      <p:nvGrpSpPr>
-        <p:cNvPr id="1" name=""/>
-        <p:cNvGrpSpPr/>
-        <p:nvPr/>
-      </p:nvGrpSpPr>
-      <p:grpSpPr>
-        <a:xfrm>
-          <a:off x="0" y="0"/>
-          <a:ext cx="0" cy="0"/>
-          <a:chOff x="0" y="0"/>
-          <a:chExt cx="0" cy="0"/>
-        </a:xfrm>
-      </p:grpSpPr>
-      <p:sp>
-        <p:nvSpPr>
-          <p:cNvPr id="2" name="Slide Image Placeholder 1"/>
-          <p:cNvSpPr>
-            <a:spLocks noGrp="1" noRot="1" noChangeAspect="1"/>
-          </p:cNvSpPr>
-          <p:nvPr>
-            <p:ph type="sldImg"/>
-          </p:nvPr>
-        </p:nvSpPr>
-        <p:spPr/>
-      </p:sp>
-      <p:sp>
-        <p:nvSpPr>
-          <p:cNvPr id="3" name="Notes Placeholder 2"/>
-          <p:cNvSpPr>
-            <a:spLocks noGrp="1"/>
-          </p:cNvSpPr>
-          <p:nvPr>
-            <p:ph type="body" idx="1"/>
-          </p:nvPr>
-        </p:nvSpPr>
-        <p:spPr/>
-        <p:txBody>
-          <a:bodyPr/>
-          <a:lstStyle/>
-          <a:p>
-            <a:r>
-              <a:rPr lang="en-US" dirty="0"/>
-              <a:t>Ask Copilot to create .github/agents/book-app-explainer.agent.md with the exact Markdown from the chapter, and to stop if the file already exists. Inspect it in Changes and confirm tools contains only read and search. The name identifies it in the agent picker. The description states its purpose. The body defines behavior and a four-part answer format: what it does, how the data moves, one small example, and what the tests cover plus one manual check.</a:t>
-            </a:r>
-            <a:endParaRPr lang="en-US" dirty="0"/>
-          </a:p>
-        </p:txBody>
-      </p:sp>
-      <p:sp>
-        <p:nvSpPr>
-          <p:cNvPr id="4" name="Slide Number Placeholder 3"/>
-          <p:cNvSpPr>
-            <a:spLocks noGrp="1"/>
-          </p:cNvSpPr>
-          <p:nvPr>
-            <p:ph type="sldNum" sz="quarter" idx="10"/>
-          </p:nvPr>
-        </p:nvSpPr>
-        <p:spPr/>
-        <p:txBody>
-          <a:bodyPr/>
-          <a:lstStyle/>
-          <a:p>
-            <a:fld id="{F7021451-1387-4CA6-816F-3879F97B5CBC}" type="slidenum">
-              <a:rPr lang="en-US"/>
-              <a:t>12</a:t>
-            </a:fld>
-            <a:endParaRPr lang="en-US"/>
-          </a:p>
-        </p:txBody>
-      </p:sp>
-    </p:spTree>
-    <p:extLst>
-      <p:ext uri="{BB962C8B-B14F-4D97-AF65-F5344CB8AC3E}">
-        <p14:creationId xmlns:p14="http://schemas.microsoft.com/office/powerpoint/2010/main" val="1024086991"/>
-      </p:ext>
-    </p:extLst>
-  </p:cSld>
-  <p:clrMapOvr>
-    <a:masterClrMapping/>
-  </p:clrMapOvr>
-</p:notes>
+<ns0:notes xmlns:ns0="http://schemas.openxmlformats.org/presentationml/2006/main" xmlns:ns1="http://schemas.openxmlformats.org/drawingml/2006/main" xmlns:ns2="http://schemas.microsoft.com/office/powerpoint/2010/main">
+  <ns0:cSld>
+    <ns0:spTree>
+      <ns0:nvGrpSpPr>
+        <ns0:cNvPr id="1" name=""/>
+        <ns0:cNvGrpSpPr/>
+        <ns0:nvPr/>
+      </ns0:nvGrpSpPr>
+      <ns0:grpSpPr>
+        <ns1:xfrm>
+          <ns1:off x="0" y="0"/>
+          <ns1:ext cx="0" cy="0"/>
+          <ns1:chOff x="0" y="0"/>
+          <ns1:chExt cx="0" cy="0"/>
+        </ns1:xfrm>
+      </ns0:grpSpPr>
+      <ns0:sp>
+        <ns0:nvSpPr>
+          <ns0:cNvPr id="2" name="Slide Image Placeholder 1"/>
+          <ns0:cNvSpPr>
+            <ns1:spLocks noGrp="1" noRot="1" noChangeAspect="1"/>
+          </ns0:cNvSpPr>
+          <ns0:nvPr>
+            <ns0:ph type="sldImg"/>
+          </ns0:nvPr>
+        </ns0:nvSpPr>
+        <ns0:spPr/>
+      </ns0:sp>
+      <ns0:sp>
+        <ns0:nvSpPr>
+          <ns0:cNvPr id="3" name="Notes Placeholder 2"/>
+          <ns0:cNvSpPr>
+            <ns1:spLocks noGrp="1"/>
+          </ns0:cNvSpPr>
+          <ns0:nvPr>
+            <ns0:ph type="body" idx="1"/>
+          </ns0:nvPr>
+        </ns0:nvSpPr>
+        <ns0:spPr/>
+        <ns0:txBody>
+          <ns1:bodyPr/>
+          <ns1:lstStyle/>
+          <ns1:p>
+            <ns1:r>
+              <ns1:rPr lang="en-US" dirty="0"/>
+              <ns1:t>Ask Copilot to create .github/agents/book-app-explainer.agent.md with the exact Markdown from the chapter, and to stop if the file already exists. Inspect it in Changes and confirm tools contains only read and search. Keep the description as a valid, indented YAML value if it wraps across lines. The name identifies it in the agent picker. The description states its purpose. The body defines behavior and a four-part answer format: what it does, how the data moves, one small example, and what the tests cover plus one manual check.</ns1:t>
+            </ns1:r>
+            <ns1:endParaRPr lang="en-US" dirty="0"/>
+          </ns1:p>
+        </ns0:txBody>
+      </ns0:sp>
+      <ns0:sp>
+        <ns0:nvSpPr>
+          <ns0:cNvPr id="4" name="Slide Number Placeholder 3"/>
+          <ns0:cNvSpPr>
+            <ns1:spLocks noGrp="1"/>
+          </ns0:cNvSpPr>
+          <ns0:nvPr>
+            <ns0:ph type="sldNum" sz="quarter" idx="10"/>
+          </ns0:nvPr>
+        </ns0:nvSpPr>
+        <ns0:spPr/>
+        <ns0:txBody>
+          <ns1:bodyPr/>
+          <ns1:lstStyle/>
+          <ns1:p>
+            <ns1:fld id="{F7021451-1387-4CA6-816F-3879F97B5CBC}" type="slidenum">
+              <ns1:rPr lang="en-US"/>
+              <ns1:t>12</ns1:t>
+            </ns1:fld>
+            <ns1:endParaRPr lang="en-US"/>
+          </ns1:p>
+        </ns0:txBody>
+      </ns0:sp>
+    </ns0:spTree>
+    <ns0:extLst>
+      <ns0:ext uri="{BB962C8B-B14F-4D97-AF65-F5344CB8AC3E}">
+        <ns2:creationId val="1024086991"/>
+      </ns0:ext>
+    </ns0:extLst>
+  </ns0:cSld>
+  <ns0:clrMapOvr>
+    <ns1:masterClrMapping/>
+  </ns0:clrMapOvr>
+</ns0:notes>
 </file>
 
 <file path=ppt/notesSlides/notesSlide13.xml><?xml version="1.0" encoding="utf-8"?>
@@ -1616,179 +1616,179 @@
 </file>
 
 <file path=ppt/notesSlides/notesSlide7.xml><?xml version="1.0" encoding="utf-8"?>
-<p:notes xmlns:a="http://schemas.openxmlformats.org/drawingml/2006/main" xmlns:r="http://schemas.openxmlformats.org/officeDocument/2006/relationships" xmlns:p="http://schemas.openxmlformats.org/presentationml/2006/main">
-  <p:cSld>
-    <p:spTree>
-      <p:nvGrpSpPr>
-        <p:cNvPr id="1" name=""/>
-        <p:cNvGrpSpPr/>
-        <p:nvPr/>
-      </p:nvGrpSpPr>
-      <p:grpSpPr>
-        <a:xfrm>
-          <a:off x="0" y="0"/>
-          <a:ext cx="0" cy="0"/>
-          <a:chOff x="0" y="0"/>
-          <a:chExt cx="0" cy="0"/>
-        </a:xfrm>
-      </p:grpSpPr>
-      <p:sp>
-        <p:nvSpPr>
-          <p:cNvPr id="2" name="Slide Image Placeholder 1"/>
-          <p:cNvSpPr>
-            <a:spLocks noGrp="1" noRot="1" noChangeAspect="1"/>
-          </p:cNvSpPr>
-          <p:nvPr>
-            <p:ph type="sldImg"/>
-          </p:nvPr>
-        </p:nvSpPr>
-        <p:spPr/>
-      </p:sp>
-      <p:sp>
-        <p:nvSpPr>
-          <p:cNvPr id="3" name="Notes Placeholder 2"/>
-          <p:cNvSpPr>
-            <a:spLocks noGrp="1"/>
-          </p:cNvSpPr>
-          <p:nvPr>
-            <p:ph type="body" idx="1"/>
-          </p:nvPr>
-        </p:nvSpPr>
-        <p:spPr/>
-        <p:txBody>
-          <a:bodyPr/>
-          <a:lstStyle/>
-          <a:p>
-            <a:r>
-              <a:rPr lang="en-US" dirty="0"/>
-              <a:t>A skill is a folder with a SKILL.md file. The block between the dashes is YAML frontmatter. The description matters: it is how the app decides when to load the skill. Below it is the Markdown checklist. Repository skills are shared through Git; personal skills apply across your projects. Important: a skill is guidance, not a permission boundary. Review without editing does not disable editing tools. Skills can also include scripts or tell Copilot to use tools, so read unfamiliar skills before you enable them.</a:t>
-            </a:r>
-            <a:endParaRPr lang="en-US" dirty="0"/>
-          </a:p>
-        </p:txBody>
-      </p:sp>
-      <p:sp>
-        <p:nvSpPr>
-          <p:cNvPr id="4" name="Slide Number Placeholder 3"/>
-          <p:cNvSpPr>
-            <a:spLocks noGrp="1"/>
-          </p:cNvSpPr>
-          <p:nvPr>
-            <p:ph type="sldNum" sz="quarter" idx="10"/>
-          </p:nvPr>
-        </p:nvSpPr>
-        <p:spPr/>
-        <p:txBody>
-          <a:bodyPr/>
-          <a:lstStyle/>
-          <a:p>
-            <a:fld id="{F7021451-1387-4CA6-816F-3879F97B5CBC}" type="slidenum">
-              <a:rPr lang="en-US"/>
-              <a:t>7</a:t>
-            </a:fld>
-            <a:endParaRPr lang="en-US"/>
-          </a:p>
-        </p:txBody>
-      </p:sp>
-    </p:spTree>
-    <p:extLst>
-      <p:ext uri="{BB962C8B-B14F-4D97-AF65-F5344CB8AC3E}">
-        <p14:creationId xmlns:p14="http://schemas.microsoft.com/office/powerpoint/2010/main" val="1024086991"/>
-      </p:ext>
-    </p:extLst>
-  </p:cSld>
-  <p:clrMapOvr>
-    <a:masterClrMapping/>
-  </p:clrMapOvr>
-</p:notes>
+<ns0:notes xmlns:ns0="http://schemas.openxmlformats.org/presentationml/2006/main" xmlns:ns1="http://schemas.openxmlformats.org/drawingml/2006/main" xmlns:ns2="http://schemas.microsoft.com/office/powerpoint/2010/main">
+  <ns0:cSld>
+    <ns0:spTree>
+      <ns0:nvGrpSpPr>
+        <ns0:cNvPr id="1" name=""/>
+        <ns0:cNvGrpSpPr/>
+        <ns0:nvPr/>
+      </ns0:nvGrpSpPr>
+      <ns0:grpSpPr>
+        <ns1:xfrm>
+          <ns1:off x="0" y="0"/>
+          <ns1:ext cx="0" cy="0"/>
+          <ns1:chOff x="0" y="0"/>
+          <ns1:chExt cx="0" cy="0"/>
+        </ns1:xfrm>
+      </ns0:grpSpPr>
+      <ns0:sp>
+        <ns0:nvSpPr>
+          <ns0:cNvPr id="2" name="Slide Image Placeholder 1"/>
+          <ns0:cNvSpPr>
+            <ns1:spLocks noGrp="1" noRot="1" noChangeAspect="1"/>
+          </ns0:cNvSpPr>
+          <ns0:nvPr>
+            <ns0:ph type="sldImg"/>
+          </ns0:nvPr>
+        </ns0:nvSpPr>
+        <ns0:spPr/>
+      </ns0:sp>
+      <ns0:sp>
+        <ns0:nvSpPr>
+          <ns0:cNvPr id="3" name="Notes Placeholder 2"/>
+          <ns0:cNvSpPr>
+            <ns1:spLocks noGrp="1"/>
+          </ns0:cNvSpPr>
+          <ns0:nvPr>
+            <ns0:ph type="body" idx="1"/>
+          </ns0:nvPr>
+        </ns0:nvSpPr>
+        <ns0:spPr/>
+        <ns0:txBody>
+          <ns1:bodyPr/>
+          <ns1:lstStyle/>
+          <ns1:p>
+            <ns1:r>
+              <ns1:rPr lang="en-US" dirty="0"/>
+              <ns1:t>A skill is a folder with a SKILL.md file. The block between the dashes is YAML frontmatter. Keep each description line indented under its key so the YAML remains valid. The description matters: it tells the app when to load the skill. Below it is the Markdown checklist. Repository skills are shared through Git; personal skills apply across your projects. A skill is guidance, not a permission boundary. Review without editing does not disable editing tools. Skills can also include scripts or tell Copilot to use tools, so read unfamiliar skills before you enable them.</ns1:t>
+            </ns1:r>
+            <ns1:endParaRPr lang="en-US" dirty="0"/>
+          </ns1:p>
+        </ns0:txBody>
+      </ns0:sp>
+      <ns0:sp>
+        <ns0:nvSpPr>
+          <ns0:cNvPr id="4" name="Slide Number Placeholder 3"/>
+          <ns0:cNvSpPr>
+            <ns1:spLocks noGrp="1"/>
+          </ns0:cNvSpPr>
+          <ns0:nvPr>
+            <ns0:ph type="sldNum" sz="quarter" idx="10"/>
+          </ns0:nvPr>
+        </ns0:nvSpPr>
+        <ns0:spPr/>
+        <ns0:txBody>
+          <ns1:bodyPr/>
+          <ns1:lstStyle/>
+          <ns1:p>
+            <ns1:fld id="{F7021451-1387-4CA6-816F-3879F97B5CBC}" type="slidenum">
+              <ns1:rPr lang="en-US"/>
+              <ns1:t>7</ns1:t>
+            </ns1:fld>
+            <ns1:endParaRPr lang="en-US"/>
+          </ns1:p>
+        </ns0:txBody>
+      </ns0:sp>
+    </ns0:spTree>
+    <ns0:extLst>
+      <ns0:ext uri="{BB962C8B-B14F-4D97-AF65-F5344CB8AC3E}">
+        <ns2:creationId val="1024086991"/>
+      </ns0:ext>
+    </ns0:extLst>
+  </ns0:cSld>
+  <ns0:clrMapOvr>
+    <ns1:masterClrMapping/>
+  </ns0:clrMapOvr>
+</ns0:notes>
 </file>
 
 <file path=ppt/notesSlides/notesSlide8.xml><?xml version="1.0" encoding="utf-8"?>
-<p:notes xmlns:a="http://schemas.openxmlformats.org/drawingml/2006/main" xmlns:r="http://schemas.openxmlformats.org/officeDocument/2006/relationships" xmlns:p="http://schemas.openxmlformats.org/presentationml/2006/main">
-  <p:cSld>
-    <p:spTree>
-      <p:nvGrpSpPr>
-        <p:cNvPr id="1" name=""/>
-        <p:cNvGrpSpPr/>
-        <p:nvPr/>
-      </p:nvGrpSpPr>
-      <p:grpSpPr>
-        <a:xfrm>
-          <a:off x="0" y="0"/>
-          <a:ext cx="0" cy="0"/>
-          <a:chOff x="0" y="0"/>
-          <a:chExt cx="0" cy="0"/>
-        </a:xfrm>
-      </p:grpSpPr>
-      <p:sp>
-        <p:nvSpPr>
-          <p:cNvPr id="2" name="Slide Image Placeholder 1"/>
-          <p:cNvSpPr>
-            <a:spLocks noGrp="1" noRot="1" noChangeAspect="1"/>
-          </p:cNvSpPr>
-          <p:nvPr>
-            <p:ph type="sldImg"/>
-          </p:nvPr>
-        </p:nvSpPr>
-        <p:spPr/>
-      </p:sp>
-      <p:sp>
-        <p:nvSpPr>
-          <p:cNvPr id="3" name="Notes Placeholder 2"/>
-          <p:cNvSpPr>
-            <a:spLocks noGrp="1"/>
-          </p:cNvSpPr>
-          <p:nvPr>
-            <p:ph type="body" idx="1"/>
-          </p:nvPr>
-        </p:nvSpPr>
-        <p:spPr/>
-        <p:txBody>
-          <a:bodyPr/>
-          <a:lstStyle/>
-          <a:p>
-            <a:r>
-              <a:rPr lang="en-US" dirty="0"/>
-              <a:t>Work in a new worktree session from main in Interactive mode. In Customize, Skills, filter to Project and search for book-app-reviewer; confirm it is enabled. All shows every installed skill, Project shows repository skills, and Built-in shows skills supplied with the app. Ask Copilot to explain the frontmatter, then append two rules: headings describe page structure, and informative images and icons have text alternatives. Edit only SKILL.md. Reload skills, switch to Plan mode, and ask for a review of samples/book-app-web/src that applies the new rules and proposes at most one improvement. Expand the activity to confirm the skill loaded.</a:t>
-            </a:r>
-            <a:endParaRPr lang="en-US" dirty="0"/>
-          </a:p>
-        </p:txBody>
-      </p:sp>
-      <p:sp>
-        <p:nvSpPr>
-          <p:cNvPr id="4" name="Slide Number Placeholder 3"/>
-          <p:cNvSpPr>
-            <a:spLocks noGrp="1"/>
-          </p:cNvSpPr>
-          <p:nvPr>
-            <p:ph type="sldNum" sz="quarter" idx="10"/>
-          </p:nvPr>
-        </p:nvSpPr>
-        <p:spPr/>
-        <p:txBody>
-          <a:bodyPr/>
-          <a:lstStyle/>
-          <a:p>
-            <a:fld id="{F7021451-1387-4CA6-816F-3879F97B5CBC}" type="slidenum">
-              <a:rPr lang="en-US"/>
-              <a:t>8</a:t>
-            </a:fld>
-            <a:endParaRPr lang="en-US"/>
-          </a:p>
-        </p:txBody>
-      </p:sp>
-    </p:spTree>
-    <p:extLst>
-      <p:ext uri="{BB962C8B-B14F-4D97-AF65-F5344CB8AC3E}">
-        <p14:creationId xmlns:p14="http://schemas.microsoft.com/office/powerpoint/2010/main" val="1024086991"/>
-      </p:ext>
-    </p:extLst>
-  </p:cSld>
-  <p:clrMapOvr>
-    <a:masterClrMapping/>
-  </p:clrMapOvr>
-</p:notes>
+<ns0:notes xmlns:ns0="http://schemas.openxmlformats.org/presentationml/2006/main" xmlns:ns1="http://schemas.openxmlformats.org/drawingml/2006/main" xmlns:ns2="http://schemas.microsoft.com/office/powerpoint/2010/main">
+  <ns0:cSld>
+    <ns0:spTree>
+      <ns0:nvGrpSpPr>
+        <ns0:cNvPr id="1" name=""/>
+        <ns0:cNvGrpSpPr/>
+        <ns0:nvPr/>
+      </ns0:nvGrpSpPr>
+      <ns0:grpSpPr>
+        <ns1:xfrm>
+          <ns1:off x="0" y="0"/>
+          <ns1:ext cx="0" cy="0"/>
+          <ns1:chOff x="0" y="0"/>
+          <ns1:chExt cx="0" cy="0"/>
+        </ns1:xfrm>
+      </ns0:grpSpPr>
+      <ns0:sp>
+        <ns0:nvSpPr>
+          <ns0:cNvPr id="2" name="Slide Image Placeholder 1"/>
+          <ns0:cNvSpPr>
+            <ns1:spLocks noGrp="1" noRot="1" noChangeAspect="1"/>
+          </ns0:cNvSpPr>
+          <ns0:nvPr>
+            <ns0:ph type="sldImg"/>
+          </ns0:nvPr>
+        </ns0:nvSpPr>
+        <ns0:spPr/>
+      </ns0:sp>
+      <ns0:sp>
+        <ns0:nvSpPr>
+          <ns0:cNvPr id="3" name="Notes Placeholder 2"/>
+          <ns0:cNvSpPr>
+            <ns1:spLocks noGrp="1"/>
+          </ns0:cNvSpPr>
+          <ns0:nvPr>
+            <ns0:ph type="body" idx="1"/>
+          </ns0:nvPr>
+        </ns0:nvSpPr>
+        <ns0:spPr/>
+        <ns0:txBody>
+          <ns1:bodyPr/>
+          <ns1:lstStyle/>
+          <ns1:p>
+            <ns1:r>
+              <ns1:rPr lang="en-US" dirty="0"/>
+              <ns1:t>Work in a new worktree session from main in Interactive mode. In Customize, open Installed, select the Skills type filter, and search for book-app-reviewer; confirm it is enabled. Use the type and scope filters to find repository skills. Ask Copilot to explain the frontmatter, then append two rules: headings describe page structure, and informative images and icons have text alternatives. Edit only SKILL.md. Reload skills, switch to Plan mode, and ask for a review of samples/book-app-web/src that applies the new rules and proposes at most one improvement. Expand the activity to confirm the skill loaded.</ns1:t>
+            </ns1:r>
+            <ns1:endParaRPr lang="en-US" dirty="0"/>
+          </ns1:p>
+        </ns0:txBody>
+      </ns0:sp>
+      <ns0:sp>
+        <ns0:nvSpPr>
+          <ns0:cNvPr id="4" name="Slide Number Placeholder 3"/>
+          <ns0:cNvSpPr>
+            <ns1:spLocks noGrp="1"/>
+          </ns0:cNvSpPr>
+          <ns0:nvPr>
+            <ns0:ph type="sldNum" sz="quarter" idx="10"/>
+          </ns0:nvPr>
+        </ns0:nvSpPr>
+        <ns0:spPr/>
+        <ns0:txBody>
+          <ns1:bodyPr/>
+          <ns1:lstStyle/>
+          <ns1:p>
+            <ns1:fld id="{F7021451-1387-4CA6-816F-3879F97B5CBC}" type="slidenum">
+              <ns1:rPr lang="en-US"/>
+              <ns1:t>8</ns1:t>
+            </ns1:fld>
+            <ns1:endParaRPr lang="en-US"/>
+          </ns1:p>
+        </ns0:txBody>
+      </ns0:sp>
+    </ns0:spTree>
+    <ns0:extLst>
+      <ns0:ext uri="{BB962C8B-B14F-4D97-AF65-F5344CB8AC3E}">
+        <ns2:creationId val="1024086991"/>
+      </ns0:ext>
+    </ns0:extLst>
+  </ns0:cSld>
+  <ns0:clrMapOvr>
+    <ns1:masterClrMapping/>
+  </ns0:clrMapOvr>
+</ns0:notes>
 </file>
 
 <file path=ppt/notesSlides/notesSlide9.xml><?xml version="1.0" encoding="utf-8"?>
@@ -3252,7 +3252,7 @@
       </p:sp>
       <p:pic>
         <p:nvPicPr>
-          <p:cNvPr id="10" name="Image 2" descr="A plumber, electrician, and roofer illustrate specialist roles, compared with AI agents for code review, testing, security, and documentation">    </p:cNvPr>
+          <p:cNvPr id="10" name="Image 2" descr="A plumber, electrician, and roofer illustrate specialist roles, compared with AI agents for code review, testing, security, and documentation"/>
           <p:cNvPicPr>
             <a:picLocks noChangeAspect="1"/>
           </p:cNvPicPr>
@@ -3712,1534 +3712,1534 @@
 </file>
 
 <file path=ppt/slides/slide12.xml><?xml version="1.0" encoding="utf-8"?>
-<p:sld xmlns:a="http://schemas.openxmlformats.org/drawingml/2006/main" xmlns:r="http://schemas.openxmlformats.org/officeDocument/2006/relationships" xmlns:p="http://schemas.openxmlformats.org/presentationml/2006/main">
-  <p:cSld name="Slide 12">
-    <p:bg>
-      <p:bgPr>
-        <a:solidFill>
-          <a:srgbClr val="FFFFFF"/>
-        </a:solidFill>
-      </p:bgPr>
-    </p:bg>
-    <p:spTree>
-      <p:nvGrpSpPr>
-        <p:cNvPr id="1" name=""/>
-        <p:cNvGrpSpPr/>
-        <p:nvPr/>
-      </p:nvGrpSpPr>
-      <p:grpSpPr>
-        <a:xfrm>
-          <a:off x="0" y="0"/>
-          <a:ext cx="0" cy="0"/>
-          <a:chOff x="0" y="0"/>
-          <a:chExt cx="0" cy="0"/>
-        </a:xfrm>
-      </p:grpSpPr>
-      <p:pic>
-        <p:nvPicPr>
-          <p:cNvPr id="2" name="Image 0" descr="">
-            <a:extLst>
-              <a:ext uri="{C183D7F6-B498-43B3-948B-1728B52AA6E4}">
-                <adec:decorative xmlns:adec="http://schemas.microsoft.com/office/drawing/2017/decorative" val="1"/>
-              </a:ext>
-            </a:extLst>
-          </p:cNvPr>
-          <p:cNvPicPr>
-            <a:picLocks noChangeAspect="1"/>
-          </p:cNvPicPr>
-          <p:nvPr/>
-        </p:nvPicPr>
-        <p:blipFill>
-          <a:blip r:embed="rId1"/>
-          <a:stretch>
-            <a:fillRect/>
-          </a:stretch>
-        </p:blipFill>
-        <p:spPr>
-          <a:xfrm>
-            <a:off x="6349901" y="0"/>
-            <a:ext cx="2793950" cy="1308050"/>
-          </a:xfrm>
-          <a:prstGeom prst="rect">
-            <a:avLst/>
-          </a:prstGeom>
-        </p:spPr>
-      </p:pic>
-      <p:sp>
-        <p:nvSpPr>
-          <p:cNvPr id="3" name="Text 0"/>
-          <p:cNvSpPr/>
-          <p:nvPr/>
-        </p:nvSpPr>
-        <p:spPr>
-          <a:xfrm>
-            <a:off x="7340501" y="177701"/>
-            <a:ext cx="1168301" cy="279350"/>
-          </a:xfrm>
-          <a:prstGeom prst="roundRect">
-            <a:avLst>
-              <a:gd name="adj" fmla="val 22731"/>
-            </a:avLst>
-          </a:prstGeom>
-          <a:solidFill>
-            <a:srgbClr val="1A7F37"/>
-          </a:solidFill>
-          <a:ln/>
-        </p:spPr>
-        <p:txBody>
-          <a:bodyPr wrap="square" rtlCol="0" anchor="ctr"/>
-          <a:lstStyle/>
-          <a:p>
-            <a:pPr indent="0" marL="0">
-              <a:buNone/>
-            </a:pPr>
-            <a:endParaRPr lang="en-US" dirty="0"/>
-          </a:p>
-        </p:txBody>
-      </p:sp>
-      <p:sp>
-        <p:nvSpPr>
-          <p:cNvPr id="4" name="Text 1"/>
-          <p:cNvSpPr/>
-          <p:nvPr/>
-        </p:nvSpPr>
-        <p:spPr>
-          <a:xfrm>
-            <a:off x="7461041" y="231577"/>
-            <a:ext cx="927071" cy="171450"/>
-          </a:xfrm>
-          <a:prstGeom prst="rect">
-            <a:avLst/>
-          </a:prstGeom>
-          <a:noFill/>
-          <a:ln/>
-        </p:spPr>
-        <p:txBody>
-          <a:bodyPr wrap="square" lIns="0" tIns="0" rIns="0" bIns="0" rtlCol="0" anchor="t"/>
-          <a:lstStyle/>
-          <a:p>
-            <a:pPr algn="ctr" indent="0" marL="0">
-              <a:buNone/>
-            </a:pPr>
-            <a:r>
-              <a:rPr lang="en-US" sz="1150" b="1" dirty="0">
-                <a:solidFill>
-                  <a:srgbClr val="FFFFFF"/>
-                </a:solidFill>
-                <a:latin typeface="Arial" pitchFamily="34" charset="0"/>
-                <a:ea typeface="Arial" pitchFamily="34" charset="-122"/>
-                <a:cs typeface="Arial" pitchFamily="34" charset="-120"/>
-              </a:rPr>
-              <a:t>CHAPTER 04</a:t>
-            </a:r>
-            <a:endParaRPr lang="en-US" sz="1150" dirty="0"/>
-          </a:p>
-        </p:txBody>
-      </p:sp>
-      <p:pic>
-        <p:nvPicPr>
-          <p:cNvPr id="5" name="Image 1" descr="Open this chapter on GitHub">
-            <a:hlinkClick r:id="rId3" tooltip="https://github.com/github/copilot-app-for-beginners/tree/main/04-skills-custom-agents"/>
-          </p:cNvPr>
-          <p:cNvPicPr>
-            <a:picLocks noChangeAspect="1"/>
-          </p:cNvPicPr>
-          <p:nvPr/>
-        </p:nvPicPr>
-        <p:blipFill>
-          <a:blip r:embed="rId2"/>
-          <a:stretch>
-            <a:fillRect/>
-          </a:stretch>
-        </p:blipFill>
-        <p:spPr>
-          <a:xfrm>
-            <a:off x="8610600" y="165050"/>
-            <a:ext cx="304800" cy="304800"/>
-          </a:xfrm>
-          <a:prstGeom prst="rect">
-            <a:avLst/>
-          </a:prstGeom>
-        </p:spPr>
-      </p:pic>
-      <p:sp>
-        <p:nvSpPr>
-          <p:cNvPr id="6" name="Text 2"/>
-          <p:cNvSpPr/>
-          <p:nvPr/>
-        </p:nvSpPr>
-        <p:spPr>
-          <a:xfrm>
-            <a:off x="507950" y="381000"/>
-            <a:ext cx="8161020" cy="190500"/>
-          </a:xfrm>
-          <a:prstGeom prst="rect">
-            <a:avLst/>
-          </a:prstGeom>
-          <a:noFill/>
-          <a:ln/>
-        </p:spPr>
-        <p:txBody>
-          <a:bodyPr wrap="square" lIns="0" tIns="0" rIns="0" bIns="0" rtlCol="0" anchor="t"/>
-          <a:lstStyle/>
-          <a:p>
-            <a:pPr algn="l" indent="0" marL="0">
-              <a:buNone/>
-            </a:pPr>
-            <a:r>
-              <a:rPr lang="en-US" sz="1250" b="1" dirty="0">
-                <a:solidFill>
-                  <a:srgbClr val="8250DF"/>
-                </a:solidFill>
-                <a:latin typeface="Arial" pitchFamily="34" charset="0"/>
-                <a:ea typeface="Arial" pitchFamily="34" charset="-122"/>
-                <a:cs typeface="Arial" pitchFamily="34" charset="-120"/>
-              </a:rPr>
-              <a:t>ANATOMY OF A CUSTOM AGENT</a:t>
-            </a:r>
-            <a:endParaRPr lang="en-US" sz="1250" dirty="0"/>
-          </a:p>
-        </p:txBody>
-      </p:sp>
-      <p:sp>
-        <p:nvSpPr>
-          <p:cNvPr id="7" name="Text 3"/>
-          <p:cNvSpPr/>
-          <p:nvPr/>
-        </p:nvSpPr>
-        <p:spPr>
-          <a:xfrm>
-            <a:off x="507950" y="622250"/>
-            <a:ext cx="8161020" cy="419100"/>
-          </a:xfrm>
-          <a:prstGeom prst="rect">
-            <a:avLst/>
-          </a:prstGeom>
-          <a:noFill/>
-          <a:ln/>
-        </p:spPr>
-        <p:txBody>
-          <a:bodyPr wrap="square" lIns="0" tIns="0" rIns="0" bIns="0" rtlCol="0" anchor="t"/>
-          <a:lstStyle/>
-          <a:p>
-            <a:pPr algn="l" indent="0" marL="0">
-              <a:lnSpc>
-                <a:spcPts val="3300"/>
-              </a:lnSpc>
-              <a:spcBef>
-                <a:spcPts val="400"/>
-              </a:spcBef>
-              <a:buNone/>
-            </a:pPr>
-            <a:r>
-              <a:rPr lang="en-US" sz="2800" b="1" dirty="0">
-                <a:solidFill>
-                  <a:srgbClr val="1F2328"/>
-                </a:solidFill>
-                <a:latin typeface="Arial" pitchFamily="34" charset="0"/>
-                <a:ea typeface="Arial" pitchFamily="34" charset="-122"/>
-                <a:cs typeface="Arial" pitchFamily="34" charset="-120"/>
-              </a:rPr>
-              <a:t>A read-only Book App explainer</a:t>
-            </a:r>
-            <a:endParaRPr lang="en-US" sz="2800" dirty="0"/>
-          </a:p>
-        </p:txBody>
-      </p:sp>
-      <p:sp>
-        <p:nvSpPr>
-          <p:cNvPr id="8" name="Text 4"/>
-          <p:cNvSpPr/>
-          <p:nvPr/>
-        </p:nvSpPr>
-        <p:spPr>
-          <a:xfrm>
-            <a:off x="507950" y="1104751"/>
-            <a:ext cx="8161020" cy="273100"/>
-          </a:xfrm>
-          <a:prstGeom prst="rect">
-            <a:avLst/>
-          </a:prstGeom>
-          <a:noFill/>
-          <a:ln/>
-        </p:spPr>
-        <p:txBody>
-          <a:bodyPr wrap="square" lIns="0" tIns="0" rIns="0" bIns="0" rtlCol="0" anchor="t"/>
-          <a:lstStyle/>
-          <a:p>
-            <a:pPr algn="l" indent="0" marL="0">
-              <a:lnSpc>
-                <a:spcPts val="2000"/>
-              </a:lnSpc>
-              <a:spcBef>
-                <a:spcPts val="500"/>
-              </a:spcBef>
-              <a:buNone/>
-            </a:pPr>
-            <a:r>
-              <a:rPr lang="en-US" sz="1650" dirty="0">
-                <a:solidFill>
-                  <a:srgbClr val="59636E"/>
-                </a:solidFill>
-                <a:latin typeface="Arial" pitchFamily="34" charset="0"/>
-                <a:ea typeface="Arial" pitchFamily="34" charset="-122"/>
-                <a:cs typeface="Arial" pitchFamily="34" charset="-120"/>
-              </a:rPr>
-              <a:t>Like a skill, plus a </a:t>
-            </a:r>
-            <a:pPr algn="l" indent="0" marL="0">
-              <a:lnSpc>
-                <a:spcPts val="2000"/>
-              </a:lnSpc>
-              <a:spcBef>
-                <a:spcPts val="500"/>
-              </a:spcBef>
-              <a:buNone/>
-            </a:pPr>
-            <a:r>
-              <a:rPr lang="en-US" sz="1650" b="1" dirty="0">
-                <a:solidFill>
-                  <a:srgbClr val="0550AE"/>
-                </a:solidFill>
-                <a:latin typeface="Courier New" pitchFamily="34" charset="0"/>
-                <a:ea typeface="Courier New" pitchFamily="34" charset="-122"/>
-                <a:cs typeface="Courier New" pitchFamily="34" charset="-120"/>
-              </a:rPr>
-              <a:t>tools</a:t>
-            </a:r>
-            <a:pPr algn="l" indent="0" marL="0">
-              <a:lnSpc>
-                <a:spcPts val="2000"/>
-              </a:lnSpc>
-              <a:spcBef>
-                <a:spcPts val="500"/>
-              </a:spcBef>
-              <a:buNone/>
-            </a:pPr>
-            <a:r>
-              <a:rPr lang="en-US" sz="1650" dirty="0">
-                <a:solidFill>
-                  <a:srgbClr val="59636E"/>
-                </a:solidFill>
-                <a:latin typeface="Arial" pitchFamily="34" charset="0"/>
-                <a:ea typeface="Arial" pitchFamily="34" charset="-122"/>
-                <a:cs typeface="Arial" pitchFamily="34" charset="-120"/>
-              </a:rPr>
-              <a:t> list.</a:t>
-            </a:r>
-            <a:endParaRPr lang="en-US" sz="1650" dirty="0"/>
-          </a:p>
-        </p:txBody>
-      </p:sp>
-      <p:sp>
-        <p:nvSpPr>
-          <p:cNvPr id="9" name="Text 5"/>
-          <p:cNvSpPr/>
-          <p:nvPr/>
-        </p:nvSpPr>
-        <p:spPr>
-          <a:xfrm>
-            <a:off x="507950" y="1574750"/>
-            <a:ext cx="4191000" cy="2721173"/>
-          </a:xfrm>
-          <a:prstGeom prst="roundRect">
-            <a:avLst>
-              <a:gd name="adj" fmla="val 3734"/>
-            </a:avLst>
-          </a:prstGeom>
-          <a:solidFill>
-            <a:srgbClr val="F6F8FA"/>
-          </a:solidFill>
-          <a:ln w="9525">
-            <a:solidFill>
-              <a:srgbClr val="D1D9E0"/>
-            </a:solidFill>
-          </a:ln>
-        </p:spPr>
-        <p:txBody>
-          <a:bodyPr wrap="square" rtlCol="0" anchor="ctr"/>
-          <a:lstStyle/>
-          <a:p>
-            <a:pPr indent="0" marL="0">
-              <a:buNone/>
-            </a:pPr>
-            <a:endParaRPr lang="en-US" dirty="0"/>
-          </a:p>
-        </p:txBody>
-      </p:sp>
-      <p:sp>
-        <p:nvSpPr>
-          <p:cNvPr id="10" name="Text 6"/>
-          <p:cNvSpPr/>
-          <p:nvPr/>
-        </p:nvSpPr>
-        <p:spPr>
-          <a:xfrm>
-            <a:off x="517475" y="1584275"/>
-            <a:ext cx="4171950" cy="238125"/>
-          </a:xfrm>
-          <a:prstGeom prst="rect">
-            <a:avLst/>
-          </a:prstGeom>
-          <a:solidFill>
-            <a:srgbClr val="EFF2F5"/>
-          </a:solidFill>
-          <a:ln/>
-        </p:spPr>
-        <p:txBody>
-          <a:bodyPr wrap="square" rtlCol="0" anchor="ctr"/>
-          <a:lstStyle/>
-          <a:p>
-            <a:pPr indent="0" marL="0">
-              <a:buNone/>
-            </a:pPr>
-            <a:endParaRPr lang="en-US" dirty="0"/>
-          </a:p>
-        </p:txBody>
-      </p:sp>
-      <p:sp>
-        <p:nvSpPr>
-          <p:cNvPr id="11" name="Shape 7"/>
-          <p:cNvSpPr/>
-          <p:nvPr/>
-        </p:nvSpPr>
-        <p:spPr>
-          <a:xfrm>
-            <a:off x="517475" y="1817638"/>
-            <a:ext cx="4171950" cy="0"/>
-          </a:xfrm>
-          <a:prstGeom prst="line">
-            <a:avLst/>
-          </a:prstGeom>
-          <a:noFill/>
-          <a:ln w="9525">
-            <a:solidFill>
-              <a:srgbClr val="D1D9E0"/>
-            </a:solidFill>
-            <a:prstDash val="solid"/>
-          </a:ln>
-        </p:spPr>
-      </p:sp>
-      <p:sp>
-        <p:nvSpPr>
-          <p:cNvPr id="12" name="Text 8"/>
-          <p:cNvSpPr/>
-          <p:nvPr/>
-        </p:nvSpPr>
-        <p:spPr>
-          <a:xfrm>
-            <a:off x="631775" y="1654076"/>
-            <a:ext cx="88850" cy="88850"/>
-          </a:xfrm>
-          <a:prstGeom prst="roundRect">
-            <a:avLst>
-              <a:gd name="adj" fmla="val 1029150"/>
-            </a:avLst>
-          </a:prstGeom>
-          <a:solidFill>
-            <a:srgbClr val="FF5F57"/>
-          </a:solidFill>
-          <a:ln/>
-        </p:spPr>
-        <p:txBody>
-          <a:bodyPr wrap="square" rtlCol="0" anchor="ctr"/>
-          <a:lstStyle/>
-          <a:p>
-            <a:pPr indent="0" marL="0">
-              <a:buNone/>
-            </a:pPr>
-            <a:endParaRPr lang="en-US" dirty="0"/>
-          </a:p>
-        </p:txBody>
-      </p:sp>
-      <p:sp>
-        <p:nvSpPr>
-          <p:cNvPr id="13" name="Text 9"/>
-          <p:cNvSpPr/>
-          <p:nvPr/>
-        </p:nvSpPr>
-        <p:spPr>
-          <a:xfrm>
-            <a:off x="771376" y="1654076"/>
-            <a:ext cx="88850" cy="88850"/>
-          </a:xfrm>
-          <a:prstGeom prst="roundRect">
-            <a:avLst>
-              <a:gd name="adj" fmla="val 1029150"/>
-            </a:avLst>
-          </a:prstGeom>
-          <a:solidFill>
-            <a:srgbClr val="FEBC2E"/>
-          </a:solidFill>
-          <a:ln/>
-        </p:spPr>
-        <p:txBody>
-          <a:bodyPr wrap="square" rtlCol="0" anchor="ctr"/>
-          <a:lstStyle/>
-          <a:p>
-            <a:pPr indent="0" marL="0">
-              <a:buNone/>
-            </a:pPr>
-            <a:endParaRPr lang="en-US" dirty="0"/>
-          </a:p>
-        </p:txBody>
-      </p:sp>
-      <p:sp>
-        <p:nvSpPr>
-          <p:cNvPr id="14" name="Text 10"/>
-          <p:cNvSpPr/>
-          <p:nvPr/>
-        </p:nvSpPr>
-        <p:spPr>
-          <a:xfrm>
-            <a:off x="910977" y="1654076"/>
-            <a:ext cx="88850" cy="88850"/>
-          </a:xfrm>
-          <a:prstGeom prst="roundRect">
-            <a:avLst>
-              <a:gd name="adj" fmla="val 1029150"/>
-            </a:avLst>
-          </a:prstGeom>
-          <a:solidFill>
-            <a:srgbClr val="28C840"/>
-          </a:solidFill>
-          <a:ln/>
-        </p:spPr>
-        <p:txBody>
-          <a:bodyPr wrap="square" rtlCol="0" anchor="ctr"/>
-          <a:lstStyle/>
-          <a:p>
-            <a:pPr indent="0" marL="0">
-              <a:buNone/>
-            </a:pPr>
-            <a:endParaRPr lang="en-US" dirty="0"/>
-          </a:p>
-        </p:txBody>
-      </p:sp>
-      <p:sp>
-        <p:nvSpPr>
-          <p:cNvPr id="15" name="Text 11"/>
-          <p:cNvSpPr/>
-          <p:nvPr/>
-        </p:nvSpPr>
-        <p:spPr>
-          <a:xfrm>
-            <a:off x="1126778" y="1612850"/>
-            <a:ext cx="2413239" cy="171450"/>
-          </a:xfrm>
-          <a:prstGeom prst="rect">
-            <a:avLst/>
-          </a:prstGeom>
-          <a:noFill/>
-          <a:ln/>
-        </p:spPr>
-        <p:txBody>
-          <a:bodyPr wrap="square" lIns="0" tIns="0" rIns="0" bIns="0" rtlCol="0" anchor="t"/>
-          <a:lstStyle/>
-          <a:p>
-            <a:pPr algn="l" indent="0" marL="0">
-              <a:buNone/>
-            </a:pPr>
-            <a:r>
-              <a:rPr lang="en-US" sz="1150" dirty="0">
-                <a:solidFill>
-                  <a:srgbClr val="59636E"/>
-                </a:solidFill>
-                <a:latin typeface="Courier New" pitchFamily="34" charset="0"/>
-                <a:ea typeface="Courier New" pitchFamily="34" charset="-122"/>
-                <a:cs typeface="Courier New" pitchFamily="34" charset="-120"/>
-              </a:rPr>
-              <a:t>book-app-explainer.agent.md</a:t>
-            </a:r>
-            <a:endParaRPr lang="en-US" sz="1150" dirty="0"/>
-          </a:p>
-        </p:txBody>
-      </p:sp>
-      <p:sp>
-        <p:nvSpPr>
-          <p:cNvPr id="16" name="Text 12"/>
-          <p:cNvSpPr/>
-          <p:nvPr/>
-        </p:nvSpPr>
-        <p:spPr>
-          <a:xfrm>
-            <a:off x="669875" y="1949351"/>
-            <a:ext cx="3944493" cy="221010"/>
-          </a:xfrm>
-          <a:prstGeom prst="rect">
-            <a:avLst/>
-          </a:prstGeom>
-          <a:noFill/>
-          <a:ln/>
-        </p:spPr>
-        <p:txBody>
-          <a:bodyPr wrap="square" lIns="0" tIns="0" rIns="0" bIns="0" rtlCol="0" anchor="t"/>
-          <a:lstStyle/>
-          <a:p>
-            <a:pPr algn="l" indent="0" marL="0">
-              <a:lnSpc>
-                <a:spcPts val="1740"/>
-              </a:lnSpc>
-              <a:buNone/>
-            </a:pPr>
-            <a:r>
-              <a:rPr lang="en-US" sz="1350" dirty="0">
-                <a:solidFill>
-                  <a:srgbClr val="818B98"/>
-                </a:solidFill>
-                <a:latin typeface="Courier New" pitchFamily="34" charset="0"/>
-                <a:ea typeface="Courier New" pitchFamily="34" charset="-122"/>
-                <a:cs typeface="Courier New" pitchFamily="34" charset="-120"/>
-              </a:rPr>
-              <a:t>---</a:t>
-            </a:r>
-            <a:endParaRPr lang="en-US" sz="1350" dirty="0"/>
-          </a:p>
-        </p:txBody>
-      </p:sp>
-      <p:sp>
-        <p:nvSpPr>
-          <p:cNvPr id="17" name="Text 13"/>
-          <p:cNvSpPr/>
-          <p:nvPr/>
-        </p:nvSpPr>
-        <p:spPr>
-          <a:xfrm>
-            <a:off x="669875" y="2170361"/>
-            <a:ext cx="3944493" cy="221010"/>
-          </a:xfrm>
-          <a:prstGeom prst="rect">
-            <a:avLst/>
-          </a:prstGeom>
-          <a:noFill/>
-          <a:ln/>
-        </p:spPr>
-        <p:txBody>
-          <a:bodyPr wrap="square" lIns="0" tIns="0" rIns="0" bIns="0" rtlCol="0" anchor="t"/>
-          <a:lstStyle/>
-          <a:p>
-            <a:pPr algn="l" indent="0" marL="0">
-              <a:lnSpc>
-                <a:spcPts val="1740"/>
-              </a:lnSpc>
-              <a:buNone/>
-            </a:pPr>
-            <a:r>
-              <a:rPr lang="en-US" sz="1350" dirty="0">
-                <a:solidFill>
-                  <a:srgbClr val="8250DF"/>
-                </a:solidFill>
-                <a:latin typeface="Courier New" pitchFamily="34" charset="0"/>
-                <a:ea typeface="Courier New" pitchFamily="34" charset="-122"/>
-                <a:cs typeface="Courier New" pitchFamily="34" charset="-120"/>
-              </a:rPr>
-              <a:t>name</a:t>
-            </a:r>
-            <a:pPr algn="l" indent="0" marL="0">
-              <a:lnSpc>
-                <a:spcPts val="1740"/>
-              </a:lnSpc>
-              <a:buNone/>
-            </a:pPr>
-            <a:r>
-              <a:rPr lang="en-US" sz="1350" dirty="0">
-                <a:solidFill>
-                  <a:srgbClr val="1F2328"/>
-                </a:solidFill>
-                <a:latin typeface="Courier New" pitchFamily="34" charset="0"/>
-                <a:ea typeface="Courier New" pitchFamily="34" charset="-122"/>
-                <a:cs typeface="Courier New" pitchFamily="34" charset="-120"/>
-              </a:rPr>
-              <a:t>: book-app-explainer</a:t>
-            </a:r>
-            <a:endParaRPr lang="en-US" sz="1350" dirty="0"/>
-          </a:p>
-        </p:txBody>
-      </p:sp>
-      <p:sp>
-        <p:nvSpPr>
-          <p:cNvPr id="18" name="Text 14"/>
-          <p:cNvSpPr/>
-          <p:nvPr/>
-        </p:nvSpPr>
-        <p:spPr>
-          <a:xfrm>
-            <a:off x="669875" y="2391370"/>
-            <a:ext cx="3944493" cy="221010"/>
-          </a:xfrm>
-          <a:prstGeom prst="rect">
-            <a:avLst/>
-          </a:prstGeom>
-          <a:noFill/>
-          <a:ln/>
-        </p:spPr>
-        <p:txBody>
-          <a:bodyPr wrap="square" lIns="0" tIns="0" rIns="0" bIns="0" rtlCol="0" anchor="t"/>
-          <a:lstStyle/>
-          <a:p>
-            <a:pPr algn="l" indent="0" marL="0">
-              <a:lnSpc>
-                <a:spcPts val="1740"/>
-              </a:lnSpc>
-              <a:buNone/>
-            </a:pPr>
-            <a:r>
-              <a:rPr lang="en-US" sz="1350" dirty="0">
-                <a:solidFill>
-                  <a:srgbClr val="8250DF"/>
-                </a:solidFill>
-                <a:latin typeface="Courier New" pitchFamily="34" charset="0"/>
-                <a:ea typeface="Courier New" pitchFamily="34" charset="-122"/>
-                <a:cs typeface="Courier New" pitchFamily="34" charset="-120"/>
-              </a:rPr>
-              <a:t>description</a:t>
-            </a:r>
-            <a:pPr algn="l" indent="0" marL="0">
-              <a:lnSpc>
-                <a:spcPts val="1740"/>
-              </a:lnSpc>
-              <a:buNone/>
-            </a:pPr>
-            <a:r>
-              <a:rPr lang="en-US" sz="1350" dirty="0">
-                <a:solidFill>
-                  <a:srgbClr val="1F2328"/>
-                </a:solidFill>
-                <a:latin typeface="Courier New" pitchFamily="34" charset="0"/>
-                <a:ea typeface="Courier New" pitchFamily="34" charset="-122"/>
-                <a:cs typeface="Courier New" pitchFamily="34" charset="-120"/>
-              </a:rPr>
-              <a:t>: Explain the Book App</a:t>
-            </a:r>
-            <a:endParaRPr lang="en-US" sz="1350" dirty="0"/>
-          </a:p>
-        </p:txBody>
-      </p:sp>
-      <p:sp>
-        <p:nvSpPr>
-          <p:cNvPr id="19" name="Text 15"/>
-          <p:cNvSpPr/>
-          <p:nvPr/>
-        </p:nvSpPr>
-        <p:spPr>
-          <a:xfrm>
-            <a:off x="669875" y="2612380"/>
-            <a:ext cx="3944493" cy="221010"/>
-          </a:xfrm>
-          <a:prstGeom prst="rect">
-            <a:avLst/>
-          </a:prstGeom>
-          <a:noFill/>
-          <a:ln/>
-        </p:spPr>
-        <p:txBody>
-          <a:bodyPr wrap="square" lIns="0" tIns="0" rIns="0" bIns="0" rtlCol="0" anchor="t"/>
-          <a:lstStyle/>
-          <a:p>
-            <a:pPr algn="l" indent="0" marL="0">
-              <a:lnSpc>
-                <a:spcPts val="1740"/>
-              </a:lnSpc>
-              <a:buNone/>
-            </a:pPr>
-            <a:r>
-              <a:rPr lang="en-US" sz="1350" dirty="0">
-                <a:solidFill>
-                  <a:srgbClr val="1F2328"/>
-                </a:solidFill>
-                <a:latin typeface="Courier New" pitchFamily="34" charset="0"/>
-                <a:ea typeface="Courier New" pitchFamily="34" charset="-122"/>
-                <a:cs typeface="Courier New" pitchFamily="34" charset="-120"/>
-              </a:rPr>
-              <a:t>to a beginner without changing</a:t>
-            </a:r>
-            <a:endParaRPr lang="en-US" sz="1350" dirty="0"/>
-          </a:p>
-        </p:txBody>
-      </p:sp>
-      <p:sp>
-        <p:nvSpPr>
-          <p:cNvPr id="20" name="Text 16"/>
-          <p:cNvSpPr/>
-          <p:nvPr/>
-        </p:nvSpPr>
-        <p:spPr>
-          <a:xfrm>
-            <a:off x="669875" y="2833390"/>
-            <a:ext cx="3944493" cy="221010"/>
-          </a:xfrm>
-          <a:prstGeom prst="rect">
-            <a:avLst/>
-          </a:prstGeom>
-          <a:noFill/>
-          <a:ln/>
-        </p:spPr>
-        <p:txBody>
-          <a:bodyPr wrap="square" lIns="0" tIns="0" rIns="0" bIns="0" rtlCol="0" anchor="t"/>
-          <a:lstStyle/>
-          <a:p>
-            <a:pPr algn="l" indent="0" marL="0">
-              <a:lnSpc>
-                <a:spcPts val="1740"/>
-              </a:lnSpc>
-              <a:buNone/>
-            </a:pPr>
-            <a:r>
-              <a:rPr lang="en-US" sz="1350" dirty="0">
-                <a:solidFill>
-                  <a:srgbClr val="1F2328"/>
-                </a:solidFill>
-                <a:latin typeface="Courier New" pitchFamily="34" charset="0"/>
-                <a:ea typeface="Courier New" pitchFamily="34" charset="-122"/>
-                <a:cs typeface="Courier New" pitchFamily="34" charset="-120"/>
-              </a:rPr>
-              <a:t>files.</a:t>
-            </a:r>
-            <a:endParaRPr lang="en-US" sz="1350" dirty="0"/>
-          </a:p>
-        </p:txBody>
-      </p:sp>
-      <p:sp>
-        <p:nvSpPr>
-          <p:cNvPr id="21" name="Text 17"/>
-          <p:cNvSpPr/>
-          <p:nvPr/>
-        </p:nvSpPr>
-        <p:spPr>
-          <a:xfrm>
-            <a:off x="669875" y="3054400"/>
-            <a:ext cx="3944493" cy="221010"/>
-          </a:xfrm>
-          <a:prstGeom prst="rect">
-            <a:avLst/>
-          </a:prstGeom>
-          <a:noFill/>
-          <a:ln/>
-        </p:spPr>
-        <p:txBody>
-          <a:bodyPr wrap="square" lIns="0" tIns="0" rIns="0" bIns="0" rtlCol="0" anchor="t"/>
-          <a:lstStyle/>
-          <a:p>
-            <a:pPr algn="l" indent="0" marL="0">
-              <a:lnSpc>
-                <a:spcPts val="1740"/>
-              </a:lnSpc>
-              <a:buNone/>
-            </a:pPr>
-            <a:r>
-              <a:rPr lang="en-US" sz="1350" dirty="0">
-                <a:solidFill>
-                  <a:srgbClr val="8250DF"/>
-                </a:solidFill>
-                <a:latin typeface="Courier New" pitchFamily="34" charset="0"/>
-                <a:ea typeface="Courier New" pitchFamily="34" charset="-122"/>
-                <a:cs typeface="Courier New" pitchFamily="34" charset="-120"/>
-              </a:rPr>
-              <a:t>tools</a:t>
-            </a:r>
-            <a:pPr algn="l" indent="0" marL="0">
-              <a:lnSpc>
-                <a:spcPts val="1740"/>
-              </a:lnSpc>
-              <a:buNone/>
-            </a:pPr>
-            <a:r>
-              <a:rPr lang="en-US" sz="1350" dirty="0">
-                <a:solidFill>
-                  <a:srgbClr val="1F2328"/>
-                </a:solidFill>
-                <a:latin typeface="Courier New" pitchFamily="34" charset="0"/>
-                <a:ea typeface="Courier New" pitchFamily="34" charset="-122"/>
-                <a:cs typeface="Courier New" pitchFamily="34" charset="-120"/>
-              </a:rPr>
-              <a:t>: ["read", "search"]</a:t>
-            </a:r>
-            <a:endParaRPr lang="en-US" sz="1350" dirty="0"/>
-          </a:p>
-        </p:txBody>
-      </p:sp>
-      <p:sp>
-        <p:nvSpPr>
-          <p:cNvPr id="22" name="Text 18"/>
-          <p:cNvSpPr/>
-          <p:nvPr/>
-        </p:nvSpPr>
-        <p:spPr>
-          <a:xfrm>
-            <a:off x="669875" y="3275409"/>
-            <a:ext cx="3944493" cy="221010"/>
-          </a:xfrm>
-          <a:prstGeom prst="rect">
-            <a:avLst/>
-          </a:prstGeom>
-          <a:noFill/>
-          <a:ln/>
-        </p:spPr>
-        <p:txBody>
-          <a:bodyPr wrap="square" lIns="0" tIns="0" rIns="0" bIns="0" rtlCol="0" anchor="t"/>
-          <a:lstStyle/>
-          <a:p>
-            <a:pPr algn="l" indent="0" marL="0">
-              <a:lnSpc>
-                <a:spcPts val="1740"/>
-              </a:lnSpc>
-              <a:buNone/>
-            </a:pPr>
-            <a:r>
-              <a:rPr lang="en-US" sz="1350" dirty="0">
-                <a:solidFill>
-                  <a:srgbClr val="818B98"/>
-                </a:solidFill>
-                <a:latin typeface="Courier New" pitchFamily="34" charset="0"/>
-                <a:ea typeface="Courier New" pitchFamily="34" charset="-122"/>
-                <a:cs typeface="Courier New" pitchFamily="34" charset="-120"/>
-              </a:rPr>
-              <a:t>---</a:t>
-            </a:r>
-            <a:endParaRPr lang="en-US" sz="1350" dirty="0"/>
-          </a:p>
-        </p:txBody>
-      </p:sp>
-      <p:sp>
-        <p:nvSpPr>
-          <p:cNvPr id="23" name="Text 19"/>
-          <p:cNvSpPr/>
-          <p:nvPr/>
-        </p:nvSpPr>
-        <p:spPr>
-          <a:xfrm>
-            <a:off x="669875" y="3496419"/>
-            <a:ext cx="3944493" cy="221010"/>
-          </a:xfrm>
-          <a:prstGeom prst="rect">
-            <a:avLst/>
-          </a:prstGeom>
-          <a:noFill/>
-          <a:ln/>
-        </p:spPr>
-        <p:txBody>
-          <a:bodyPr wrap="square" lIns="0" tIns="0" rIns="0" bIns="0" rtlCol="0" anchor="t"/>
-          <a:lstStyle/>
-          <a:p>
-            <a:pPr algn="l" indent="0" marL="0">
-              <a:lnSpc>
-                <a:spcPts val="1740"/>
-              </a:lnSpc>
-              <a:buNone/>
-            </a:pPr>
-            <a:r>
-              <a:rPr lang="en-US" sz="1350" dirty="0">
-                <a:solidFill>
-                  <a:srgbClr val="1F2328"/>
-                </a:solidFill>
-                <a:latin typeface="Courier New" pitchFamily="34" charset="0"/>
-                <a:ea typeface="Courier New" pitchFamily="34" charset="-122"/>
-                <a:cs typeface="Courier New" pitchFamily="34" charset="-120"/>
-              </a:rPr>
-              <a:t>Read the code before answering.</a:t>
-            </a:r>
-            <a:endParaRPr lang="en-US" sz="1350" dirty="0"/>
-          </a:p>
-        </p:txBody>
-      </p:sp>
-      <p:sp>
-        <p:nvSpPr>
-          <p:cNvPr id="24" name="Text 20"/>
-          <p:cNvSpPr/>
-          <p:nvPr/>
-        </p:nvSpPr>
-        <p:spPr>
-          <a:xfrm>
-            <a:off x="669875" y="3717429"/>
-            <a:ext cx="3944493" cy="221010"/>
-          </a:xfrm>
-          <a:prstGeom prst="rect">
-            <a:avLst/>
-          </a:prstGeom>
-          <a:noFill/>
-          <a:ln/>
-        </p:spPr>
-        <p:txBody>
-          <a:bodyPr wrap="square" lIns="0" tIns="0" rIns="0" bIns="0" rtlCol="0" anchor="t"/>
-          <a:lstStyle/>
-          <a:p>
-            <a:pPr algn="l" indent="0" marL="0">
-              <a:lnSpc>
-                <a:spcPts val="1740"/>
-              </a:lnSpc>
-              <a:buNone/>
-            </a:pPr>
-            <a:r>
-              <a:rPr lang="en-US" sz="1350" dirty="0">
-                <a:solidFill>
-                  <a:srgbClr val="1F2328"/>
-                </a:solidFill>
-                <a:latin typeface="Courier New" pitchFamily="34" charset="0"/>
-                <a:ea typeface="Courier New" pitchFamily="34" charset="-122"/>
-                <a:cs typeface="Courier New" pitchFamily="34" charset="-120"/>
-              </a:rPr>
-              <a:t>Do not edit files or run commands.</a:t>
-            </a:r>
-            <a:endParaRPr lang="en-US" sz="1350" dirty="0"/>
-          </a:p>
-        </p:txBody>
-      </p:sp>
-      <p:sp>
-        <p:nvSpPr>
-          <p:cNvPr id="25" name="Text 21"/>
-          <p:cNvSpPr/>
-          <p:nvPr/>
-        </p:nvSpPr>
-        <p:spPr>
-          <a:xfrm>
-            <a:off x="669875" y="3938439"/>
-            <a:ext cx="3944493" cy="221010"/>
-          </a:xfrm>
-          <a:prstGeom prst="rect">
-            <a:avLst/>
-          </a:prstGeom>
-          <a:noFill/>
-          <a:ln/>
-        </p:spPr>
-        <p:txBody>
-          <a:bodyPr wrap="square" lIns="0" tIns="0" rIns="0" bIns="0" rtlCol="0" anchor="t"/>
-          <a:lstStyle/>
-          <a:p>
-            <a:pPr algn="l" indent="0" marL="0">
-              <a:lnSpc>
-                <a:spcPts val="1740"/>
-              </a:lnSpc>
-              <a:buNone/>
-            </a:pPr>
-            <a:r>
-              <a:rPr lang="en-US" sz="1350" dirty="0">
-                <a:solidFill>
-                  <a:srgbClr val="1F2328"/>
-                </a:solidFill>
-                <a:latin typeface="Courier New" pitchFamily="34" charset="0"/>
-                <a:ea typeface="Courier New" pitchFamily="34" charset="-122"/>
-                <a:cs typeface="Courier New" pitchFamily="34" charset="-120"/>
-              </a:rPr>
-              <a:t>Answer in four parts.</a:t>
-            </a:r>
-            <a:endParaRPr lang="en-US" sz="1350" dirty="0"/>
-          </a:p>
-        </p:txBody>
-      </p:sp>
-      <p:sp>
-        <p:nvSpPr>
-          <p:cNvPr id="26" name="Text 22"/>
-          <p:cNvSpPr/>
-          <p:nvPr/>
-        </p:nvSpPr>
-        <p:spPr>
-          <a:xfrm>
-            <a:off x="4952851" y="2054572"/>
-            <a:ext cx="381000" cy="381000"/>
-          </a:xfrm>
-          <a:prstGeom prst="roundRect">
-            <a:avLst>
-              <a:gd name="adj" fmla="val 23333"/>
-            </a:avLst>
-          </a:prstGeom>
-          <a:solidFill>
-            <a:srgbClr val="DAFBE1"/>
-          </a:solidFill>
-          <a:ln/>
-        </p:spPr>
-        <p:txBody>
-          <a:bodyPr wrap="square" rtlCol="0" anchor="ctr"/>
-          <a:lstStyle/>
-          <a:p>
-            <a:pPr indent="0" marL="0">
-              <a:buNone/>
-            </a:pPr>
-            <a:endParaRPr lang="en-US" dirty="0"/>
-          </a:p>
-        </p:txBody>
-      </p:sp>
-      <p:pic>
-        <p:nvPicPr>
-          <p:cNvPr id="27" name="Image 2" descr="">
-            <a:extLst>
-              <a:ext uri="{C183D7F6-B498-43B3-948B-1728B52AA6E4}">
-                <adec:decorative xmlns:adec="http://schemas.microsoft.com/office/drawing/2017/decorative" val="1"/>
-              </a:ext>
-            </a:extLst>
-          </p:cNvPr>
-          <p:cNvPicPr>
-            <a:picLocks noChangeAspect="1"/>
-          </p:cNvPicPr>
-          <p:nvPr/>
-        </p:nvPicPr>
-        <p:blipFill>
-          <a:blip r:embed="rId4"/>
-          <a:stretch>
-            <a:fillRect/>
-          </a:stretch>
-        </p:blipFill>
-        <p:spPr>
-          <a:xfrm>
-            <a:off x="5035451" y="2137172"/>
-            <a:ext cx="215801" cy="215801"/>
-          </a:xfrm>
-          <a:prstGeom prst="rect">
-            <a:avLst/>
-          </a:prstGeom>
-        </p:spPr>
-      </p:pic>
-      <p:sp>
-        <p:nvSpPr>
-          <p:cNvPr id="28" name="Text 23"/>
-          <p:cNvSpPr/>
-          <p:nvPr/>
-        </p:nvSpPr>
-        <p:spPr>
-          <a:xfrm>
-            <a:off x="5486251" y="2014389"/>
-            <a:ext cx="2275400" cy="238125"/>
-          </a:xfrm>
-          <a:prstGeom prst="rect">
-            <a:avLst/>
-          </a:prstGeom>
-          <a:noFill/>
-          <a:ln/>
-        </p:spPr>
-        <p:txBody>
-          <a:bodyPr wrap="square" lIns="0" tIns="0" rIns="0" bIns="0" rtlCol="0" anchor="t"/>
-          <a:lstStyle/>
-          <a:p>
-            <a:pPr algn="l" indent="0" marL="0">
-              <a:buNone/>
-            </a:pPr>
-            <a:r>
-              <a:rPr lang="en-US" sz="1550" b="1" dirty="0">
-                <a:solidFill>
-                  <a:srgbClr val="0550AE"/>
-                </a:solidFill>
-                <a:latin typeface="Courier New" pitchFamily="34" charset="0"/>
-                <a:ea typeface="Courier New" pitchFamily="34" charset="-122"/>
-                <a:cs typeface="Courier New" pitchFamily="34" charset="-120"/>
-              </a:rPr>
-              <a:t>name</a:t>
-            </a:r>
-            <a:pPr algn="l" indent="0" marL="0">
-              <a:buNone/>
-            </a:pPr>
-            <a:r>
-              <a:rPr lang="en-US" sz="1550" dirty="0">
-                <a:solidFill>
-                  <a:srgbClr val="1F2328"/>
-                </a:solidFill>
-                <a:latin typeface="Arial" pitchFamily="34" charset="0"/>
-                <a:ea typeface="Arial" pitchFamily="34" charset="-122"/>
-                <a:cs typeface="Arial" pitchFamily="34" charset="-120"/>
-              </a:rPr>
-              <a:t> and </a:t>
-            </a:r>
-            <a:pPr algn="l" indent="0" marL="0">
-              <a:buNone/>
-            </a:pPr>
-            <a:r>
-              <a:rPr lang="en-US" sz="1550" b="1" dirty="0">
-                <a:solidFill>
-                  <a:srgbClr val="0550AE"/>
-                </a:solidFill>
-                <a:latin typeface="Courier New" pitchFamily="34" charset="0"/>
-                <a:ea typeface="Courier New" pitchFamily="34" charset="-122"/>
-                <a:cs typeface="Courier New" pitchFamily="34" charset="-120"/>
-              </a:rPr>
-              <a:t>description</a:t>
-            </a:r>
-            <a:endParaRPr lang="en-US" sz="1550" dirty="0"/>
-          </a:p>
-        </p:txBody>
-      </p:sp>
-      <p:sp>
-        <p:nvSpPr>
-          <p:cNvPr id="29" name="Text 24"/>
-          <p:cNvSpPr/>
-          <p:nvPr/>
-        </p:nvSpPr>
-        <p:spPr>
-          <a:xfrm>
-            <a:off x="5486251" y="2277814"/>
-            <a:ext cx="2275400" cy="198090"/>
-          </a:xfrm>
-          <a:prstGeom prst="rect">
-            <a:avLst/>
-          </a:prstGeom>
-          <a:noFill/>
-          <a:ln/>
-        </p:spPr>
-        <p:txBody>
-          <a:bodyPr wrap="square" lIns="0" tIns="0" rIns="0" bIns="0" rtlCol="0" anchor="t"/>
-          <a:lstStyle/>
-          <a:p>
-            <a:pPr algn="l" indent="0" marL="0">
-              <a:lnSpc>
-                <a:spcPts val="1560"/>
-              </a:lnSpc>
-              <a:buNone/>
-            </a:pPr>
-            <a:r>
-              <a:rPr lang="en-US" sz="1350" dirty="0">
-                <a:solidFill>
-                  <a:srgbClr val="59636E"/>
-                </a:solidFill>
-                <a:latin typeface="Arial" pitchFamily="34" charset="0"/>
-                <a:ea typeface="Arial" pitchFamily="34" charset="-122"/>
-                <a:cs typeface="Arial" pitchFamily="34" charset="-120"/>
-              </a:rPr>
-              <a:t>Shown in the agent picker.</a:t>
-            </a:r>
-            <a:endParaRPr lang="en-US" sz="1350" dirty="0"/>
-          </a:p>
-        </p:txBody>
-      </p:sp>
-      <p:sp>
-        <p:nvSpPr>
-          <p:cNvPr id="30" name="Text 25"/>
-          <p:cNvSpPr/>
-          <p:nvPr/>
-        </p:nvSpPr>
-        <p:spPr>
-          <a:xfrm>
-            <a:off x="4952851" y="2749451"/>
-            <a:ext cx="381000" cy="381000"/>
-          </a:xfrm>
-          <a:prstGeom prst="roundRect">
-            <a:avLst>
-              <a:gd name="adj" fmla="val 23333"/>
-            </a:avLst>
-          </a:prstGeom>
-          <a:solidFill>
-            <a:srgbClr val="DAFBE1"/>
-          </a:solidFill>
-          <a:ln/>
-        </p:spPr>
-        <p:txBody>
-          <a:bodyPr wrap="square" rtlCol="0" anchor="ctr"/>
-          <a:lstStyle/>
-          <a:p>
-            <a:pPr indent="0" marL="0">
-              <a:buNone/>
-            </a:pPr>
-            <a:endParaRPr lang="en-US" dirty="0"/>
-          </a:p>
-        </p:txBody>
-      </p:sp>
-      <p:pic>
-        <p:nvPicPr>
-          <p:cNvPr id="31" name="Image 3" descr="">
-            <a:extLst>
-              <a:ext uri="{C183D7F6-B498-43B3-948B-1728B52AA6E4}">
-                <adec:decorative xmlns:adec="http://schemas.microsoft.com/office/drawing/2017/decorative" val="1"/>
-              </a:ext>
-            </a:extLst>
-          </p:cNvPr>
-          <p:cNvPicPr>
-            <a:picLocks noChangeAspect="1"/>
-          </p:cNvPicPr>
-          <p:nvPr/>
-        </p:nvPicPr>
-        <p:blipFill>
-          <a:blip r:embed="rId5"/>
-          <a:stretch>
-            <a:fillRect/>
-          </a:stretch>
-        </p:blipFill>
-        <p:spPr>
-          <a:xfrm>
-            <a:off x="5035451" y="2832050"/>
-            <a:ext cx="215801" cy="215801"/>
-          </a:xfrm>
-          <a:prstGeom prst="rect">
-            <a:avLst/>
-          </a:prstGeom>
-        </p:spPr>
-      </p:pic>
-      <p:sp>
-        <p:nvSpPr>
-          <p:cNvPr id="32" name="Text 26"/>
-          <p:cNvSpPr/>
-          <p:nvPr/>
-        </p:nvSpPr>
-        <p:spPr>
-          <a:xfrm>
-            <a:off x="5486251" y="2704505"/>
-            <a:ext cx="2582501" cy="238125"/>
-          </a:xfrm>
-          <a:prstGeom prst="rect">
-            <a:avLst/>
-          </a:prstGeom>
-          <a:noFill/>
-          <a:ln/>
-        </p:spPr>
-        <p:txBody>
-          <a:bodyPr wrap="square" lIns="0" tIns="0" rIns="0" bIns="0" rtlCol="0" anchor="t"/>
-          <a:lstStyle/>
-          <a:p>
-            <a:pPr algn="l" indent="0" marL="0">
-              <a:buNone/>
-            </a:pPr>
-            <a:r>
-              <a:rPr lang="en-US" sz="1550" b="1" dirty="0">
-                <a:solidFill>
-                  <a:srgbClr val="0550AE"/>
-                </a:solidFill>
-                <a:latin typeface="Courier New" pitchFamily="34" charset="0"/>
-                <a:ea typeface="Courier New" pitchFamily="34" charset="-122"/>
-                <a:cs typeface="Courier New" pitchFamily="34" charset="-120"/>
-              </a:rPr>
-              <a:t>tools</a:t>
-            </a:r>
-            <a:endParaRPr lang="en-US" sz="1550" dirty="0"/>
-          </a:p>
-        </p:txBody>
-      </p:sp>
-      <p:sp>
-        <p:nvSpPr>
-          <p:cNvPr id="33" name="Text 27"/>
-          <p:cNvSpPr/>
-          <p:nvPr/>
-        </p:nvSpPr>
-        <p:spPr>
-          <a:xfrm>
-            <a:off x="5486251" y="2967930"/>
-            <a:ext cx="2582501" cy="207615"/>
-          </a:xfrm>
-          <a:prstGeom prst="rect">
-            <a:avLst/>
-          </a:prstGeom>
-          <a:noFill/>
-          <a:ln/>
-        </p:spPr>
-        <p:txBody>
-          <a:bodyPr wrap="square" lIns="0" tIns="0" rIns="0" bIns="0" rtlCol="0" anchor="t"/>
-          <a:lstStyle/>
-          <a:p>
-            <a:pPr algn="l" indent="0" marL="0">
-              <a:lnSpc>
-                <a:spcPts val="1560"/>
-              </a:lnSpc>
-              <a:buNone/>
-            </a:pPr>
-            <a:r>
-              <a:rPr lang="en-US" sz="1350" b="1" dirty="0">
-                <a:solidFill>
-                  <a:srgbClr val="0550AE"/>
-                </a:solidFill>
-                <a:latin typeface="Courier New" pitchFamily="34" charset="0"/>
-                <a:ea typeface="Courier New" pitchFamily="34" charset="-122"/>
-                <a:cs typeface="Courier New" pitchFamily="34" charset="-120"/>
-              </a:rPr>
-              <a:t>read</a:t>
-            </a:r>
-            <a:pPr algn="l" indent="0" marL="0">
-              <a:lnSpc>
-                <a:spcPts val="1560"/>
-              </a:lnSpc>
-              <a:buNone/>
-            </a:pPr>
-            <a:r>
-              <a:rPr lang="en-US" sz="1350" dirty="0">
-                <a:solidFill>
-                  <a:srgbClr val="59636E"/>
-                </a:solidFill>
-                <a:latin typeface="Arial" pitchFamily="34" charset="0"/>
-                <a:ea typeface="Arial" pitchFamily="34" charset="-122"/>
-                <a:cs typeface="Arial" pitchFamily="34" charset="-120"/>
-              </a:rPr>
-              <a:t> and </a:t>
-            </a:r>
-            <a:pPr algn="l" indent="0" marL="0">
-              <a:lnSpc>
-                <a:spcPts val="1560"/>
-              </a:lnSpc>
-              <a:buNone/>
-            </a:pPr>
-            <a:r>
-              <a:rPr lang="en-US" sz="1350" b="1" dirty="0">
-                <a:solidFill>
-                  <a:srgbClr val="0550AE"/>
-                </a:solidFill>
-                <a:latin typeface="Courier New" pitchFamily="34" charset="0"/>
-                <a:ea typeface="Courier New" pitchFamily="34" charset="-122"/>
-                <a:cs typeface="Courier New" pitchFamily="34" charset="-120"/>
-              </a:rPr>
-              <a:t>search</a:t>
-            </a:r>
-            <a:pPr algn="l" indent="0" marL="0">
-              <a:lnSpc>
-                <a:spcPts val="1560"/>
-              </a:lnSpc>
-              <a:buNone/>
-            </a:pPr>
-            <a:r>
-              <a:rPr lang="en-US" sz="1350" dirty="0">
-                <a:solidFill>
-                  <a:srgbClr val="59636E"/>
-                </a:solidFill>
-                <a:latin typeface="Arial" pitchFamily="34" charset="0"/>
-                <a:ea typeface="Arial" pitchFamily="34" charset="-122"/>
-                <a:cs typeface="Arial" pitchFamily="34" charset="-120"/>
-              </a:rPr>
-              <a:t> only. No edits.</a:t>
-            </a:r>
-            <a:endParaRPr lang="en-US" sz="1350" dirty="0"/>
-          </a:p>
-        </p:txBody>
-      </p:sp>
-      <p:sp>
-        <p:nvSpPr>
-          <p:cNvPr id="34" name="Text 28"/>
-          <p:cNvSpPr/>
-          <p:nvPr/>
-        </p:nvSpPr>
-        <p:spPr>
-          <a:xfrm>
-            <a:off x="4952851" y="3439567"/>
-            <a:ext cx="381000" cy="381000"/>
-          </a:xfrm>
-          <a:prstGeom prst="roundRect">
-            <a:avLst>
-              <a:gd name="adj" fmla="val 23333"/>
-            </a:avLst>
-          </a:prstGeom>
-          <a:solidFill>
-            <a:srgbClr val="DAFBE1"/>
-          </a:solidFill>
-          <a:ln/>
-        </p:spPr>
-        <p:txBody>
-          <a:bodyPr wrap="square" rtlCol="0" anchor="ctr"/>
-          <a:lstStyle/>
-          <a:p>
-            <a:pPr indent="0" marL="0">
-              <a:buNone/>
-            </a:pPr>
-            <a:endParaRPr lang="en-US" dirty="0"/>
-          </a:p>
-        </p:txBody>
-      </p:sp>
-      <p:pic>
-        <p:nvPicPr>
-          <p:cNvPr id="35" name="Image 4" descr="">
-            <a:extLst>
-              <a:ext uri="{C183D7F6-B498-43B3-948B-1728B52AA6E4}">
-                <adec:decorative xmlns:adec="http://schemas.microsoft.com/office/drawing/2017/decorative" val="1"/>
-              </a:ext>
-            </a:extLst>
-          </p:cNvPr>
-          <p:cNvPicPr>
-            <a:picLocks noChangeAspect="1"/>
-          </p:cNvPicPr>
-          <p:nvPr/>
-        </p:nvPicPr>
-        <p:blipFill>
-          <a:blip r:embed="rId6"/>
-          <a:stretch>
-            <a:fillRect/>
-          </a:stretch>
-        </p:blipFill>
-        <p:spPr>
-          <a:xfrm>
-            <a:off x="5035451" y="3522166"/>
-            <a:ext cx="215801" cy="215801"/>
-          </a:xfrm>
-          <a:prstGeom prst="rect">
-            <a:avLst/>
-          </a:prstGeom>
-        </p:spPr>
-      </p:pic>
-      <p:sp>
-        <p:nvSpPr>
-          <p:cNvPr id="36" name="Text 29"/>
-          <p:cNvSpPr/>
-          <p:nvPr/>
-        </p:nvSpPr>
-        <p:spPr>
-          <a:xfrm>
-            <a:off x="5486251" y="3404146"/>
-            <a:ext cx="2235779" cy="228600"/>
-          </a:xfrm>
-          <a:prstGeom prst="rect">
-            <a:avLst/>
-          </a:prstGeom>
-          <a:noFill/>
-          <a:ln/>
-        </p:spPr>
-        <p:txBody>
-          <a:bodyPr wrap="square" lIns="0" tIns="0" rIns="0" bIns="0" rtlCol="0" anchor="t"/>
-          <a:lstStyle/>
-          <a:p>
-            <a:pPr algn="l" indent="0" marL="0">
-              <a:buNone/>
-            </a:pPr>
-            <a:r>
-              <a:rPr lang="en-US" sz="1550" b="1" dirty="0">
-                <a:solidFill>
-                  <a:srgbClr val="1F2328"/>
-                </a:solidFill>
-                <a:latin typeface="Arial" pitchFamily="34" charset="0"/>
-                <a:ea typeface="Arial" pitchFamily="34" charset="-122"/>
-                <a:cs typeface="Arial" pitchFamily="34" charset="-120"/>
-              </a:rPr>
-              <a:t>Body</a:t>
-            </a:r>
-            <a:endParaRPr lang="en-US" sz="1550" dirty="0"/>
-          </a:p>
-        </p:txBody>
-      </p:sp>
-      <p:sp>
-        <p:nvSpPr>
-          <p:cNvPr id="37" name="Text 30"/>
-          <p:cNvSpPr/>
-          <p:nvPr/>
-        </p:nvSpPr>
-        <p:spPr>
-          <a:xfrm>
-            <a:off x="5486251" y="3658046"/>
-            <a:ext cx="2235779" cy="198090"/>
-          </a:xfrm>
-          <a:prstGeom prst="rect">
-            <a:avLst/>
-          </a:prstGeom>
-          <a:noFill/>
-          <a:ln/>
-        </p:spPr>
-        <p:txBody>
-          <a:bodyPr wrap="square" lIns="0" tIns="0" rIns="0" bIns="0" rtlCol="0" anchor="t"/>
-          <a:lstStyle/>
-          <a:p>
-            <a:pPr algn="l" indent="0" marL="0">
-              <a:lnSpc>
-                <a:spcPts val="1560"/>
-              </a:lnSpc>
-              <a:buNone/>
-            </a:pPr>
-            <a:r>
-              <a:rPr lang="en-US" sz="1350" dirty="0">
-                <a:solidFill>
-                  <a:srgbClr val="59636E"/>
-                </a:solidFill>
-                <a:latin typeface="Arial" pitchFamily="34" charset="0"/>
-                <a:ea typeface="Arial" pitchFamily="34" charset="-122"/>
-                <a:cs typeface="Arial" pitchFamily="34" charset="-120"/>
-              </a:rPr>
-              <a:t>Behavior and answer format.</a:t>
-            </a:r>
-            <a:endParaRPr lang="en-US" sz="1350" dirty="0"/>
-          </a:p>
-        </p:txBody>
-      </p:sp>
-    </p:spTree>
-  </p:cSld>
-  <p:clrMapOvr>
-    <a:masterClrMapping/>
-  </p:clrMapOvr>
-</p:sld>
+<ns0:sld xmlns:ns0="http://schemas.openxmlformats.org/presentationml/2006/main" xmlns:ns1="http://schemas.openxmlformats.org/drawingml/2006/main" xmlns:ns2="http://schemas.microsoft.com/office/drawing/2017/decorative" xmlns:ns3="http://schemas.openxmlformats.org/officeDocument/2006/relationships">
+  <ns0:cSld name="Slide 12">
+    <ns0:bg>
+      <ns0:bgPr>
+        <ns1:solidFill>
+          <ns1:srgbClr val="FFFFFF"/>
+        </ns1:solidFill>
+      </ns0:bgPr>
+    </ns0:bg>
+    <ns0:spTree>
+      <ns0:nvGrpSpPr>
+        <ns0:cNvPr id="1" name=""/>
+        <ns0:cNvGrpSpPr/>
+        <ns0:nvPr/>
+      </ns0:nvGrpSpPr>
+      <ns0:grpSpPr>
+        <ns1:xfrm>
+          <ns1:off x="0" y="0"/>
+          <ns1:ext cx="0" cy="0"/>
+          <ns1:chOff x="0" y="0"/>
+          <ns1:chExt cx="0" cy="0"/>
+        </ns1:xfrm>
+      </ns0:grpSpPr>
+      <ns0:pic>
+        <ns0:nvPicPr>
+          <ns0:cNvPr id="2" name="Image 0" descr="">
+            <ns1:extLst>
+              <ns1:ext uri="{C183D7F6-B498-43B3-948B-1728B52AA6E4}">
+                <ns2:decorative val="1"/>
+              </ns1:ext>
+            </ns1:extLst>
+          </ns0:cNvPr>
+          <ns0:cNvPicPr>
+            <ns1:picLocks noChangeAspect="1"/>
+          </ns0:cNvPicPr>
+          <ns0:nvPr/>
+        </ns0:nvPicPr>
+        <ns0:blipFill>
+          <ns1:blip ns3:embed="rId1"/>
+          <ns1:stretch>
+            <ns1:fillRect/>
+          </ns1:stretch>
+        </ns0:blipFill>
+        <ns0:spPr>
+          <ns1:xfrm>
+            <ns1:off x="6349901" y="0"/>
+            <ns1:ext cx="2793950" cy="1308050"/>
+          </ns1:xfrm>
+          <ns1:prstGeom prst="rect">
+            <ns1:avLst/>
+          </ns1:prstGeom>
+        </ns0:spPr>
+      </ns0:pic>
+      <ns0:sp>
+        <ns0:nvSpPr>
+          <ns0:cNvPr id="3" name="Text 0"/>
+          <ns0:cNvSpPr/>
+          <ns0:nvPr/>
+        </ns0:nvSpPr>
+        <ns0:spPr>
+          <ns1:xfrm>
+            <ns1:off x="7340501" y="177701"/>
+            <ns1:ext cx="1168301" cy="279350"/>
+          </ns1:xfrm>
+          <ns1:prstGeom prst="roundRect">
+            <ns1:avLst>
+              <ns1:gd name="adj" fmla="val 22731"/>
+            </ns1:avLst>
+          </ns1:prstGeom>
+          <ns1:solidFill>
+            <ns1:srgbClr val="1A7F37"/>
+          </ns1:solidFill>
+          <ns1:ln/>
+        </ns0:spPr>
+        <ns0:txBody>
+          <ns1:bodyPr wrap="square" rtlCol="0" anchor="ctr"/>
+          <ns1:lstStyle/>
+          <ns1:p>
+            <ns1:pPr indent="0" marL="0">
+              <ns1:buNone/>
+            </ns1:pPr>
+            <ns1:endParaRPr lang="en-US" dirty="0"/>
+          </ns1:p>
+        </ns0:txBody>
+      </ns0:sp>
+      <ns0:sp>
+        <ns0:nvSpPr>
+          <ns0:cNvPr id="4" name="Text 1"/>
+          <ns0:cNvSpPr/>
+          <ns0:nvPr/>
+        </ns0:nvSpPr>
+        <ns0:spPr>
+          <ns1:xfrm>
+            <ns1:off x="7461041" y="231577"/>
+            <ns1:ext cx="927071" cy="171450"/>
+          </ns1:xfrm>
+          <ns1:prstGeom prst="rect">
+            <ns1:avLst/>
+          </ns1:prstGeom>
+          <ns1:noFill/>
+          <ns1:ln/>
+        </ns0:spPr>
+        <ns0:txBody>
+          <ns1:bodyPr wrap="square" lIns="0" tIns="0" rIns="0" bIns="0" rtlCol="0" anchor="t"/>
+          <ns1:lstStyle/>
+          <ns1:p>
+            <ns1:pPr algn="ctr" indent="0" marL="0">
+              <ns1:buNone/>
+            </ns1:pPr>
+            <ns1:r>
+              <ns1:rPr lang="en-US" sz="1150" b="1" dirty="0">
+                <ns1:solidFill>
+                  <ns1:srgbClr val="FFFFFF"/>
+                </ns1:solidFill>
+                <ns1:latin typeface="Arial" pitchFamily="34" charset="0"/>
+                <ns1:ea typeface="Arial" pitchFamily="34" charset="-122"/>
+                <ns1:cs typeface="Arial" pitchFamily="34" charset="-120"/>
+              </ns1:rPr>
+              <ns1:t>CHAPTER 04</ns1:t>
+            </ns1:r>
+            <ns1:endParaRPr lang="en-US" sz="1150" dirty="0"/>
+          </ns1:p>
+        </ns0:txBody>
+      </ns0:sp>
+      <ns0:pic>
+        <ns0:nvPicPr>
+          <ns0:cNvPr id="5" name="Image 1" descr="Open this chapter on GitHub">
+            <ns1:hlinkClick ns3:id="rId3" tooltip="https://github.com/github/copilot-app-for-beginners/tree/main/04-skills-custom-agents"/>
+          </ns0:cNvPr>
+          <ns0:cNvPicPr>
+            <ns1:picLocks noChangeAspect="1"/>
+          </ns0:cNvPicPr>
+          <ns0:nvPr/>
+        </ns0:nvPicPr>
+        <ns0:blipFill>
+          <ns1:blip ns3:embed="rId2"/>
+          <ns1:stretch>
+            <ns1:fillRect/>
+          </ns1:stretch>
+        </ns0:blipFill>
+        <ns0:spPr>
+          <ns1:xfrm>
+            <ns1:off x="8610600" y="165050"/>
+            <ns1:ext cx="304800" cy="304800"/>
+          </ns1:xfrm>
+          <ns1:prstGeom prst="rect">
+            <ns1:avLst/>
+          </ns1:prstGeom>
+        </ns0:spPr>
+      </ns0:pic>
+      <ns0:sp>
+        <ns0:nvSpPr>
+          <ns0:cNvPr id="6" name="Text 2"/>
+          <ns0:cNvSpPr/>
+          <ns0:nvPr/>
+        </ns0:nvSpPr>
+        <ns0:spPr>
+          <ns1:xfrm>
+            <ns1:off x="507950" y="381000"/>
+            <ns1:ext cx="8161020" cy="190500"/>
+          </ns1:xfrm>
+          <ns1:prstGeom prst="rect">
+            <ns1:avLst/>
+          </ns1:prstGeom>
+          <ns1:noFill/>
+          <ns1:ln/>
+        </ns0:spPr>
+        <ns0:txBody>
+          <ns1:bodyPr wrap="square" lIns="0" tIns="0" rIns="0" bIns="0" rtlCol="0" anchor="t"/>
+          <ns1:lstStyle/>
+          <ns1:p>
+            <ns1:pPr algn="l" indent="0" marL="0">
+              <ns1:buNone/>
+            </ns1:pPr>
+            <ns1:r>
+              <ns1:rPr lang="en-US" sz="1250" b="1" dirty="0">
+                <ns1:solidFill>
+                  <ns1:srgbClr val="8250DF"/>
+                </ns1:solidFill>
+                <ns1:latin typeface="Arial" pitchFamily="34" charset="0"/>
+                <ns1:ea typeface="Arial" pitchFamily="34" charset="-122"/>
+                <ns1:cs typeface="Arial" pitchFamily="34" charset="-120"/>
+              </ns1:rPr>
+              <ns1:t>ANATOMY OF A CUSTOM AGENT</ns1:t>
+            </ns1:r>
+            <ns1:endParaRPr lang="en-US" sz="1250" dirty="0"/>
+          </ns1:p>
+        </ns0:txBody>
+      </ns0:sp>
+      <ns0:sp>
+        <ns0:nvSpPr>
+          <ns0:cNvPr id="7" name="Text 3"/>
+          <ns0:cNvSpPr/>
+          <ns0:nvPr/>
+        </ns0:nvSpPr>
+        <ns0:spPr>
+          <ns1:xfrm>
+            <ns1:off x="507950" y="622250"/>
+            <ns1:ext cx="8161020" cy="419100"/>
+          </ns1:xfrm>
+          <ns1:prstGeom prst="rect">
+            <ns1:avLst/>
+          </ns1:prstGeom>
+          <ns1:noFill/>
+          <ns1:ln/>
+        </ns0:spPr>
+        <ns0:txBody>
+          <ns1:bodyPr wrap="square" lIns="0" tIns="0" rIns="0" bIns="0" rtlCol="0" anchor="t"/>
+          <ns1:lstStyle/>
+          <ns1:p>
+            <ns1:pPr algn="l" indent="0" marL="0">
+              <ns1:lnSpc>
+                <ns1:spcPts val="3300"/>
+              </ns1:lnSpc>
+              <ns1:spcBef>
+                <ns1:spcPts val="400"/>
+              </ns1:spcBef>
+              <ns1:buNone/>
+            </ns1:pPr>
+            <ns1:r>
+              <ns1:rPr lang="en-US" sz="2800" b="1" dirty="0">
+                <ns1:solidFill>
+                  <ns1:srgbClr val="1F2328"/>
+                </ns1:solidFill>
+                <ns1:latin typeface="Arial" pitchFamily="34" charset="0"/>
+                <ns1:ea typeface="Arial" pitchFamily="34" charset="-122"/>
+                <ns1:cs typeface="Arial" pitchFamily="34" charset="-120"/>
+              </ns1:rPr>
+              <ns1:t>A read-only Book App explainer</ns1:t>
+            </ns1:r>
+            <ns1:endParaRPr lang="en-US" sz="2800" dirty="0"/>
+          </ns1:p>
+        </ns0:txBody>
+      </ns0:sp>
+      <ns0:sp>
+        <ns0:nvSpPr>
+          <ns0:cNvPr id="8" name="Text 4"/>
+          <ns0:cNvSpPr/>
+          <ns0:nvPr/>
+        </ns0:nvSpPr>
+        <ns0:spPr>
+          <ns1:xfrm>
+            <ns1:off x="507950" y="1104751"/>
+            <ns1:ext cx="8161020" cy="273100"/>
+          </ns1:xfrm>
+          <ns1:prstGeom prst="rect">
+            <ns1:avLst/>
+          </ns1:prstGeom>
+          <ns1:noFill/>
+          <ns1:ln/>
+        </ns0:spPr>
+        <ns0:txBody>
+          <ns1:bodyPr wrap="square" lIns="0" tIns="0" rIns="0" bIns="0" rtlCol="0" anchor="t"/>
+          <ns1:lstStyle/>
+          <ns1:p>
+            <ns1:pPr algn="l" indent="0" marL="0">
+              <ns1:lnSpc>
+                <ns1:spcPts val="2000"/>
+              </ns1:lnSpc>
+              <ns1:spcBef>
+                <ns1:spcPts val="500"/>
+              </ns1:spcBef>
+              <ns1:buNone/>
+            </ns1:pPr>
+            <ns1:r>
+              <ns1:rPr lang="en-US" sz="1650" dirty="0">
+                <ns1:solidFill>
+                  <ns1:srgbClr val="59636E"/>
+                </ns1:solidFill>
+                <ns1:latin typeface="Arial" pitchFamily="34" charset="0"/>
+                <ns1:ea typeface="Arial" pitchFamily="34" charset="-122"/>
+                <ns1:cs typeface="Arial" pitchFamily="34" charset="-120"/>
+              </ns1:rPr>
+              <ns1:t>Like a skill, plus a </ns1:t>
+            </ns1:r>
+            <ns1:pPr algn="l" indent="0" marL="0">
+              <ns1:lnSpc>
+                <ns1:spcPts val="2000"/>
+              </ns1:lnSpc>
+              <ns1:spcBef>
+                <ns1:spcPts val="500"/>
+              </ns1:spcBef>
+              <ns1:buNone/>
+            </ns1:pPr>
+            <ns1:r>
+              <ns1:rPr lang="en-US" sz="1650" b="1" dirty="0">
+                <ns1:solidFill>
+                  <ns1:srgbClr val="0550AE"/>
+                </ns1:solidFill>
+                <ns1:latin typeface="Courier New" pitchFamily="34" charset="0"/>
+                <ns1:ea typeface="Courier New" pitchFamily="34" charset="-122"/>
+                <ns1:cs typeface="Courier New" pitchFamily="34" charset="-120"/>
+              </ns1:rPr>
+              <ns1:t>tools</ns1:t>
+            </ns1:r>
+            <ns1:pPr algn="l" indent="0" marL="0">
+              <ns1:lnSpc>
+                <ns1:spcPts val="2000"/>
+              </ns1:lnSpc>
+              <ns1:spcBef>
+                <ns1:spcPts val="500"/>
+              </ns1:spcBef>
+              <ns1:buNone/>
+            </ns1:pPr>
+            <ns1:r>
+              <ns1:rPr lang="en-US" sz="1650" dirty="0">
+                <ns1:solidFill>
+                  <ns1:srgbClr val="59636E"/>
+                </ns1:solidFill>
+                <ns1:latin typeface="Arial" pitchFamily="34" charset="0"/>
+                <ns1:ea typeface="Arial" pitchFamily="34" charset="-122"/>
+                <ns1:cs typeface="Arial" pitchFamily="34" charset="-120"/>
+              </ns1:rPr>
+              <ns1:t> list.</ns1:t>
+            </ns1:r>
+            <ns1:endParaRPr lang="en-US" sz="1650" dirty="0"/>
+          </ns1:p>
+        </ns0:txBody>
+      </ns0:sp>
+      <ns0:sp>
+        <ns0:nvSpPr>
+          <ns0:cNvPr id="9" name="Text 5"/>
+          <ns0:cNvSpPr/>
+          <ns0:nvPr/>
+        </ns0:nvSpPr>
+        <ns0:spPr>
+          <ns1:xfrm>
+            <ns1:off x="507950" y="1574750"/>
+            <ns1:ext cx="4191000" cy="2721173"/>
+          </ns1:xfrm>
+          <ns1:prstGeom prst="roundRect">
+            <ns1:avLst>
+              <ns1:gd name="adj" fmla="val 3734"/>
+            </ns1:avLst>
+          </ns1:prstGeom>
+          <ns1:solidFill>
+            <ns1:srgbClr val="F6F8FA"/>
+          </ns1:solidFill>
+          <ns1:ln w="9525">
+            <ns1:solidFill>
+              <ns1:srgbClr val="D1D9E0"/>
+            </ns1:solidFill>
+          </ns1:ln>
+        </ns0:spPr>
+        <ns0:txBody>
+          <ns1:bodyPr wrap="square" rtlCol="0" anchor="ctr"/>
+          <ns1:lstStyle/>
+          <ns1:p>
+            <ns1:pPr indent="0" marL="0">
+              <ns1:buNone/>
+            </ns1:pPr>
+            <ns1:endParaRPr lang="en-US" dirty="0"/>
+          </ns1:p>
+        </ns0:txBody>
+      </ns0:sp>
+      <ns0:sp>
+        <ns0:nvSpPr>
+          <ns0:cNvPr id="10" name="Text 6"/>
+          <ns0:cNvSpPr/>
+          <ns0:nvPr/>
+        </ns0:nvSpPr>
+        <ns0:spPr>
+          <ns1:xfrm>
+            <ns1:off x="517475" y="1584275"/>
+            <ns1:ext cx="4171950" cy="238125"/>
+          </ns1:xfrm>
+          <ns1:prstGeom prst="rect">
+            <ns1:avLst/>
+          </ns1:prstGeom>
+          <ns1:solidFill>
+            <ns1:srgbClr val="EFF2F5"/>
+          </ns1:solidFill>
+          <ns1:ln/>
+        </ns0:spPr>
+        <ns0:txBody>
+          <ns1:bodyPr wrap="square" rtlCol="0" anchor="ctr"/>
+          <ns1:lstStyle/>
+          <ns1:p>
+            <ns1:pPr indent="0" marL="0">
+              <ns1:buNone/>
+            </ns1:pPr>
+            <ns1:endParaRPr lang="en-US" dirty="0"/>
+          </ns1:p>
+        </ns0:txBody>
+      </ns0:sp>
+      <ns0:sp>
+        <ns0:nvSpPr>
+          <ns0:cNvPr id="11" name="Shape 7"/>
+          <ns0:cNvSpPr/>
+          <ns0:nvPr/>
+        </ns0:nvSpPr>
+        <ns0:spPr>
+          <ns1:xfrm>
+            <ns1:off x="517475" y="1817638"/>
+            <ns1:ext cx="4171950" cy="0"/>
+          </ns1:xfrm>
+          <ns1:prstGeom prst="line">
+            <ns1:avLst/>
+          </ns1:prstGeom>
+          <ns1:noFill/>
+          <ns1:ln w="9525">
+            <ns1:solidFill>
+              <ns1:srgbClr val="D1D9E0"/>
+            </ns1:solidFill>
+            <ns1:prstDash val="solid"/>
+          </ns1:ln>
+        </ns0:spPr>
+      </ns0:sp>
+      <ns0:sp>
+        <ns0:nvSpPr>
+          <ns0:cNvPr id="12" name="Text 8"/>
+          <ns0:cNvSpPr/>
+          <ns0:nvPr/>
+        </ns0:nvSpPr>
+        <ns0:spPr>
+          <ns1:xfrm>
+            <ns1:off x="631775" y="1654076"/>
+            <ns1:ext cx="88850" cy="88850"/>
+          </ns1:xfrm>
+          <ns1:prstGeom prst="roundRect">
+            <ns1:avLst>
+              <ns1:gd name="adj" fmla="val 1029150"/>
+            </ns1:avLst>
+          </ns1:prstGeom>
+          <ns1:solidFill>
+            <ns1:srgbClr val="FF5F57"/>
+          </ns1:solidFill>
+          <ns1:ln/>
+        </ns0:spPr>
+        <ns0:txBody>
+          <ns1:bodyPr wrap="square" rtlCol="0" anchor="ctr"/>
+          <ns1:lstStyle/>
+          <ns1:p>
+            <ns1:pPr indent="0" marL="0">
+              <ns1:buNone/>
+            </ns1:pPr>
+            <ns1:endParaRPr lang="en-US" dirty="0"/>
+          </ns1:p>
+        </ns0:txBody>
+      </ns0:sp>
+      <ns0:sp>
+        <ns0:nvSpPr>
+          <ns0:cNvPr id="13" name="Text 9"/>
+          <ns0:cNvSpPr/>
+          <ns0:nvPr/>
+        </ns0:nvSpPr>
+        <ns0:spPr>
+          <ns1:xfrm>
+            <ns1:off x="771376" y="1654076"/>
+            <ns1:ext cx="88850" cy="88850"/>
+          </ns1:xfrm>
+          <ns1:prstGeom prst="roundRect">
+            <ns1:avLst>
+              <ns1:gd name="adj" fmla="val 1029150"/>
+            </ns1:avLst>
+          </ns1:prstGeom>
+          <ns1:solidFill>
+            <ns1:srgbClr val="FEBC2E"/>
+          </ns1:solidFill>
+          <ns1:ln/>
+        </ns0:spPr>
+        <ns0:txBody>
+          <ns1:bodyPr wrap="square" rtlCol="0" anchor="ctr"/>
+          <ns1:lstStyle/>
+          <ns1:p>
+            <ns1:pPr indent="0" marL="0">
+              <ns1:buNone/>
+            </ns1:pPr>
+            <ns1:endParaRPr lang="en-US" dirty="0"/>
+          </ns1:p>
+        </ns0:txBody>
+      </ns0:sp>
+      <ns0:sp>
+        <ns0:nvSpPr>
+          <ns0:cNvPr id="14" name="Text 10"/>
+          <ns0:cNvSpPr/>
+          <ns0:nvPr/>
+        </ns0:nvSpPr>
+        <ns0:spPr>
+          <ns1:xfrm>
+            <ns1:off x="910977" y="1654076"/>
+            <ns1:ext cx="88850" cy="88850"/>
+          </ns1:xfrm>
+          <ns1:prstGeom prst="roundRect">
+            <ns1:avLst>
+              <ns1:gd name="adj" fmla="val 1029150"/>
+            </ns1:avLst>
+          </ns1:prstGeom>
+          <ns1:solidFill>
+            <ns1:srgbClr val="28C840"/>
+          </ns1:solidFill>
+          <ns1:ln/>
+        </ns0:spPr>
+        <ns0:txBody>
+          <ns1:bodyPr wrap="square" rtlCol="0" anchor="ctr"/>
+          <ns1:lstStyle/>
+          <ns1:p>
+            <ns1:pPr indent="0" marL="0">
+              <ns1:buNone/>
+            </ns1:pPr>
+            <ns1:endParaRPr lang="en-US" dirty="0"/>
+          </ns1:p>
+        </ns0:txBody>
+      </ns0:sp>
+      <ns0:sp>
+        <ns0:nvSpPr>
+          <ns0:cNvPr id="15" name="Text 11"/>
+          <ns0:cNvSpPr/>
+          <ns0:nvPr/>
+        </ns0:nvSpPr>
+        <ns0:spPr>
+          <ns1:xfrm>
+            <ns1:off x="1126778" y="1612850"/>
+            <ns1:ext cx="2413239" cy="171450"/>
+          </ns1:xfrm>
+          <ns1:prstGeom prst="rect">
+            <ns1:avLst/>
+          </ns1:prstGeom>
+          <ns1:noFill/>
+          <ns1:ln/>
+        </ns0:spPr>
+        <ns0:txBody>
+          <ns1:bodyPr wrap="square" lIns="0" tIns="0" rIns="0" bIns="0" rtlCol="0" anchor="t"/>
+          <ns1:lstStyle/>
+          <ns1:p>
+            <ns1:pPr algn="l" indent="0" marL="0">
+              <ns1:buNone/>
+            </ns1:pPr>
+            <ns1:r>
+              <ns1:rPr lang="en-US" sz="1150" dirty="0">
+                <ns1:solidFill>
+                  <ns1:srgbClr val="59636E"/>
+                </ns1:solidFill>
+                <ns1:latin typeface="Courier New" pitchFamily="34" charset="0"/>
+                <ns1:ea typeface="Courier New" pitchFamily="34" charset="-122"/>
+                <ns1:cs typeface="Courier New" pitchFamily="34" charset="-120"/>
+              </ns1:rPr>
+              <ns1:t>book-app-explainer.agent.md</ns1:t>
+            </ns1:r>
+            <ns1:endParaRPr lang="en-US" sz="1150" dirty="0"/>
+          </ns1:p>
+        </ns0:txBody>
+      </ns0:sp>
+      <ns0:sp>
+        <ns0:nvSpPr>
+          <ns0:cNvPr id="16" name="Text 12"/>
+          <ns0:cNvSpPr/>
+          <ns0:nvPr/>
+        </ns0:nvSpPr>
+        <ns0:spPr>
+          <ns1:xfrm>
+            <ns1:off x="669875" y="1949351"/>
+            <ns1:ext cx="3944493" cy="221010"/>
+          </ns1:xfrm>
+          <ns1:prstGeom prst="rect">
+            <ns1:avLst/>
+          </ns1:prstGeom>
+          <ns1:noFill/>
+          <ns1:ln/>
+        </ns0:spPr>
+        <ns0:txBody>
+          <ns1:bodyPr wrap="square" lIns="0" tIns="0" rIns="0" bIns="0" rtlCol="0" anchor="t"/>
+          <ns1:lstStyle/>
+          <ns1:p>
+            <ns1:pPr algn="l" indent="0" marL="0">
+              <ns1:lnSpc>
+                <ns1:spcPts val="1740"/>
+              </ns1:lnSpc>
+              <ns1:buNone/>
+            </ns1:pPr>
+            <ns1:r>
+              <ns1:rPr lang="en-US" sz="1350" dirty="0">
+                <ns1:solidFill>
+                  <ns1:srgbClr val="818B98"/>
+                </ns1:solidFill>
+                <ns1:latin typeface="Courier New" pitchFamily="34" charset="0"/>
+                <ns1:ea typeface="Courier New" pitchFamily="34" charset="-122"/>
+                <ns1:cs typeface="Courier New" pitchFamily="34" charset="-120"/>
+              </ns1:rPr>
+              <ns1:t>---</ns1:t>
+            </ns1:r>
+            <ns1:endParaRPr lang="en-US" sz="1350" dirty="0"/>
+          </ns1:p>
+        </ns0:txBody>
+      </ns0:sp>
+      <ns0:sp>
+        <ns0:nvSpPr>
+          <ns0:cNvPr id="17" name="Text 13"/>
+          <ns0:cNvSpPr/>
+          <ns0:nvPr/>
+        </ns0:nvSpPr>
+        <ns0:spPr>
+          <ns1:xfrm>
+            <ns1:off x="669875" y="2170361"/>
+            <ns1:ext cx="3944493" cy="221010"/>
+          </ns1:xfrm>
+          <ns1:prstGeom prst="rect">
+            <ns1:avLst/>
+          </ns1:prstGeom>
+          <ns1:noFill/>
+          <ns1:ln/>
+        </ns0:spPr>
+        <ns0:txBody>
+          <ns1:bodyPr wrap="square" lIns="0" tIns="0" rIns="0" bIns="0" rtlCol="0" anchor="t"/>
+          <ns1:lstStyle/>
+          <ns1:p>
+            <ns1:pPr algn="l" indent="0" marL="0">
+              <ns1:lnSpc>
+                <ns1:spcPts val="1740"/>
+              </ns1:lnSpc>
+              <ns1:buNone/>
+            </ns1:pPr>
+            <ns1:r>
+              <ns1:rPr lang="en-US" sz="1350" dirty="0">
+                <ns1:solidFill>
+                  <ns1:srgbClr val="8250DF"/>
+                </ns1:solidFill>
+                <ns1:latin typeface="Courier New" pitchFamily="34" charset="0"/>
+                <ns1:ea typeface="Courier New" pitchFamily="34" charset="-122"/>
+                <ns1:cs typeface="Courier New" pitchFamily="34" charset="-120"/>
+              </ns1:rPr>
+              <ns1:t>name</ns1:t>
+            </ns1:r>
+            <ns1:pPr algn="l" indent="0" marL="0">
+              <ns1:lnSpc>
+                <ns1:spcPts val="1740"/>
+              </ns1:lnSpc>
+              <ns1:buNone/>
+            </ns1:pPr>
+            <ns1:r>
+              <ns1:rPr lang="en-US" sz="1350" dirty="0">
+                <ns1:solidFill>
+                  <ns1:srgbClr val="1F2328"/>
+                </ns1:solidFill>
+                <ns1:latin typeface="Courier New" pitchFamily="34" charset="0"/>
+                <ns1:ea typeface="Courier New" pitchFamily="34" charset="-122"/>
+                <ns1:cs typeface="Courier New" pitchFamily="34" charset="-120"/>
+              </ns1:rPr>
+              <ns1:t>: book-app-explainer</ns1:t>
+            </ns1:r>
+            <ns1:endParaRPr lang="en-US" sz="1350" dirty="0"/>
+          </ns1:p>
+        </ns0:txBody>
+      </ns0:sp>
+      <ns0:sp>
+        <ns0:nvSpPr>
+          <ns0:cNvPr id="18" name="Text 14"/>
+          <ns0:cNvSpPr/>
+          <ns0:nvPr/>
+        </ns0:nvSpPr>
+        <ns0:spPr>
+          <ns1:xfrm>
+            <ns1:off x="669875" y="2391370"/>
+            <ns1:ext cx="3944493" cy="221010"/>
+          </ns1:xfrm>
+          <ns1:prstGeom prst="rect">
+            <ns1:avLst/>
+          </ns1:prstGeom>
+          <ns1:noFill/>
+          <ns1:ln/>
+        </ns0:spPr>
+        <ns0:txBody>
+          <ns1:bodyPr wrap="square" lIns="0" tIns="0" rIns="0" bIns="0" rtlCol="0" anchor="t"/>
+          <ns1:lstStyle/>
+          <ns1:p>
+            <ns1:pPr algn="l" indent="0" marL="0">
+              <ns1:lnSpc>
+                <ns1:spcPts val="1740"/>
+              </ns1:lnSpc>
+              <ns1:buNone/>
+            </ns1:pPr>
+            <ns1:r>
+              <ns1:rPr lang="en-US" sz="1350" dirty="0">
+                <ns1:solidFill>
+                  <ns1:srgbClr val="8250DF"/>
+                </ns1:solidFill>
+                <ns1:latin typeface="Courier New" pitchFamily="34" charset="0"/>
+                <ns1:ea typeface="Courier New" pitchFamily="34" charset="-122"/>
+                <ns1:cs typeface="Courier New" pitchFamily="34" charset="-120"/>
+              </ns1:rPr>
+              <ns1:t>description: Explain the Book App</ns1:t>
+            </ns1:r>
+            <ns1:pPr algn="l" indent="0" marL="0">
+              <ns1:lnSpc>
+                <ns1:spcPts val="1740"/>
+              </ns1:lnSpc>
+              <ns1:buNone/>
+            </ns1:pPr>
+            <ns1:r>
+              <ns1:rPr lang="en-US" sz="1350" dirty="0">
+                <ns1:solidFill>
+                  <ns1:srgbClr val="1F2328"/>
+                </ns1:solidFill>
+                <ns1:latin typeface="Courier New" pitchFamily="34" charset="0"/>
+                <ns1:ea typeface="Courier New" pitchFamily="34" charset="-122"/>
+                <ns1:cs typeface="Courier New" pitchFamily="34" charset="-120"/>
+              </ns1:rPr>
+              <ns1:t/>
+            </ns1:r>
+            <ns1:endParaRPr lang="en-US" sz="1350" dirty="0"/>
+          </ns1:p>
+        </ns0:txBody>
+      </ns0:sp>
+      <ns0:sp>
+        <ns0:nvSpPr>
+          <ns0:cNvPr id="19" name="Text 15"/>
+          <ns0:cNvSpPr/>
+          <ns0:nvPr/>
+        </ns0:nvSpPr>
+        <ns0:spPr>
+          <ns1:xfrm>
+            <ns1:off x="669875" y="2612380"/>
+            <ns1:ext cx="3944493" cy="221010"/>
+          </ns1:xfrm>
+          <ns1:prstGeom prst="rect">
+            <ns1:avLst/>
+          </ns1:prstGeom>
+          <ns1:noFill/>
+          <ns1:ln/>
+        </ns0:spPr>
+        <ns0:txBody>
+          <ns1:bodyPr wrap="square" lIns="0" tIns="0" rIns="0" bIns="0" rtlCol="0" anchor="t"/>
+          <ns1:lstStyle/>
+          <ns1:p>
+            <ns1:pPr algn="l" indent="0" marL="0">
+              <ns1:lnSpc>
+                <ns1:spcPts val="1740"/>
+              </ns1:lnSpc>
+              <ns1:buNone/>
+            </ns1:pPr>
+            <ns1:r>
+              <ns1:rPr lang="en-US" sz="1350" dirty="0">
+                <ns1:solidFill>
+                  <ns1:srgbClr val="1F2328"/>
+                </ns1:solidFill>
+                <ns1:latin typeface="Courier New" pitchFamily="34" charset="0"/>
+                <ns1:ea typeface="Courier New" pitchFamily="34" charset="-122"/>
+                <ns1:cs typeface="Courier New" pitchFamily="34" charset="-120"/>
+              </ns1:rPr>
+              <ns1:t xml:space="preserve">  to a beginner without changing</ns1:t>
+            </ns1:r>
+            <ns1:endParaRPr lang="en-US" sz="1350" dirty="0"/>
+          </ns1:p>
+        </ns0:txBody>
+      </ns0:sp>
+      <ns0:sp>
+        <ns0:nvSpPr>
+          <ns0:cNvPr id="20" name="Text 16"/>
+          <ns0:cNvSpPr/>
+          <ns0:nvPr/>
+        </ns0:nvSpPr>
+        <ns0:spPr>
+          <ns1:xfrm>
+            <ns1:off x="669875" y="2833390"/>
+            <ns1:ext cx="3944493" cy="221010"/>
+          </ns1:xfrm>
+          <ns1:prstGeom prst="rect">
+            <ns1:avLst/>
+          </ns1:prstGeom>
+          <ns1:noFill/>
+          <ns1:ln/>
+        </ns0:spPr>
+        <ns0:txBody>
+          <ns1:bodyPr wrap="square" lIns="0" tIns="0" rIns="0" bIns="0" rtlCol="0" anchor="t"/>
+          <ns1:lstStyle/>
+          <ns1:p>
+            <ns1:pPr algn="l" indent="0" marL="0">
+              <ns1:lnSpc>
+                <ns1:spcPts val="1740"/>
+              </ns1:lnSpc>
+              <ns1:buNone/>
+            </ns1:pPr>
+            <ns1:r>
+              <ns1:rPr lang="en-US" sz="1350" dirty="0">
+                <ns1:solidFill>
+                  <ns1:srgbClr val="1F2328"/>
+                </ns1:solidFill>
+                <ns1:latin typeface="Courier New" pitchFamily="34" charset="0"/>
+                <ns1:ea typeface="Courier New" pitchFamily="34" charset="-122"/>
+                <ns1:cs typeface="Courier New" pitchFamily="34" charset="-120"/>
+              </ns1:rPr>
+              <ns1:t xml:space="preserve">  files.</ns1:t>
+            </ns1:r>
+            <ns1:endParaRPr lang="en-US" sz="1350" dirty="0"/>
+          </ns1:p>
+        </ns0:txBody>
+      </ns0:sp>
+      <ns0:sp>
+        <ns0:nvSpPr>
+          <ns0:cNvPr id="21" name="Text 17"/>
+          <ns0:cNvSpPr/>
+          <ns0:nvPr/>
+        </ns0:nvSpPr>
+        <ns0:spPr>
+          <ns1:xfrm>
+            <ns1:off x="669875" y="3054400"/>
+            <ns1:ext cx="3944493" cy="221010"/>
+          </ns1:xfrm>
+          <ns1:prstGeom prst="rect">
+            <ns1:avLst/>
+          </ns1:prstGeom>
+          <ns1:noFill/>
+          <ns1:ln/>
+        </ns0:spPr>
+        <ns0:txBody>
+          <ns1:bodyPr wrap="square" lIns="0" tIns="0" rIns="0" bIns="0" rtlCol="0" anchor="t"/>
+          <ns1:lstStyle/>
+          <ns1:p>
+            <ns1:pPr algn="l" indent="0" marL="0">
+              <ns1:lnSpc>
+                <ns1:spcPts val="1740"/>
+              </ns1:lnSpc>
+              <ns1:buNone/>
+            </ns1:pPr>
+            <ns1:r>
+              <ns1:rPr lang="en-US" sz="1350" dirty="0">
+                <ns1:solidFill>
+                  <ns1:srgbClr val="8250DF"/>
+                </ns1:solidFill>
+                <ns1:latin typeface="Courier New" pitchFamily="34" charset="0"/>
+                <ns1:ea typeface="Courier New" pitchFamily="34" charset="-122"/>
+                <ns1:cs typeface="Courier New" pitchFamily="34" charset="-120"/>
+              </ns1:rPr>
+              <ns1:t>tools</ns1:t>
+            </ns1:r>
+            <ns1:pPr algn="l" indent="0" marL="0">
+              <ns1:lnSpc>
+                <ns1:spcPts val="1740"/>
+              </ns1:lnSpc>
+              <ns1:buNone/>
+            </ns1:pPr>
+            <ns1:r>
+              <ns1:rPr lang="en-US" sz="1350" dirty="0">
+                <ns1:solidFill>
+                  <ns1:srgbClr val="1F2328"/>
+                </ns1:solidFill>
+                <ns1:latin typeface="Courier New" pitchFamily="34" charset="0"/>
+                <ns1:ea typeface="Courier New" pitchFamily="34" charset="-122"/>
+                <ns1:cs typeface="Courier New" pitchFamily="34" charset="-120"/>
+              </ns1:rPr>
+              <ns1:t>: ["read", "search"]</ns1:t>
+            </ns1:r>
+            <ns1:endParaRPr lang="en-US" sz="1350" dirty="0"/>
+          </ns1:p>
+        </ns0:txBody>
+      </ns0:sp>
+      <ns0:sp>
+        <ns0:nvSpPr>
+          <ns0:cNvPr id="22" name="Text 18"/>
+          <ns0:cNvSpPr/>
+          <ns0:nvPr/>
+        </ns0:nvSpPr>
+        <ns0:spPr>
+          <ns1:xfrm>
+            <ns1:off x="669875" y="3275409"/>
+            <ns1:ext cx="3944493" cy="221010"/>
+          </ns1:xfrm>
+          <ns1:prstGeom prst="rect">
+            <ns1:avLst/>
+          </ns1:prstGeom>
+          <ns1:noFill/>
+          <ns1:ln/>
+        </ns0:spPr>
+        <ns0:txBody>
+          <ns1:bodyPr wrap="square" lIns="0" tIns="0" rIns="0" bIns="0" rtlCol="0" anchor="t"/>
+          <ns1:lstStyle/>
+          <ns1:p>
+            <ns1:pPr algn="l" indent="0" marL="0">
+              <ns1:lnSpc>
+                <ns1:spcPts val="1740"/>
+              </ns1:lnSpc>
+              <ns1:buNone/>
+            </ns1:pPr>
+            <ns1:r>
+              <ns1:rPr lang="en-US" sz="1350" dirty="0">
+                <ns1:solidFill>
+                  <ns1:srgbClr val="818B98"/>
+                </ns1:solidFill>
+                <ns1:latin typeface="Courier New" pitchFamily="34" charset="0"/>
+                <ns1:ea typeface="Courier New" pitchFamily="34" charset="-122"/>
+                <ns1:cs typeface="Courier New" pitchFamily="34" charset="-120"/>
+              </ns1:rPr>
+              <ns1:t>---</ns1:t>
+            </ns1:r>
+            <ns1:endParaRPr lang="en-US" sz="1350" dirty="0"/>
+          </ns1:p>
+        </ns0:txBody>
+      </ns0:sp>
+      <ns0:sp>
+        <ns0:nvSpPr>
+          <ns0:cNvPr id="23" name="Text 19"/>
+          <ns0:cNvSpPr/>
+          <ns0:nvPr/>
+        </ns0:nvSpPr>
+        <ns0:spPr>
+          <ns1:xfrm>
+            <ns1:off x="669875" y="3496419"/>
+            <ns1:ext cx="3944493" cy="221010"/>
+          </ns1:xfrm>
+          <ns1:prstGeom prst="rect">
+            <ns1:avLst/>
+          </ns1:prstGeom>
+          <ns1:noFill/>
+          <ns1:ln/>
+        </ns0:spPr>
+        <ns0:txBody>
+          <ns1:bodyPr wrap="square" lIns="0" tIns="0" rIns="0" bIns="0" rtlCol="0" anchor="t"/>
+          <ns1:lstStyle/>
+          <ns1:p>
+            <ns1:pPr algn="l" indent="0" marL="0">
+              <ns1:lnSpc>
+                <ns1:spcPts val="1740"/>
+              </ns1:lnSpc>
+              <ns1:buNone/>
+            </ns1:pPr>
+            <ns1:r>
+              <ns1:rPr lang="en-US" sz="1350" dirty="0">
+                <ns1:solidFill>
+                  <ns1:srgbClr val="1F2328"/>
+                </ns1:solidFill>
+                <ns1:latin typeface="Courier New" pitchFamily="34" charset="0"/>
+                <ns1:ea typeface="Courier New" pitchFamily="34" charset="-122"/>
+                <ns1:cs typeface="Courier New" pitchFamily="34" charset="-120"/>
+              </ns1:rPr>
+              <ns1:t>Read the code before answering.</ns1:t>
+            </ns1:r>
+            <ns1:endParaRPr lang="en-US" sz="1350" dirty="0"/>
+          </ns1:p>
+        </ns0:txBody>
+      </ns0:sp>
+      <ns0:sp>
+        <ns0:nvSpPr>
+          <ns0:cNvPr id="24" name="Text 20"/>
+          <ns0:cNvSpPr/>
+          <ns0:nvPr/>
+        </ns0:nvSpPr>
+        <ns0:spPr>
+          <ns1:xfrm>
+            <ns1:off x="669875" y="3717429"/>
+            <ns1:ext cx="3944493" cy="221010"/>
+          </ns1:xfrm>
+          <ns1:prstGeom prst="rect">
+            <ns1:avLst/>
+          </ns1:prstGeom>
+          <ns1:noFill/>
+          <ns1:ln/>
+        </ns0:spPr>
+        <ns0:txBody>
+          <ns1:bodyPr wrap="square" lIns="0" tIns="0" rIns="0" bIns="0" rtlCol="0" anchor="t"/>
+          <ns1:lstStyle/>
+          <ns1:p>
+            <ns1:pPr algn="l" indent="0" marL="0">
+              <ns1:lnSpc>
+                <ns1:spcPts val="1740"/>
+              </ns1:lnSpc>
+              <ns1:buNone/>
+            </ns1:pPr>
+            <ns1:r>
+              <ns1:rPr lang="en-US" sz="1350" dirty="0">
+                <ns1:solidFill>
+                  <ns1:srgbClr val="1F2328"/>
+                </ns1:solidFill>
+                <ns1:latin typeface="Courier New" pitchFamily="34" charset="0"/>
+                <ns1:ea typeface="Courier New" pitchFamily="34" charset="-122"/>
+                <ns1:cs typeface="Courier New" pitchFamily="34" charset="-120"/>
+              </ns1:rPr>
+              <ns1:t>Do not edit files or run commands.</ns1:t>
+            </ns1:r>
+            <ns1:endParaRPr lang="en-US" sz="1350" dirty="0"/>
+          </ns1:p>
+        </ns0:txBody>
+      </ns0:sp>
+      <ns0:sp>
+        <ns0:nvSpPr>
+          <ns0:cNvPr id="25" name="Text 21"/>
+          <ns0:cNvSpPr/>
+          <ns0:nvPr/>
+        </ns0:nvSpPr>
+        <ns0:spPr>
+          <ns1:xfrm>
+            <ns1:off x="669875" y="3938439"/>
+            <ns1:ext cx="3944493" cy="221010"/>
+          </ns1:xfrm>
+          <ns1:prstGeom prst="rect">
+            <ns1:avLst/>
+          </ns1:prstGeom>
+          <ns1:noFill/>
+          <ns1:ln/>
+        </ns0:spPr>
+        <ns0:txBody>
+          <ns1:bodyPr wrap="square" lIns="0" tIns="0" rIns="0" bIns="0" rtlCol="0" anchor="t"/>
+          <ns1:lstStyle/>
+          <ns1:p>
+            <ns1:pPr algn="l" indent="0" marL="0">
+              <ns1:lnSpc>
+                <ns1:spcPts val="1740"/>
+              </ns1:lnSpc>
+              <ns1:buNone/>
+            </ns1:pPr>
+            <ns1:r>
+              <ns1:rPr lang="en-US" sz="1350" dirty="0">
+                <ns1:solidFill>
+                  <ns1:srgbClr val="1F2328"/>
+                </ns1:solidFill>
+                <ns1:latin typeface="Courier New" pitchFamily="34" charset="0"/>
+                <ns1:ea typeface="Courier New" pitchFamily="34" charset="-122"/>
+                <ns1:cs typeface="Courier New" pitchFamily="34" charset="-120"/>
+              </ns1:rPr>
+              <ns1:t>Answer in four parts.</ns1:t>
+            </ns1:r>
+            <ns1:endParaRPr lang="en-US" sz="1350" dirty="0"/>
+          </ns1:p>
+        </ns0:txBody>
+      </ns0:sp>
+      <ns0:sp>
+        <ns0:nvSpPr>
+          <ns0:cNvPr id="26" name="Text 22"/>
+          <ns0:cNvSpPr/>
+          <ns0:nvPr/>
+        </ns0:nvSpPr>
+        <ns0:spPr>
+          <ns1:xfrm>
+            <ns1:off x="4952851" y="2054572"/>
+            <ns1:ext cx="381000" cy="381000"/>
+          </ns1:xfrm>
+          <ns1:prstGeom prst="roundRect">
+            <ns1:avLst>
+              <ns1:gd name="adj" fmla="val 23333"/>
+            </ns1:avLst>
+          </ns1:prstGeom>
+          <ns1:solidFill>
+            <ns1:srgbClr val="DAFBE1"/>
+          </ns1:solidFill>
+          <ns1:ln/>
+        </ns0:spPr>
+        <ns0:txBody>
+          <ns1:bodyPr wrap="square" rtlCol="0" anchor="ctr"/>
+          <ns1:lstStyle/>
+          <ns1:p>
+            <ns1:pPr indent="0" marL="0">
+              <ns1:buNone/>
+            </ns1:pPr>
+            <ns1:endParaRPr lang="en-US" dirty="0"/>
+          </ns1:p>
+        </ns0:txBody>
+      </ns0:sp>
+      <ns0:pic>
+        <ns0:nvPicPr>
+          <ns0:cNvPr id="27" name="Image 2" descr="">
+            <ns1:extLst>
+              <ns1:ext uri="{C183D7F6-B498-43B3-948B-1728B52AA6E4}">
+                <ns2:decorative val="1"/>
+              </ns1:ext>
+            </ns1:extLst>
+          </ns0:cNvPr>
+          <ns0:cNvPicPr>
+            <ns1:picLocks noChangeAspect="1"/>
+          </ns0:cNvPicPr>
+          <ns0:nvPr/>
+        </ns0:nvPicPr>
+        <ns0:blipFill>
+          <ns1:blip ns3:embed="rId4"/>
+          <ns1:stretch>
+            <ns1:fillRect/>
+          </ns1:stretch>
+        </ns0:blipFill>
+        <ns0:spPr>
+          <ns1:xfrm>
+            <ns1:off x="5035451" y="2137172"/>
+            <ns1:ext cx="215801" cy="215801"/>
+          </ns1:xfrm>
+          <ns1:prstGeom prst="rect">
+            <ns1:avLst/>
+          </ns1:prstGeom>
+        </ns0:spPr>
+      </ns0:pic>
+      <ns0:sp>
+        <ns0:nvSpPr>
+          <ns0:cNvPr id="28" name="Text 23"/>
+          <ns0:cNvSpPr/>
+          <ns0:nvPr/>
+        </ns0:nvSpPr>
+        <ns0:spPr>
+          <ns1:xfrm>
+            <ns1:off x="5486251" y="2014389"/>
+            <ns1:ext cx="2275400" cy="238125"/>
+          </ns1:xfrm>
+          <ns1:prstGeom prst="rect">
+            <ns1:avLst/>
+          </ns1:prstGeom>
+          <ns1:noFill/>
+          <ns1:ln/>
+        </ns0:spPr>
+        <ns0:txBody>
+          <ns1:bodyPr wrap="square" lIns="0" tIns="0" rIns="0" bIns="0" rtlCol="0" anchor="t"/>
+          <ns1:lstStyle/>
+          <ns1:p>
+            <ns1:pPr algn="l" indent="0" marL="0">
+              <ns1:buNone/>
+            </ns1:pPr>
+            <ns1:r>
+              <ns1:rPr lang="en-US" sz="1550" b="1" dirty="0">
+                <ns1:solidFill>
+                  <ns1:srgbClr val="0550AE"/>
+                </ns1:solidFill>
+                <ns1:latin typeface="Courier New" pitchFamily="34" charset="0"/>
+                <ns1:ea typeface="Courier New" pitchFamily="34" charset="-122"/>
+                <ns1:cs typeface="Courier New" pitchFamily="34" charset="-120"/>
+              </ns1:rPr>
+              <ns1:t>name</ns1:t>
+            </ns1:r>
+            <ns1:pPr algn="l" indent="0" marL="0">
+              <ns1:buNone/>
+            </ns1:pPr>
+            <ns1:r>
+              <ns1:rPr lang="en-US" sz="1550" dirty="0">
+                <ns1:solidFill>
+                  <ns1:srgbClr val="1F2328"/>
+                </ns1:solidFill>
+                <ns1:latin typeface="Arial" pitchFamily="34" charset="0"/>
+                <ns1:ea typeface="Arial" pitchFamily="34" charset="-122"/>
+                <ns1:cs typeface="Arial" pitchFamily="34" charset="-120"/>
+              </ns1:rPr>
+              <ns1:t> and </ns1:t>
+            </ns1:r>
+            <ns1:pPr algn="l" indent="0" marL="0">
+              <ns1:buNone/>
+            </ns1:pPr>
+            <ns1:r>
+              <ns1:rPr lang="en-US" sz="1550" b="1" dirty="0">
+                <ns1:solidFill>
+                  <ns1:srgbClr val="0550AE"/>
+                </ns1:solidFill>
+                <ns1:latin typeface="Courier New" pitchFamily="34" charset="0"/>
+                <ns1:ea typeface="Courier New" pitchFamily="34" charset="-122"/>
+                <ns1:cs typeface="Courier New" pitchFamily="34" charset="-120"/>
+              </ns1:rPr>
+              <ns1:t>description</ns1:t>
+            </ns1:r>
+            <ns1:endParaRPr lang="en-US" sz="1550" dirty="0"/>
+          </ns1:p>
+        </ns0:txBody>
+      </ns0:sp>
+      <ns0:sp>
+        <ns0:nvSpPr>
+          <ns0:cNvPr id="29" name="Text 24"/>
+          <ns0:cNvSpPr/>
+          <ns0:nvPr/>
+        </ns0:nvSpPr>
+        <ns0:spPr>
+          <ns1:xfrm>
+            <ns1:off x="5486251" y="2277814"/>
+            <ns1:ext cx="2275400" cy="198090"/>
+          </ns1:xfrm>
+          <ns1:prstGeom prst="rect">
+            <ns1:avLst/>
+          </ns1:prstGeom>
+          <ns1:noFill/>
+          <ns1:ln/>
+        </ns0:spPr>
+        <ns0:txBody>
+          <ns1:bodyPr wrap="square" lIns="0" tIns="0" rIns="0" bIns="0" rtlCol="0" anchor="t"/>
+          <ns1:lstStyle/>
+          <ns1:p>
+            <ns1:pPr algn="l" indent="0" marL="0">
+              <ns1:lnSpc>
+                <ns1:spcPts val="1560"/>
+              </ns1:lnSpc>
+              <ns1:buNone/>
+            </ns1:pPr>
+            <ns1:r>
+              <ns1:rPr lang="en-US" sz="1350" dirty="0">
+                <ns1:solidFill>
+                  <ns1:srgbClr val="59636E"/>
+                </ns1:solidFill>
+                <ns1:latin typeface="Arial" pitchFamily="34" charset="0"/>
+                <ns1:ea typeface="Arial" pitchFamily="34" charset="-122"/>
+                <ns1:cs typeface="Arial" pitchFamily="34" charset="-120"/>
+              </ns1:rPr>
+              <ns1:t>Shown in the agent picker.</ns1:t>
+            </ns1:r>
+            <ns1:endParaRPr lang="en-US" sz="1350" dirty="0"/>
+          </ns1:p>
+        </ns0:txBody>
+      </ns0:sp>
+      <ns0:sp>
+        <ns0:nvSpPr>
+          <ns0:cNvPr id="30" name="Text 25"/>
+          <ns0:cNvSpPr/>
+          <ns0:nvPr/>
+        </ns0:nvSpPr>
+        <ns0:spPr>
+          <ns1:xfrm>
+            <ns1:off x="4952851" y="2749451"/>
+            <ns1:ext cx="381000" cy="381000"/>
+          </ns1:xfrm>
+          <ns1:prstGeom prst="roundRect">
+            <ns1:avLst>
+              <ns1:gd name="adj" fmla="val 23333"/>
+            </ns1:avLst>
+          </ns1:prstGeom>
+          <ns1:solidFill>
+            <ns1:srgbClr val="DAFBE1"/>
+          </ns1:solidFill>
+          <ns1:ln/>
+        </ns0:spPr>
+        <ns0:txBody>
+          <ns1:bodyPr wrap="square" rtlCol="0" anchor="ctr"/>
+          <ns1:lstStyle/>
+          <ns1:p>
+            <ns1:pPr indent="0" marL="0">
+              <ns1:buNone/>
+            </ns1:pPr>
+            <ns1:endParaRPr lang="en-US" dirty="0"/>
+          </ns1:p>
+        </ns0:txBody>
+      </ns0:sp>
+      <ns0:pic>
+        <ns0:nvPicPr>
+          <ns0:cNvPr id="31" name="Image 3" descr="">
+            <ns1:extLst>
+              <ns1:ext uri="{C183D7F6-B498-43B3-948B-1728B52AA6E4}">
+                <ns2:decorative val="1"/>
+              </ns1:ext>
+            </ns1:extLst>
+          </ns0:cNvPr>
+          <ns0:cNvPicPr>
+            <ns1:picLocks noChangeAspect="1"/>
+          </ns0:cNvPicPr>
+          <ns0:nvPr/>
+        </ns0:nvPicPr>
+        <ns0:blipFill>
+          <ns1:blip ns3:embed="rId5"/>
+          <ns1:stretch>
+            <ns1:fillRect/>
+          </ns1:stretch>
+        </ns0:blipFill>
+        <ns0:spPr>
+          <ns1:xfrm>
+            <ns1:off x="5035451" y="2832050"/>
+            <ns1:ext cx="215801" cy="215801"/>
+          </ns1:xfrm>
+          <ns1:prstGeom prst="rect">
+            <ns1:avLst/>
+          </ns1:prstGeom>
+        </ns0:spPr>
+      </ns0:pic>
+      <ns0:sp>
+        <ns0:nvSpPr>
+          <ns0:cNvPr id="32" name="Text 26"/>
+          <ns0:cNvSpPr/>
+          <ns0:nvPr/>
+        </ns0:nvSpPr>
+        <ns0:spPr>
+          <ns1:xfrm>
+            <ns1:off x="5486251" y="2704505"/>
+            <ns1:ext cx="2582501" cy="238125"/>
+          </ns1:xfrm>
+          <ns1:prstGeom prst="rect">
+            <ns1:avLst/>
+          </ns1:prstGeom>
+          <ns1:noFill/>
+          <ns1:ln/>
+        </ns0:spPr>
+        <ns0:txBody>
+          <ns1:bodyPr wrap="square" lIns="0" tIns="0" rIns="0" bIns="0" rtlCol="0" anchor="t"/>
+          <ns1:lstStyle/>
+          <ns1:p>
+            <ns1:pPr algn="l" indent="0" marL="0">
+              <ns1:buNone/>
+            </ns1:pPr>
+            <ns1:r>
+              <ns1:rPr lang="en-US" sz="1550" b="1" dirty="0">
+                <ns1:solidFill>
+                  <ns1:srgbClr val="0550AE"/>
+                </ns1:solidFill>
+                <ns1:latin typeface="Courier New" pitchFamily="34" charset="0"/>
+                <ns1:ea typeface="Courier New" pitchFamily="34" charset="-122"/>
+                <ns1:cs typeface="Courier New" pitchFamily="34" charset="-120"/>
+              </ns1:rPr>
+              <ns1:t>tools</ns1:t>
+            </ns1:r>
+            <ns1:endParaRPr lang="en-US" sz="1550" dirty="0"/>
+          </ns1:p>
+        </ns0:txBody>
+      </ns0:sp>
+      <ns0:sp>
+        <ns0:nvSpPr>
+          <ns0:cNvPr id="33" name="Text 27"/>
+          <ns0:cNvSpPr/>
+          <ns0:nvPr/>
+        </ns0:nvSpPr>
+        <ns0:spPr>
+          <ns1:xfrm>
+            <ns1:off x="5486251" y="2967930"/>
+            <ns1:ext cx="2582501" cy="207615"/>
+          </ns1:xfrm>
+          <ns1:prstGeom prst="rect">
+            <ns1:avLst/>
+          </ns1:prstGeom>
+          <ns1:noFill/>
+          <ns1:ln/>
+        </ns0:spPr>
+        <ns0:txBody>
+          <ns1:bodyPr wrap="square" lIns="0" tIns="0" rIns="0" bIns="0" rtlCol="0" anchor="t"/>
+          <ns1:lstStyle/>
+          <ns1:p>
+            <ns1:pPr algn="l" indent="0" marL="0">
+              <ns1:lnSpc>
+                <ns1:spcPts val="1560"/>
+              </ns1:lnSpc>
+              <ns1:buNone/>
+            </ns1:pPr>
+            <ns1:r>
+              <ns1:rPr lang="en-US" sz="1350" b="1" dirty="0">
+                <ns1:solidFill>
+                  <ns1:srgbClr val="0550AE"/>
+                </ns1:solidFill>
+                <ns1:latin typeface="Courier New" pitchFamily="34" charset="0"/>
+                <ns1:ea typeface="Courier New" pitchFamily="34" charset="-122"/>
+                <ns1:cs typeface="Courier New" pitchFamily="34" charset="-120"/>
+              </ns1:rPr>
+              <ns1:t>read</ns1:t>
+            </ns1:r>
+            <ns1:pPr algn="l" indent="0" marL="0">
+              <ns1:lnSpc>
+                <ns1:spcPts val="1560"/>
+              </ns1:lnSpc>
+              <ns1:buNone/>
+            </ns1:pPr>
+            <ns1:r>
+              <ns1:rPr lang="en-US" sz="1350" dirty="0">
+                <ns1:solidFill>
+                  <ns1:srgbClr val="59636E"/>
+                </ns1:solidFill>
+                <ns1:latin typeface="Arial" pitchFamily="34" charset="0"/>
+                <ns1:ea typeface="Arial" pitchFamily="34" charset="-122"/>
+                <ns1:cs typeface="Arial" pitchFamily="34" charset="-120"/>
+              </ns1:rPr>
+              <ns1:t> and </ns1:t>
+            </ns1:r>
+            <ns1:pPr algn="l" indent="0" marL="0">
+              <ns1:lnSpc>
+                <ns1:spcPts val="1560"/>
+              </ns1:lnSpc>
+              <ns1:buNone/>
+            </ns1:pPr>
+            <ns1:r>
+              <ns1:rPr lang="en-US" sz="1350" b="1" dirty="0">
+                <ns1:solidFill>
+                  <ns1:srgbClr val="0550AE"/>
+                </ns1:solidFill>
+                <ns1:latin typeface="Courier New" pitchFamily="34" charset="0"/>
+                <ns1:ea typeface="Courier New" pitchFamily="34" charset="-122"/>
+                <ns1:cs typeface="Courier New" pitchFamily="34" charset="-120"/>
+              </ns1:rPr>
+              <ns1:t>search</ns1:t>
+            </ns1:r>
+            <ns1:pPr algn="l" indent="0" marL="0">
+              <ns1:lnSpc>
+                <ns1:spcPts val="1560"/>
+              </ns1:lnSpc>
+              <ns1:buNone/>
+            </ns1:pPr>
+            <ns1:r>
+              <ns1:rPr lang="en-US" sz="1350" dirty="0">
+                <ns1:solidFill>
+                  <ns1:srgbClr val="59636E"/>
+                </ns1:solidFill>
+                <ns1:latin typeface="Arial" pitchFamily="34" charset="0"/>
+                <ns1:ea typeface="Arial" pitchFamily="34" charset="-122"/>
+                <ns1:cs typeface="Arial" pitchFamily="34" charset="-120"/>
+              </ns1:rPr>
+              <ns1:t> only. No edits.</ns1:t>
+            </ns1:r>
+            <ns1:endParaRPr lang="en-US" sz="1350" dirty="0"/>
+          </ns1:p>
+        </ns0:txBody>
+      </ns0:sp>
+      <ns0:sp>
+        <ns0:nvSpPr>
+          <ns0:cNvPr id="34" name="Text 28"/>
+          <ns0:cNvSpPr/>
+          <ns0:nvPr/>
+        </ns0:nvSpPr>
+        <ns0:spPr>
+          <ns1:xfrm>
+            <ns1:off x="4952851" y="3439567"/>
+            <ns1:ext cx="381000" cy="381000"/>
+          </ns1:xfrm>
+          <ns1:prstGeom prst="roundRect">
+            <ns1:avLst>
+              <ns1:gd name="adj" fmla="val 23333"/>
+            </ns1:avLst>
+          </ns1:prstGeom>
+          <ns1:solidFill>
+            <ns1:srgbClr val="DAFBE1"/>
+          </ns1:solidFill>
+          <ns1:ln/>
+        </ns0:spPr>
+        <ns0:txBody>
+          <ns1:bodyPr wrap="square" rtlCol="0" anchor="ctr"/>
+          <ns1:lstStyle/>
+          <ns1:p>
+            <ns1:pPr indent="0" marL="0">
+              <ns1:buNone/>
+            </ns1:pPr>
+            <ns1:endParaRPr lang="en-US" dirty="0"/>
+          </ns1:p>
+        </ns0:txBody>
+      </ns0:sp>
+      <ns0:pic>
+        <ns0:nvPicPr>
+          <ns0:cNvPr id="35" name="Image 4" descr="">
+            <ns1:extLst>
+              <ns1:ext uri="{C183D7F6-B498-43B3-948B-1728B52AA6E4}">
+                <ns2:decorative val="1"/>
+              </ns1:ext>
+            </ns1:extLst>
+          </ns0:cNvPr>
+          <ns0:cNvPicPr>
+            <ns1:picLocks noChangeAspect="1"/>
+          </ns0:cNvPicPr>
+          <ns0:nvPr/>
+        </ns0:nvPicPr>
+        <ns0:blipFill>
+          <ns1:blip ns3:embed="rId6"/>
+          <ns1:stretch>
+            <ns1:fillRect/>
+          </ns1:stretch>
+        </ns0:blipFill>
+        <ns0:spPr>
+          <ns1:xfrm>
+            <ns1:off x="5035451" y="3522166"/>
+            <ns1:ext cx="215801" cy="215801"/>
+          </ns1:xfrm>
+          <ns1:prstGeom prst="rect">
+            <ns1:avLst/>
+          </ns1:prstGeom>
+        </ns0:spPr>
+      </ns0:pic>
+      <ns0:sp>
+        <ns0:nvSpPr>
+          <ns0:cNvPr id="36" name="Text 29"/>
+          <ns0:cNvSpPr/>
+          <ns0:nvPr/>
+        </ns0:nvSpPr>
+        <ns0:spPr>
+          <ns1:xfrm>
+            <ns1:off x="5486251" y="3404146"/>
+            <ns1:ext cx="2235779" cy="228600"/>
+          </ns1:xfrm>
+          <ns1:prstGeom prst="rect">
+            <ns1:avLst/>
+          </ns1:prstGeom>
+          <ns1:noFill/>
+          <ns1:ln/>
+        </ns0:spPr>
+        <ns0:txBody>
+          <ns1:bodyPr wrap="square" lIns="0" tIns="0" rIns="0" bIns="0" rtlCol="0" anchor="t"/>
+          <ns1:lstStyle/>
+          <ns1:p>
+            <ns1:pPr algn="l" indent="0" marL="0">
+              <ns1:buNone/>
+            </ns1:pPr>
+            <ns1:r>
+              <ns1:rPr lang="en-US" sz="1550" b="1" dirty="0">
+                <ns1:solidFill>
+                  <ns1:srgbClr val="1F2328"/>
+                </ns1:solidFill>
+                <ns1:latin typeface="Arial" pitchFamily="34" charset="0"/>
+                <ns1:ea typeface="Arial" pitchFamily="34" charset="-122"/>
+                <ns1:cs typeface="Arial" pitchFamily="34" charset="-120"/>
+              </ns1:rPr>
+              <ns1:t>Body</ns1:t>
+            </ns1:r>
+            <ns1:endParaRPr lang="en-US" sz="1550" dirty="0"/>
+          </ns1:p>
+        </ns0:txBody>
+      </ns0:sp>
+      <ns0:sp>
+        <ns0:nvSpPr>
+          <ns0:cNvPr id="37" name="Text 30"/>
+          <ns0:cNvSpPr/>
+          <ns0:nvPr/>
+        </ns0:nvSpPr>
+        <ns0:spPr>
+          <ns1:xfrm>
+            <ns1:off x="5486251" y="3658046"/>
+            <ns1:ext cx="2235779" cy="198090"/>
+          </ns1:xfrm>
+          <ns1:prstGeom prst="rect">
+            <ns1:avLst/>
+          </ns1:prstGeom>
+          <ns1:noFill/>
+          <ns1:ln/>
+        </ns0:spPr>
+        <ns0:txBody>
+          <ns1:bodyPr wrap="square" lIns="0" tIns="0" rIns="0" bIns="0" rtlCol="0" anchor="t"/>
+          <ns1:lstStyle/>
+          <ns1:p>
+            <ns1:pPr algn="l" indent="0" marL="0">
+              <ns1:lnSpc>
+                <ns1:spcPts val="1560"/>
+              </ns1:lnSpc>
+              <ns1:buNone/>
+            </ns1:pPr>
+            <ns1:r>
+              <ns1:rPr lang="en-US" sz="1350" dirty="0">
+                <ns1:solidFill>
+                  <ns1:srgbClr val="59636E"/>
+                </ns1:solidFill>
+                <ns1:latin typeface="Arial" pitchFamily="34" charset="0"/>
+                <ns1:ea typeface="Arial" pitchFamily="34" charset="-122"/>
+                <ns1:cs typeface="Arial" pitchFamily="34" charset="-120"/>
+              </ns1:rPr>
+              <ns1:t>Behavior and answer format.</ns1:t>
+            </ns1:r>
+            <ns1:endParaRPr lang="en-US" sz="1350" dirty="0"/>
+          </ns1:p>
+        </ns0:txBody>
+      </ns0:sp>
+    </ns0:spTree>
+  </ns0:cSld>
+  <ns0:clrMapOvr>
+    <ns1:masterClrMapping/>
+  </ns0:clrMapOvr>
+</ns0:sld>
 </file>
 
 <file path=ppt/slides/slide13.xml><?xml version="1.0" encoding="utf-8"?>
@@ -5567,7 +5567,7 @@
       </p:sp>
       <p:pic>
         <p:nvPicPr>
-          <p:cNvPr id="10" name="Image 2" descr="The /agent suggestions with book-app-explainer highlighted and its read-only description visible">    </p:cNvPr>
+          <p:cNvPr id="10" name="Image 2" descr="The /agent suggestions with book-app-explainer highlighted and its read-only description visible"/>
           <p:cNvPicPr>
             <a:picLocks noChangeAspect="1"/>
           </p:cNvPicPr>
@@ -11999,7 +11999,7 @@
       </p:sp>
       <p:pic>
         <p:nvPicPr>
-          <p:cNvPr id="10" name="Image 2" descr="Song chart analogy for skills in the Copilot app">    </p:cNvPr>
+          <p:cNvPr id="10" name="Image 2" descr="Song chart analogy for skills in the Copilot app"/>
           <p:cNvPicPr>
             <a:picLocks noChangeAspect="1"/>
           </p:cNvPicPr>
@@ -12738,7 +12738,7 @@
       </p:sp>
       <p:pic>
         <p:nvPicPr>
-          <p:cNvPr id="9" name="Image 2" descr="One-off prompt versus skill: a skill is a reusable checklist that lives in the repo and gives the same guidance each time">    </p:cNvPr>
+          <p:cNvPr id="9" name="Image 2" descr="One-off prompt versus skill: a skill is a reusable checklist that lives in the repo and gives the same guidance each time"/>
           <p:cNvPicPr>
             <a:picLocks noChangeAspect="1"/>
           </p:cNvPicPr>
@@ -13198,2701 +13198,2701 @@
 </file>
 
 <file path=ppt/slides/slide7.xml><?xml version="1.0" encoding="utf-8"?>
-<p:sld xmlns:a="http://schemas.openxmlformats.org/drawingml/2006/main" xmlns:r="http://schemas.openxmlformats.org/officeDocument/2006/relationships" xmlns:p="http://schemas.openxmlformats.org/presentationml/2006/main">
-  <p:cSld name="Slide 7">
-    <p:bg>
-      <p:bgPr>
-        <a:solidFill>
-          <a:srgbClr val="FFFFFF"/>
-        </a:solidFill>
-      </p:bgPr>
-    </p:bg>
-    <p:spTree>
-      <p:nvGrpSpPr>
-        <p:cNvPr id="1" name=""/>
-        <p:cNvGrpSpPr/>
-        <p:nvPr/>
-      </p:nvGrpSpPr>
-      <p:grpSpPr>
-        <a:xfrm>
-          <a:off x="0" y="0"/>
-          <a:ext cx="0" cy="0"/>
-          <a:chOff x="0" y="0"/>
-          <a:chExt cx="0" cy="0"/>
-        </a:xfrm>
-      </p:grpSpPr>
-      <p:pic>
-        <p:nvPicPr>
-          <p:cNvPr id="2" name="Image 0" descr="">
-            <a:extLst>
-              <a:ext uri="{C183D7F6-B498-43B3-948B-1728B52AA6E4}">
-                <adec:decorative xmlns:adec="http://schemas.microsoft.com/office/drawing/2017/decorative" val="1"/>
-              </a:ext>
-            </a:extLst>
-          </p:cNvPr>
-          <p:cNvPicPr>
-            <a:picLocks noChangeAspect="1"/>
-          </p:cNvPicPr>
-          <p:nvPr/>
-        </p:nvPicPr>
-        <p:blipFill>
-          <a:blip r:embed="rId1"/>
-          <a:stretch>
-            <a:fillRect/>
-          </a:stretch>
-        </p:blipFill>
-        <p:spPr>
-          <a:xfrm>
-            <a:off x="6349901" y="0"/>
-            <a:ext cx="2793950" cy="1308050"/>
-          </a:xfrm>
-          <a:prstGeom prst="rect">
-            <a:avLst/>
-          </a:prstGeom>
-        </p:spPr>
-      </p:pic>
-      <p:sp>
-        <p:nvSpPr>
-          <p:cNvPr id="3" name="Text 0"/>
-          <p:cNvSpPr/>
-          <p:nvPr/>
-        </p:nvSpPr>
-        <p:spPr>
-          <a:xfrm>
-            <a:off x="7340501" y="177701"/>
-            <a:ext cx="1168301" cy="279350"/>
-          </a:xfrm>
-          <a:prstGeom prst="roundRect">
-            <a:avLst>
-              <a:gd name="adj" fmla="val 22731"/>
-            </a:avLst>
-          </a:prstGeom>
-          <a:solidFill>
-            <a:srgbClr val="1A7F37"/>
-          </a:solidFill>
-          <a:ln/>
-        </p:spPr>
-        <p:txBody>
-          <a:bodyPr wrap="square" rtlCol="0" anchor="ctr"/>
-          <a:lstStyle/>
-          <a:p>
-            <a:pPr indent="0" marL="0">
-              <a:buNone/>
-            </a:pPr>
-            <a:endParaRPr lang="en-US" dirty="0"/>
-          </a:p>
-        </p:txBody>
-      </p:sp>
-      <p:sp>
-        <p:nvSpPr>
-          <p:cNvPr id="4" name="Text 1"/>
-          <p:cNvSpPr/>
-          <p:nvPr/>
-        </p:nvSpPr>
-        <p:spPr>
-          <a:xfrm>
-            <a:off x="7461041" y="231577"/>
-            <a:ext cx="927071" cy="171450"/>
-          </a:xfrm>
-          <a:prstGeom prst="rect">
-            <a:avLst/>
-          </a:prstGeom>
-          <a:noFill/>
-          <a:ln/>
-        </p:spPr>
-        <p:txBody>
-          <a:bodyPr wrap="square" lIns="0" tIns="0" rIns="0" bIns="0" rtlCol="0" anchor="t"/>
-          <a:lstStyle/>
-          <a:p>
-            <a:pPr algn="ctr" indent="0" marL="0">
-              <a:buNone/>
-            </a:pPr>
-            <a:r>
-              <a:rPr lang="en-US" sz="1150" b="1" dirty="0">
-                <a:solidFill>
-                  <a:srgbClr val="FFFFFF"/>
-                </a:solidFill>
-                <a:latin typeface="Arial" pitchFamily="34" charset="0"/>
-                <a:ea typeface="Arial" pitchFamily="34" charset="-122"/>
-                <a:cs typeface="Arial" pitchFamily="34" charset="-120"/>
-              </a:rPr>
-              <a:t>CHAPTER 04</a:t>
-            </a:r>
-            <a:endParaRPr lang="en-US" sz="1150" dirty="0"/>
-          </a:p>
-        </p:txBody>
-      </p:sp>
-      <p:pic>
-        <p:nvPicPr>
-          <p:cNvPr id="5" name="Image 1" descr="Open this chapter on GitHub">
-            <a:hlinkClick r:id="rId3" tooltip="https://github.com/github/copilot-app-for-beginners/tree/main/04-skills-custom-agents"/>
-          </p:cNvPr>
-          <p:cNvPicPr>
-            <a:picLocks noChangeAspect="1"/>
-          </p:cNvPicPr>
-          <p:nvPr/>
-        </p:nvPicPr>
-        <p:blipFill>
-          <a:blip r:embed="rId2"/>
-          <a:stretch>
-            <a:fillRect/>
-          </a:stretch>
-        </p:blipFill>
-        <p:spPr>
-          <a:xfrm>
-            <a:off x="8610600" y="165050"/>
-            <a:ext cx="304800" cy="304800"/>
-          </a:xfrm>
-          <a:prstGeom prst="rect">
-            <a:avLst/>
-          </a:prstGeom>
-        </p:spPr>
-      </p:pic>
-      <p:sp>
-        <p:nvSpPr>
-          <p:cNvPr id="6" name="Text 2"/>
-          <p:cNvSpPr/>
-          <p:nvPr/>
-        </p:nvSpPr>
-        <p:spPr>
-          <a:xfrm>
-            <a:off x="507950" y="381000"/>
-            <a:ext cx="8161020" cy="190500"/>
-          </a:xfrm>
-          <a:prstGeom prst="rect">
-            <a:avLst/>
-          </a:prstGeom>
-          <a:noFill/>
-          <a:ln/>
-        </p:spPr>
-        <p:txBody>
-          <a:bodyPr wrap="square" lIns="0" tIns="0" rIns="0" bIns="0" rtlCol="0" anchor="t"/>
-          <a:lstStyle/>
-          <a:p>
-            <a:pPr algn="l" indent="0" marL="0">
-              <a:buNone/>
-            </a:pPr>
-            <a:r>
-              <a:rPr lang="en-US" sz="1250" b="1" dirty="0">
-                <a:solidFill>
-                  <a:srgbClr val="0969DA"/>
-                </a:solidFill>
-                <a:latin typeface="Arial" pitchFamily="34" charset="0"/>
-                <a:ea typeface="Arial" pitchFamily="34" charset="-122"/>
-                <a:cs typeface="Arial" pitchFamily="34" charset="-120"/>
-              </a:rPr>
-              <a:t>ANATOMY OF A SKILL</a:t>
-            </a:r>
-            <a:endParaRPr lang="en-US" sz="1250" dirty="0"/>
-          </a:p>
-        </p:txBody>
-      </p:sp>
-      <p:sp>
-        <p:nvSpPr>
-          <p:cNvPr id="7" name="Text 3"/>
-          <p:cNvSpPr/>
-          <p:nvPr/>
-        </p:nvSpPr>
-        <p:spPr>
-          <a:xfrm>
-            <a:off x="507950" y="622250"/>
-            <a:ext cx="8161020" cy="419100"/>
-          </a:xfrm>
-          <a:prstGeom prst="rect">
-            <a:avLst/>
-          </a:prstGeom>
-          <a:noFill/>
-          <a:ln/>
-        </p:spPr>
-        <p:txBody>
-          <a:bodyPr wrap="square" lIns="0" tIns="0" rIns="0" bIns="0" rtlCol="0" anchor="t"/>
-          <a:lstStyle/>
-          <a:p>
-            <a:pPr algn="l" indent="0" marL="0">
-              <a:lnSpc>
-                <a:spcPts val="3300"/>
-              </a:lnSpc>
-              <a:spcBef>
-                <a:spcPts val="400"/>
-              </a:spcBef>
-              <a:buNone/>
-            </a:pPr>
-            <a:r>
-              <a:rPr lang="en-US" sz="2800" b="1" dirty="0">
-                <a:solidFill>
-                  <a:srgbClr val="1F2328"/>
-                </a:solidFill>
-                <a:latin typeface="Arial" pitchFamily="34" charset="0"/>
-                <a:ea typeface="Arial" pitchFamily="34" charset="-122"/>
-                <a:cs typeface="Arial" pitchFamily="34" charset="-120"/>
-              </a:rPr>
-              <a:t>A folder with a SKILL.md file</a:t>
-            </a:r>
-            <a:endParaRPr lang="en-US" sz="2800" dirty="0"/>
-          </a:p>
-        </p:txBody>
-      </p:sp>
-      <p:sp>
-        <p:nvSpPr>
-          <p:cNvPr id="8" name="Text 4"/>
-          <p:cNvSpPr/>
-          <p:nvPr/>
-        </p:nvSpPr>
-        <p:spPr>
-          <a:xfrm>
-            <a:off x="507950" y="1104751"/>
-            <a:ext cx="8161020" cy="273100"/>
-          </a:xfrm>
-          <a:prstGeom prst="rect">
-            <a:avLst/>
-          </a:prstGeom>
-          <a:noFill/>
-          <a:ln/>
-        </p:spPr>
-        <p:txBody>
-          <a:bodyPr wrap="square" lIns="0" tIns="0" rIns="0" bIns="0" rtlCol="0" anchor="t"/>
-          <a:lstStyle/>
-          <a:p>
-            <a:pPr algn="l" indent="0" marL="0">
-              <a:lnSpc>
-                <a:spcPts val="2000"/>
-              </a:lnSpc>
-              <a:spcBef>
-                <a:spcPts val="500"/>
-              </a:spcBef>
-              <a:buNone/>
-            </a:pPr>
-            <a:r>
-              <a:rPr lang="en-US" sz="1650" dirty="0">
-                <a:solidFill>
-                  <a:srgbClr val="59636E"/>
-                </a:solidFill>
-                <a:latin typeface="Arial" pitchFamily="34" charset="0"/>
-                <a:ea typeface="Arial" pitchFamily="34" charset="-122"/>
-                <a:cs typeface="Arial" pitchFamily="34" charset="-120"/>
-              </a:rPr>
-              <a:t>The course includes </a:t>
-            </a:r>
-            <a:pPr algn="l" indent="0" marL="0">
-              <a:lnSpc>
-                <a:spcPts val="2000"/>
-              </a:lnSpc>
-              <a:spcBef>
-                <a:spcPts val="500"/>
-              </a:spcBef>
-              <a:buNone/>
-            </a:pPr>
-            <a:r>
-              <a:rPr lang="en-US" sz="1650" b="1" dirty="0">
-                <a:solidFill>
-                  <a:srgbClr val="0550AE"/>
-                </a:solidFill>
-                <a:latin typeface="Courier New" pitchFamily="34" charset="0"/>
-                <a:ea typeface="Courier New" pitchFamily="34" charset="-122"/>
-                <a:cs typeface="Courier New" pitchFamily="34" charset="-120"/>
-              </a:rPr>
-              <a:t>.github/skills/book-app-reviewer/</a:t>
-            </a:r>
-            <a:pPr algn="l" indent="0" marL="0">
-              <a:lnSpc>
-                <a:spcPts val="2000"/>
-              </a:lnSpc>
-              <a:spcBef>
-                <a:spcPts val="500"/>
-              </a:spcBef>
-              <a:buNone/>
-            </a:pPr>
-            <a:r>
-              <a:rPr lang="en-US" sz="1650" dirty="0">
-                <a:solidFill>
-                  <a:srgbClr val="59636E"/>
-                </a:solidFill>
-                <a:latin typeface="Arial" pitchFamily="34" charset="0"/>
-                <a:ea typeface="Arial" pitchFamily="34" charset="-122"/>
-                <a:cs typeface="Arial" pitchFamily="34" charset="-120"/>
-              </a:rPr>
-              <a:t>.</a:t>
-            </a:r>
-            <a:endParaRPr lang="en-US" sz="1650" dirty="0"/>
-          </a:p>
-        </p:txBody>
-      </p:sp>
-      <p:sp>
-        <p:nvSpPr>
-          <p:cNvPr id="9" name="Text 5"/>
-          <p:cNvSpPr/>
-          <p:nvPr/>
-        </p:nvSpPr>
-        <p:spPr>
-          <a:xfrm>
-            <a:off x="507950" y="1574750"/>
-            <a:ext cx="3810000" cy="2942183"/>
-          </a:xfrm>
-          <a:prstGeom prst="roundRect">
-            <a:avLst>
-              <a:gd name="adj" fmla="val 3453"/>
-            </a:avLst>
-          </a:prstGeom>
-          <a:solidFill>
-            <a:srgbClr val="F6F8FA"/>
-          </a:solidFill>
-          <a:ln w="9525">
-            <a:solidFill>
-              <a:srgbClr val="D1D9E0"/>
-            </a:solidFill>
-          </a:ln>
-        </p:spPr>
-        <p:txBody>
-          <a:bodyPr wrap="square" rtlCol="0" anchor="ctr"/>
-          <a:lstStyle/>
-          <a:p>
-            <a:pPr indent="0" marL="0">
-              <a:buNone/>
-            </a:pPr>
-            <a:endParaRPr lang="en-US" dirty="0"/>
-          </a:p>
-        </p:txBody>
-      </p:sp>
-      <p:sp>
-        <p:nvSpPr>
-          <p:cNvPr id="10" name="Text 6"/>
-          <p:cNvSpPr/>
-          <p:nvPr/>
-        </p:nvSpPr>
-        <p:spPr>
-          <a:xfrm>
-            <a:off x="517475" y="1584275"/>
-            <a:ext cx="3790950" cy="238125"/>
-          </a:xfrm>
-          <a:prstGeom prst="rect">
-            <a:avLst/>
-          </a:prstGeom>
-          <a:solidFill>
-            <a:srgbClr val="EFF2F5"/>
-          </a:solidFill>
-          <a:ln/>
-        </p:spPr>
-        <p:txBody>
-          <a:bodyPr wrap="square" rtlCol="0" anchor="ctr"/>
-          <a:lstStyle/>
-          <a:p>
-            <a:pPr indent="0" marL="0">
-              <a:buNone/>
-            </a:pPr>
-            <a:endParaRPr lang="en-US" dirty="0"/>
-          </a:p>
-        </p:txBody>
-      </p:sp>
-      <p:sp>
-        <p:nvSpPr>
-          <p:cNvPr id="11" name="Shape 7"/>
-          <p:cNvSpPr/>
-          <p:nvPr/>
-        </p:nvSpPr>
-        <p:spPr>
-          <a:xfrm>
-            <a:off x="517475" y="1817638"/>
-            <a:ext cx="3790950" cy="0"/>
-          </a:xfrm>
-          <a:prstGeom prst="line">
-            <a:avLst/>
-          </a:prstGeom>
-          <a:noFill/>
-          <a:ln w="9525">
-            <a:solidFill>
-              <a:srgbClr val="D1D9E0"/>
-            </a:solidFill>
-            <a:prstDash val="solid"/>
-          </a:ln>
-        </p:spPr>
-      </p:sp>
-      <p:sp>
-        <p:nvSpPr>
-          <p:cNvPr id="12" name="Text 8"/>
-          <p:cNvSpPr/>
-          <p:nvPr/>
-        </p:nvSpPr>
-        <p:spPr>
-          <a:xfrm>
-            <a:off x="631775" y="1654076"/>
-            <a:ext cx="88850" cy="88850"/>
-          </a:xfrm>
-          <a:prstGeom prst="roundRect">
-            <a:avLst>
-              <a:gd name="adj" fmla="val 1029150"/>
-            </a:avLst>
-          </a:prstGeom>
-          <a:solidFill>
-            <a:srgbClr val="FF5F57"/>
-          </a:solidFill>
-          <a:ln/>
-        </p:spPr>
-        <p:txBody>
-          <a:bodyPr wrap="square" rtlCol="0" anchor="ctr"/>
-          <a:lstStyle/>
-          <a:p>
-            <a:pPr indent="0" marL="0">
-              <a:buNone/>
-            </a:pPr>
-            <a:endParaRPr lang="en-US" dirty="0"/>
-          </a:p>
-        </p:txBody>
-      </p:sp>
-      <p:sp>
-        <p:nvSpPr>
-          <p:cNvPr id="13" name="Text 9"/>
-          <p:cNvSpPr/>
-          <p:nvPr/>
-        </p:nvSpPr>
-        <p:spPr>
-          <a:xfrm>
-            <a:off x="771376" y="1654076"/>
-            <a:ext cx="88850" cy="88850"/>
-          </a:xfrm>
-          <a:prstGeom prst="roundRect">
-            <a:avLst>
-              <a:gd name="adj" fmla="val 1029150"/>
-            </a:avLst>
-          </a:prstGeom>
-          <a:solidFill>
-            <a:srgbClr val="FEBC2E"/>
-          </a:solidFill>
-          <a:ln/>
-        </p:spPr>
-        <p:txBody>
-          <a:bodyPr wrap="square" rtlCol="0" anchor="ctr"/>
-          <a:lstStyle/>
-          <a:p>
-            <a:pPr indent="0" marL="0">
-              <a:buNone/>
-            </a:pPr>
-            <a:endParaRPr lang="en-US" dirty="0"/>
-          </a:p>
-        </p:txBody>
-      </p:sp>
-      <p:sp>
-        <p:nvSpPr>
-          <p:cNvPr id="14" name="Text 10"/>
-          <p:cNvSpPr/>
-          <p:nvPr/>
-        </p:nvSpPr>
-        <p:spPr>
-          <a:xfrm>
-            <a:off x="910977" y="1654076"/>
-            <a:ext cx="88850" cy="88850"/>
-          </a:xfrm>
-          <a:prstGeom prst="roundRect">
-            <a:avLst>
-              <a:gd name="adj" fmla="val 1029150"/>
-            </a:avLst>
-          </a:prstGeom>
-          <a:solidFill>
-            <a:srgbClr val="28C840"/>
-          </a:solidFill>
-          <a:ln/>
-        </p:spPr>
-        <p:txBody>
-          <a:bodyPr wrap="square" rtlCol="0" anchor="ctr"/>
-          <a:lstStyle/>
-          <a:p>
-            <a:pPr indent="0" marL="0">
-              <a:buNone/>
-            </a:pPr>
-            <a:endParaRPr lang="en-US" dirty="0"/>
-          </a:p>
-        </p:txBody>
-      </p:sp>
-      <p:sp>
-        <p:nvSpPr>
-          <p:cNvPr id="15" name="Text 11"/>
-          <p:cNvSpPr/>
-          <p:nvPr/>
-        </p:nvSpPr>
-        <p:spPr>
-          <a:xfrm>
-            <a:off x="1126778" y="1612850"/>
-            <a:ext cx="715152" cy="171450"/>
-          </a:xfrm>
-          <a:prstGeom prst="rect">
-            <a:avLst/>
-          </a:prstGeom>
-          <a:noFill/>
-          <a:ln/>
-        </p:spPr>
-        <p:txBody>
-          <a:bodyPr wrap="square" lIns="0" tIns="0" rIns="0" bIns="0" rtlCol="0" anchor="t"/>
-          <a:lstStyle/>
-          <a:p>
-            <a:pPr algn="l" indent="0" marL="0">
-              <a:buNone/>
-            </a:pPr>
-            <a:r>
-              <a:rPr lang="en-US" sz="1150" dirty="0">
-                <a:solidFill>
-                  <a:srgbClr val="59636E"/>
-                </a:solidFill>
-                <a:latin typeface="Courier New" pitchFamily="34" charset="0"/>
-                <a:ea typeface="Courier New" pitchFamily="34" charset="-122"/>
-                <a:cs typeface="Courier New" pitchFamily="34" charset="-120"/>
-              </a:rPr>
-              <a:t>SKILL.md</a:t>
-            </a:r>
-            <a:endParaRPr lang="en-US" sz="1150" dirty="0"/>
-          </a:p>
-        </p:txBody>
-      </p:sp>
-      <p:sp>
-        <p:nvSpPr>
-          <p:cNvPr id="16" name="Text 12"/>
-          <p:cNvSpPr/>
-          <p:nvPr/>
-        </p:nvSpPr>
-        <p:spPr>
-          <a:xfrm>
-            <a:off x="669875" y="1949351"/>
-            <a:ext cx="3555873" cy="221010"/>
-          </a:xfrm>
-          <a:prstGeom prst="rect">
-            <a:avLst/>
-          </a:prstGeom>
-          <a:noFill/>
-          <a:ln/>
-        </p:spPr>
-        <p:txBody>
-          <a:bodyPr wrap="square" lIns="0" tIns="0" rIns="0" bIns="0" rtlCol="0" anchor="t"/>
-          <a:lstStyle/>
-          <a:p>
-            <a:pPr algn="l" indent="0" marL="0">
-              <a:lnSpc>
-                <a:spcPts val="1740"/>
-              </a:lnSpc>
-              <a:buNone/>
-            </a:pPr>
-            <a:r>
-              <a:rPr lang="en-US" sz="1350" dirty="0">
-                <a:solidFill>
-                  <a:srgbClr val="818B98"/>
-                </a:solidFill>
-                <a:latin typeface="Courier New" pitchFamily="34" charset="0"/>
-                <a:ea typeface="Courier New" pitchFamily="34" charset="-122"/>
-                <a:cs typeface="Courier New" pitchFamily="34" charset="-120"/>
-              </a:rPr>
-              <a:t>---</a:t>
-            </a:r>
-            <a:endParaRPr lang="en-US" sz="1350" dirty="0"/>
-          </a:p>
-        </p:txBody>
-      </p:sp>
-      <p:sp>
-        <p:nvSpPr>
-          <p:cNvPr id="17" name="Text 13"/>
-          <p:cNvSpPr/>
-          <p:nvPr/>
-        </p:nvSpPr>
-        <p:spPr>
-          <a:xfrm>
-            <a:off x="669875" y="2170361"/>
-            <a:ext cx="3555873" cy="221010"/>
-          </a:xfrm>
-          <a:prstGeom prst="rect">
-            <a:avLst/>
-          </a:prstGeom>
-          <a:noFill/>
-          <a:ln/>
-        </p:spPr>
-        <p:txBody>
-          <a:bodyPr wrap="square" lIns="0" tIns="0" rIns="0" bIns="0" rtlCol="0" anchor="t"/>
-          <a:lstStyle/>
-          <a:p>
-            <a:pPr algn="l" indent="0" marL="0">
-              <a:lnSpc>
-                <a:spcPts val="1740"/>
-              </a:lnSpc>
-              <a:buNone/>
-            </a:pPr>
-            <a:r>
-              <a:rPr lang="en-US" sz="1350" dirty="0">
-                <a:solidFill>
-                  <a:srgbClr val="8250DF"/>
-                </a:solidFill>
-                <a:latin typeface="Courier New" pitchFamily="34" charset="0"/>
-                <a:ea typeface="Courier New" pitchFamily="34" charset="-122"/>
-                <a:cs typeface="Courier New" pitchFamily="34" charset="-120"/>
-              </a:rPr>
-              <a:t>name</a:t>
-            </a:r>
-            <a:pPr algn="l" indent="0" marL="0">
-              <a:lnSpc>
-                <a:spcPts val="1740"/>
-              </a:lnSpc>
-              <a:buNone/>
-            </a:pPr>
-            <a:r>
-              <a:rPr lang="en-US" sz="1350" dirty="0">
-                <a:solidFill>
-                  <a:srgbClr val="1F2328"/>
-                </a:solidFill>
-                <a:latin typeface="Courier New" pitchFamily="34" charset="0"/>
-                <a:ea typeface="Courier New" pitchFamily="34" charset="-122"/>
-                <a:cs typeface="Courier New" pitchFamily="34" charset="-120"/>
-              </a:rPr>
-              <a:t>: book-app-reviewer</a:t>
-            </a:r>
-            <a:endParaRPr lang="en-US" sz="1350" dirty="0"/>
-          </a:p>
-        </p:txBody>
-      </p:sp>
-      <p:sp>
-        <p:nvSpPr>
-          <p:cNvPr id="18" name="Text 14"/>
-          <p:cNvSpPr/>
-          <p:nvPr/>
-        </p:nvSpPr>
-        <p:spPr>
-          <a:xfrm>
-            <a:off x="669875" y="2391370"/>
-            <a:ext cx="3555873" cy="221010"/>
-          </a:xfrm>
-          <a:prstGeom prst="rect">
-            <a:avLst/>
-          </a:prstGeom>
-          <a:noFill/>
-          <a:ln/>
-        </p:spPr>
-        <p:txBody>
-          <a:bodyPr wrap="square" lIns="0" tIns="0" rIns="0" bIns="0" rtlCol="0" anchor="t"/>
-          <a:lstStyle/>
-          <a:p>
-            <a:pPr algn="l" indent="0" marL="0">
-              <a:lnSpc>
-                <a:spcPts val="1740"/>
-              </a:lnSpc>
-              <a:buNone/>
-            </a:pPr>
-            <a:r>
-              <a:rPr lang="en-US" sz="1350" dirty="0">
-                <a:solidFill>
-                  <a:srgbClr val="8250DF"/>
-                </a:solidFill>
-                <a:latin typeface="Courier New" pitchFamily="34" charset="0"/>
-                <a:ea typeface="Courier New" pitchFamily="34" charset="-122"/>
-                <a:cs typeface="Courier New" pitchFamily="34" charset="-120"/>
-              </a:rPr>
-              <a:t>description</a:t>
-            </a:r>
-            <a:pPr algn="l" indent="0" marL="0">
-              <a:lnSpc>
-                <a:spcPts val="1740"/>
-              </a:lnSpc>
-              <a:buNone/>
-            </a:pPr>
-            <a:r>
-              <a:rPr lang="en-US" sz="1350" dirty="0">
-                <a:solidFill>
-                  <a:srgbClr val="1F2328"/>
-                </a:solidFill>
-                <a:latin typeface="Courier New" pitchFamily="34" charset="0"/>
-                <a:ea typeface="Courier New" pitchFamily="34" charset="-122"/>
-                <a:cs typeface="Courier New" pitchFamily="34" charset="-120"/>
-              </a:rPr>
-              <a:t>: Review changes in</a:t>
-            </a:r>
-            <a:endParaRPr lang="en-US" sz="1350" dirty="0"/>
-          </a:p>
-        </p:txBody>
-      </p:sp>
-      <p:sp>
-        <p:nvSpPr>
-          <p:cNvPr id="19" name="Text 15"/>
-          <p:cNvSpPr/>
-          <p:nvPr/>
-        </p:nvSpPr>
-        <p:spPr>
-          <a:xfrm>
-            <a:off x="669875" y="2612380"/>
-            <a:ext cx="3555873" cy="221010"/>
-          </a:xfrm>
-          <a:prstGeom prst="rect">
-            <a:avLst/>
-          </a:prstGeom>
-          <a:noFill/>
-          <a:ln/>
-        </p:spPr>
-        <p:txBody>
-          <a:bodyPr wrap="square" lIns="0" tIns="0" rIns="0" bIns="0" rtlCol="0" anchor="t"/>
-          <a:lstStyle/>
-          <a:p>
-            <a:pPr algn="l" indent="0" marL="0">
-              <a:lnSpc>
-                <a:spcPts val="1740"/>
-              </a:lnSpc>
-              <a:buNone/>
-            </a:pPr>
-            <a:r>
-              <a:rPr lang="en-US" sz="1350" dirty="0">
-                <a:solidFill>
-                  <a:srgbClr val="1F2328"/>
-                </a:solidFill>
-                <a:latin typeface="Courier New" pitchFamily="34" charset="0"/>
-                <a:ea typeface="Courier New" pitchFamily="34" charset="-122"/>
-                <a:cs typeface="Courier New" pitchFamily="34" charset="-120"/>
-              </a:rPr>
-              <a:t>samples/book-app-web for</a:t>
-            </a:r>
-            <a:endParaRPr lang="en-US" sz="1350" dirty="0"/>
-          </a:p>
-        </p:txBody>
-      </p:sp>
-      <p:sp>
-        <p:nvSpPr>
-          <p:cNvPr id="20" name="Text 16"/>
-          <p:cNvSpPr/>
-          <p:nvPr/>
-        </p:nvSpPr>
-        <p:spPr>
-          <a:xfrm>
-            <a:off x="669875" y="2833390"/>
-            <a:ext cx="3555873" cy="221010"/>
-          </a:xfrm>
-          <a:prstGeom prst="rect">
-            <a:avLst/>
-          </a:prstGeom>
-          <a:noFill/>
-          <a:ln/>
-        </p:spPr>
-        <p:txBody>
-          <a:bodyPr wrap="square" lIns="0" tIns="0" rIns="0" bIns="0" rtlCol="0" anchor="t"/>
-          <a:lstStyle/>
-          <a:p>
-            <a:pPr algn="l" indent="0" marL="0">
-              <a:lnSpc>
-                <a:spcPts val="1740"/>
-              </a:lnSpc>
-              <a:buNone/>
-            </a:pPr>
-            <a:r>
-              <a:rPr lang="en-US" sz="1350" dirty="0">
-                <a:solidFill>
-                  <a:srgbClr val="1F2328"/>
-                </a:solidFill>
-                <a:latin typeface="Courier New" pitchFamily="34" charset="0"/>
-                <a:ea typeface="Courier New" pitchFamily="34" charset="-122"/>
-                <a:cs typeface="Courier New" pitchFamily="34" charset="-120"/>
-              </a:rPr>
-              <a:t>accessibility, layout, tests,</a:t>
-            </a:r>
-            <a:endParaRPr lang="en-US" sz="1350" dirty="0"/>
-          </a:p>
-        </p:txBody>
-      </p:sp>
-      <p:sp>
-        <p:nvSpPr>
-          <p:cNvPr id="21" name="Text 17"/>
-          <p:cNvSpPr/>
-          <p:nvPr/>
-        </p:nvSpPr>
-        <p:spPr>
-          <a:xfrm>
-            <a:off x="669875" y="3054400"/>
-            <a:ext cx="3555873" cy="221010"/>
-          </a:xfrm>
-          <a:prstGeom prst="rect">
-            <a:avLst/>
-          </a:prstGeom>
-          <a:noFill/>
-          <a:ln/>
-        </p:spPr>
-        <p:txBody>
-          <a:bodyPr wrap="square" lIns="0" tIns="0" rIns="0" bIns="0" rtlCol="0" anchor="t"/>
-          <a:lstStyle/>
-          <a:p>
-            <a:pPr algn="l" indent="0" marL="0">
-              <a:lnSpc>
-                <a:spcPts val="1740"/>
-              </a:lnSpc>
-              <a:buNone/>
-            </a:pPr>
-            <a:r>
-              <a:rPr lang="en-US" sz="1350" dirty="0">
-                <a:solidFill>
-                  <a:srgbClr val="1F2328"/>
-                </a:solidFill>
-                <a:latin typeface="Courier New" pitchFamily="34" charset="0"/>
-                <a:ea typeface="Courier New" pitchFamily="34" charset="-122"/>
-                <a:cs typeface="Courier New" pitchFamily="34" charset="-120"/>
-              </a:rPr>
-              <a:t>and small changes.</a:t>
-            </a:r>
-            <a:endParaRPr lang="en-US" sz="1350" dirty="0"/>
-          </a:p>
-        </p:txBody>
-      </p:sp>
-      <p:sp>
-        <p:nvSpPr>
-          <p:cNvPr id="22" name="Text 18"/>
-          <p:cNvSpPr/>
-          <p:nvPr/>
-        </p:nvSpPr>
-        <p:spPr>
-          <a:xfrm>
-            <a:off x="669875" y="3275409"/>
-            <a:ext cx="3555873" cy="221010"/>
-          </a:xfrm>
-          <a:prstGeom prst="rect">
-            <a:avLst/>
-          </a:prstGeom>
-          <a:noFill/>
-          <a:ln/>
-        </p:spPr>
-        <p:txBody>
-          <a:bodyPr wrap="square" lIns="0" tIns="0" rIns="0" bIns="0" rtlCol="0" anchor="t"/>
-          <a:lstStyle/>
-          <a:p>
-            <a:pPr algn="l" indent="0" marL="0">
-              <a:lnSpc>
-                <a:spcPts val="1740"/>
-              </a:lnSpc>
-              <a:buNone/>
-            </a:pPr>
-            <a:r>
-              <a:rPr lang="en-US" sz="1350" dirty="0">
-                <a:solidFill>
-                  <a:srgbClr val="818B98"/>
-                </a:solidFill>
-                <a:latin typeface="Courier New" pitchFamily="34" charset="0"/>
-                <a:ea typeface="Courier New" pitchFamily="34" charset="-122"/>
-                <a:cs typeface="Courier New" pitchFamily="34" charset="-120"/>
-              </a:rPr>
-              <a:t>---</a:t>
-            </a:r>
-            <a:endParaRPr lang="en-US" sz="1350" dirty="0"/>
-          </a:p>
-        </p:txBody>
-      </p:sp>
-      <p:sp>
-        <p:nvSpPr>
-          <p:cNvPr id="23" name="Text 19"/>
-          <p:cNvSpPr/>
-          <p:nvPr/>
-        </p:nvSpPr>
-        <p:spPr>
-          <a:xfrm>
-            <a:off x="669875" y="3496419"/>
-            <a:ext cx="3555873" cy="221010"/>
-          </a:xfrm>
-          <a:prstGeom prst="rect">
-            <a:avLst/>
-          </a:prstGeom>
-          <a:noFill/>
-          <a:ln/>
-        </p:spPr>
-        <p:txBody>
-          <a:bodyPr wrap="square" lIns="0" tIns="0" rIns="0" bIns="0" rtlCol="0" anchor="t"/>
-          <a:lstStyle/>
-          <a:p>
-            <a:pPr algn="l" indent="0" marL="0">
-              <a:lnSpc>
-                <a:spcPts val="1740"/>
-              </a:lnSpc>
-              <a:buNone/>
-            </a:pPr>
-            <a:r>
-              <a:rPr lang="en-US" sz="1350" dirty="0">
-                <a:solidFill>
-                  <a:srgbClr val="818B98"/>
-                </a:solidFill>
-                <a:latin typeface="Courier New" pitchFamily="34" charset="0"/>
-                <a:ea typeface="Courier New" pitchFamily="34" charset="-122"/>
-                <a:cs typeface="Courier New" pitchFamily="34" charset="-120"/>
-              </a:rPr>
-              <a:t># Review focus</a:t>
-            </a:r>
-            <a:endParaRPr lang="en-US" sz="1350" dirty="0"/>
-          </a:p>
-        </p:txBody>
-      </p:sp>
-      <p:sp>
-        <p:nvSpPr>
-          <p:cNvPr id="24" name="Text 20"/>
-          <p:cNvSpPr/>
-          <p:nvPr/>
-        </p:nvSpPr>
-        <p:spPr>
-          <a:xfrm>
-            <a:off x="669875" y="3717429"/>
-            <a:ext cx="3555873" cy="221010"/>
-          </a:xfrm>
-          <a:prstGeom prst="rect">
-            <a:avLst/>
-          </a:prstGeom>
-          <a:noFill/>
-          <a:ln/>
-        </p:spPr>
-        <p:txBody>
-          <a:bodyPr wrap="square" lIns="0" tIns="0" rIns="0" bIns="0" rtlCol="0" anchor="t"/>
-          <a:lstStyle/>
-          <a:p>
-            <a:pPr algn="l" indent="0" marL="0">
-              <a:lnSpc>
-                <a:spcPts val="1740"/>
-              </a:lnSpc>
-              <a:buNone/>
-            </a:pPr>
-            <a:r>
-              <a:rPr lang="en-US" sz="1350" dirty="0">
-                <a:solidFill>
-                  <a:srgbClr val="1F2328"/>
-                </a:solidFill>
-                <a:latin typeface="Courier New" pitchFamily="34" charset="0"/>
-                <a:ea typeface="Courier New" pitchFamily="34" charset="-122"/>
-                <a:cs typeface="Courier New" pitchFamily="34" charset="-120"/>
-              </a:rPr>
-              <a:t>​- Stack, tests, and build</a:t>
-            </a:r>
-            <a:endParaRPr lang="en-US" sz="1350" dirty="0"/>
-          </a:p>
-        </p:txBody>
-      </p:sp>
-      <p:sp>
-        <p:nvSpPr>
-          <p:cNvPr id="25" name="Text 21"/>
-          <p:cNvSpPr/>
-          <p:nvPr/>
-        </p:nvSpPr>
-        <p:spPr>
-          <a:xfrm>
-            <a:off x="669875" y="3938439"/>
-            <a:ext cx="3555873" cy="221010"/>
-          </a:xfrm>
-          <a:prstGeom prst="rect">
-            <a:avLst/>
-          </a:prstGeom>
-          <a:noFill/>
-          <a:ln/>
-        </p:spPr>
-        <p:txBody>
-          <a:bodyPr wrap="square" lIns="0" tIns="0" rIns="0" bIns="0" rtlCol="0" anchor="t"/>
-          <a:lstStyle/>
-          <a:p>
-            <a:pPr algn="l" indent="0" marL="0">
-              <a:lnSpc>
-                <a:spcPts val="1740"/>
-              </a:lnSpc>
-              <a:buNone/>
-            </a:pPr>
-            <a:r>
-              <a:rPr lang="en-US" sz="1350" dirty="0">
-                <a:solidFill>
-                  <a:srgbClr val="1F2328"/>
-                </a:solidFill>
-                <a:latin typeface="Courier New" pitchFamily="34" charset="0"/>
-                <a:ea typeface="Courier New" pitchFamily="34" charset="-122"/>
-                <a:cs typeface="Courier New" pitchFamily="34" charset="-120"/>
-              </a:rPr>
-              <a:t>​- Accessibility</a:t>
-            </a:r>
-            <a:endParaRPr lang="en-US" sz="1350" dirty="0"/>
-          </a:p>
-        </p:txBody>
-      </p:sp>
-      <p:sp>
-        <p:nvSpPr>
-          <p:cNvPr id="26" name="Text 22"/>
-          <p:cNvSpPr/>
-          <p:nvPr/>
-        </p:nvSpPr>
-        <p:spPr>
-          <a:xfrm>
-            <a:off x="669875" y="4159448"/>
-            <a:ext cx="3555873" cy="221010"/>
-          </a:xfrm>
-          <a:prstGeom prst="rect">
-            <a:avLst/>
-          </a:prstGeom>
-          <a:noFill/>
-          <a:ln/>
-        </p:spPr>
-        <p:txBody>
-          <a:bodyPr wrap="square" lIns="0" tIns="0" rIns="0" bIns="0" rtlCol="0" anchor="t"/>
-          <a:lstStyle/>
-          <a:p>
-            <a:pPr algn="l" indent="0" marL="0">
-              <a:lnSpc>
-                <a:spcPts val="1740"/>
-              </a:lnSpc>
-              <a:buNone/>
-            </a:pPr>
-            <a:r>
-              <a:rPr lang="en-US" sz="1350" dirty="0">
-                <a:solidFill>
-                  <a:srgbClr val="1F2328"/>
-                </a:solidFill>
-                <a:latin typeface="Courier New" pitchFamily="34" charset="0"/>
-                <a:ea typeface="Courier New" pitchFamily="34" charset="-122"/>
-                <a:cs typeface="Courier New" pitchFamily="34" charset="-120"/>
-              </a:rPr>
-              <a:t>​- Responsive layout</a:t>
-            </a:r>
-            <a:endParaRPr lang="en-US" sz="1350" dirty="0"/>
-          </a:p>
-        </p:txBody>
-      </p:sp>
-      <p:sp>
-        <p:nvSpPr>
-          <p:cNvPr id="27" name="Text 23"/>
-          <p:cNvSpPr/>
-          <p:nvPr/>
-        </p:nvSpPr>
-        <p:spPr>
-          <a:xfrm>
-            <a:off x="4571851" y="2066181"/>
-            <a:ext cx="381000" cy="381000"/>
-          </a:xfrm>
-          <a:prstGeom prst="roundRect">
-            <a:avLst>
-              <a:gd name="adj" fmla="val 23333"/>
-            </a:avLst>
-          </a:prstGeom>
-          <a:solidFill>
-            <a:srgbClr val="FBEFFF"/>
-          </a:solidFill>
-          <a:ln/>
-        </p:spPr>
-        <p:txBody>
-          <a:bodyPr wrap="square" rtlCol="0" anchor="ctr"/>
-          <a:lstStyle/>
-          <a:p>
-            <a:pPr indent="0" marL="0">
-              <a:buNone/>
-            </a:pPr>
-            <a:endParaRPr lang="en-US" dirty="0"/>
-          </a:p>
-        </p:txBody>
-      </p:sp>
-      <p:pic>
-        <p:nvPicPr>
-          <p:cNvPr id="28" name="Image 2" descr="">
-            <a:extLst>
-              <a:ext uri="{C183D7F6-B498-43B3-948B-1728B52AA6E4}">
-                <adec:decorative xmlns:adec="http://schemas.microsoft.com/office/drawing/2017/decorative" val="1"/>
-              </a:ext>
-            </a:extLst>
-          </p:cNvPr>
-          <p:cNvPicPr>
-            <a:picLocks noChangeAspect="1"/>
-          </p:cNvPicPr>
-          <p:nvPr/>
-        </p:nvPicPr>
-        <p:blipFill>
-          <a:blip r:embed="rId4"/>
-          <a:stretch>
-            <a:fillRect/>
-          </a:stretch>
-        </p:blipFill>
-        <p:spPr>
-          <a:xfrm>
-            <a:off x="4654451" y="2148780"/>
-            <a:ext cx="215801" cy="215801"/>
-          </a:xfrm>
-          <a:prstGeom prst="rect">
-            <a:avLst/>
-          </a:prstGeom>
-        </p:spPr>
-      </p:pic>
-      <p:sp>
-        <p:nvSpPr>
-          <p:cNvPr id="29" name="Text 24"/>
-          <p:cNvSpPr/>
-          <p:nvPr/>
-        </p:nvSpPr>
-        <p:spPr>
-          <a:xfrm>
-            <a:off x="5105251" y="1926878"/>
-            <a:ext cx="3601263" cy="228600"/>
-          </a:xfrm>
-          <a:prstGeom prst="rect">
-            <a:avLst/>
-          </a:prstGeom>
-          <a:noFill/>
-          <a:ln/>
-        </p:spPr>
-        <p:txBody>
-          <a:bodyPr wrap="square" lIns="0" tIns="0" rIns="0" bIns="0" rtlCol="0" anchor="t"/>
-          <a:lstStyle/>
-          <a:p>
-            <a:pPr algn="l" indent="0" marL="0">
-              <a:buNone/>
-            </a:pPr>
-            <a:r>
-              <a:rPr lang="en-US" sz="1550" b="1" dirty="0">
-                <a:solidFill>
-                  <a:srgbClr val="1F2328"/>
-                </a:solidFill>
-                <a:latin typeface="Arial" pitchFamily="34" charset="0"/>
-                <a:ea typeface="Arial" pitchFamily="34" charset="-122"/>
-                <a:cs typeface="Arial" pitchFamily="34" charset="-120"/>
-              </a:rPr>
-              <a:t>Frontmatter</a:t>
-            </a:r>
-            <a:endParaRPr lang="en-US" sz="1550" dirty="0"/>
-          </a:p>
-        </p:txBody>
-      </p:sp>
-      <p:sp>
-        <p:nvSpPr>
-          <p:cNvPr id="30" name="Text 25"/>
-          <p:cNvSpPr/>
-          <p:nvPr/>
-        </p:nvSpPr>
-        <p:spPr>
-          <a:xfrm>
-            <a:off x="5105251" y="2180779"/>
-            <a:ext cx="3601263" cy="405705"/>
-          </a:xfrm>
-          <a:prstGeom prst="rect">
-            <a:avLst/>
-          </a:prstGeom>
-          <a:noFill/>
-          <a:ln/>
-        </p:spPr>
-        <p:txBody>
-          <a:bodyPr wrap="square" lIns="0" tIns="0" rIns="0" bIns="0" rtlCol="0" anchor="t"/>
-          <a:lstStyle/>
-          <a:p>
-            <a:pPr algn="l" indent="0" marL="0">
-              <a:lnSpc>
-                <a:spcPts val="1560"/>
-              </a:lnSpc>
-              <a:buNone/>
-            </a:pPr>
-            <a:r>
-              <a:rPr lang="en-US" sz="1350" dirty="0">
-                <a:solidFill>
-                  <a:srgbClr val="59636E"/>
-                </a:solidFill>
-                <a:latin typeface="Arial" pitchFamily="34" charset="0"/>
-                <a:ea typeface="Arial" pitchFamily="34" charset="-122"/>
-                <a:cs typeface="Arial" pitchFamily="34" charset="-120"/>
-              </a:rPr>
-              <a:t>The </a:t>
-            </a:r>
-            <a:pPr algn="l" indent="0" marL="0">
-              <a:lnSpc>
-                <a:spcPts val="1560"/>
-              </a:lnSpc>
-              <a:buNone/>
-            </a:pPr>
-            <a:r>
-              <a:rPr lang="en-US" sz="1350" b="1" dirty="0">
-                <a:solidFill>
-                  <a:srgbClr val="0550AE"/>
-                </a:solidFill>
-                <a:latin typeface="Courier New" pitchFamily="34" charset="0"/>
-                <a:ea typeface="Courier New" pitchFamily="34" charset="-122"/>
-                <a:cs typeface="Courier New" pitchFamily="34" charset="-120"/>
-              </a:rPr>
-              <a:t>description</a:t>
-            </a:r>
-            <a:pPr algn="l" indent="0" marL="0">
-              <a:lnSpc>
-                <a:spcPts val="1560"/>
-              </a:lnSpc>
-              <a:buNone/>
-            </a:pPr>
-            <a:r>
-              <a:rPr lang="en-US" sz="1350" dirty="0">
-                <a:solidFill>
-                  <a:srgbClr val="59636E"/>
-                </a:solidFill>
-                <a:latin typeface="Arial" pitchFamily="34" charset="0"/>
-                <a:ea typeface="Arial" pitchFamily="34" charset="-122"/>
-                <a:cs typeface="Arial" pitchFamily="34" charset="-120"/>
-              </a:rPr>
-              <a:t> tells the app when to load it.</a:t>
-            </a:r>
-            <a:endParaRPr lang="en-US" sz="1350" dirty="0"/>
-          </a:p>
-        </p:txBody>
-      </p:sp>
-      <p:sp>
-        <p:nvSpPr>
-          <p:cNvPr id="31" name="Text 26"/>
-          <p:cNvSpPr/>
-          <p:nvPr/>
-        </p:nvSpPr>
-        <p:spPr>
-          <a:xfrm>
-            <a:off x="4571851" y="2825055"/>
-            <a:ext cx="381000" cy="381000"/>
-          </a:xfrm>
-          <a:prstGeom prst="roundRect">
-            <a:avLst>
-              <a:gd name="adj" fmla="val 23333"/>
-            </a:avLst>
-          </a:prstGeom>
-          <a:solidFill>
-            <a:srgbClr val="FBEFFF"/>
-          </a:solidFill>
-          <a:ln/>
-        </p:spPr>
-        <p:txBody>
-          <a:bodyPr wrap="square" rtlCol="0" anchor="ctr"/>
-          <a:lstStyle/>
-          <a:p>
-            <a:pPr indent="0" marL="0">
-              <a:buNone/>
-            </a:pPr>
-            <a:endParaRPr lang="en-US" dirty="0"/>
-          </a:p>
-        </p:txBody>
-      </p:sp>
-      <p:pic>
-        <p:nvPicPr>
-          <p:cNvPr id="32" name="Image 3" descr="">
-            <a:extLst>
-              <a:ext uri="{C183D7F6-B498-43B3-948B-1728B52AA6E4}">
-                <adec:decorative xmlns:adec="http://schemas.microsoft.com/office/drawing/2017/decorative" val="1"/>
-              </a:ext>
-            </a:extLst>
-          </p:cNvPr>
-          <p:cNvPicPr>
-            <a:picLocks noChangeAspect="1"/>
-          </p:cNvPicPr>
-          <p:nvPr/>
-        </p:nvPicPr>
-        <p:blipFill>
-          <a:blip r:embed="rId5"/>
-          <a:stretch>
-            <a:fillRect/>
-          </a:stretch>
-        </p:blipFill>
-        <p:spPr>
-          <a:xfrm>
-            <a:off x="4654451" y="2907655"/>
-            <a:ext cx="215801" cy="215801"/>
-          </a:xfrm>
-          <a:prstGeom prst="rect">
-            <a:avLst/>
-          </a:prstGeom>
-        </p:spPr>
-      </p:pic>
-      <p:sp>
-        <p:nvSpPr>
-          <p:cNvPr id="33" name="Text 27"/>
-          <p:cNvSpPr/>
-          <p:nvPr/>
-        </p:nvSpPr>
-        <p:spPr>
-          <a:xfrm>
-            <a:off x="5105251" y="2789634"/>
-            <a:ext cx="2430241" cy="228600"/>
-          </a:xfrm>
-          <a:prstGeom prst="rect">
-            <a:avLst/>
-          </a:prstGeom>
-          <a:noFill/>
-          <a:ln/>
-        </p:spPr>
-        <p:txBody>
-          <a:bodyPr wrap="square" lIns="0" tIns="0" rIns="0" bIns="0" rtlCol="0" anchor="t"/>
-          <a:lstStyle/>
-          <a:p>
-            <a:pPr algn="l" indent="0" marL="0">
-              <a:buNone/>
-            </a:pPr>
-            <a:r>
-              <a:rPr lang="en-US" sz="1550" b="1" dirty="0">
-                <a:solidFill>
-                  <a:srgbClr val="1F2328"/>
-                </a:solidFill>
-                <a:latin typeface="Arial" pitchFamily="34" charset="0"/>
-                <a:ea typeface="Arial" pitchFamily="34" charset="-122"/>
-                <a:cs typeface="Arial" pitchFamily="34" charset="-120"/>
-              </a:rPr>
-              <a:t>Instructions</a:t>
-            </a:r>
-            <a:endParaRPr lang="en-US" sz="1550" dirty="0"/>
-          </a:p>
-        </p:txBody>
-      </p:sp>
-      <p:sp>
-        <p:nvSpPr>
-          <p:cNvPr id="34" name="Text 28"/>
-          <p:cNvSpPr/>
-          <p:nvPr/>
-        </p:nvSpPr>
-        <p:spPr>
-          <a:xfrm>
-            <a:off x="5105251" y="3043535"/>
-            <a:ext cx="2430241" cy="198090"/>
-          </a:xfrm>
-          <a:prstGeom prst="rect">
-            <a:avLst/>
-          </a:prstGeom>
-          <a:noFill/>
-          <a:ln/>
-        </p:spPr>
-        <p:txBody>
-          <a:bodyPr wrap="square" lIns="0" tIns="0" rIns="0" bIns="0" rtlCol="0" anchor="t"/>
-          <a:lstStyle/>
-          <a:p>
-            <a:pPr algn="l" indent="0" marL="0">
-              <a:lnSpc>
-                <a:spcPts val="1560"/>
-              </a:lnSpc>
-              <a:buNone/>
-            </a:pPr>
-            <a:r>
-              <a:rPr lang="en-US" sz="1350" dirty="0">
-                <a:solidFill>
-                  <a:srgbClr val="59636E"/>
-                </a:solidFill>
-                <a:latin typeface="Arial" pitchFamily="34" charset="0"/>
-                <a:ea typeface="Arial" pitchFamily="34" charset="-122"/>
-                <a:cs typeface="Arial" pitchFamily="34" charset="-120"/>
-              </a:rPr>
-              <a:t>The checklist the agent follows.</a:t>
-            </a:r>
-            <a:endParaRPr lang="en-US" sz="1350" dirty="0"/>
-          </a:p>
-        </p:txBody>
-      </p:sp>
-      <p:sp>
-        <p:nvSpPr>
-          <p:cNvPr id="35" name="Text 29"/>
-          <p:cNvSpPr/>
-          <p:nvPr/>
-        </p:nvSpPr>
-        <p:spPr>
-          <a:xfrm>
-            <a:off x="4571851" y="3444776"/>
-            <a:ext cx="4064050" cy="720030"/>
-          </a:xfrm>
-          <a:prstGeom prst="roundRect">
-            <a:avLst>
-              <a:gd name="adj" fmla="val 14111"/>
-            </a:avLst>
-          </a:prstGeom>
-          <a:solidFill>
-            <a:srgbClr val="FFEBE9"/>
-          </a:solidFill>
-          <a:ln w="9525">
-            <a:solidFill>
-              <a:srgbClr val="FFCECB"/>
-            </a:solidFill>
-          </a:ln>
-        </p:spPr>
-        <p:txBody>
-          <a:bodyPr wrap="square" rtlCol="0" anchor="ctr"/>
-          <a:lstStyle/>
-          <a:p>
-            <a:pPr indent="0" marL="0">
-              <a:buNone/>
-            </a:pPr>
-            <a:endParaRPr lang="en-US" dirty="0"/>
-          </a:p>
-        </p:txBody>
-      </p:sp>
-      <p:pic>
-        <p:nvPicPr>
-          <p:cNvPr id="36" name="Image 4" descr="">
-            <a:extLst>
-              <a:ext uri="{C183D7F6-B498-43B3-948B-1728B52AA6E4}">
-                <adec:decorative xmlns:adec="http://schemas.microsoft.com/office/drawing/2017/decorative" val="1"/>
-              </a:ext>
-            </a:extLst>
-          </p:cNvPr>
-          <p:cNvPicPr>
-            <a:picLocks noChangeAspect="1"/>
-          </p:cNvPicPr>
-          <p:nvPr/>
-        </p:nvPicPr>
-        <p:blipFill>
-          <a:blip r:embed="rId6"/>
-          <a:stretch>
-            <a:fillRect/>
-          </a:stretch>
-        </p:blipFill>
-        <p:spPr>
-          <a:xfrm>
-            <a:off x="4759077" y="3703141"/>
-            <a:ext cx="203150" cy="203150"/>
-          </a:xfrm>
-          <a:prstGeom prst="rect">
-            <a:avLst/>
-          </a:prstGeom>
-        </p:spPr>
-      </p:pic>
-      <p:sp>
-        <p:nvSpPr>
-          <p:cNvPr id="37" name="Text 30"/>
-          <p:cNvSpPr/>
-          <p:nvPr/>
-        </p:nvSpPr>
-        <p:spPr>
-          <a:xfrm>
-            <a:off x="5089178" y="3581251"/>
-            <a:ext cx="3426687" cy="447080"/>
-          </a:xfrm>
-          <a:prstGeom prst="rect">
-            <a:avLst/>
-          </a:prstGeom>
-          <a:noFill/>
-          <a:ln/>
-        </p:spPr>
-        <p:txBody>
-          <a:bodyPr wrap="square" lIns="0" tIns="0" rIns="0" bIns="0" rtlCol="0" anchor="t"/>
-          <a:lstStyle/>
-          <a:p>
-            <a:pPr algn="l" indent="0" marL="0">
-              <a:lnSpc>
-                <a:spcPts val="1760"/>
-              </a:lnSpc>
-              <a:buNone/>
-            </a:pPr>
-            <a:r>
-              <a:rPr lang="en-US" sz="1450" dirty="0">
-                <a:solidFill>
-                  <a:srgbClr val="1F2328"/>
-                </a:solidFill>
-                <a:latin typeface="Arial" pitchFamily="34" charset="0"/>
-                <a:ea typeface="Arial" pitchFamily="34" charset="-122"/>
-                <a:cs typeface="Arial" pitchFamily="34" charset="-120"/>
-              </a:rPr>
-              <a:t>A skill </a:t>
-            </a:r>
-            <a:pPr algn="l" indent="0" marL="0">
-              <a:lnSpc>
-                <a:spcPts val="1760"/>
-              </a:lnSpc>
-              <a:buNone/>
-            </a:pPr>
-            <a:r>
-              <a:rPr lang="en-US" sz="1450" b="1" dirty="0">
-                <a:solidFill>
-                  <a:srgbClr val="1F2328"/>
-                </a:solidFill>
-                <a:latin typeface="Arial" pitchFamily="34" charset="0"/>
-                <a:ea typeface="Arial" pitchFamily="34" charset="-122"/>
-                <a:cs typeface="Arial" pitchFamily="34" charset="-120"/>
-              </a:rPr>
-              <a:t>guides</a:t>
-            </a:r>
-            <a:pPr algn="l" indent="0" marL="0">
-              <a:lnSpc>
-                <a:spcPts val="1760"/>
-              </a:lnSpc>
-              <a:buNone/>
-            </a:pPr>
-            <a:r>
-              <a:rPr lang="en-US" sz="1450" dirty="0">
-                <a:solidFill>
-                  <a:srgbClr val="1F2328"/>
-                </a:solidFill>
-                <a:latin typeface="Arial" pitchFamily="34" charset="0"/>
-                <a:ea typeface="Arial" pitchFamily="34" charset="-122"/>
-                <a:cs typeface="Arial" pitchFamily="34" charset="-120"/>
-              </a:rPr>
-              <a:t>. It does not stop editing. Read unfamiliar skills first.</a:t>
-            </a:r>
-            <a:endParaRPr lang="en-US" sz="1450" dirty="0"/>
-          </a:p>
-        </p:txBody>
-      </p:sp>
-    </p:spTree>
-  </p:cSld>
-  <p:clrMapOvr>
-    <a:masterClrMapping/>
-  </p:clrMapOvr>
-</p:sld>
+<ns0:sld xmlns:ns0="http://schemas.openxmlformats.org/presentationml/2006/main" xmlns:ns1="http://schemas.openxmlformats.org/drawingml/2006/main" xmlns:ns2="http://schemas.microsoft.com/office/drawing/2017/decorative" xmlns:ns3="http://schemas.openxmlformats.org/officeDocument/2006/relationships">
+  <ns0:cSld name="Slide 7">
+    <ns0:bg>
+      <ns0:bgPr>
+        <ns1:solidFill>
+          <ns1:srgbClr val="FFFFFF"/>
+        </ns1:solidFill>
+      </ns0:bgPr>
+    </ns0:bg>
+    <ns0:spTree>
+      <ns0:nvGrpSpPr>
+        <ns0:cNvPr id="1" name=""/>
+        <ns0:cNvGrpSpPr/>
+        <ns0:nvPr/>
+      </ns0:nvGrpSpPr>
+      <ns0:grpSpPr>
+        <ns1:xfrm>
+          <ns1:off x="0" y="0"/>
+          <ns1:ext cx="0" cy="0"/>
+          <ns1:chOff x="0" y="0"/>
+          <ns1:chExt cx="0" cy="0"/>
+        </ns1:xfrm>
+      </ns0:grpSpPr>
+      <ns0:pic>
+        <ns0:nvPicPr>
+          <ns0:cNvPr id="2" name="Image 0" descr="">
+            <ns1:extLst>
+              <ns1:ext uri="{C183D7F6-B498-43B3-948B-1728B52AA6E4}">
+                <ns2:decorative val="1"/>
+              </ns1:ext>
+            </ns1:extLst>
+          </ns0:cNvPr>
+          <ns0:cNvPicPr>
+            <ns1:picLocks noChangeAspect="1"/>
+          </ns0:cNvPicPr>
+          <ns0:nvPr/>
+        </ns0:nvPicPr>
+        <ns0:blipFill>
+          <ns1:blip ns3:embed="rId1"/>
+          <ns1:stretch>
+            <ns1:fillRect/>
+          </ns1:stretch>
+        </ns0:blipFill>
+        <ns0:spPr>
+          <ns1:xfrm>
+            <ns1:off x="6349901" y="0"/>
+            <ns1:ext cx="2793950" cy="1308050"/>
+          </ns1:xfrm>
+          <ns1:prstGeom prst="rect">
+            <ns1:avLst/>
+          </ns1:prstGeom>
+        </ns0:spPr>
+      </ns0:pic>
+      <ns0:sp>
+        <ns0:nvSpPr>
+          <ns0:cNvPr id="3" name="Text 0"/>
+          <ns0:cNvSpPr/>
+          <ns0:nvPr/>
+        </ns0:nvSpPr>
+        <ns0:spPr>
+          <ns1:xfrm>
+            <ns1:off x="7340501" y="177701"/>
+            <ns1:ext cx="1168301" cy="279350"/>
+          </ns1:xfrm>
+          <ns1:prstGeom prst="roundRect">
+            <ns1:avLst>
+              <ns1:gd name="adj" fmla="val 22731"/>
+            </ns1:avLst>
+          </ns1:prstGeom>
+          <ns1:solidFill>
+            <ns1:srgbClr val="1A7F37"/>
+          </ns1:solidFill>
+          <ns1:ln/>
+        </ns0:spPr>
+        <ns0:txBody>
+          <ns1:bodyPr wrap="square" rtlCol="0" anchor="ctr"/>
+          <ns1:lstStyle/>
+          <ns1:p>
+            <ns1:pPr indent="0" marL="0">
+              <ns1:buNone/>
+            </ns1:pPr>
+            <ns1:endParaRPr lang="en-US" dirty="0"/>
+          </ns1:p>
+        </ns0:txBody>
+      </ns0:sp>
+      <ns0:sp>
+        <ns0:nvSpPr>
+          <ns0:cNvPr id="4" name="Text 1"/>
+          <ns0:cNvSpPr/>
+          <ns0:nvPr/>
+        </ns0:nvSpPr>
+        <ns0:spPr>
+          <ns1:xfrm>
+            <ns1:off x="7461041" y="231577"/>
+            <ns1:ext cx="927071" cy="171450"/>
+          </ns1:xfrm>
+          <ns1:prstGeom prst="rect">
+            <ns1:avLst/>
+          </ns1:prstGeom>
+          <ns1:noFill/>
+          <ns1:ln/>
+        </ns0:spPr>
+        <ns0:txBody>
+          <ns1:bodyPr wrap="square" lIns="0" tIns="0" rIns="0" bIns="0" rtlCol="0" anchor="t"/>
+          <ns1:lstStyle/>
+          <ns1:p>
+            <ns1:pPr algn="ctr" indent="0" marL="0">
+              <ns1:buNone/>
+            </ns1:pPr>
+            <ns1:r>
+              <ns1:rPr lang="en-US" sz="1150" b="1" dirty="0">
+                <ns1:solidFill>
+                  <ns1:srgbClr val="FFFFFF"/>
+                </ns1:solidFill>
+                <ns1:latin typeface="Arial" pitchFamily="34" charset="0"/>
+                <ns1:ea typeface="Arial" pitchFamily="34" charset="-122"/>
+                <ns1:cs typeface="Arial" pitchFamily="34" charset="-120"/>
+              </ns1:rPr>
+              <ns1:t>CHAPTER 04</ns1:t>
+            </ns1:r>
+            <ns1:endParaRPr lang="en-US" sz="1150" dirty="0"/>
+          </ns1:p>
+        </ns0:txBody>
+      </ns0:sp>
+      <ns0:pic>
+        <ns0:nvPicPr>
+          <ns0:cNvPr id="5" name="Image 1" descr="Open this chapter on GitHub">
+            <ns1:hlinkClick ns3:id="rId3" tooltip="https://github.com/github/copilot-app-for-beginners/tree/main/04-skills-custom-agents"/>
+          </ns0:cNvPr>
+          <ns0:cNvPicPr>
+            <ns1:picLocks noChangeAspect="1"/>
+          </ns0:cNvPicPr>
+          <ns0:nvPr/>
+        </ns0:nvPicPr>
+        <ns0:blipFill>
+          <ns1:blip ns3:embed="rId2"/>
+          <ns1:stretch>
+            <ns1:fillRect/>
+          </ns1:stretch>
+        </ns0:blipFill>
+        <ns0:spPr>
+          <ns1:xfrm>
+            <ns1:off x="8610600" y="165050"/>
+            <ns1:ext cx="304800" cy="304800"/>
+          </ns1:xfrm>
+          <ns1:prstGeom prst="rect">
+            <ns1:avLst/>
+          </ns1:prstGeom>
+        </ns0:spPr>
+      </ns0:pic>
+      <ns0:sp>
+        <ns0:nvSpPr>
+          <ns0:cNvPr id="6" name="Text 2"/>
+          <ns0:cNvSpPr/>
+          <ns0:nvPr/>
+        </ns0:nvSpPr>
+        <ns0:spPr>
+          <ns1:xfrm>
+            <ns1:off x="507950" y="381000"/>
+            <ns1:ext cx="8161020" cy="190500"/>
+          </ns1:xfrm>
+          <ns1:prstGeom prst="rect">
+            <ns1:avLst/>
+          </ns1:prstGeom>
+          <ns1:noFill/>
+          <ns1:ln/>
+        </ns0:spPr>
+        <ns0:txBody>
+          <ns1:bodyPr wrap="square" lIns="0" tIns="0" rIns="0" bIns="0" rtlCol="0" anchor="t"/>
+          <ns1:lstStyle/>
+          <ns1:p>
+            <ns1:pPr algn="l" indent="0" marL="0">
+              <ns1:buNone/>
+            </ns1:pPr>
+            <ns1:r>
+              <ns1:rPr lang="en-US" sz="1250" b="1" dirty="0">
+                <ns1:solidFill>
+                  <ns1:srgbClr val="0969DA"/>
+                </ns1:solidFill>
+                <ns1:latin typeface="Arial" pitchFamily="34" charset="0"/>
+                <ns1:ea typeface="Arial" pitchFamily="34" charset="-122"/>
+                <ns1:cs typeface="Arial" pitchFamily="34" charset="-120"/>
+              </ns1:rPr>
+              <ns1:t>ANATOMY OF A SKILL</ns1:t>
+            </ns1:r>
+            <ns1:endParaRPr lang="en-US" sz="1250" dirty="0"/>
+          </ns1:p>
+        </ns0:txBody>
+      </ns0:sp>
+      <ns0:sp>
+        <ns0:nvSpPr>
+          <ns0:cNvPr id="7" name="Text 3"/>
+          <ns0:cNvSpPr/>
+          <ns0:nvPr/>
+        </ns0:nvSpPr>
+        <ns0:spPr>
+          <ns1:xfrm>
+            <ns1:off x="507950" y="622250"/>
+            <ns1:ext cx="8161020" cy="419100"/>
+          </ns1:xfrm>
+          <ns1:prstGeom prst="rect">
+            <ns1:avLst/>
+          </ns1:prstGeom>
+          <ns1:noFill/>
+          <ns1:ln/>
+        </ns0:spPr>
+        <ns0:txBody>
+          <ns1:bodyPr wrap="square" lIns="0" tIns="0" rIns="0" bIns="0" rtlCol="0" anchor="t"/>
+          <ns1:lstStyle/>
+          <ns1:p>
+            <ns1:pPr algn="l" indent="0" marL="0">
+              <ns1:lnSpc>
+                <ns1:spcPts val="3300"/>
+              </ns1:lnSpc>
+              <ns1:spcBef>
+                <ns1:spcPts val="400"/>
+              </ns1:spcBef>
+              <ns1:buNone/>
+            </ns1:pPr>
+            <ns1:r>
+              <ns1:rPr lang="en-US" sz="2800" b="1" dirty="0">
+                <ns1:solidFill>
+                  <ns1:srgbClr val="1F2328"/>
+                </ns1:solidFill>
+                <ns1:latin typeface="Arial" pitchFamily="34" charset="0"/>
+                <ns1:ea typeface="Arial" pitchFamily="34" charset="-122"/>
+                <ns1:cs typeface="Arial" pitchFamily="34" charset="-120"/>
+              </ns1:rPr>
+              <ns1:t>A folder with a SKILL.md file</ns1:t>
+            </ns1:r>
+            <ns1:endParaRPr lang="en-US" sz="2800" dirty="0"/>
+          </ns1:p>
+        </ns0:txBody>
+      </ns0:sp>
+      <ns0:sp>
+        <ns0:nvSpPr>
+          <ns0:cNvPr id="8" name="Text 4"/>
+          <ns0:cNvSpPr/>
+          <ns0:nvPr/>
+        </ns0:nvSpPr>
+        <ns0:spPr>
+          <ns1:xfrm>
+            <ns1:off x="507950" y="1104751"/>
+            <ns1:ext cx="8161020" cy="273100"/>
+          </ns1:xfrm>
+          <ns1:prstGeom prst="rect">
+            <ns1:avLst/>
+          </ns1:prstGeom>
+          <ns1:noFill/>
+          <ns1:ln/>
+        </ns0:spPr>
+        <ns0:txBody>
+          <ns1:bodyPr wrap="square" lIns="0" tIns="0" rIns="0" bIns="0" rtlCol="0" anchor="t"/>
+          <ns1:lstStyle/>
+          <ns1:p>
+            <ns1:pPr algn="l" indent="0" marL="0">
+              <ns1:lnSpc>
+                <ns1:spcPts val="2000"/>
+              </ns1:lnSpc>
+              <ns1:spcBef>
+                <ns1:spcPts val="500"/>
+              </ns1:spcBef>
+              <ns1:buNone/>
+            </ns1:pPr>
+            <ns1:r>
+              <ns1:rPr lang="en-US" sz="1650" dirty="0">
+                <ns1:solidFill>
+                  <ns1:srgbClr val="59636E"/>
+                </ns1:solidFill>
+                <ns1:latin typeface="Arial" pitchFamily="34" charset="0"/>
+                <ns1:ea typeface="Arial" pitchFamily="34" charset="-122"/>
+                <ns1:cs typeface="Arial" pitchFamily="34" charset="-120"/>
+              </ns1:rPr>
+              <ns1:t>The course includes </ns1:t>
+            </ns1:r>
+            <ns1:pPr algn="l" indent="0" marL="0">
+              <ns1:lnSpc>
+                <ns1:spcPts val="2000"/>
+              </ns1:lnSpc>
+              <ns1:spcBef>
+                <ns1:spcPts val="500"/>
+              </ns1:spcBef>
+              <ns1:buNone/>
+            </ns1:pPr>
+            <ns1:r>
+              <ns1:rPr lang="en-US" sz="1650" b="1" dirty="0">
+                <ns1:solidFill>
+                  <ns1:srgbClr val="0550AE"/>
+                </ns1:solidFill>
+                <ns1:latin typeface="Courier New" pitchFamily="34" charset="0"/>
+                <ns1:ea typeface="Courier New" pitchFamily="34" charset="-122"/>
+                <ns1:cs typeface="Courier New" pitchFamily="34" charset="-120"/>
+              </ns1:rPr>
+              <ns1:t>.github/skills/book-app-reviewer/</ns1:t>
+            </ns1:r>
+            <ns1:pPr algn="l" indent="0" marL="0">
+              <ns1:lnSpc>
+                <ns1:spcPts val="2000"/>
+              </ns1:lnSpc>
+              <ns1:spcBef>
+                <ns1:spcPts val="500"/>
+              </ns1:spcBef>
+              <ns1:buNone/>
+            </ns1:pPr>
+            <ns1:r>
+              <ns1:rPr lang="en-US" sz="1650" dirty="0">
+                <ns1:solidFill>
+                  <ns1:srgbClr val="59636E"/>
+                </ns1:solidFill>
+                <ns1:latin typeface="Arial" pitchFamily="34" charset="0"/>
+                <ns1:ea typeface="Arial" pitchFamily="34" charset="-122"/>
+                <ns1:cs typeface="Arial" pitchFamily="34" charset="-120"/>
+              </ns1:rPr>
+              <ns1:t>.</ns1:t>
+            </ns1:r>
+            <ns1:endParaRPr lang="en-US" sz="1650" dirty="0"/>
+          </ns1:p>
+        </ns0:txBody>
+      </ns0:sp>
+      <ns0:sp>
+        <ns0:nvSpPr>
+          <ns0:cNvPr id="9" name="Text 5"/>
+          <ns0:cNvSpPr/>
+          <ns0:nvPr/>
+        </ns0:nvSpPr>
+        <ns0:spPr>
+          <ns1:xfrm>
+            <ns1:off x="507950" y="1574750"/>
+            <ns1:ext cx="3810000" cy="2942183"/>
+          </ns1:xfrm>
+          <ns1:prstGeom prst="roundRect">
+            <ns1:avLst>
+              <ns1:gd name="adj" fmla="val 3453"/>
+            </ns1:avLst>
+          </ns1:prstGeom>
+          <ns1:solidFill>
+            <ns1:srgbClr val="F6F8FA"/>
+          </ns1:solidFill>
+          <ns1:ln w="9525">
+            <ns1:solidFill>
+              <ns1:srgbClr val="D1D9E0"/>
+            </ns1:solidFill>
+          </ns1:ln>
+        </ns0:spPr>
+        <ns0:txBody>
+          <ns1:bodyPr wrap="square" rtlCol="0" anchor="ctr"/>
+          <ns1:lstStyle/>
+          <ns1:p>
+            <ns1:pPr indent="0" marL="0">
+              <ns1:buNone/>
+            </ns1:pPr>
+            <ns1:endParaRPr lang="en-US" dirty="0"/>
+          </ns1:p>
+        </ns0:txBody>
+      </ns0:sp>
+      <ns0:sp>
+        <ns0:nvSpPr>
+          <ns0:cNvPr id="10" name="Text 6"/>
+          <ns0:cNvSpPr/>
+          <ns0:nvPr/>
+        </ns0:nvSpPr>
+        <ns0:spPr>
+          <ns1:xfrm>
+            <ns1:off x="517475" y="1584275"/>
+            <ns1:ext cx="3790950" cy="238125"/>
+          </ns1:xfrm>
+          <ns1:prstGeom prst="rect">
+            <ns1:avLst/>
+          </ns1:prstGeom>
+          <ns1:solidFill>
+            <ns1:srgbClr val="EFF2F5"/>
+          </ns1:solidFill>
+          <ns1:ln/>
+        </ns0:spPr>
+        <ns0:txBody>
+          <ns1:bodyPr wrap="square" rtlCol="0" anchor="ctr"/>
+          <ns1:lstStyle/>
+          <ns1:p>
+            <ns1:pPr indent="0" marL="0">
+              <ns1:buNone/>
+            </ns1:pPr>
+            <ns1:endParaRPr lang="en-US" dirty="0"/>
+          </ns1:p>
+        </ns0:txBody>
+      </ns0:sp>
+      <ns0:sp>
+        <ns0:nvSpPr>
+          <ns0:cNvPr id="11" name="Shape 7"/>
+          <ns0:cNvSpPr/>
+          <ns0:nvPr/>
+        </ns0:nvSpPr>
+        <ns0:spPr>
+          <ns1:xfrm>
+            <ns1:off x="517475" y="1817638"/>
+            <ns1:ext cx="3790950" cy="0"/>
+          </ns1:xfrm>
+          <ns1:prstGeom prst="line">
+            <ns1:avLst/>
+          </ns1:prstGeom>
+          <ns1:noFill/>
+          <ns1:ln w="9525">
+            <ns1:solidFill>
+              <ns1:srgbClr val="D1D9E0"/>
+            </ns1:solidFill>
+            <ns1:prstDash val="solid"/>
+          </ns1:ln>
+        </ns0:spPr>
+      </ns0:sp>
+      <ns0:sp>
+        <ns0:nvSpPr>
+          <ns0:cNvPr id="12" name="Text 8"/>
+          <ns0:cNvSpPr/>
+          <ns0:nvPr/>
+        </ns0:nvSpPr>
+        <ns0:spPr>
+          <ns1:xfrm>
+            <ns1:off x="631775" y="1654076"/>
+            <ns1:ext cx="88850" cy="88850"/>
+          </ns1:xfrm>
+          <ns1:prstGeom prst="roundRect">
+            <ns1:avLst>
+              <ns1:gd name="adj" fmla="val 1029150"/>
+            </ns1:avLst>
+          </ns1:prstGeom>
+          <ns1:solidFill>
+            <ns1:srgbClr val="FF5F57"/>
+          </ns1:solidFill>
+          <ns1:ln/>
+        </ns0:spPr>
+        <ns0:txBody>
+          <ns1:bodyPr wrap="square" rtlCol="0" anchor="ctr"/>
+          <ns1:lstStyle/>
+          <ns1:p>
+            <ns1:pPr indent="0" marL="0">
+              <ns1:buNone/>
+            </ns1:pPr>
+            <ns1:endParaRPr lang="en-US" dirty="0"/>
+          </ns1:p>
+        </ns0:txBody>
+      </ns0:sp>
+      <ns0:sp>
+        <ns0:nvSpPr>
+          <ns0:cNvPr id="13" name="Text 9"/>
+          <ns0:cNvSpPr/>
+          <ns0:nvPr/>
+        </ns0:nvSpPr>
+        <ns0:spPr>
+          <ns1:xfrm>
+            <ns1:off x="771376" y="1654076"/>
+            <ns1:ext cx="88850" cy="88850"/>
+          </ns1:xfrm>
+          <ns1:prstGeom prst="roundRect">
+            <ns1:avLst>
+              <ns1:gd name="adj" fmla="val 1029150"/>
+            </ns1:avLst>
+          </ns1:prstGeom>
+          <ns1:solidFill>
+            <ns1:srgbClr val="FEBC2E"/>
+          </ns1:solidFill>
+          <ns1:ln/>
+        </ns0:spPr>
+        <ns0:txBody>
+          <ns1:bodyPr wrap="square" rtlCol="0" anchor="ctr"/>
+          <ns1:lstStyle/>
+          <ns1:p>
+            <ns1:pPr indent="0" marL="0">
+              <ns1:buNone/>
+            </ns1:pPr>
+            <ns1:endParaRPr lang="en-US" dirty="0"/>
+          </ns1:p>
+        </ns0:txBody>
+      </ns0:sp>
+      <ns0:sp>
+        <ns0:nvSpPr>
+          <ns0:cNvPr id="14" name="Text 10"/>
+          <ns0:cNvSpPr/>
+          <ns0:nvPr/>
+        </ns0:nvSpPr>
+        <ns0:spPr>
+          <ns1:xfrm>
+            <ns1:off x="910977" y="1654076"/>
+            <ns1:ext cx="88850" cy="88850"/>
+          </ns1:xfrm>
+          <ns1:prstGeom prst="roundRect">
+            <ns1:avLst>
+              <ns1:gd name="adj" fmla="val 1029150"/>
+            </ns1:avLst>
+          </ns1:prstGeom>
+          <ns1:solidFill>
+            <ns1:srgbClr val="28C840"/>
+          </ns1:solidFill>
+          <ns1:ln/>
+        </ns0:spPr>
+        <ns0:txBody>
+          <ns1:bodyPr wrap="square" rtlCol="0" anchor="ctr"/>
+          <ns1:lstStyle/>
+          <ns1:p>
+            <ns1:pPr indent="0" marL="0">
+              <ns1:buNone/>
+            </ns1:pPr>
+            <ns1:endParaRPr lang="en-US" dirty="0"/>
+          </ns1:p>
+        </ns0:txBody>
+      </ns0:sp>
+      <ns0:sp>
+        <ns0:nvSpPr>
+          <ns0:cNvPr id="15" name="Text 11"/>
+          <ns0:cNvSpPr/>
+          <ns0:nvPr/>
+        </ns0:nvSpPr>
+        <ns0:spPr>
+          <ns1:xfrm>
+            <ns1:off x="1126778" y="1612850"/>
+            <ns1:ext cx="715152" cy="171450"/>
+          </ns1:xfrm>
+          <ns1:prstGeom prst="rect">
+            <ns1:avLst/>
+          </ns1:prstGeom>
+          <ns1:noFill/>
+          <ns1:ln/>
+        </ns0:spPr>
+        <ns0:txBody>
+          <ns1:bodyPr wrap="square" lIns="0" tIns="0" rIns="0" bIns="0" rtlCol="0" anchor="t"/>
+          <ns1:lstStyle/>
+          <ns1:p>
+            <ns1:pPr algn="l" indent="0" marL="0">
+              <ns1:buNone/>
+            </ns1:pPr>
+            <ns1:r>
+              <ns1:rPr lang="en-US" sz="1150" dirty="0">
+                <ns1:solidFill>
+                  <ns1:srgbClr val="59636E"/>
+                </ns1:solidFill>
+                <ns1:latin typeface="Courier New" pitchFamily="34" charset="0"/>
+                <ns1:ea typeface="Courier New" pitchFamily="34" charset="-122"/>
+                <ns1:cs typeface="Courier New" pitchFamily="34" charset="-120"/>
+              </ns1:rPr>
+              <ns1:t>SKILL.md</ns1:t>
+            </ns1:r>
+            <ns1:endParaRPr lang="en-US" sz="1150" dirty="0"/>
+          </ns1:p>
+        </ns0:txBody>
+      </ns0:sp>
+      <ns0:sp>
+        <ns0:nvSpPr>
+          <ns0:cNvPr id="16" name="Text 12"/>
+          <ns0:cNvSpPr/>
+          <ns0:nvPr/>
+        </ns0:nvSpPr>
+        <ns0:spPr>
+          <ns1:xfrm>
+            <ns1:off x="669875" y="1949351"/>
+            <ns1:ext cx="3555873" cy="221010"/>
+          </ns1:xfrm>
+          <ns1:prstGeom prst="rect">
+            <ns1:avLst/>
+          </ns1:prstGeom>
+          <ns1:noFill/>
+          <ns1:ln/>
+        </ns0:spPr>
+        <ns0:txBody>
+          <ns1:bodyPr wrap="square" lIns="0" tIns="0" rIns="0" bIns="0" rtlCol="0" anchor="t"/>
+          <ns1:lstStyle/>
+          <ns1:p>
+            <ns1:pPr algn="l" indent="0" marL="0">
+              <ns1:lnSpc>
+                <ns1:spcPts val="1740"/>
+              </ns1:lnSpc>
+              <ns1:buNone/>
+            </ns1:pPr>
+            <ns1:r>
+              <ns1:rPr lang="en-US" sz="1350" dirty="0">
+                <ns1:solidFill>
+                  <ns1:srgbClr val="818B98"/>
+                </ns1:solidFill>
+                <ns1:latin typeface="Courier New" pitchFamily="34" charset="0"/>
+                <ns1:ea typeface="Courier New" pitchFamily="34" charset="-122"/>
+                <ns1:cs typeface="Courier New" pitchFamily="34" charset="-120"/>
+              </ns1:rPr>
+              <ns1:t>---</ns1:t>
+            </ns1:r>
+            <ns1:endParaRPr lang="en-US" sz="1350" dirty="0"/>
+          </ns1:p>
+        </ns0:txBody>
+      </ns0:sp>
+      <ns0:sp>
+        <ns0:nvSpPr>
+          <ns0:cNvPr id="17" name="Text 13"/>
+          <ns0:cNvSpPr/>
+          <ns0:nvPr/>
+        </ns0:nvSpPr>
+        <ns0:spPr>
+          <ns1:xfrm>
+            <ns1:off x="669875" y="2170361"/>
+            <ns1:ext cx="3555873" cy="221010"/>
+          </ns1:xfrm>
+          <ns1:prstGeom prst="rect">
+            <ns1:avLst/>
+          </ns1:prstGeom>
+          <ns1:noFill/>
+          <ns1:ln/>
+        </ns0:spPr>
+        <ns0:txBody>
+          <ns1:bodyPr wrap="square" lIns="0" tIns="0" rIns="0" bIns="0" rtlCol="0" anchor="t"/>
+          <ns1:lstStyle/>
+          <ns1:p>
+            <ns1:pPr algn="l" indent="0" marL="0">
+              <ns1:lnSpc>
+                <ns1:spcPts val="1740"/>
+              </ns1:lnSpc>
+              <ns1:buNone/>
+            </ns1:pPr>
+            <ns1:r>
+              <ns1:rPr lang="en-US" sz="1350" dirty="0">
+                <ns1:solidFill>
+                  <ns1:srgbClr val="8250DF"/>
+                </ns1:solidFill>
+                <ns1:latin typeface="Courier New" pitchFamily="34" charset="0"/>
+                <ns1:ea typeface="Courier New" pitchFamily="34" charset="-122"/>
+                <ns1:cs typeface="Courier New" pitchFamily="34" charset="-120"/>
+              </ns1:rPr>
+              <ns1:t>name</ns1:t>
+            </ns1:r>
+            <ns1:pPr algn="l" indent="0" marL="0">
+              <ns1:lnSpc>
+                <ns1:spcPts val="1740"/>
+              </ns1:lnSpc>
+              <ns1:buNone/>
+            </ns1:pPr>
+            <ns1:r>
+              <ns1:rPr lang="en-US" sz="1350" dirty="0">
+                <ns1:solidFill>
+                  <ns1:srgbClr val="1F2328"/>
+                </ns1:solidFill>
+                <ns1:latin typeface="Courier New" pitchFamily="34" charset="0"/>
+                <ns1:ea typeface="Courier New" pitchFamily="34" charset="-122"/>
+                <ns1:cs typeface="Courier New" pitchFamily="34" charset="-120"/>
+              </ns1:rPr>
+              <ns1:t>: book-app-reviewer</ns1:t>
+            </ns1:r>
+            <ns1:endParaRPr lang="en-US" sz="1350" dirty="0"/>
+          </ns1:p>
+        </ns0:txBody>
+      </ns0:sp>
+      <ns0:sp>
+        <ns0:nvSpPr>
+          <ns0:cNvPr id="18" name="Text 14"/>
+          <ns0:cNvSpPr/>
+          <ns0:nvPr/>
+        </ns0:nvSpPr>
+        <ns0:spPr>
+          <ns1:xfrm>
+            <ns1:off x="669875" y="2391370"/>
+            <ns1:ext cx="3555873" cy="221010"/>
+          </ns1:xfrm>
+          <ns1:prstGeom prst="rect">
+            <ns1:avLst/>
+          </ns1:prstGeom>
+          <ns1:noFill/>
+          <ns1:ln/>
+        </ns0:spPr>
+        <ns0:txBody>
+          <ns1:bodyPr wrap="square" lIns="0" tIns="0" rIns="0" bIns="0" rtlCol="0" anchor="t"/>
+          <ns1:lstStyle/>
+          <ns1:p>
+            <ns1:pPr algn="l" indent="0" marL="0">
+              <ns1:lnSpc>
+                <ns1:spcPts val="1740"/>
+              </ns1:lnSpc>
+              <ns1:buNone/>
+            </ns1:pPr>
+            <ns1:r>
+              <ns1:rPr lang="en-US" sz="1350" dirty="0">
+                <ns1:solidFill>
+                  <ns1:srgbClr val="8250DF"/>
+                </ns1:solidFill>
+                <ns1:latin typeface="Courier New" pitchFamily="34" charset="0"/>
+                <ns1:ea typeface="Courier New" pitchFamily="34" charset="-122"/>
+                <ns1:cs typeface="Courier New" pitchFamily="34" charset="-120"/>
+              </ns1:rPr>
+              <ns1:t>description: Review changes in</ns1:t>
+            </ns1:r>
+            <ns1:pPr algn="l" indent="0" marL="0">
+              <ns1:lnSpc>
+                <ns1:spcPts val="1740"/>
+              </ns1:lnSpc>
+              <ns1:buNone/>
+            </ns1:pPr>
+            <ns1:r>
+              <ns1:rPr lang="en-US" sz="1350" dirty="0">
+                <ns1:solidFill>
+                  <ns1:srgbClr val="1F2328"/>
+                </ns1:solidFill>
+                <ns1:latin typeface="Courier New" pitchFamily="34" charset="0"/>
+                <ns1:ea typeface="Courier New" pitchFamily="34" charset="-122"/>
+                <ns1:cs typeface="Courier New" pitchFamily="34" charset="-120"/>
+              </ns1:rPr>
+              <ns1:t/>
+            </ns1:r>
+            <ns1:endParaRPr lang="en-US" sz="1350" dirty="0"/>
+          </ns1:p>
+        </ns0:txBody>
+      </ns0:sp>
+      <ns0:sp>
+        <ns0:nvSpPr>
+          <ns0:cNvPr id="19" name="Text 15"/>
+          <ns0:cNvSpPr/>
+          <ns0:nvPr/>
+        </ns0:nvSpPr>
+        <ns0:spPr>
+          <ns1:xfrm>
+            <ns1:off x="669875" y="2612380"/>
+            <ns1:ext cx="3555873" cy="221010"/>
+          </ns1:xfrm>
+          <ns1:prstGeom prst="rect">
+            <ns1:avLst/>
+          </ns1:prstGeom>
+          <ns1:noFill/>
+          <ns1:ln/>
+        </ns0:spPr>
+        <ns0:txBody>
+          <ns1:bodyPr wrap="square" lIns="0" tIns="0" rIns="0" bIns="0" rtlCol="0" anchor="t"/>
+          <ns1:lstStyle/>
+          <ns1:p>
+            <ns1:pPr algn="l" indent="0" marL="0">
+              <ns1:lnSpc>
+                <ns1:spcPts val="1740"/>
+              </ns1:lnSpc>
+              <ns1:buNone/>
+            </ns1:pPr>
+            <ns1:r>
+              <ns1:rPr lang="en-US" sz="1350" dirty="0">
+                <ns1:solidFill>
+                  <ns1:srgbClr val="1F2328"/>
+                </ns1:solidFill>
+                <ns1:latin typeface="Courier New" pitchFamily="34" charset="0"/>
+                <ns1:ea typeface="Courier New" pitchFamily="34" charset="-122"/>
+                <ns1:cs typeface="Courier New" pitchFamily="34" charset="-120"/>
+              </ns1:rPr>
+              <ns1:t xml:space="preserve">  samples/book-app-web for</ns1:t>
+            </ns1:r>
+            <ns1:endParaRPr lang="en-US" sz="1350" dirty="0"/>
+          </ns1:p>
+        </ns0:txBody>
+      </ns0:sp>
+      <ns0:sp>
+        <ns0:nvSpPr>
+          <ns0:cNvPr id="20" name="Text 16"/>
+          <ns0:cNvSpPr/>
+          <ns0:nvPr/>
+        </ns0:nvSpPr>
+        <ns0:spPr>
+          <ns1:xfrm>
+            <ns1:off x="669875" y="2833390"/>
+            <ns1:ext cx="3555873" cy="221010"/>
+          </ns1:xfrm>
+          <ns1:prstGeom prst="rect">
+            <ns1:avLst/>
+          </ns1:prstGeom>
+          <ns1:noFill/>
+          <ns1:ln/>
+        </ns0:spPr>
+        <ns0:txBody>
+          <ns1:bodyPr wrap="square" lIns="0" tIns="0" rIns="0" bIns="0" rtlCol="0" anchor="t"/>
+          <ns1:lstStyle/>
+          <ns1:p>
+            <ns1:pPr algn="l" indent="0" marL="0">
+              <ns1:lnSpc>
+                <ns1:spcPts val="1740"/>
+              </ns1:lnSpc>
+              <ns1:buNone/>
+            </ns1:pPr>
+            <ns1:r>
+              <ns1:rPr lang="en-US" sz="1350" dirty="0">
+                <ns1:solidFill>
+                  <ns1:srgbClr val="1F2328"/>
+                </ns1:solidFill>
+                <ns1:latin typeface="Courier New" pitchFamily="34" charset="0"/>
+                <ns1:ea typeface="Courier New" pitchFamily="34" charset="-122"/>
+                <ns1:cs typeface="Courier New" pitchFamily="34" charset="-120"/>
+              </ns1:rPr>
+              <ns1:t xml:space="preserve">  accessibility, layout, tests,</ns1:t>
+            </ns1:r>
+            <ns1:endParaRPr lang="en-US" sz="1350" dirty="0"/>
+          </ns1:p>
+        </ns0:txBody>
+      </ns0:sp>
+      <ns0:sp>
+        <ns0:nvSpPr>
+          <ns0:cNvPr id="21" name="Text 17"/>
+          <ns0:cNvSpPr/>
+          <ns0:nvPr/>
+        </ns0:nvSpPr>
+        <ns0:spPr>
+          <ns1:xfrm>
+            <ns1:off x="669875" y="3054400"/>
+            <ns1:ext cx="3555873" cy="221010"/>
+          </ns1:xfrm>
+          <ns1:prstGeom prst="rect">
+            <ns1:avLst/>
+          </ns1:prstGeom>
+          <ns1:noFill/>
+          <ns1:ln/>
+        </ns0:spPr>
+        <ns0:txBody>
+          <ns1:bodyPr wrap="square" lIns="0" tIns="0" rIns="0" bIns="0" rtlCol="0" anchor="t"/>
+          <ns1:lstStyle/>
+          <ns1:p>
+            <ns1:pPr algn="l" indent="0" marL="0">
+              <ns1:lnSpc>
+                <ns1:spcPts val="1740"/>
+              </ns1:lnSpc>
+              <ns1:buNone/>
+            </ns1:pPr>
+            <ns1:r>
+              <ns1:rPr lang="en-US" sz="1350" dirty="0">
+                <ns1:solidFill>
+                  <ns1:srgbClr val="1F2328"/>
+                </ns1:solidFill>
+                <ns1:latin typeface="Courier New" pitchFamily="34" charset="0"/>
+                <ns1:ea typeface="Courier New" pitchFamily="34" charset="-122"/>
+                <ns1:cs typeface="Courier New" pitchFamily="34" charset="-120"/>
+              </ns1:rPr>
+              <ns1:t xml:space="preserve">  and small changes.</ns1:t>
+            </ns1:r>
+            <ns1:endParaRPr lang="en-US" sz="1350" dirty="0"/>
+          </ns1:p>
+        </ns0:txBody>
+      </ns0:sp>
+      <ns0:sp>
+        <ns0:nvSpPr>
+          <ns0:cNvPr id="22" name="Text 18"/>
+          <ns0:cNvSpPr/>
+          <ns0:nvPr/>
+        </ns0:nvSpPr>
+        <ns0:spPr>
+          <ns1:xfrm>
+            <ns1:off x="669875" y="3275409"/>
+            <ns1:ext cx="3555873" cy="221010"/>
+          </ns1:xfrm>
+          <ns1:prstGeom prst="rect">
+            <ns1:avLst/>
+          </ns1:prstGeom>
+          <ns1:noFill/>
+          <ns1:ln/>
+        </ns0:spPr>
+        <ns0:txBody>
+          <ns1:bodyPr wrap="square" lIns="0" tIns="0" rIns="0" bIns="0" rtlCol="0" anchor="t"/>
+          <ns1:lstStyle/>
+          <ns1:p>
+            <ns1:pPr algn="l" indent="0" marL="0">
+              <ns1:lnSpc>
+                <ns1:spcPts val="1740"/>
+              </ns1:lnSpc>
+              <ns1:buNone/>
+            </ns1:pPr>
+            <ns1:r>
+              <ns1:rPr lang="en-US" sz="1350" dirty="0">
+                <ns1:solidFill>
+                  <ns1:srgbClr val="818B98"/>
+                </ns1:solidFill>
+                <ns1:latin typeface="Courier New" pitchFamily="34" charset="0"/>
+                <ns1:ea typeface="Courier New" pitchFamily="34" charset="-122"/>
+                <ns1:cs typeface="Courier New" pitchFamily="34" charset="-120"/>
+              </ns1:rPr>
+              <ns1:t>---</ns1:t>
+            </ns1:r>
+            <ns1:endParaRPr lang="en-US" sz="1350" dirty="0"/>
+          </ns1:p>
+        </ns0:txBody>
+      </ns0:sp>
+      <ns0:sp>
+        <ns0:nvSpPr>
+          <ns0:cNvPr id="23" name="Text 19"/>
+          <ns0:cNvSpPr/>
+          <ns0:nvPr/>
+        </ns0:nvSpPr>
+        <ns0:spPr>
+          <ns1:xfrm>
+            <ns1:off x="669875" y="3496419"/>
+            <ns1:ext cx="3555873" cy="221010"/>
+          </ns1:xfrm>
+          <ns1:prstGeom prst="rect">
+            <ns1:avLst/>
+          </ns1:prstGeom>
+          <ns1:noFill/>
+          <ns1:ln/>
+        </ns0:spPr>
+        <ns0:txBody>
+          <ns1:bodyPr wrap="square" lIns="0" tIns="0" rIns="0" bIns="0" rtlCol="0" anchor="t"/>
+          <ns1:lstStyle/>
+          <ns1:p>
+            <ns1:pPr algn="l" indent="0" marL="0">
+              <ns1:lnSpc>
+                <ns1:spcPts val="1740"/>
+              </ns1:lnSpc>
+              <ns1:buNone/>
+            </ns1:pPr>
+            <ns1:r>
+              <ns1:rPr lang="en-US" sz="1350" dirty="0">
+                <ns1:solidFill>
+                  <ns1:srgbClr val="818B98"/>
+                </ns1:solidFill>
+                <ns1:latin typeface="Courier New" pitchFamily="34" charset="0"/>
+                <ns1:ea typeface="Courier New" pitchFamily="34" charset="-122"/>
+                <ns1:cs typeface="Courier New" pitchFamily="34" charset="-120"/>
+              </ns1:rPr>
+              <ns1:t># Review focus</ns1:t>
+            </ns1:r>
+            <ns1:endParaRPr lang="en-US" sz="1350" dirty="0"/>
+          </ns1:p>
+        </ns0:txBody>
+      </ns0:sp>
+      <ns0:sp>
+        <ns0:nvSpPr>
+          <ns0:cNvPr id="24" name="Text 20"/>
+          <ns0:cNvSpPr/>
+          <ns0:nvPr/>
+        </ns0:nvSpPr>
+        <ns0:spPr>
+          <ns1:xfrm>
+            <ns1:off x="669875" y="3717429"/>
+            <ns1:ext cx="3555873" cy="221010"/>
+          </ns1:xfrm>
+          <ns1:prstGeom prst="rect">
+            <ns1:avLst/>
+          </ns1:prstGeom>
+          <ns1:noFill/>
+          <ns1:ln/>
+        </ns0:spPr>
+        <ns0:txBody>
+          <ns1:bodyPr wrap="square" lIns="0" tIns="0" rIns="0" bIns="0" rtlCol="0" anchor="t"/>
+          <ns1:lstStyle/>
+          <ns1:p>
+            <ns1:pPr algn="l" indent="0" marL="0">
+              <ns1:lnSpc>
+                <ns1:spcPts val="1740"/>
+              </ns1:lnSpc>
+              <ns1:buNone/>
+            </ns1:pPr>
+            <ns1:r>
+              <ns1:rPr lang="en-US" sz="1350" dirty="0">
+                <ns1:solidFill>
+                  <ns1:srgbClr val="1F2328"/>
+                </ns1:solidFill>
+                <ns1:latin typeface="Courier New" pitchFamily="34" charset="0"/>
+                <ns1:ea typeface="Courier New" pitchFamily="34" charset="-122"/>
+                <ns1:cs typeface="Courier New" pitchFamily="34" charset="-120"/>
+              </ns1:rPr>
+              <ns1:t>​- Stack, tests, and build</ns1:t>
+            </ns1:r>
+            <ns1:endParaRPr lang="en-US" sz="1350" dirty="0"/>
+          </ns1:p>
+        </ns0:txBody>
+      </ns0:sp>
+      <ns0:sp>
+        <ns0:nvSpPr>
+          <ns0:cNvPr id="25" name="Text 21"/>
+          <ns0:cNvSpPr/>
+          <ns0:nvPr/>
+        </ns0:nvSpPr>
+        <ns0:spPr>
+          <ns1:xfrm>
+            <ns1:off x="669875" y="3938439"/>
+            <ns1:ext cx="3555873" cy="221010"/>
+          </ns1:xfrm>
+          <ns1:prstGeom prst="rect">
+            <ns1:avLst/>
+          </ns1:prstGeom>
+          <ns1:noFill/>
+          <ns1:ln/>
+        </ns0:spPr>
+        <ns0:txBody>
+          <ns1:bodyPr wrap="square" lIns="0" tIns="0" rIns="0" bIns="0" rtlCol="0" anchor="t"/>
+          <ns1:lstStyle/>
+          <ns1:p>
+            <ns1:pPr algn="l" indent="0" marL="0">
+              <ns1:lnSpc>
+                <ns1:spcPts val="1740"/>
+              </ns1:lnSpc>
+              <ns1:buNone/>
+            </ns1:pPr>
+            <ns1:r>
+              <ns1:rPr lang="en-US" sz="1350" dirty="0">
+                <ns1:solidFill>
+                  <ns1:srgbClr val="1F2328"/>
+                </ns1:solidFill>
+                <ns1:latin typeface="Courier New" pitchFamily="34" charset="0"/>
+                <ns1:ea typeface="Courier New" pitchFamily="34" charset="-122"/>
+                <ns1:cs typeface="Courier New" pitchFamily="34" charset="-120"/>
+              </ns1:rPr>
+              <ns1:t>​- Accessibility</ns1:t>
+            </ns1:r>
+            <ns1:endParaRPr lang="en-US" sz="1350" dirty="0"/>
+          </ns1:p>
+        </ns0:txBody>
+      </ns0:sp>
+      <ns0:sp>
+        <ns0:nvSpPr>
+          <ns0:cNvPr id="26" name="Text 22"/>
+          <ns0:cNvSpPr/>
+          <ns0:nvPr/>
+        </ns0:nvSpPr>
+        <ns0:spPr>
+          <ns1:xfrm>
+            <ns1:off x="669875" y="4159448"/>
+            <ns1:ext cx="3555873" cy="221010"/>
+          </ns1:xfrm>
+          <ns1:prstGeom prst="rect">
+            <ns1:avLst/>
+          </ns1:prstGeom>
+          <ns1:noFill/>
+          <ns1:ln/>
+        </ns0:spPr>
+        <ns0:txBody>
+          <ns1:bodyPr wrap="square" lIns="0" tIns="0" rIns="0" bIns="0" rtlCol="0" anchor="t"/>
+          <ns1:lstStyle/>
+          <ns1:p>
+            <ns1:pPr algn="l" indent="0" marL="0">
+              <ns1:lnSpc>
+                <ns1:spcPts val="1740"/>
+              </ns1:lnSpc>
+              <ns1:buNone/>
+            </ns1:pPr>
+            <ns1:r>
+              <ns1:rPr lang="en-US" sz="1350" dirty="0">
+                <ns1:solidFill>
+                  <ns1:srgbClr val="1F2328"/>
+                </ns1:solidFill>
+                <ns1:latin typeface="Courier New" pitchFamily="34" charset="0"/>
+                <ns1:ea typeface="Courier New" pitchFamily="34" charset="-122"/>
+                <ns1:cs typeface="Courier New" pitchFamily="34" charset="-120"/>
+              </ns1:rPr>
+              <ns1:t>​- Responsive layout</ns1:t>
+            </ns1:r>
+            <ns1:endParaRPr lang="en-US" sz="1350" dirty="0"/>
+          </ns1:p>
+        </ns0:txBody>
+      </ns0:sp>
+      <ns0:sp>
+        <ns0:nvSpPr>
+          <ns0:cNvPr id="27" name="Text 23"/>
+          <ns0:cNvSpPr/>
+          <ns0:nvPr/>
+        </ns0:nvSpPr>
+        <ns0:spPr>
+          <ns1:xfrm>
+            <ns1:off x="4571851" y="2066181"/>
+            <ns1:ext cx="381000" cy="381000"/>
+          </ns1:xfrm>
+          <ns1:prstGeom prst="roundRect">
+            <ns1:avLst>
+              <ns1:gd name="adj" fmla="val 23333"/>
+            </ns1:avLst>
+          </ns1:prstGeom>
+          <ns1:solidFill>
+            <ns1:srgbClr val="FBEFFF"/>
+          </ns1:solidFill>
+          <ns1:ln/>
+        </ns0:spPr>
+        <ns0:txBody>
+          <ns1:bodyPr wrap="square" rtlCol="0" anchor="ctr"/>
+          <ns1:lstStyle/>
+          <ns1:p>
+            <ns1:pPr indent="0" marL="0">
+              <ns1:buNone/>
+            </ns1:pPr>
+            <ns1:endParaRPr lang="en-US" dirty="0"/>
+          </ns1:p>
+        </ns0:txBody>
+      </ns0:sp>
+      <ns0:pic>
+        <ns0:nvPicPr>
+          <ns0:cNvPr id="28" name="Image 2" descr="">
+            <ns1:extLst>
+              <ns1:ext uri="{C183D7F6-B498-43B3-948B-1728B52AA6E4}">
+                <ns2:decorative val="1"/>
+              </ns1:ext>
+            </ns1:extLst>
+          </ns0:cNvPr>
+          <ns0:cNvPicPr>
+            <ns1:picLocks noChangeAspect="1"/>
+          </ns0:cNvPicPr>
+          <ns0:nvPr/>
+        </ns0:nvPicPr>
+        <ns0:blipFill>
+          <ns1:blip ns3:embed="rId4"/>
+          <ns1:stretch>
+            <ns1:fillRect/>
+          </ns1:stretch>
+        </ns0:blipFill>
+        <ns0:spPr>
+          <ns1:xfrm>
+            <ns1:off x="4654451" y="2148780"/>
+            <ns1:ext cx="215801" cy="215801"/>
+          </ns1:xfrm>
+          <ns1:prstGeom prst="rect">
+            <ns1:avLst/>
+          </ns1:prstGeom>
+        </ns0:spPr>
+      </ns0:pic>
+      <ns0:sp>
+        <ns0:nvSpPr>
+          <ns0:cNvPr id="29" name="Text 24"/>
+          <ns0:cNvSpPr/>
+          <ns0:nvPr/>
+        </ns0:nvSpPr>
+        <ns0:spPr>
+          <ns1:xfrm>
+            <ns1:off x="5105251" y="1926878"/>
+            <ns1:ext cx="3601263" cy="228600"/>
+          </ns1:xfrm>
+          <ns1:prstGeom prst="rect">
+            <ns1:avLst/>
+          </ns1:prstGeom>
+          <ns1:noFill/>
+          <ns1:ln/>
+        </ns0:spPr>
+        <ns0:txBody>
+          <ns1:bodyPr wrap="square" lIns="0" tIns="0" rIns="0" bIns="0" rtlCol="0" anchor="t"/>
+          <ns1:lstStyle/>
+          <ns1:p>
+            <ns1:pPr algn="l" indent="0" marL="0">
+              <ns1:buNone/>
+            </ns1:pPr>
+            <ns1:r>
+              <ns1:rPr lang="en-US" sz="1550" b="1" dirty="0">
+                <ns1:solidFill>
+                  <ns1:srgbClr val="1F2328"/>
+                </ns1:solidFill>
+                <ns1:latin typeface="Arial" pitchFamily="34" charset="0"/>
+                <ns1:ea typeface="Arial" pitchFamily="34" charset="-122"/>
+                <ns1:cs typeface="Arial" pitchFamily="34" charset="-120"/>
+              </ns1:rPr>
+              <ns1:t>Frontmatter</ns1:t>
+            </ns1:r>
+            <ns1:endParaRPr lang="en-US" sz="1550" dirty="0"/>
+          </ns1:p>
+        </ns0:txBody>
+      </ns0:sp>
+      <ns0:sp>
+        <ns0:nvSpPr>
+          <ns0:cNvPr id="30" name="Text 25"/>
+          <ns0:cNvSpPr/>
+          <ns0:nvPr/>
+        </ns0:nvSpPr>
+        <ns0:spPr>
+          <ns1:xfrm>
+            <ns1:off x="5105251" y="2180779"/>
+            <ns1:ext cx="3601263" cy="405705"/>
+          </ns1:xfrm>
+          <ns1:prstGeom prst="rect">
+            <ns1:avLst/>
+          </ns1:prstGeom>
+          <ns1:noFill/>
+          <ns1:ln/>
+        </ns0:spPr>
+        <ns0:txBody>
+          <ns1:bodyPr wrap="square" lIns="0" tIns="0" rIns="0" bIns="0" rtlCol="0" anchor="t"/>
+          <ns1:lstStyle/>
+          <ns1:p>
+            <ns1:pPr algn="l" indent="0" marL="0">
+              <ns1:lnSpc>
+                <ns1:spcPts val="1560"/>
+              </ns1:lnSpc>
+              <ns1:buNone/>
+            </ns1:pPr>
+            <ns1:r>
+              <ns1:rPr lang="en-US" sz="1350" dirty="0">
+                <ns1:solidFill>
+                  <ns1:srgbClr val="59636E"/>
+                </ns1:solidFill>
+                <ns1:latin typeface="Arial" pitchFamily="34" charset="0"/>
+                <ns1:ea typeface="Arial" pitchFamily="34" charset="-122"/>
+                <ns1:cs typeface="Arial" pitchFamily="34" charset="-120"/>
+              </ns1:rPr>
+              <ns1:t>The </ns1:t>
+            </ns1:r>
+            <ns1:pPr algn="l" indent="0" marL="0">
+              <ns1:lnSpc>
+                <ns1:spcPts val="1560"/>
+              </ns1:lnSpc>
+              <ns1:buNone/>
+            </ns1:pPr>
+            <ns1:r>
+              <ns1:rPr lang="en-US" sz="1350" b="1" dirty="0">
+                <ns1:solidFill>
+                  <ns1:srgbClr val="0550AE"/>
+                </ns1:solidFill>
+                <ns1:latin typeface="Courier New" pitchFamily="34" charset="0"/>
+                <ns1:ea typeface="Courier New" pitchFamily="34" charset="-122"/>
+                <ns1:cs typeface="Courier New" pitchFamily="34" charset="-120"/>
+              </ns1:rPr>
+              <ns1:t>description</ns1:t>
+            </ns1:r>
+            <ns1:pPr algn="l" indent="0" marL="0">
+              <ns1:lnSpc>
+                <ns1:spcPts val="1560"/>
+              </ns1:lnSpc>
+              <ns1:buNone/>
+            </ns1:pPr>
+            <ns1:r>
+              <ns1:rPr lang="en-US" sz="1350" dirty="0">
+                <ns1:solidFill>
+                  <ns1:srgbClr val="59636E"/>
+                </ns1:solidFill>
+                <ns1:latin typeface="Arial" pitchFamily="34" charset="0"/>
+                <ns1:ea typeface="Arial" pitchFamily="34" charset="-122"/>
+                <ns1:cs typeface="Arial" pitchFamily="34" charset="-120"/>
+              </ns1:rPr>
+              <ns1:t> tells the app when to load it.</ns1:t>
+            </ns1:r>
+            <ns1:endParaRPr lang="en-US" sz="1350" dirty="0"/>
+          </ns1:p>
+        </ns0:txBody>
+      </ns0:sp>
+      <ns0:sp>
+        <ns0:nvSpPr>
+          <ns0:cNvPr id="31" name="Text 26"/>
+          <ns0:cNvSpPr/>
+          <ns0:nvPr/>
+        </ns0:nvSpPr>
+        <ns0:spPr>
+          <ns1:xfrm>
+            <ns1:off x="4571851" y="2825055"/>
+            <ns1:ext cx="381000" cy="381000"/>
+          </ns1:xfrm>
+          <ns1:prstGeom prst="roundRect">
+            <ns1:avLst>
+              <ns1:gd name="adj" fmla="val 23333"/>
+            </ns1:avLst>
+          </ns1:prstGeom>
+          <ns1:solidFill>
+            <ns1:srgbClr val="FBEFFF"/>
+          </ns1:solidFill>
+          <ns1:ln/>
+        </ns0:spPr>
+        <ns0:txBody>
+          <ns1:bodyPr wrap="square" rtlCol="0" anchor="ctr"/>
+          <ns1:lstStyle/>
+          <ns1:p>
+            <ns1:pPr indent="0" marL="0">
+              <ns1:buNone/>
+            </ns1:pPr>
+            <ns1:endParaRPr lang="en-US" dirty="0"/>
+          </ns1:p>
+        </ns0:txBody>
+      </ns0:sp>
+      <ns0:pic>
+        <ns0:nvPicPr>
+          <ns0:cNvPr id="32" name="Image 3" descr="">
+            <ns1:extLst>
+              <ns1:ext uri="{C183D7F6-B498-43B3-948B-1728B52AA6E4}">
+                <ns2:decorative val="1"/>
+              </ns1:ext>
+            </ns1:extLst>
+          </ns0:cNvPr>
+          <ns0:cNvPicPr>
+            <ns1:picLocks noChangeAspect="1"/>
+          </ns0:cNvPicPr>
+          <ns0:nvPr/>
+        </ns0:nvPicPr>
+        <ns0:blipFill>
+          <ns1:blip ns3:embed="rId5"/>
+          <ns1:stretch>
+            <ns1:fillRect/>
+          </ns1:stretch>
+        </ns0:blipFill>
+        <ns0:spPr>
+          <ns1:xfrm>
+            <ns1:off x="4654451" y="2907655"/>
+            <ns1:ext cx="215801" cy="215801"/>
+          </ns1:xfrm>
+          <ns1:prstGeom prst="rect">
+            <ns1:avLst/>
+          </ns1:prstGeom>
+        </ns0:spPr>
+      </ns0:pic>
+      <ns0:sp>
+        <ns0:nvSpPr>
+          <ns0:cNvPr id="33" name="Text 27"/>
+          <ns0:cNvSpPr/>
+          <ns0:nvPr/>
+        </ns0:nvSpPr>
+        <ns0:spPr>
+          <ns1:xfrm>
+            <ns1:off x="5105251" y="2789634"/>
+            <ns1:ext cx="2430241" cy="228600"/>
+          </ns1:xfrm>
+          <ns1:prstGeom prst="rect">
+            <ns1:avLst/>
+          </ns1:prstGeom>
+          <ns1:noFill/>
+          <ns1:ln/>
+        </ns0:spPr>
+        <ns0:txBody>
+          <ns1:bodyPr wrap="square" lIns="0" tIns="0" rIns="0" bIns="0" rtlCol="0" anchor="t"/>
+          <ns1:lstStyle/>
+          <ns1:p>
+            <ns1:pPr algn="l" indent="0" marL="0">
+              <ns1:buNone/>
+            </ns1:pPr>
+            <ns1:r>
+              <ns1:rPr lang="en-US" sz="1550" b="1" dirty="0">
+                <ns1:solidFill>
+                  <ns1:srgbClr val="1F2328"/>
+                </ns1:solidFill>
+                <ns1:latin typeface="Arial" pitchFamily="34" charset="0"/>
+                <ns1:ea typeface="Arial" pitchFamily="34" charset="-122"/>
+                <ns1:cs typeface="Arial" pitchFamily="34" charset="-120"/>
+              </ns1:rPr>
+              <ns1:t>Instructions</ns1:t>
+            </ns1:r>
+            <ns1:endParaRPr lang="en-US" sz="1550" dirty="0"/>
+          </ns1:p>
+        </ns0:txBody>
+      </ns0:sp>
+      <ns0:sp>
+        <ns0:nvSpPr>
+          <ns0:cNvPr id="34" name="Text 28"/>
+          <ns0:cNvSpPr/>
+          <ns0:nvPr/>
+        </ns0:nvSpPr>
+        <ns0:spPr>
+          <ns1:xfrm>
+            <ns1:off x="5105251" y="3043535"/>
+            <ns1:ext cx="2430241" cy="198090"/>
+          </ns1:xfrm>
+          <ns1:prstGeom prst="rect">
+            <ns1:avLst/>
+          </ns1:prstGeom>
+          <ns1:noFill/>
+          <ns1:ln/>
+        </ns0:spPr>
+        <ns0:txBody>
+          <ns1:bodyPr wrap="square" lIns="0" tIns="0" rIns="0" bIns="0" rtlCol="0" anchor="t"/>
+          <ns1:lstStyle/>
+          <ns1:p>
+            <ns1:pPr algn="l" indent="0" marL="0">
+              <ns1:lnSpc>
+                <ns1:spcPts val="1560"/>
+              </ns1:lnSpc>
+              <ns1:buNone/>
+            </ns1:pPr>
+            <ns1:r>
+              <ns1:rPr lang="en-US" sz="1350" dirty="0">
+                <ns1:solidFill>
+                  <ns1:srgbClr val="59636E"/>
+                </ns1:solidFill>
+                <ns1:latin typeface="Arial" pitchFamily="34" charset="0"/>
+                <ns1:ea typeface="Arial" pitchFamily="34" charset="-122"/>
+                <ns1:cs typeface="Arial" pitchFamily="34" charset="-120"/>
+              </ns1:rPr>
+              <ns1:t>The checklist the agent follows.</ns1:t>
+            </ns1:r>
+            <ns1:endParaRPr lang="en-US" sz="1350" dirty="0"/>
+          </ns1:p>
+        </ns0:txBody>
+      </ns0:sp>
+      <ns0:sp>
+        <ns0:nvSpPr>
+          <ns0:cNvPr id="35" name="Text 29"/>
+          <ns0:cNvSpPr/>
+          <ns0:nvPr/>
+        </ns0:nvSpPr>
+        <ns0:spPr>
+          <ns1:xfrm>
+            <ns1:off x="4571851" y="3444776"/>
+            <ns1:ext cx="4064050" cy="720030"/>
+          </ns1:xfrm>
+          <ns1:prstGeom prst="roundRect">
+            <ns1:avLst>
+              <ns1:gd name="adj" fmla="val 14111"/>
+            </ns1:avLst>
+          </ns1:prstGeom>
+          <ns1:solidFill>
+            <ns1:srgbClr val="FFEBE9"/>
+          </ns1:solidFill>
+          <ns1:ln w="9525">
+            <ns1:solidFill>
+              <ns1:srgbClr val="FFCECB"/>
+            </ns1:solidFill>
+          </ns1:ln>
+        </ns0:spPr>
+        <ns0:txBody>
+          <ns1:bodyPr wrap="square" rtlCol="0" anchor="ctr"/>
+          <ns1:lstStyle/>
+          <ns1:p>
+            <ns1:pPr indent="0" marL="0">
+              <ns1:buNone/>
+            </ns1:pPr>
+            <ns1:endParaRPr lang="en-US" dirty="0"/>
+          </ns1:p>
+        </ns0:txBody>
+      </ns0:sp>
+      <ns0:pic>
+        <ns0:nvPicPr>
+          <ns0:cNvPr id="36" name="Image 4" descr="">
+            <ns1:extLst>
+              <ns1:ext uri="{C183D7F6-B498-43B3-948B-1728B52AA6E4}">
+                <ns2:decorative val="1"/>
+              </ns1:ext>
+            </ns1:extLst>
+          </ns0:cNvPr>
+          <ns0:cNvPicPr>
+            <ns1:picLocks noChangeAspect="1"/>
+          </ns0:cNvPicPr>
+          <ns0:nvPr/>
+        </ns0:nvPicPr>
+        <ns0:blipFill>
+          <ns1:blip ns3:embed="rId6"/>
+          <ns1:stretch>
+            <ns1:fillRect/>
+          </ns1:stretch>
+        </ns0:blipFill>
+        <ns0:spPr>
+          <ns1:xfrm>
+            <ns1:off x="4759077" y="3703141"/>
+            <ns1:ext cx="203150" cy="203150"/>
+          </ns1:xfrm>
+          <ns1:prstGeom prst="rect">
+            <ns1:avLst/>
+          </ns1:prstGeom>
+        </ns0:spPr>
+      </ns0:pic>
+      <ns0:sp>
+        <ns0:nvSpPr>
+          <ns0:cNvPr id="37" name="Text 30"/>
+          <ns0:cNvSpPr/>
+          <ns0:nvPr/>
+        </ns0:nvSpPr>
+        <ns0:spPr>
+          <ns1:xfrm>
+            <ns1:off x="5089178" y="3581251"/>
+            <ns1:ext cx="3426687" cy="447080"/>
+          </ns1:xfrm>
+          <ns1:prstGeom prst="rect">
+            <ns1:avLst/>
+          </ns1:prstGeom>
+          <ns1:noFill/>
+          <ns1:ln/>
+        </ns0:spPr>
+        <ns0:txBody>
+          <ns1:bodyPr wrap="square" lIns="0" tIns="0" rIns="0" bIns="0" rtlCol="0" anchor="t"/>
+          <ns1:lstStyle/>
+          <ns1:p>
+            <ns1:pPr algn="l" indent="0" marL="0">
+              <ns1:lnSpc>
+                <ns1:spcPts val="1760"/>
+              </ns1:lnSpc>
+              <ns1:buNone/>
+            </ns1:pPr>
+            <ns1:r>
+              <ns1:rPr lang="en-US" sz="1450" dirty="0">
+                <ns1:solidFill>
+                  <ns1:srgbClr val="1F2328"/>
+                </ns1:solidFill>
+                <ns1:latin typeface="Arial" pitchFamily="34" charset="0"/>
+                <ns1:ea typeface="Arial" pitchFamily="34" charset="-122"/>
+                <ns1:cs typeface="Arial" pitchFamily="34" charset="-120"/>
+              </ns1:rPr>
+              <ns1:t>A skill </ns1:t>
+            </ns1:r>
+            <ns1:pPr algn="l" indent="0" marL="0">
+              <ns1:lnSpc>
+                <ns1:spcPts val="1760"/>
+              </ns1:lnSpc>
+              <ns1:buNone/>
+            </ns1:pPr>
+            <ns1:r>
+              <ns1:rPr lang="en-US" sz="1450" b="1" dirty="0">
+                <ns1:solidFill>
+                  <ns1:srgbClr val="1F2328"/>
+                </ns1:solidFill>
+                <ns1:latin typeface="Arial" pitchFamily="34" charset="0"/>
+                <ns1:ea typeface="Arial" pitchFamily="34" charset="-122"/>
+                <ns1:cs typeface="Arial" pitchFamily="34" charset="-120"/>
+              </ns1:rPr>
+              <ns1:t>guides</ns1:t>
+            </ns1:r>
+            <ns1:pPr algn="l" indent="0" marL="0">
+              <ns1:lnSpc>
+                <ns1:spcPts val="1760"/>
+              </ns1:lnSpc>
+              <ns1:buNone/>
+            </ns1:pPr>
+            <ns1:r>
+              <ns1:rPr lang="en-US" sz="1450" dirty="0">
+                <ns1:solidFill>
+                  <ns1:srgbClr val="1F2328"/>
+                </ns1:solidFill>
+                <ns1:latin typeface="Arial" pitchFamily="34" charset="0"/>
+                <ns1:ea typeface="Arial" pitchFamily="34" charset="-122"/>
+                <ns1:cs typeface="Arial" pitchFamily="34" charset="-120"/>
+              </ns1:rPr>
+              <ns1:t>. It does not stop editing. Read unfamiliar skills first.</ns1:t>
+            </ns1:r>
+            <ns1:endParaRPr lang="en-US" sz="1450" dirty="0"/>
+          </ns1:p>
+        </ns0:txBody>
+      </ns0:sp>
+    </ns0:spTree>
+  </ns0:cSld>
+  <ns0:clrMapOvr>
+    <ns1:masterClrMapping/>
+  </ns0:clrMapOvr>
+</ns0:sld>
 </file>
 
 <file path=ppt/slides/slide8.xml><?xml version="1.0" encoding="utf-8"?>
-<p:sld xmlns:a="http://schemas.openxmlformats.org/drawingml/2006/main" xmlns:r="http://schemas.openxmlformats.org/officeDocument/2006/relationships" xmlns:p="http://schemas.openxmlformats.org/presentationml/2006/main">
-  <p:cSld name="Slide 8">
-    <p:bg>
-      <p:bgPr>
-        <a:solidFill>
-          <a:srgbClr val="FFFFFF"/>
-        </a:solidFill>
-      </p:bgPr>
-    </p:bg>
-    <p:spTree>
-      <p:nvGrpSpPr>
-        <p:cNvPr id="1" name=""/>
-        <p:cNvGrpSpPr/>
-        <p:nvPr/>
-      </p:nvGrpSpPr>
-      <p:grpSpPr>
-        <a:xfrm>
-          <a:off x="0" y="0"/>
-          <a:ext cx="0" cy="0"/>
-          <a:chOff x="0" y="0"/>
-          <a:chExt cx="0" cy="0"/>
-        </a:xfrm>
-      </p:grpSpPr>
-      <p:pic>
-        <p:nvPicPr>
-          <p:cNvPr id="2" name="Image 0" descr="">
-            <a:extLst>
-              <a:ext uri="{C183D7F6-B498-43B3-948B-1728B52AA6E4}">
-                <adec:decorative xmlns:adec="http://schemas.microsoft.com/office/drawing/2017/decorative" val="1"/>
-              </a:ext>
-            </a:extLst>
-          </p:cNvPr>
-          <p:cNvPicPr>
-            <a:picLocks noChangeAspect="1"/>
-          </p:cNvPicPr>
-          <p:nvPr/>
-        </p:nvPicPr>
-        <p:blipFill>
-          <a:blip r:embed="rId1"/>
-          <a:stretch>
-            <a:fillRect/>
-          </a:stretch>
-        </p:blipFill>
-        <p:spPr>
-          <a:xfrm>
-            <a:off x="6349901" y="0"/>
-            <a:ext cx="2793950" cy="1308050"/>
-          </a:xfrm>
-          <a:prstGeom prst="rect">
-            <a:avLst/>
-          </a:prstGeom>
-        </p:spPr>
-      </p:pic>
-      <p:sp>
-        <p:nvSpPr>
-          <p:cNvPr id="3" name="Text 0"/>
-          <p:cNvSpPr/>
-          <p:nvPr/>
-        </p:nvSpPr>
-        <p:spPr>
-          <a:xfrm>
-            <a:off x="7340501" y="177701"/>
-            <a:ext cx="1168301" cy="279350"/>
-          </a:xfrm>
-          <a:prstGeom prst="roundRect">
-            <a:avLst>
-              <a:gd name="adj" fmla="val 22731"/>
-            </a:avLst>
-          </a:prstGeom>
-          <a:solidFill>
-            <a:srgbClr val="1A7F37"/>
-          </a:solidFill>
-          <a:ln/>
-        </p:spPr>
-        <p:txBody>
-          <a:bodyPr wrap="square" rtlCol="0" anchor="ctr"/>
-          <a:lstStyle/>
-          <a:p>
-            <a:pPr indent="0" marL="0">
-              <a:buNone/>
-            </a:pPr>
-            <a:endParaRPr lang="en-US" dirty="0"/>
-          </a:p>
-        </p:txBody>
-      </p:sp>
-      <p:sp>
-        <p:nvSpPr>
-          <p:cNvPr id="4" name="Text 1"/>
-          <p:cNvSpPr/>
-          <p:nvPr/>
-        </p:nvSpPr>
-        <p:spPr>
-          <a:xfrm>
-            <a:off x="7461041" y="231577"/>
-            <a:ext cx="927071" cy="171450"/>
-          </a:xfrm>
-          <a:prstGeom prst="rect">
-            <a:avLst/>
-          </a:prstGeom>
-          <a:noFill/>
-          <a:ln/>
-        </p:spPr>
-        <p:txBody>
-          <a:bodyPr wrap="square" lIns="0" tIns="0" rIns="0" bIns="0" rtlCol="0" anchor="t"/>
-          <a:lstStyle/>
-          <a:p>
-            <a:pPr algn="ctr" indent="0" marL="0">
-              <a:buNone/>
-            </a:pPr>
-            <a:r>
-              <a:rPr lang="en-US" sz="1150" b="1" dirty="0">
-                <a:solidFill>
-                  <a:srgbClr val="FFFFFF"/>
-                </a:solidFill>
-                <a:latin typeface="Arial" pitchFamily="34" charset="0"/>
-                <a:ea typeface="Arial" pitchFamily="34" charset="-122"/>
-                <a:cs typeface="Arial" pitchFamily="34" charset="-120"/>
-              </a:rPr>
-              <a:t>CHAPTER 04</a:t>
-            </a:r>
-            <a:endParaRPr lang="en-US" sz="1150" dirty="0"/>
-          </a:p>
-        </p:txBody>
-      </p:sp>
-      <p:pic>
-        <p:nvPicPr>
-          <p:cNvPr id="5" name="Image 1" descr="Open this chapter on GitHub">
-            <a:hlinkClick r:id="rId3" tooltip="https://github.com/github/copilot-app-for-beginners/tree/main/04-skills-custom-agents"/>
-          </p:cNvPr>
-          <p:cNvPicPr>
-            <a:picLocks noChangeAspect="1"/>
-          </p:cNvPicPr>
-          <p:nvPr/>
-        </p:nvPicPr>
-        <p:blipFill>
-          <a:blip r:embed="rId2"/>
-          <a:stretch>
-            <a:fillRect/>
-          </a:stretch>
-        </p:blipFill>
-        <p:spPr>
-          <a:xfrm>
-            <a:off x="8610600" y="165050"/>
-            <a:ext cx="304800" cy="304800"/>
-          </a:xfrm>
-          <a:prstGeom prst="rect">
-            <a:avLst/>
-          </a:prstGeom>
-        </p:spPr>
-      </p:pic>
-      <p:sp>
-        <p:nvSpPr>
-          <p:cNvPr id="6" name="Text 2"/>
-          <p:cNvSpPr/>
-          <p:nvPr/>
-        </p:nvSpPr>
-        <p:spPr>
-          <a:xfrm>
-            <a:off x="507950" y="381000"/>
-            <a:ext cx="8161020" cy="190500"/>
-          </a:xfrm>
-          <a:prstGeom prst="rect">
-            <a:avLst/>
-          </a:prstGeom>
-          <a:noFill/>
-          <a:ln/>
-        </p:spPr>
-        <p:txBody>
-          <a:bodyPr wrap="square" lIns="0" tIns="0" rIns="0" bIns="0" rtlCol="0" anchor="t"/>
-          <a:lstStyle/>
-          <a:p>
-            <a:pPr algn="l" indent="0" marL="0">
-              <a:buNone/>
-            </a:pPr>
-            <a:r>
-              <a:rPr lang="en-US" sz="1250" b="1" dirty="0">
-                <a:solidFill>
-                  <a:srgbClr val="0969DA"/>
-                </a:solidFill>
-                <a:latin typeface="Arial" pitchFamily="34" charset="0"/>
-                <a:ea typeface="Arial" pitchFamily="34" charset="-122"/>
-                <a:cs typeface="Arial" pitchFamily="34" charset="-120"/>
-              </a:rPr>
-              <a:t>EXERCISE</a:t>
-            </a:r>
-            <a:endParaRPr lang="en-US" sz="1250" dirty="0"/>
-          </a:p>
-        </p:txBody>
-      </p:sp>
-      <p:sp>
-        <p:nvSpPr>
-          <p:cNvPr id="7" name="Text 3"/>
-          <p:cNvSpPr/>
-          <p:nvPr/>
-        </p:nvSpPr>
-        <p:spPr>
-          <a:xfrm>
-            <a:off x="507950" y="622250"/>
-            <a:ext cx="8161020" cy="419100"/>
-          </a:xfrm>
-          <a:prstGeom prst="rect">
-            <a:avLst/>
-          </a:prstGeom>
-          <a:noFill/>
-          <a:ln/>
-        </p:spPr>
-        <p:txBody>
-          <a:bodyPr wrap="square" lIns="0" tIns="0" rIns="0" bIns="0" rtlCol="0" anchor="t"/>
-          <a:lstStyle/>
-          <a:p>
-            <a:pPr algn="l" indent="0" marL="0">
-              <a:lnSpc>
-                <a:spcPts val="3300"/>
-              </a:lnSpc>
-              <a:spcBef>
-                <a:spcPts val="400"/>
-              </a:spcBef>
-              <a:buNone/>
-            </a:pPr>
-            <a:r>
-              <a:rPr lang="en-US" sz="2800" b="1" dirty="0">
-                <a:solidFill>
-                  <a:srgbClr val="1F2328"/>
-                </a:solidFill>
-                <a:latin typeface="Arial" pitchFamily="34" charset="0"/>
-                <a:ea typeface="Arial" pitchFamily="34" charset="-122"/>
-                <a:cs typeface="Arial" pitchFamily="34" charset="-120"/>
-              </a:rPr>
-              <a:t>Update the skill, then use it</a:t>
-            </a:r>
-            <a:endParaRPr lang="en-US" sz="2800" dirty="0"/>
-          </a:p>
-        </p:txBody>
-      </p:sp>
-      <p:sp>
-        <p:nvSpPr>
-          <p:cNvPr id="8" name="Text 4"/>
-          <p:cNvSpPr/>
-          <p:nvPr/>
-        </p:nvSpPr>
-        <p:spPr>
-          <a:xfrm>
-            <a:off x="511076" y="1311771"/>
-            <a:ext cx="8121551" cy="1516261"/>
-          </a:xfrm>
-          <a:prstGeom prst="roundRect">
-            <a:avLst>
-              <a:gd name="adj" fmla="val 5026"/>
-            </a:avLst>
-          </a:prstGeom>
-          <a:solidFill>
-            <a:srgbClr val="FFFFFF"/>
-          </a:solidFill>
-          <a:ln w="9525">
-            <a:solidFill>
-              <a:srgbClr val="D1D9E0"/>
-            </a:solidFill>
-          </a:ln>
-          <a:effectLst>
-            <a:outerShdw sx="100000" sy="100000" kx="0" ky="0" algn="bl" rotWithShape="0" blurRad="38100" dist="9525" dir="5400000">
-              <a:srgbClr val="1f2328">
-                <a:alpha val="12000"/>
-              </a:srgbClr>
-            </a:outerShdw>
-          </a:effectLst>
-        </p:spPr>
-        <p:txBody>
-          <a:bodyPr wrap="square" rtlCol="0" anchor="ctr"/>
-          <a:lstStyle/>
-          <a:p>
-            <a:pPr indent="0" marL="0">
-              <a:buNone/>
-            </a:pPr>
-            <a:endParaRPr lang="en-US" dirty="0"/>
-          </a:p>
-        </p:txBody>
-      </p:sp>
-      <p:pic>
-        <p:nvPicPr>
-          <p:cNvPr id="9" name="Image 2" descr="Customize Skills page with the book-app-reviewer skill listed under Project">    </p:cNvPr>
-          <p:cNvPicPr>
-            <a:picLocks noChangeAspect="1"/>
-          </p:cNvPicPr>
-          <p:nvPr/>
-        </p:nvPicPr>
-        <p:blipFill>
-          <a:blip r:embed="rId4"/>
-          <a:stretch>
-            <a:fillRect/>
-          </a:stretch>
-        </p:blipFill>
-        <p:spPr>
-          <a:xfrm>
-            <a:off x="558701" y="1359396"/>
-            <a:ext cx="8026301" cy="1421011"/>
-          </a:xfrm>
-          <a:prstGeom prst="rect">
-            <a:avLst/>
-          </a:prstGeom>
-        </p:spPr>
-      </p:pic>
-      <p:sp>
-        <p:nvSpPr>
-          <p:cNvPr id="10" name="Text 5"/>
-          <p:cNvSpPr/>
-          <p:nvPr/>
-        </p:nvSpPr>
-        <p:spPr>
-          <a:xfrm>
-            <a:off x="507950" y="3047851"/>
-            <a:ext cx="8127950" cy="1469827"/>
-          </a:xfrm>
-          <a:prstGeom prst="roundRect">
-            <a:avLst>
-              <a:gd name="adj" fmla="val 8640"/>
-            </a:avLst>
-          </a:prstGeom>
-          <a:solidFill>
-            <a:srgbClr val="FFFFFF"/>
-          </a:solidFill>
-          <a:ln w="9525">
-            <a:solidFill>
-              <a:srgbClr val="E0C5FF"/>
-            </a:solidFill>
-          </a:ln>
-        </p:spPr>
-        <p:txBody>
-          <a:bodyPr wrap="square" rtlCol="0" anchor="ctr"/>
-          <a:lstStyle/>
-          <a:p>
-            <a:pPr indent="0" marL="0">
-              <a:buNone/>
-            </a:pPr>
-            <a:endParaRPr lang="en-US" dirty="0"/>
-          </a:p>
-        </p:txBody>
-      </p:sp>
-      <p:sp>
-        <p:nvSpPr>
-          <p:cNvPr id="11" name="Shape 6"/>
-          <p:cNvSpPr/>
-          <p:nvPr/>
-        </p:nvSpPr>
-        <p:spPr>
-          <a:xfrm>
-            <a:off x="517475" y="3417689"/>
-            <a:ext cx="8108900" cy="0"/>
-          </a:xfrm>
-          <a:prstGeom prst="line">
-            <a:avLst/>
-          </a:prstGeom>
-          <a:noFill/>
-          <a:ln w="9525">
-            <a:solidFill>
-              <a:srgbClr val="D1D9E0"/>
-            </a:solidFill>
-            <a:prstDash val="solid"/>
-          </a:ln>
-        </p:spPr>
-      </p:sp>
-      <p:sp>
-        <p:nvSpPr>
-          <p:cNvPr id="12" name="Text 7"/>
-          <p:cNvSpPr/>
-          <p:nvPr/>
-        </p:nvSpPr>
-        <p:spPr>
-          <a:xfrm>
-            <a:off x="695176" y="3095476"/>
-            <a:ext cx="279350" cy="279350"/>
-          </a:xfrm>
-          <a:prstGeom prst="roundRect">
-            <a:avLst>
-              <a:gd name="adj" fmla="val 327331"/>
-            </a:avLst>
-          </a:prstGeom>
-          <a:solidFill>
-            <a:srgbClr val="8250DF"/>
-          </a:solidFill>
-          <a:ln/>
-        </p:spPr>
-        <p:txBody>
-          <a:bodyPr wrap="square" rtlCol="0" anchor="ctr"/>
-          <a:lstStyle/>
-          <a:p>
-            <a:pPr indent="0" marL="0">
-              <a:buNone/>
-            </a:pPr>
-            <a:endParaRPr lang="en-US" dirty="0"/>
-          </a:p>
-        </p:txBody>
-      </p:sp>
-      <p:sp>
-        <p:nvSpPr>
-          <p:cNvPr id="13" name="Text 8"/>
-          <p:cNvSpPr/>
-          <p:nvPr/>
-        </p:nvSpPr>
-        <p:spPr>
-          <a:xfrm>
-            <a:off x="789841" y="3139827"/>
-            <a:ext cx="90020" cy="190500"/>
-          </a:xfrm>
-          <a:prstGeom prst="rect">
-            <a:avLst/>
-          </a:prstGeom>
-          <a:noFill/>
-          <a:ln/>
-        </p:spPr>
-        <p:txBody>
-          <a:bodyPr wrap="square" lIns="0" tIns="0" rIns="0" bIns="0" rtlCol="0" anchor="t"/>
-          <a:lstStyle/>
-          <a:p>
-            <a:pPr algn="ctr" indent="0" marL="0">
-              <a:buNone/>
-            </a:pPr>
-            <a:r>
-              <a:rPr lang="en-US" sz="1250" b="1" dirty="0">
-                <a:solidFill>
-                  <a:srgbClr val="FFFFFF"/>
-                </a:solidFill>
-                <a:latin typeface="Arial" pitchFamily="34" charset="0"/>
-                <a:ea typeface="Arial" pitchFamily="34" charset="-122"/>
-                <a:cs typeface="Arial" pitchFamily="34" charset="-120"/>
-              </a:rPr>
-              <a:t>1</a:t>
-            </a:r>
-            <a:endParaRPr lang="en-US" sz="1250" dirty="0"/>
-          </a:p>
-        </p:txBody>
-      </p:sp>
-      <p:sp>
-        <p:nvSpPr>
-          <p:cNvPr id="14" name="Text 9"/>
-          <p:cNvSpPr/>
-          <p:nvPr/>
-        </p:nvSpPr>
-        <p:spPr>
-          <a:xfrm>
-            <a:off x="1152227" y="3127772"/>
-            <a:ext cx="2331720" cy="214610"/>
-          </a:xfrm>
-          <a:prstGeom prst="rect">
-            <a:avLst/>
-          </a:prstGeom>
-          <a:noFill/>
-          <a:ln/>
-        </p:spPr>
-        <p:txBody>
-          <a:bodyPr wrap="square" lIns="0" tIns="0" rIns="0" bIns="0" rtlCol="0" anchor="t"/>
-          <a:lstStyle/>
-          <a:p>
-            <a:pPr algn="l" indent="0" marL="0">
-              <a:lnSpc>
-                <a:spcPts val="1690"/>
-              </a:lnSpc>
-              <a:buNone/>
-            </a:pPr>
-            <a:r>
-              <a:rPr lang="en-US" sz="1500" b="1" dirty="0">
-                <a:solidFill>
-                  <a:srgbClr val="1F2328"/>
-                </a:solidFill>
-                <a:latin typeface="Arial" pitchFamily="34" charset="0"/>
-                <a:ea typeface="Arial" pitchFamily="34" charset="-122"/>
-                <a:cs typeface="Arial" pitchFamily="34" charset="-120"/>
-              </a:rPr>
-              <a:t>Find and check it</a:t>
-            </a:r>
-            <a:endParaRPr lang="en-US" sz="1500" dirty="0"/>
-          </a:p>
-        </p:txBody>
-      </p:sp>
-      <p:sp>
-        <p:nvSpPr>
-          <p:cNvPr id="15" name="Text 10"/>
-          <p:cNvSpPr/>
-          <p:nvPr/>
-        </p:nvSpPr>
-        <p:spPr>
-          <a:xfrm>
-            <a:off x="3615928" y="3131641"/>
-            <a:ext cx="4929402" cy="207020"/>
-          </a:xfrm>
-          <a:prstGeom prst="rect">
-            <a:avLst/>
-          </a:prstGeom>
-          <a:noFill/>
-          <a:ln/>
-        </p:spPr>
-        <p:txBody>
-          <a:bodyPr wrap="square" lIns="0" tIns="0" rIns="0" bIns="0" rtlCol="0" anchor="t"/>
-          <a:lstStyle/>
-          <a:p>
-            <a:pPr algn="l" indent="0" marL="0">
-              <a:lnSpc>
-                <a:spcPts val="1630"/>
-              </a:lnSpc>
-              <a:buNone/>
-            </a:pPr>
-            <a:r>
-              <a:rPr lang="en-US" sz="1400" b="1" dirty="0">
-                <a:solidFill>
-                  <a:srgbClr val="59636E"/>
-                </a:solidFill>
-                <a:latin typeface="Arial" pitchFamily="34" charset="0"/>
-                <a:ea typeface="Arial" pitchFamily="34" charset="-122"/>
-                <a:cs typeface="Arial" pitchFamily="34" charset="-120"/>
-              </a:rPr>
-              <a:t>Customize</a:t>
-            </a:r>
-            <a:pPr algn="l" indent="0" marL="0">
-              <a:lnSpc>
-                <a:spcPts val="1630"/>
-              </a:lnSpc>
-              <a:buNone/>
-            </a:pPr>
-            <a:r>
-              <a:rPr lang="en-US" sz="1400" dirty="0">
-                <a:solidFill>
-                  <a:srgbClr val="59636E"/>
-                </a:solidFill>
-                <a:latin typeface="Arial" pitchFamily="34" charset="0"/>
-                <a:ea typeface="Arial" pitchFamily="34" charset="-122"/>
-                <a:cs typeface="Arial" pitchFamily="34" charset="-120"/>
-              </a:rPr>
-              <a:t> &gt; </a:t>
-            </a:r>
-            <a:pPr algn="l" indent="0" marL="0">
-              <a:lnSpc>
-                <a:spcPts val="1630"/>
-              </a:lnSpc>
-              <a:buNone/>
-            </a:pPr>
-            <a:r>
-              <a:rPr lang="en-US" sz="1400" b="1" dirty="0">
-                <a:solidFill>
-                  <a:srgbClr val="59636E"/>
-                </a:solidFill>
-                <a:latin typeface="Arial" pitchFamily="34" charset="0"/>
-                <a:ea typeface="Arial" pitchFamily="34" charset="-122"/>
-                <a:cs typeface="Arial" pitchFamily="34" charset="-120"/>
-              </a:rPr>
-              <a:t>Skills</a:t>
-            </a:r>
-            <a:pPr algn="l" indent="0" marL="0">
-              <a:lnSpc>
-                <a:spcPts val="1630"/>
-              </a:lnSpc>
-              <a:buNone/>
-            </a:pPr>
-            <a:r>
-              <a:rPr lang="en-US" sz="1400" dirty="0">
-                <a:solidFill>
-                  <a:srgbClr val="59636E"/>
-                </a:solidFill>
-                <a:latin typeface="Arial" pitchFamily="34" charset="0"/>
-                <a:ea typeface="Arial" pitchFamily="34" charset="-122"/>
-                <a:cs typeface="Arial" pitchFamily="34" charset="-120"/>
-              </a:rPr>
-              <a:t> &gt; </a:t>
-            </a:r>
-            <a:pPr algn="l" indent="0" marL="0">
-              <a:lnSpc>
-                <a:spcPts val="1630"/>
-              </a:lnSpc>
-              <a:buNone/>
-            </a:pPr>
-            <a:r>
-              <a:rPr lang="en-US" sz="1400" b="1" dirty="0">
-                <a:solidFill>
-                  <a:srgbClr val="59636E"/>
-                </a:solidFill>
-                <a:latin typeface="Arial" pitchFamily="34" charset="0"/>
-                <a:ea typeface="Arial" pitchFamily="34" charset="-122"/>
-                <a:cs typeface="Arial" pitchFamily="34" charset="-120"/>
-              </a:rPr>
-              <a:t>Project</a:t>
-            </a:r>
-            <a:pPr algn="l" indent="0" marL="0">
-              <a:lnSpc>
-                <a:spcPts val="1630"/>
-              </a:lnSpc>
-              <a:buNone/>
-            </a:pPr>
-            <a:r>
-              <a:rPr lang="en-US" sz="1400" dirty="0">
-                <a:solidFill>
-                  <a:srgbClr val="59636E"/>
-                </a:solidFill>
-                <a:latin typeface="Arial" pitchFamily="34" charset="0"/>
-                <a:ea typeface="Arial" pitchFamily="34" charset="-122"/>
-                <a:cs typeface="Arial" pitchFamily="34" charset="-120"/>
-              </a:rPr>
-              <a:t>.</a:t>
-            </a:r>
-            <a:endParaRPr lang="en-US" sz="1400" dirty="0"/>
-          </a:p>
-        </p:txBody>
-      </p:sp>
-      <p:sp>
-        <p:nvSpPr>
-          <p:cNvPr id="16" name="Shape 11"/>
-          <p:cNvSpPr/>
-          <p:nvPr/>
-        </p:nvSpPr>
-        <p:spPr>
-          <a:xfrm>
-            <a:off x="517475" y="3782764"/>
-            <a:ext cx="8108900" cy="0"/>
-          </a:xfrm>
-          <a:prstGeom prst="line">
-            <a:avLst/>
-          </a:prstGeom>
-          <a:noFill/>
-          <a:ln w="9525">
-            <a:solidFill>
-              <a:srgbClr val="D1D9E0"/>
-            </a:solidFill>
-            <a:prstDash val="solid"/>
-          </a:ln>
-        </p:spPr>
-      </p:sp>
-      <p:sp>
-        <p:nvSpPr>
-          <p:cNvPr id="17" name="Text 12"/>
-          <p:cNvSpPr/>
-          <p:nvPr/>
-        </p:nvSpPr>
-        <p:spPr>
-          <a:xfrm>
-            <a:off x="695176" y="3460552"/>
-            <a:ext cx="279350" cy="279350"/>
-          </a:xfrm>
-          <a:prstGeom prst="roundRect">
-            <a:avLst>
-              <a:gd name="adj" fmla="val 327331"/>
-            </a:avLst>
-          </a:prstGeom>
-          <a:solidFill>
-            <a:srgbClr val="8250DF"/>
-          </a:solidFill>
-          <a:ln/>
-        </p:spPr>
-        <p:txBody>
-          <a:bodyPr wrap="square" rtlCol="0" anchor="ctr"/>
-          <a:lstStyle/>
-          <a:p>
-            <a:pPr indent="0" marL="0">
-              <a:buNone/>
-            </a:pPr>
-            <a:endParaRPr lang="en-US" dirty="0"/>
-          </a:p>
-        </p:txBody>
-      </p:sp>
-      <p:sp>
-        <p:nvSpPr>
-          <p:cNvPr id="18" name="Text 13"/>
-          <p:cNvSpPr/>
-          <p:nvPr/>
-        </p:nvSpPr>
-        <p:spPr>
-          <a:xfrm>
-            <a:off x="789841" y="3504902"/>
-            <a:ext cx="90020" cy="190500"/>
-          </a:xfrm>
-          <a:prstGeom prst="rect">
-            <a:avLst/>
-          </a:prstGeom>
-          <a:noFill/>
-          <a:ln/>
-        </p:spPr>
-        <p:txBody>
-          <a:bodyPr wrap="square" lIns="0" tIns="0" rIns="0" bIns="0" rtlCol="0" anchor="t"/>
-          <a:lstStyle/>
-          <a:p>
-            <a:pPr algn="ctr" indent="0" marL="0">
-              <a:buNone/>
-            </a:pPr>
-            <a:r>
-              <a:rPr lang="en-US" sz="1250" b="1" dirty="0">
-                <a:solidFill>
-                  <a:srgbClr val="FFFFFF"/>
-                </a:solidFill>
-                <a:latin typeface="Arial" pitchFamily="34" charset="0"/>
-                <a:ea typeface="Arial" pitchFamily="34" charset="-122"/>
-                <a:cs typeface="Arial" pitchFamily="34" charset="-120"/>
-              </a:rPr>
-              <a:t>2</a:t>
-            </a:r>
-            <a:endParaRPr lang="en-US" sz="1250" dirty="0"/>
-          </a:p>
-        </p:txBody>
-      </p:sp>
-      <p:sp>
-        <p:nvSpPr>
-          <p:cNvPr id="19" name="Text 14"/>
-          <p:cNvSpPr/>
-          <p:nvPr/>
-        </p:nvSpPr>
-        <p:spPr>
-          <a:xfrm>
-            <a:off x="1152227" y="3492847"/>
-            <a:ext cx="2331720" cy="214610"/>
-          </a:xfrm>
-          <a:prstGeom prst="rect">
-            <a:avLst/>
-          </a:prstGeom>
-          <a:noFill/>
-          <a:ln/>
-        </p:spPr>
-        <p:txBody>
-          <a:bodyPr wrap="square" lIns="0" tIns="0" rIns="0" bIns="0" rtlCol="0" anchor="t"/>
-          <a:lstStyle/>
-          <a:p>
-            <a:pPr algn="l" indent="0" marL="0">
-              <a:lnSpc>
-                <a:spcPts val="1690"/>
-              </a:lnSpc>
-              <a:buNone/>
-            </a:pPr>
-            <a:r>
-              <a:rPr lang="en-US" sz="1500" b="1" dirty="0">
-                <a:solidFill>
-                  <a:srgbClr val="1F2328"/>
-                </a:solidFill>
-                <a:latin typeface="Arial" pitchFamily="34" charset="0"/>
-                <a:ea typeface="Arial" pitchFamily="34" charset="-122"/>
-                <a:cs typeface="Arial" pitchFamily="34" charset="-120"/>
-              </a:rPr>
-              <a:t>Append two rules</a:t>
-            </a:r>
-            <a:endParaRPr lang="en-US" sz="1500" dirty="0"/>
-          </a:p>
-        </p:txBody>
-      </p:sp>
-      <p:sp>
-        <p:nvSpPr>
-          <p:cNvPr id="20" name="Text 15"/>
-          <p:cNvSpPr/>
-          <p:nvPr/>
-        </p:nvSpPr>
-        <p:spPr>
-          <a:xfrm>
-            <a:off x="3615928" y="3496717"/>
-            <a:ext cx="4929402" cy="207020"/>
-          </a:xfrm>
-          <a:prstGeom prst="rect">
-            <a:avLst/>
-          </a:prstGeom>
-          <a:noFill/>
-          <a:ln/>
-        </p:spPr>
-        <p:txBody>
-          <a:bodyPr wrap="square" lIns="0" tIns="0" rIns="0" bIns="0" rtlCol="0" anchor="t"/>
-          <a:lstStyle/>
-          <a:p>
-            <a:pPr algn="l" indent="0" marL="0">
-              <a:lnSpc>
-                <a:spcPts val="1630"/>
-              </a:lnSpc>
-              <a:buNone/>
-            </a:pPr>
-            <a:r>
-              <a:rPr lang="en-US" sz="1400" dirty="0">
-                <a:solidFill>
-                  <a:srgbClr val="59636E"/>
-                </a:solidFill>
-                <a:latin typeface="Arial" pitchFamily="34" charset="0"/>
-                <a:ea typeface="Arial" pitchFamily="34" charset="-122"/>
-                <a:cs typeface="Arial" pitchFamily="34" charset="-120"/>
-              </a:rPr>
-              <a:t>Heading structure and text alternatives.</a:t>
-            </a:r>
-            <a:endParaRPr lang="en-US" sz="1400" dirty="0"/>
-          </a:p>
-        </p:txBody>
-      </p:sp>
-      <p:sp>
-        <p:nvSpPr>
-          <p:cNvPr id="21" name="Shape 16"/>
-          <p:cNvSpPr/>
-          <p:nvPr/>
-        </p:nvSpPr>
-        <p:spPr>
-          <a:xfrm>
-            <a:off x="517475" y="4147840"/>
-            <a:ext cx="8108900" cy="0"/>
-          </a:xfrm>
-          <a:prstGeom prst="line">
-            <a:avLst/>
-          </a:prstGeom>
-          <a:noFill/>
-          <a:ln w="9525">
-            <a:solidFill>
-              <a:srgbClr val="D1D9E0"/>
-            </a:solidFill>
-            <a:prstDash val="solid"/>
-          </a:ln>
-        </p:spPr>
-      </p:sp>
-      <p:sp>
-        <p:nvSpPr>
-          <p:cNvPr id="22" name="Text 17"/>
-          <p:cNvSpPr/>
-          <p:nvPr/>
-        </p:nvSpPr>
-        <p:spPr>
-          <a:xfrm>
-            <a:off x="695176" y="3825627"/>
-            <a:ext cx="279350" cy="279350"/>
-          </a:xfrm>
-          <a:prstGeom prst="roundRect">
-            <a:avLst>
-              <a:gd name="adj" fmla="val 327331"/>
-            </a:avLst>
-          </a:prstGeom>
-          <a:solidFill>
-            <a:srgbClr val="8250DF"/>
-          </a:solidFill>
-          <a:ln/>
-        </p:spPr>
-        <p:txBody>
-          <a:bodyPr wrap="square" rtlCol="0" anchor="ctr"/>
-          <a:lstStyle/>
-          <a:p>
-            <a:pPr indent="0" marL="0">
-              <a:buNone/>
-            </a:pPr>
-            <a:endParaRPr lang="en-US" dirty="0"/>
-          </a:p>
-        </p:txBody>
-      </p:sp>
-      <p:sp>
-        <p:nvSpPr>
-          <p:cNvPr id="23" name="Text 18"/>
-          <p:cNvSpPr/>
-          <p:nvPr/>
-        </p:nvSpPr>
-        <p:spPr>
-          <a:xfrm>
-            <a:off x="789841" y="3869978"/>
-            <a:ext cx="90020" cy="190500"/>
-          </a:xfrm>
-          <a:prstGeom prst="rect">
-            <a:avLst/>
-          </a:prstGeom>
-          <a:noFill/>
-          <a:ln/>
-        </p:spPr>
-        <p:txBody>
-          <a:bodyPr wrap="square" lIns="0" tIns="0" rIns="0" bIns="0" rtlCol="0" anchor="t"/>
-          <a:lstStyle/>
-          <a:p>
-            <a:pPr algn="ctr" indent="0" marL="0">
-              <a:buNone/>
-            </a:pPr>
-            <a:r>
-              <a:rPr lang="en-US" sz="1250" b="1" dirty="0">
-                <a:solidFill>
-                  <a:srgbClr val="FFFFFF"/>
-                </a:solidFill>
-                <a:latin typeface="Arial" pitchFamily="34" charset="0"/>
-                <a:ea typeface="Arial" pitchFamily="34" charset="-122"/>
-                <a:cs typeface="Arial" pitchFamily="34" charset="-120"/>
-              </a:rPr>
-              <a:t>3</a:t>
-            </a:r>
-            <a:endParaRPr lang="en-US" sz="1250" dirty="0"/>
-          </a:p>
-        </p:txBody>
-      </p:sp>
-      <p:sp>
-        <p:nvSpPr>
-          <p:cNvPr id="24" name="Text 19"/>
-          <p:cNvSpPr/>
-          <p:nvPr/>
-        </p:nvSpPr>
-        <p:spPr>
-          <a:xfrm>
-            <a:off x="1152227" y="3857923"/>
-            <a:ext cx="2331720" cy="214610"/>
-          </a:xfrm>
-          <a:prstGeom prst="rect">
-            <a:avLst/>
-          </a:prstGeom>
-          <a:noFill/>
-          <a:ln/>
-        </p:spPr>
-        <p:txBody>
-          <a:bodyPr wrap="square" lIns="0" tIns="0" rIns="0" bIns="0" rtlCol="0" anchor="t"/>
-          <a:lstStyle/>
-          <a:p>
-            <a:pPr algn="l" indent="0" marL="0">
-              <a:lnSpc>
-                <a:spcPts val="1690"/>
-              </a:lnSpc>
-              <a:buNone/>
-            </a:pPr>
-            <a:r>
-              <a:rPr lang="en-US" sz="1500" b="1" dirty="0">
-                <a:solidFill>
-                  <a:srgbClr val="1F2328"/>
-                </a:solidFill>
-                <a:latin typeface="Arial" pitchFamily="34" charset="0"/>
-                <a:ea typeface="Arial" pitchFamily="34" charset="-122"/>
-                <a:cs typeface="Arial" pitchFamily="34" charset="-120"/>
-              </a:rPr>
-              <a:t>Reload</a:t>
-            </a:r>
-            <a:endParaRPr lang="en-US" sz="1500" dirty="0"/>
-          </a:p>
-        </p:txBody>
-      </p:sp>
-      <p:sp>
-        <p:nvSpPr>
-          <p:cNvPr id="25" name="Text 20"/>
-          <p:cNvSpPr/>
-          <p:nvPr/>
-        </p:nvSpPr>
-        <p:spPr>
-          <a:xfrm>
-            <a:off x="3615928" y="3852267"/>
-            <a:ext cx="4929402" cy="226070"/>
-          </a:xfrm>
-          <a:prstGeom prst="rect">
-            <a:avLst/>
-          </a:prstGeom>
-          <a:noFill/>
-          <a:ln/>
-        </p:spPr>
-        <p:txBody>
-          <a:bodyPr wrap="square" lIns="0" tIns="0" rIns="0" bIns="0" rtlCol="0" anchor="t"/>
-          <a:lstStyle/>
-          <a:p>
-            <a:pPr algn="l" indent="0" marL="0">
-              <a:lnSpc>
-                <a:spcPts val="1630"/>
-              </a:lnSpc>
-              <a:buNone/>
-            </a:pPr>
-            <a:r>
-              <a:rPr lang="en-US" sz="1400" dirty="0">
-                <a:solidFill>
-                  <a:srgbClr val="59636E"/>
-                </a:solidFill>
-                <a:latin typeface="Arial" pitchFamily="34" charset="0"/>
-                <a:ea typeface="Arial" pitchFamily="34" charset="-122"/>
-                <a:cs typeface="Arial" pitchFamily="34" charset="-120"/>
-              </a:rPr>
-              <a:t>Check </a:t>
-            </a:r>
-            <a:pPr algn="l" indent="0" marL="0">
-              <a:lnSpc>
-                <a:spcPts val="1630"/>
-              </a:lnSpc>
-              <a:buNone/>
-            </a:pPr>
-            <a:r>
-              <a:rPr lang="en-US" sz="1400" b="1" dirty="0">
-                <a:solidFill>
-                  <a:srgbClr val="59636E"/>
-                </a:solidFill>
-                <a:latin typeface="Arial" pitchFamily="34" charset="0"/>
-                <a:ea typeface="Arial" pitchFamily="34" charset="-122"/>
-                <a:cs typeface="Arial" pitchFamily="34" charset="-120"/>
-              </a:rPr>
-              <a:t>Changes</a:t>
-            </a:r>
-            <a:pPr algn="l" indent="0" marL="0">
-              <a:lnSpc>
-                <a:spcPts val="1630"/>
-              </a:lnSpc>
-              <a:buNone/>
-            </a:pPr>
-            <a:r>
-              <a:rPr lang="en-US" sz="1400" dirty="0">
-                <a:solidFill>
-                  <a:srgbClr val="59636E"/>
-                </a:solidFill>
-                <a:latin typeface="Arial" pitchFamily="34" charset="0"/>
-                <a:ea typeface="Arial" pitchFamily="34" charset="-122"/>
-                <a:cs typeface="Arial" pitchFamily="34" charset="-120"/>
-              </a:rPr>
-              <a:t>, then </a:t>
-            </a:r>
-            <a:pPr algn="l" indent="0" marL="0">
-              <a:lnSpc>
-                <a:spcPts val="1630"/>
-              </a:lnSpc>
-              <a:buNone/>
-            </a:pPr>
-            <a:r>
-              <a:rPr lang="en-US" sz="1400" b="1" dirty="0">
-                <a:solidFill>
-                  <a:srgbClr val="0550AE"/>
-                </a:solidFill>
-                <a:latin typeface="Courier New" pitchFamily="34" charset="0"/>
-                <a:ea typeface="Courier New" pitchFamily="34" charset="-122"/>
-                <a:cs typeface="Courier New" pitchFamily="34" charset="-120"/>
-              </a:rPr>
-              <a:t>/skills reload</a:t>
-            </a:r>
-            <a:pPr algn="l" indent="0" marL="0">
-              <a:lnSpc>
-                <a:spcPts val="1630"/>
-              </a:lnSpc>
-              <a:buNone/>
-            </a:pPr>
-            <a:r>
-              <a:rPr lang="en-US" sz="1400" dirty="0">
-                <a:solidFill>
-                  <a:srgbClr val="59636E"/>
-                </a:solidFill>
-                <a:latin typeface="Arial" pitchFamily="34" charset="0"/>
-                <a:ea typeface="Arial" pitchFamily="34" charset="-122"/>
-                <a:cs typeface="Arial" pitchFamily="34" charset="-120"/>
-              </a:rPr>
-              <a:t>.</a:t>
-            </a:r>
-            <a:endParaRPr lang="en-US" sz="1400" dirty="0"/>
-          </a:p>
-        </p:txBody>
-      </p:sp>
-      <p:sp>
-        <p:nvSpPr>
-          <p:cNvPr id="26" name="Text 21"/>
-          <p:cNvSpPr/>
-          <p:nvPr/>
-        </p:nvSpPr>
-        <p:spPr>
-          <a:xfrm>
-            <a:off x="695176" y="4190702"/>
-            <a:ext cx="279350" cy="279350"/>
-          </a:xfrm>
-          <a:prstGeom prst="roundRect">
-            <a:avLst>
-              <a:gd name="adj" fmla="val 327331"/>
-            </a:avLst>
-          </a:prstGeom>
-          <a:solidFill>
-            <a:srgbClr val="8250DF"/>
-          </a:solidFill>
-          <a:ln/>
-        </p:spPr>
-        <p:txBody>
-          <a:bodyPr wrap="square" rtlCol="0" anchor="ctr"/>
-          <a:lstStyle/>
-          <a:p>
-            <a:pPr indent="0" marL="0">
-              <a:buNone/>
-            </a:pPr>
-            <a:endParaRPr lang="en-US" dirty="0"/>
-          </a:p>
-        </p:txBody>
-      </p:sp>
-      <p:sp>
-        <p:nvSpPr>
-          <p:cNvPr id="27" name="Text 22"/>
-          <p:cNvSpPr/>
-          <p:nvPr/>
-        </p:nvSpPr>
-        <p:spPr>
-          <a:xfrm>
-            <a:off x="789841" y="4235053"/>
-            <a:ext cx="90020" cy="190500"/>
-          </a:xfrm>
-          <a:prstGeom prst="rect">
-            <a:avLst/>
-          </a:prstGeom>
-          <a:noFill/>
-          <a:ln/>
-        </p:spPr>
-        <p:txBody>
-          <a:bodyPr wrap="square" lIns="0" tIns="0" rIns="0" bIns="0" rtlCol="0" anchor="t"/>
-          <a:lstStyle/>
-          <a:p>
-            <a:pPr algn="ctr" indent="0" marL="0">
-              <a:buNone/>
-            </a:pPr>
-            <a:r>
-              <a:rPr lang="en-US" sz="1250" b="1" dirty="0">
-                <a:solidFill>
-                  <a:srgbClr val="FFFFFF"/>
-                </a:solidFill>
-                <a:latin typeface="Arial" pitchFamily="34" charset="0"/>
-                <a:ea typeface="Arial" pitchFamily="34" charset="-122"/>
-                <a:cs typeface="Arial" pitchFamily="34" charset="-120"/>
-              </a:rPr>
-              <a:t>4</a:t>
-            </a:r>
-            <a:endParaRPr lang="en-US" sz="1250" dirty="0"/>
-          </a:p>
-        </p:txBody>
-      </p:sp>
-      <p:sp>
-        <p:nvSpPr>
-          <p:cNvPr id="28" name="Text 23"/>
-          <p:cNvSpPr/>
-          <p:nvPr/>
-        </p:nvSpPr>
-        <p:spPr>
-          <a:xfrm>
-            <a:off x="1152227" y="4222998"/>
-            <a:ext cx="2331720" cy="214610"/>
-          </a:xfrm>
-          <a:prstGeom prst="rect">
-            <a:avLst/>
-          </a:prstGeom>
-          <a:noFill/>
-          <a:ln/>
-        </p:spPr>
-        <p:txBody>
-          <a:bodyPr wrap="square" lIns="0" tIns="0" rIns="0" bIns="0" rtlCol="0" anchor="t"/>
-          <a:lstStyle/>
-          <a:p>
-            <a:pPr algn="l" indent="0" marL="0">
-              <a:lnSpc>
-                <a:spcPts val="1690"/>
-              </a:lnSpc>
-              <a:buNone/>
-            </a:pPr>
-            <a:r>
-              <a:rPr lang="en-US" sz="1500" b="1" dirty="0">
-                <a:solidFill>
-                  <a:srgbClr val="1F2328"/>
-                </a:solidFill>
-                <a:latin typeface="Arial" pitchFamily="34" charset="0"/>
-                <a:ea typeface="Arial" pitchFamily="34" charset="-122"/>
-                <a:cs typeface="Arial" pitchFamily="34" charset="-120"/>
-              </a:rPr>
-              <a:t>Review in Plan mode</a:t>
-            </a:r>
-            <a:endParaRPr lang="en-US" sz="1500" dirty="0"/>
-          </a:p>
-        </p:txBody>
-      </p:sp>
-      <p:sp>
-        <p:nvSpPr>
-          <p:cNvPr id="29" name="Text 24"/>
-          <p:cNvSpPr/>
-          <p:nvPr/>
-        </p:nvSpPr>
-        <p:spPr>
-          <a:xfrm>
-            <a:off x="3615928" y="4226868"/>
-            <a:ext cx="4929402" cy="207020"/>
-          </a:xfrm>
-          <a:prstGeom prst="rect">
-            <a:avLst/>
-          </a:prstGeom>
-          <a:noFill/>
-          <a:ln/>
-        </p:spPr>
-        <p:txBody>
-          <a:bodyPr wrap="square" lIns="0" tIns="0" rIns="0" bIns="0" rtlCol="0" anchor="t"/>
-          <a:lstStyle/>
-          <a:p>
-            <a:pPr algn="l" indent="0" marL="0">
-              <a:lnSpc>
-                <a:spcPts val="1630"/>
-              </a:lnSpc>
-              <a:buNone/>
-            </a:pPr>
-            <a:r>
-              <a:rPr lang="en-US" sz="1400" dirty="0">
-                <a:solidFill>
-                  <a:srgbClr val="59636E"/>
-                </a:solidFill>
-                <a:latin typeface="Arial" pitchFamily="34" charset="0"/>
-                <a:ea typeface="Arial" pitchFamily="34" charset="-122"/>
-                <a:cs typeface="Arial" pitchFamily="34" charset="-120"/>
-              </a:rPr>
-              <a:t>Confirm the skill loaded in the activity.</a:t>
-            </a:r>
-            <a:endParaRPr lang="en-US" sz="1400" dirty="0"/>
-          </a:p>
-        </p:txBody>
-      </p:sp>
-    </p:spTree>
-  </p:cSld>
-  <p:clrMapOvr>
-    <a:masterClrMapping/>
-  </p:clrMapOvr>
-</p:sld>
+<ns0:sld xmlns:ns0="http://schemas.openxmlformats.org/presentationml/2006/main" xmlns:ns1="http://schemas.openxmlformats.org/drawingml/2006/main" xmlns:ns2="http://schemas.microsoft.com/office/drawing/2017/decorative" xmlns:ns3="http://schemas.openxmlformats.org/officeDocument/2006/relationships">
+  <ns0:cSld name="Slide 8">
+    <ns0:bg>
+      <ns0:bgPr>
+        <ns1:solidFill>
+          <ns1:srgbClr val="FFFFFF"/>
+        </ns1:solidFill>
+      </ns0:bgPr>
+    </ns0:bg>
+    <ns0:spTree>
+      <ns0:nvGrpSpPr>
+        <ns0:cNvPr id="1" name=""/>
+        <ns0:cNvGrpSpPr/>
+        <ns0:nvPr/>
+      </ns0:nvGrpSpPr>
+      <ns0:grpSpPr>
+        <ns1:xfrm>
+          <ns1:off x="0" y="0"/>
+          <ns1:ext cx="0" cy="0"/>
+          <ns1:chOff x="0" y="0"/>
+          <ns1:chExt cx="0" cy="0"/>
+        </ns1:xfrm>
+      </ns0:grpSpPr>
+      <ns0:pic>
+        <ns0:nvPicPr>
+          <ns0:cNvPr id="2" name="Image 0" descr="">
+            <ns1:extLst>
+              <ns1:ext uri="{C183D7F6-B498-43B3-948B-1728B52AA6E4}">
+                <ns2:decorative val="1"/>
+              </ns1:ext>
+            </ns1:extLst>
+          </ns0:cNvPr>
+          <ns0:cNvPicPr>
+            <ns1:picLocks noChangeAspect="1"/>
+          </ns0:cNvPicPr>
+          <ns0:nvPr/>
+        </ns0:nvPicPr>
+        <ns0:blipFill>
+          <ns1:blip ns3:embed="rId1"/>
+          <ns1:stretch>
+            <ns1:fillRect/>
+          </ns1:stretch>
+        </ns0:blipFill>
+        <ns0:spPr>
+          <ns1:xfrm>
+            <ns1:off x="6349901" y="0"/>
+            <ns1:ext cx="2793950" cy="1308050"/>
+          </ns1:xfrm>
+          <ns1:prstGeom prst="rect">
+            <ns1:avLst/>
+          </ns1:prstGeom>
+        </ns0:spPr>
+      </ns0:pic>
+      <ns0:sp>
+        <ns0:nvSpPr>
+          <ns0:cNvPr id="3" name="Text 0"/>
+          <ns0:cNvSpPr/>
+          <ns0:nvPr/>
+        </ns0:nvSpPr>
+        <ns0:spPr>
+          <ns1:xfrm>
+            <ns1:off x="7340501" y="177701"/>
+            <ns1:ext cx="1168301" cy="279350"/>
+          </ns1:xfrm>
+          <ns1:prstGeom prst="roundRect">
+            <ns1:avLst>
+              <ns1:gd name="adj" fmla="val 22731"/>
+            </ns1:avLst>
+          </ns1:prstGeom>
+          <ns1:solidFill>
+            <ns1:srgbClr val="1A7F37"/>
+          </ns1:solidFill>
+          <ns1:ln/>
+        </ns0:spPr>
+        <ns0:txBody>
+          <ns1:bodyPr wrap="square" rtlCol="0" anchor="ctr"/>
+          <ns1:lstStyle/>
+          <ns1:p>
+            <ns1:pPr indent="0" marL="0">
+              <ns1:buNone/>
+            </ns1:pPr>
+            <ns1:endParaRPr lang="en-US" dirty="0"/>
+          </ns1:p>
+        </ns0:txBody>
+      </ns0:sp>
+      <ns0:sp>
+        <ns0:nvSpPr>
+          <ns0:cNvPr id="4" name="Text 1"/>
+          <ns0:cNvSpPr/>
+          <ns0:nvPr/>
+        </ns0:nvSpPr>
+        <ns0:spPr>
+          <ns1:xfrm>
+            <ns1:off x="7461041" y="231577"/>
+            <ns1:ext cx="927071" cy="171450"/>
+          </ns1:xfrm>
+          <ns1:prstGeom prst="rect">
+            <ns1:avLst/>
+          </ns1:prstGeom>
+          <ns1:noFill/>
+          <ns1:ln/>
+        </ns0:spPr>
+        <ns0:txBody>
+          <ns1:bodyPr wrap="square" lIns="0" tIns="0" rIns="0" bIns="0" rtlCol="0" anchor="t"/>
+          <ns1:lstStyle/>
+          <ns1:p>
+            <ns1:pPr algn="ctr" indent="0" marL="0">
+              <ns1:buNone/>
+            </ns1:pPr>
+            <ns1:r>
+              <ns1:rPr lang="en-US" sz="1150" b="1" dirty="0">
+                <ns1:solidFill>
+                  <ns1:srgbClr val="FFFFFF"/>
+                </ns1:solidFill>
+                <ns1:latin typeface="Arial" pitchFamily="34" charset="0"/>
+                <ns1:ea typeface="Arial" pitchFamily="34" charset="-122"/>
+                <ns1:cs typeface="Arial" pitchFamily="34" charset="-120"/>
+              </ns1:rPr>
+              <ns1:t>CHAPTER 04</ns1:t>
+            </ns1:r>
+            <ns1:endParaRPr lang="en-US" sz="1150" dirty="0"/>
+          </ns1:p>
+        </ns0:txBody>
+      </ns0:sp>
+      <ns0:pic>
+        <ns0:nvPicPr>
+          <ns0:cNvPr id="5" name="Image 1" descr="Open this chapter on GitHub">
+            <ns1:hlinkClick ns3:id="rId3" tooltip="https://github.com/github/copilot-app-for-beginners/tree/main/04-skills-custom-agents"/>
+          </ns0:cNvPr>
+          <ns0:cNvPicPr>
+            <ns1:picLocks noChangeAspect="1"/>
+          </ns0:cNvPicPr>
+          <ns0:nvPr/>
+        </ns0:nvPicPr>
+        <ns0:blipFill>
+          <ns1:blip ns3:embed="rId2"/>
+          <ns1:stretch>
+            <ns1:fillRect/>
+          </ns1:stretch>
+        </ns0:blipFill>
+        <ns0:spPr>
+          <ns1:xfrm>
+            <ns1:off x="8610600" y="165050"/>
+            <ns1:ext cx="304800" cy="304800"/>
+          </ns1:xfrm>
+          <ns1:prstGeom prst="rect">
+            <ns1:avLst/>
+          </ns1:prstGeom>
+        </ns0:spPr>
+      </ns0:pic>
+      <ns0:sp>
+        <ns0:nvSpPr>
+          <ns0:cNvPr id="6" name="Text 2"/>
+          <ns0:cNvSpPr/>
+          <ns0:nvPr/>
+        </ns0:nvSpPr>
+        <ns0:spPr>
+          <ns1:xfrm>
+            <ns1:off x="507950" y="381000"/>
+            <ns1:ext cx="8161020" cy="190500"/>
+          </ns1:xfrm>
+          <ns1:prstGeom prst="rect">
+            <ns1:avLst/>
+          </ns1:prstGeom>
+          <ns1:noFill/>
+          <ns1:ln/>
+        </ns0:spPr>
+        <ns0:txBody>
+          <ns1:bodyPr wrap="square" lIns="0" tIns="0" rIns="0" bIns="0" rtlCol="0" anchor="t"/>
+          <ns1:lstStyle/>
+          <ns1:p>
+            <ns1:pPr algn="l" indent="0" marL="0">
+              <ns1:buNone/>
+            </ns1:pPr>
+            <ns1:r>
+              <ns1:rPr lang="en-US" sz="1250" b="1" dirty="0">
+                <ns1:solidFill>
+                  <ns1:srgbClr val="0969DA"/>
+                </ns1:solidFill>
+                <ns1:latin typeface="Arial" pitchFamily="34" charset="0"/>
+                <ns1:ea typeface="Arial" pitchFamily="34" charset="-122"/>
+                <ns1:cs typeface="Arial" pitchFamily="34" charset="-120"/>
+              </ns1:rPr>
+              <ns1:t>EXERCISE</ns1:t>
+            </ns1:r>
+            <ns1:endParaRPr lang="en-US" sz="1250" dirty="0"/>
+          </ns1:p>
+        </ns0:txBody>
+      </ns0:sp>
+      <ns0:sp>
+        <ns0:nvSpPr>
+          <ns0:cNvPr id="7" name="Text 3"/>
+          <ns0:cNvSpPr/>
+          <ns0:nvPr/>
+        </ns0:nvSpPr>
+        <ns0:spPr>
+          <ns1:xfrm>
+            <ns1:off x="507950" y="622250"/>
+            <ns1:ext cx="8161020" cy="419100"/>
+          </ns1:xfrm>
+          <ns1:prstGeom prst="rect">
+            <ns1:avLst/>
+          </ns1:prstGeom>
+          <ns1:noFill/>
+          <ns1:ln/>
+        </ns0:spPr>
+        <ns0:txBody>
+          <ns1:bodyPr wrap="square" lIns="0" tIns="0" rIns="0" bIns="0" rtlCol="0" anchor="t"/>
+          <ns1:lstStyle/>
+          <ns1:p>
+            <ns1:pPr algn="l" indent="0" marL="0">
+              <ns1:lnSpc>
+                <ns1:spcPts val="3300"/>
+              </ns1:lnSpc>
+              <ns1:spcBef>
+                <ns1:spcPts val="400"/>
+              </ns1:spcBef>
+              <ns1:buNone/>
+            </ns1:pPr>
+            <ns1:r>
+              <ns1:rPr lang="en-US" sz="2800" b="1" dirty="0">
+                <ns1:solidFill>
+                  <ns1:srgbClr val="1F2328"/>
+                </ns1:solidFill>
+                <ns1:latin typeface="Arial" pitchFamily="34" charset="0"/>
+                <ns1:ea typeface="Arial" pitchFamily="34" charset="-122"/>
+                <ns1:cs typeface="Arial" pitchFamily="34" charset="-120"/>
+              </ns1:rPr>
+              <ns1:t>Update the skill, then use it</ns1:t>
+            </ns1:r>
+            <ns1:endParaRPr lang="en-US" sz="2800" dirty="0"/>
+          </ns1:p>
+        </ns0:txBody>
+      </ns0:sp>
+      <ns0:sp>
+        <ns0:nvSpPr>
+          <ns0:cNvPr id="8" name="Text 4"/>
+          <ns0:cNvSpPr/>
+          <ns0:nvPr/>
+        </ns0:nvSpPr>
+        <ns0:spPr>
+          <ns1:xfrm>
+            <ns1:off x="511076" y="1311771"/>
+            <ns1:ext cx="8121551" cy="1516261"/>
+          </ns1:xfrm>
+          <ns1:prstGeom prst="roundRect">
+            <ns1:avLst>
+              <ns1:gd name="adj" fmla="val 5026"/>
+            </ns1:avLst>
+          </ns1:prstGeom>
+          <ns1:solidFill>
+            <ns1:srgbClr val="FFFFFF"/>
+          </ns1:solidFill>
+          <ns1:ln w="9525">
+            <ns1:solidFill>
+              <ns1:srgbClr val="D1D9E0"/>
+            </ns1:solidFill>
+          </ns1:ln>
+          <ns1:effectLst>
+            <ns1:outerShdw sx="100000" sy="100000" kx="0" ky="0" algn="bl" rotWithShape="0" blurRad="38100" dist="9525" dir="5400000">
+              <ns1:srgbClr val="1f2328">
+                <ns1:alpha val="12000"/>
+              </ns1:srgbClr>
+            </ns1:outerShdw>
+          </ns1:effectLst>
+        </ns0:spPr>
+        <ns0:txBody>
+          <ns1:bodyPr wrap="square" rtlCol="0" anchor="ctr"/>
+          <ns1:lstStyle/>
+          <ns1:p>
+            <ns1:pPr indent="0" marL="0">
+              <ns1:buNone/>
+            </ns1:pPr>
+            <ns1:endParaRPr lang="en-US" dirty="0"/>
+          </ns1:p>
+        </ns0:txBody>
+      </ns0:sp>
+      <ns0:pic>
+        <ns0:nvPicPr>
+          <ns0:cNvPr id="9" name="Image 2" descr="Customize Installed tab with Skills filter and the book-app-reviewer result"/>
+          <ns0:cNvPicPr>
+            <ns1:picLocks noChangeAspect="1"/>
+          </ns0:cNvPicPr>
+          <ns0:nvPr/>
+        </ns0:nvPicPr>
+        <ns0:blipFill>
+          <ns1:blip ns3:embed="rId4"/>
+          <ns1:stretch>
+            <ns1:fillRect/>
+          </ns1:stretch>
+        </ns0:blipFill>
+        <ns0:spPr>
+          <ns1:xfrm>
+            <ns1:off x="558701" y="1359396"/>
+            <ns1:ext cx="8026301" cy="1421011"/>
+          </ns1:xfrm>
+          <ns1:prstGeom prst="rect">
+            <ns1:avLst/>
+          </ns1:prstGeom>
+        </ns0:spPr>
+      </ns0:pic>
+      <ns0:sp>
+        <ns0:nvSpPr>
+          <ns0:cNvPr id="10" name="Text 5"/>
+          <ns0:cNvSpPr/>
+          <ns0:nvPr/>
+        </ns0:nvSpPr>
+        <ns0:spPr>
+          <ns1:xfrm>
+            <ns1:off x="507950" y="3047851"/>
+            <ns1:ext cx="8127950" cy="1469827"/>
+          </ns1:xfrm>
+          <ns1:prstGeom prst="roundRect">
+            <ns1:avLst>
+              <ns1:gd name="adj" fmla="val 8640"/>
+            </ns1:avLst>
+          </ns1:prstGeom>
+          <ns1:solidFill>
+            <ns1:srgbClr val="FFFFFF"/>
+          </ns1:solidFill>
+          <ns1:ln w="9525">
+            <ns1:solidFill>
+              <ns1:srgbClr val="E0C5FF"/>
+            </ns1:solidFill>
+          </ns1:ln>
+        </ns0:spPr>
+        <ns0:txBody>
+          <ns1:bodyPr wrap="square" rtlCol="0" anchor="ctr"/>
+          <ns1:lstStyle/>
+          <ns1:p>
+            <ns1:pPr indent="0" marL="0">
+              <ns1:buNone/>
+            </ns1:pPr>
+            <ns1:endParaRPr lang="en-US" dirty="0"/>
+          </ns1:p>
+        </ns0:txBody>
+      </ns0:sp>
+      <ns0:sp>
+        <ns0:nvSpPr>
+          <ns0:cNvPr id="11" name="Shape 6"/>
+          <ns0:cNvSpPr/>
+          <ns0:nvPr/>
+        </ns0:nvSpPr>
+        <ns0:spPr>
+          <ns1:xfrm>
+            <ns1:off x="517475" y="3417689"/>
+            <ns1:ext cx="8108900" cy="0"/>
+          </ns1:xfrm>
+          <ns1:prstGeom prst="line">
+            <ns1:avLst/>
+          </ns1:prstGeom>
+          <ns1:noFill/>
+          <ns1:ln w="9525">
+            <ns1:solidFill>
+              <ns1:srgbClr val="D1D9E0"/>
+            </ns1:solidFill>
+            <ns1:prstDash val="solid"/>
+          </ns1:ln>
+        </ns0:spPr>
+      </ns0:sp>
+      <ns0:sp>
+        <ns0:nvSpPr>
+          <ns0:cNvPr id="12" name="Text 7"/>
+          <ns0:cNvSpPr/>
+          <ns0:nvPr/>
+        </ns0:nvSpPr>
+        <ns0:spPr>
+          <ns1:xfrm>
+            <ns1:off x="695176" y="3095476"/>
+            <ns1:ext cx="279350" cy="279350"/>
+          </ns1:xfrm>
+          <ns1:prstGeom prst="roundRect">
+            <ns1:avLst>
+              <ns1:gd name="adj" fmla="val 327331"/>
+            </ns1:avLst>
+          </ns1:prstGeom>
+          <ns1:solidFill>
+            <ns1:srgbClr val="8250DF"/>
+          </ns1:solidFill>
+          <ns1:ln/>
+        </ns0:spPr>
+        <ns0:txBody>
+          <ns1:bodyPr wrap="square" rtlCol="0" anchor="ctr"/>
+          <ns1:lstStyle/>
+          <ns1:p>
+            <ns1:pPr indent="0" marL="0">
+              <ns1:buNone/>
+            </ns1:pPr>
+            <ns1:endParaRPr lang="en-US" dirty="0"/>
+          </ns1:p>
+        </ns0:txBody>
+      </ns0:sp>
+      <ns0:sp>
+        <ns0:nvSpPr>
+          <ns0:cNvPr id="13" name="Text 8"/>
+          <ns0:cNvSpPr/>
+          <ns0:nvPr/>
+        </ns0:nvSpPr>
+        <ns0:spPr>
+          <ns1:xfrm>
+            <ns1:off x="789841" y="3139827"/>
+            <ns1:ext cx="90020" cy="190500"/>
+          </ns1:xfrm>
+          <ns1:prstGeom prst="rect">
+            <ns1:avLst/>
+          </ns1:prstGeom>
+          <ns1:noFill/>
+          <ns1:ln/>
+        </ns0:spPr>
+        <ns0:txBody>
+          <ns1:bodyPr wrap="square" lIns="0" tIns="0" rIns="0" bIns="0" rtlCol="0" anchor="t"/>
+          <ns1:lstStyle/>
+          <ns1:p>
+            <ns1:pPr algn="ctr" indent="0" marL="0">
+              <ns1:buNone/>
+            </ns1:pPr>
+            <ns1:r>
+              <ns1:rPr lang="en-US" sz="1250" b="1" dirty="0">
+                <ns1:solidFill>
+                  <ns1:srgbClr val="FFFFFF"/>
+                </ns1:solidFill>
+                <ns1:latin typeface="Arial" pitchFamily="34" charset="0"/>
+                <ns1:ea typeface="Arial" pitchFamily="34" charset="-122"/>
+                <ns1:cs typeface="Arial" pitchFamily="34" charset="-120"/>
+              </ns1:rPr>
+              <ns1:t>1</ns1:t>
+            </ns1:r>
+            <ns1:endParaRPr lang="en-US" sz="1250" dirty="0"/>
+          </ns1:p>
+        </ns0:txBody>
+      </ns0:sp>
+      <ns0:sp>
+        <ns0:nvSpPr>
+          <ns0:cNvPr id="14" name="Text 9"/>
+          <ns0:cNvSpPr/>
+          <ns0:nvPr/>
+        </ns0:nvSpPr>
+        <ns0:spPr>
+          <ns1:xfrm>
+            <ns1:off x="1152227" y="3127772"/>
+            <ns1:ext cx="2331720" cy="214610"/>
+          </ns1:xfrm>
+          <ns1:prstGeom prst="rect">
+            <ns1:avLst/>
+          </ns1:prstGeom>
+          <ns1:noFill/>
+          <ns1:ln/>
+        </ns0:spPr>
+        <ns0:txBody>
+          <ns1:bodyPr wrap="square" lIns="0" tIns="0" rIns="0" bIns="0" rtlCol="0" anchor="t"/>
+          <ns1:lstStyle/>
+          <ns1:p>
+            <ns1:pPr algn="l" indent="0" marL="0">
+              <ns1:lnSpc>
+                <ns1:spcPts val="1690"/>
+              </ns1:lnSpc>
+              <ns1:buNone/>
+            </ns1:pPr>
+            <ns1:r>
+              <ns1:rPr lang="en-US" sz="1500" b="1" dirty="0">
+                <ns1:solidFill>
+                  <ns1:srgbClr val="1F2328"/>
+                </ns1:solidFill>
+                <ns1:latin typeface="Arial" pitchFamily="34" charset="0"/>
+                <ns1:ea typeface="Arial" pitchFamily="34" charset="-122"/>
+                <ns1:cs typeface="Arial" pitchFamily="34" charset="-120"/>
+              </ns1:rPr>
+              <ns1:t>Find and check it</ns1:t>
+            </ns1:r>
+            <ns1:endParaRPr lang="en-US" sz="1500" dirty="0"/>
+          </ns1:p>
+        </ns0:txBody>
+      </ns0:sp>
+      <ns0:sp>
+        <ns0:nvSpPr>
+          <ns0:cNvPr id="15" name="Text 10"/>
+          <ns0:cNvSpPr/>
+          <ns0:nvPr/>
+        </ns0:nvSpPr>
+        <ns0:spPr>
+          <ns1:xfrm>
+            <ns1:off x="3615928" y="3131641"/>
+            <ns1:ext cx="4929402" cy="207020"/>
+          </ns1:xfrm>
+          <ns1:prstGeom prst="rect">
+            <ns1:avLst/>
+          </ns1:prstGeom>
+          <ns1:noFill/>
+          <ns1:ln/>
+        </ns0:spPr>
+        <ns0:txBody>
+          <ns1:bodyPr wrap="square" lIns="0" tIns="0" rIns="0" bIns="0" rtlCol="0" anchor="t"/>
+          <ns1:lstStyle/>
+          <ns1:p>
+            <ns1:pPr algn="l" indent="0" marL="0">
+              <ns1:lnSpc>
+                <ns1:spcPts val="1630"/>
+              </ns1:lnSpc>
+              <ns1:buNone/>
+            </ns1:pPr>
+            <ns1:r>
+              <ns1:rPr lang="en-US" sz="1400" b="1" dirty="0">
+                <ns1:solidFill>
+                  <ns1:srgbClr val="59636E"/>
+                </ns1:solidFill>
+                <ns1:latin typeface="Arial" pitchFamily="34" charset="0"/>
+                <ns1:ea typeface="Arial" pitchFamily="34" charset="-122"/>
+                <ns1:cs typeface="Arial" pitchFamily="34" charset="-120"/>
+              </ns1:rPr>
+              <ns1:t>Customize &gt; Installed &gt; Skills.</ns1:t>
+            </ns1:r>
+            <ns1:pPr algn="l" indent="0" marL="0">
+              <ns1:lnSpc>
+                <ns1:spcPts val="1630"/>
+              </ns1:lnSpc>
+              <ns1:buNone/>
+            </ns1:pPr>
+            <ns1:r>
+              <ns1:rPr lang="en-US" sz="1400" dirty="0">
+                <ns1:solidFill>
+                  <ns1:srgbClr val="59636E"/>
+                </ns1:solidFill>
+                <ns1:latin typeface="Arial" pitchFamily="34" charset="0"/>
+                <ns1:ea typeface="Arial" pitchFamily="34" charset="-122"/>
+                <ns1:cs typeface="Arial" pitchFamily="34" charset="-120"/>
+              </ns1:rPr>
+              <ns1:t/>
+            </ns1:r>
+            <ns1:pPr algn="l" indent="0" marL="0">
+              <ns1:lnSpc>
+                <ns1:spcPts val="1630"/>
+              </ns1:lnSpc>
+              <ns1:buNone/>
+            </ns1:pPr>
+            <ns1:r>
+              <ns1:rPr lang="en-US" sz="1400" b="1" dirty="0">
+                <ns1:solidFill>
+                  <ns1:srgbClr val="59636E"/>
+                </ns1:solidFill>
+                <ns1:latin typeface="Arial" pitchFamily="34" charset="0"/>
+                <ns1:ea typeface="Arial" pitchFamily="34" charset="-122"/>
+                <ns1:cs typeface="Arial" pitchFamily="34" charset="-120"/>
+              </ns1:rPr>
+              <ns1:t/>
+            </ns1:r>
+            <ns1:pPr algn="l" indent="0" marL="0">
+              <ns1:lnSpc>
+                <ns1:spcPts val="1630"/>
+              </ns1:lnSpc>
+              <ns1:buNone/>
+            </ns1:pPr>
+            <ns1:r>
+              <ns1:rPr lang="en-US" sz="1400" dirty="0">
+                <ns1:solidFill>
+                  <ns1:srgbClr val="59636E"/>
+                </ns1:solidFill>
+                <ns1:latin typeface="Arial" pitchFamily="34" charset="0"/>
+                <ns1:ea typeface="Arial" pitchFamily="34" charset="-122"/>
+                <ns1:cs typeface="Arial" pitchFamily="34" charset="-120"/>
+              </ns1:rPr>
+              <ns1:t/>
+            </ns1:r>
+            <ns1:pPr algn="l" indent="0" marL="0">
+              <ns1:lnSpc>
+                <ns1:spcPts val="1630"/>
+              </ns1:lnSpc>
+              <ns1:buNone/>
+            </ns1:pPr>
+            <ns1:r>
+              <ns1:rPr lang="en-US" sz="1400" b="1" dirty="0">
+                <ns1:solidFill>
+                  <ns1:srgbClr val="59636E"/>
+                </ns1:solidFill>
+                <ns1:latin typeface="Arial" pitchFamily="34" charset="0"/>
+                <ns1:ea typeface="Arial" pitchFamily="34" charset="-122"/>
+                <ns1:cs typeface="Arial" pitchFamily="34" charset="-120"/>
+              </ns1:rPr>
+              <ns1:t/>
+            </ns1:r>
+            <ns1:pPr algn="l" indent="0" marL="0">
+              <ns1:lnSpc>
+                <ns1:spcPts val="1630"/>
+              </ns1:lnSpc>
+              <ns1:buNone/>
+            </ns1:pPr>
+            <ns1:r>
+              <ns1:rPr lang="en-US" sz="1400" dirty="0">
+                <ns1:solidFill>
+                  <ns1:srgbClr val="59636E"/>
+                </ns1:solidFill>
+                <ns1:latin typeface="Arial" pitchFamily="34" charset="0"/>
+                <ns1:ea typeface="Arial" pitchFamily="34" charset="-122"/>
+                <ns1:cs typeface="Arial" pitchFamily="34" charset="-120"/>
+              </ns1:rPr>
+              <ns1:t/>
+            </ns1:r>
+            <ns1:endParaRPr lang="en-US" sz="1400" dirty="0"/>
+          </ns1:p>
+        </ns0:txBody>
+      </ns0:sp>
+      <ns0:sp>
+        <ns0:nvSpPr>
+          <ns0:cNvPr id="16" name="Shape 11"/>
+          <ns0:cNvSpPr/>
+          <ns0:nvPr/>
+        </ns0:nvSpPr>
+        <ns0:spPr>
+          <ns1:xfrm>
+            <ns1:off x="517475" y="3782764"/>
+            <ns1:ext cx="8108900" cy="0"/>
+          </ns1:xfrm>
+          <ns1:prstGeom prst="line">
+            <ns1:avLst/>
+          </ns1:prstGeom>
+          <ns1:noFill/>
+          <ns1:ln w="9525">
+            <ns1:solidFill>
+              <ns1:srgbClr val="D1D9E0"/>
+            </ns1:solidFill>
+            <ns1:prstDash val="solid"/>
+          </ns1:ln>
+        </ns0:spPr>
+      </ns0:sp>
+      <ns0:sp>
+        <ns0:nvSpPr>
+          <ns0:cNvPr id="17" name="Text 12"/>
+          <ns0:cNvSpPr/>
+          <ns0:nvPr/>
+        </ns0:nvSpPr>
+        <ns0:spPr>
+          <ns1:xfrm>
+            <ns1:off x="695176" y="3460552"/>
+            <ns1:ext cx="279350" cy="279350"/>
+          </ns1:xfrm>
+          <ns1:prstGeom prst="roundRect">
+            <ns1:avLst>
+              <ns1:gd name="adj" fmla="val 327331"/>
+            </ns1:avLst>
+          </ns1:prstGeom>
+          <ns1:solidFill>
+            <ns1:srgbClr val="8250DF"/>
+          </ns1:solidFill>
+          <ns1:ln/>
+        </ns0:spPr>
+        <ns0:txBody>
+          <ns1:bodyPr wrap="square" rtlCol="0" anchor="ctr"/>
+          <ns1:lstStyle/>
+          <ns1:p>
+            <ns1:pPr indent="0" marL="0">
+              <ns1:buNone/>
+            </ns1:pPr>
+            <ns1:endParaRPr lang="en-US" dirty="0"/>
+          </ns1:p>
+        </ns0:txBody>
+      </ns0:sp>
+      <ns0:sp>
+        <ns0:nvSpPr>
+          <ns0:cNvPr id="18" name="Text 13"/>
+          <ns0:cNvSpPr/>
+          <ns0:nvPr/>
+        </ns0:nvSpPr>
+        <ns0:spPr>
+          <ns1:xfrm>
+            <ns1:off x="789841" y="3504902"/>
+            <ns1:ext cx="90020" cy="190500"/>
+          </ns1:xfrm>
+          <ns1:prstGeom prst="rect">
+            <ns1:avLst/>
+          </ns1:prstGeom>
+          <ns1:noFill/>
+          <ns1:ln/>
+        </ns0:spPr>
+        <ns0:txBody>
+          <ns1:bodyPr wrap="square" lIns="0" tIns="0" rIns="0" bIns="0" rtlCol="0" anchor="t"/>
+          <ns1:lstStyle/>
+          <ns1:p>
+            <ns1:pPr algn="ctr" indent="0" marL="0">
+              <ns1:buNone/>
+            </ns1:pPr>
+            <ns1:r>
+              <ns1:rPr lang="en-US" sz="1250" b="1" dirty="0">
+                <ns1:solidFill>
+                  <ns1:srgbClr val="FFFFFF"/>
+                </ns1:solidFill>
+                <ns1:latin typeface="Arial" pitchFamily="34" charset="0"/>
+                <ns1:ea typeface="Arial" pitchFamily="34" charset="-122"/>
+                <ns1:cs typeface="Arial" pitchFamily="34" charset="-120"/>
+              </ns1:rPr>
+              <ns1:t>2</ns1:t>
+            </ns1:r>
+            <ns1:endParaRPr lang="en-US" sz="1250" dirty="0"/>
+          </ns1:p>
+        </ns0:txBody>
+      </ns0:sp>
+      <ns0:sp>
+        <ns0:nvSpPr>
+          <ns0:cNvPr id="19" name="Text 14"/>
+          <ns0:cNvSpPr/>
+          <ns0:nvPr/>
+        </ns0:nvSpPr>
+        <ns0:spPr>
+          <ns1:xfrm>
+            <ns1:off x="1152227" y="3492847"/>
+            <ns1:ext cx="2331720" cy="214610"/>
+          </ns1:xfrm>
+          <ns1:prstGeom prst="rect">
+            <ns1:avLst/>
+          </ns1:prstGeom>
+          <ns1:noFill/>
+          <ns1:ln/>
+        </ns0:spPr>
+        <ns0:txBody>
+          <ns1:bodyPr wrap="square" lIns="0" tIns="0" rIns="0" bIns="0" rtlCol="0" anchor="t"/>
+          <ns1:lstStyle/>
+          <ns1:p>
+            <ns1:pPr algn="l" indent="0" marL="0">
+              <ns1:lnSpc>
+                <ns1:spcPts val="1690"/>
+              </ns1:lnSpc>
+              <ns1:buNone/>
+            </ns1:pPr>
+            <ns1:r>
+              <ns1:rPr lang="en-US" sz="1500" b="1" dirty="0">
+                <ns1:solidFill>
+                  <ns1:srgbClr val="1F2328"/>
+                </ns1:solidFill>
+                <ns1:latin typeface="Arial" pitchFamily="34" charset="0"/>
+                <ns1:ea typeface="Arial" pitchFamily="34" charset="-122"/>
+                <ns1:cs typeface="Arial" pitchFamily="34" charset="-120"/>
+              </ns1:rPr>
+              <ns1:t>Append two rules</ns1:t>
+            </ns1:r>
+            <ns1:endParaRPr lang="en-US" sz="1500" dirty="0"/>
+          </ns1:p>
+        </ns0:txBody>
+      </ns0:sp>
+      <ns0:sp>
+        <ns0:nvSpPr>
+          <ns0:cNvPr id="20" name="Text 15"/>
+          <ns0:cNvSpPr/>
+          <ns0:nvPr/>
+        </ns0:nvSpPr>
+        <ns0:spPr>
+          <ns1:xfrm>
+            <ns1:off x="3615928" y="3496717"/>
+            <ns1:ext cx="4929402" cy="207020"/>
+          </ns1:xfrm>
+          <ns1:prstGeom prst="rect">
+            <ns1:avLst/>
+          </ns1:prstGeom>
+          <ns1:noFill/>
+          <ns1:ln/>
+        </ns0:spPr>
+        <ns0:txBody>
+          <ns1:bodyPr wrap="square" lIns="0" tIns="0" rIns="0" bIns="0" rtlCol="0" anchor="t"/>
+          <ns1:lstStyle/>
+          <ns1:p>
+            <ns1:pPr algn="l" indent="0" marL="0">
+              <ns1:lnSpc>
+                <ns1:spcPts val="1630"/>
+              </ns1:lnSpc>
+              <ns1:buNone/>
+            </ns1:pPr>
+            <ns1:r>
+              <ns1:rPr lang="en-US" sz="1400" dirty="0">
+                <ns1:solidFill>
+                  <ns1:srgbClr val="59636E"/>
+                </ns1:solidFill>
+                <ns1:latin typeface="Arial" pitchFamily="34" charset="0"/>
+                <ns1:ea typeface="Arial" pitchFamily="34" charset="-122"/>
+                <ns1:cs typeface="Arial" pitchFamily="34" charset="-120"/>
+              </ns1:rPr>
+              <ns1:t>Heading structure and text alternatives.</ns1:t>
+            </ns1:r>
+            <ns1:endParaRPr lang="en-US" sz="1400" dirty="0"/>
+          </ns1:p>
+        </ns0:txBody>
+      </ns0:sp>
+      <ns0:sp>
+        <ns0:nvSpPr>
+          <ns0:cNvPr id="21" name="Shape 16"/>
+          <ns0:cNvSpPr/>
+          <ns0:nvPr/>
+        </ns0:nvSpPr>
+        <ns0:spPr>
+          <ns1:xfrm>
+            <ns1:off x="517475" y="4147840"/>
+            <ns1:ext cx="8108900" cy="0"/>
+          </ns1:xfrm>
+          <ns1:prstGeom prst="line">
+            <ns1:avLst/>
+          </ns1:prstGeom>
+          <ns1:noFill/>
+          <ns1:ln w="9525">
+            <ns1:solidFill>
+              <ns1:srgbClr val="D1D9E0"/>
+            </ns1:solidFill>
+            <ns1:prstDash val="solid"/>
+          </ns1:ln>
+        </ns0:spPr>
+      </ns0:sp>
+      <ns0:sp>
+        <ns0:nvSpPr>
+          <ns0:cNvPr id="22" name="Text 17"/>
+          <ns0:cNvSpPr/>
+          <ns0:nvPr/>
+        </ns0:nvSpPr>
+        <ns0:spPr>
+          <ns1:xfrm>
+            <ns1:off x="695176" y="3825627"/>
+            <ns1:ext cx="279350" cy="279350"/>
+          </ns1:xfrm>
+          <ns1:prstGeom prst="roundRect">
+            <ns1:avLst>
+              <ns1:gd name="adj" fmla="val 327331"/>
+            </ns1:avLst>
+          </ns1:prstGeom>
+          <ns1:solidFill>
+            <ns1:srgbClr val="8250DF"/>
+          </ns1:solidFill>
+          <ns1:ln/>
+        </ns0:spPr>
+        <ns0:txBody>
+          <ns1:bodyPr wrap="square" rtlCol="0" anchor="ctr"/>
+          <ns1:lstStyle/>
+          <ns1:p>
+            <ns1:pPr indent="0" marL="0">
+              <ns1:buNone/>
+            </ns1:pPr>
+            <ns1:endParaRPr lang="en-US" dirty="0"/>
+          </ns1:p>
+        </ns0:txBody>
+      </ns0:sp>
+      <ns0:sp>
+        <ns0:nvSpPr>
+          <ns0:cNvPr id="23" name="Text 18"/>
+          <ns0:cNvSpPr/>
+          <ns0:nvPr/>
+        </ns0:nvSpPr>
+        <ns0:spPr>
+          <ns1:xfrm>
+            <ns1:off x="789841" y="3869978"/>
+            <ns1:ext cx="90020" cy="190500"/>
+          </ns1:xfrm>
+          <ns1:prstGeom prst="rect">
+            <ns1:avLst/>
+          </ns1:prstGeom>
+          <ns1:noFill/>
+          <ns1:ln/>
+        </ns0:spPr>
+        <ns0:txBody>
+          <ns1:bodyPr wrap="square" lIns="0" tIns="0" rIns="0" bIns="0" rtlCol="0" anchor="t"/>
+          <ns1:lstStyle/>
+          <ns1:p>
+            <ns1:pPr algn="ctr" indent="0" marL="0">
+              <ns1:buNone/>
+            </ns1:pPr>
+            <ns1:r>
+              <ns1:rPr lang="en-US" sz="1250" b="1" dirty="0">
+                <ns1:solidFill>
+                  <ns1:srgbClr val="FFFFFF"/>
+                </ns1:solidFill>
+                <ns1:latin typeface="Arial" pitchFamily="34" charset="0"/>
+                <ns1:ea typeface="Arial" pitchFamily="34" charset="-122"/>
+                <ns1:cs typeface="Arial" pitchFamily="34" charset="-120"/>
+              </ns1:rPr>
+              <ns1:t>3</ns1:t>
+            </ns1:r>
+            <ns1:endParaRPr lang="en-US" sz="1250" dirty="0"/>
+          </ns1:p>
+        </ns0:txBody>
+      </ns0:sp>
+      <ns0:sp>
+        <ns0:nvSpPr>
+          <ns0:cNvPr id="24" name="Text 19"/>
+          <ns0:cNvSpPr/>
+          <ns0:nvPr/>
+        </ns0:nvSpPr>
+        <ns0:spPr>
+          <ns1:xfrm>
+            <ns1:off x="1152227" y="3857923"/>
+            <ns1:ext cx="2331720" cy="214610"/>
+          </ns1:xfrm>
+          <ns1:prstGeom prst="rect">
+            <ns1:avLst/>
+          </ns1:prstGeom>
+          <ns1:noFill/>
+          <ns1:ln/>
+        </ns0:spPr>
+        <ns0:txBody>
+          <ns1:bodyPr wrap="square" lIns="0" tIns="0" rIns="0" bIns="0" rtlCol="0" anchor="t"/>
+          <ns1:lstStyle/>
+          <ns1:p>
+            <ns1:pPr algn="l" indent="0" marL="0">
+              <ns1:lnSpc>
+                <ns1:spcPts val="1690"/>
+              </ns1:lnSpc>
+              <ns1:buNone/>
+            </ns1:pPr>
+            <ns1:r>
+              <ns1:rPr lang="en-US" sz="1500" b="1" dirty="0">
+                <ns1:solidFill>
+                  <ns1:srgbClr val="1F2328"/>
+                </ns1:solidFill>
+                <ns1:latin typeface="Arial" pitchFamily="34" charset="0"/>
+                <ns1:ea typeface="Arial" pitchFamily="34" charset="-122"/>
+                <ns1:cs typeface="Arial" pitchFamily="34" charset="-120"/>
+              </ns1:rPr>
+              <ns1:t>Reload</ns1:t>
+            </ns1:r>
+            <ns1:endParaRPr lang="en-US" sz="1500" dirty="0"/>
+          </ns1:p>
+        </ns0:txBody>
+      </ns0:sp>
+      <ns0:sp>
+        <ns0:nvSpPr>
+          <ns0:cNvPr id="25" name="Text 20"/>
+          <ns0:cNvSpPr/>
+          <ns0:nvPr/>
+        </ns0:nvSpPr>
+        <ns0:spPr>
+          <ns1:xfrm>
+            <ns1:off x="3615928" y="3852267"/>
+            <ns1:ext cx="4929402" cy="226070"/>
+          </ns1:xfrm>
+          <ns1:prstGeom prst="rect">
+            <ns1:avLst/>
+          </ns1:prstGeom>
+          <ns1:noFill/>
+          <ns1:ln/>
+        </ns0:spPr>
+        <ns0:txBody>
+          <ns1:bodyPr wrap="square" lIns="0" tIns="0" rIns="0" bIns="0" rtlCol="0" anchor="t"/>
+          <ns1:lstStyle/>
+          <ns1:p>
+            <ns1:pPr algn="l" indent="0" marL="0">
+              <ns1:lnSpc>
+                <ns1:spcPts val="1630"/>
+              </ns1:lnSpc>
+              <ns1:buNone/>
+            </ns1:pPr>
+            <ns1:r>
+              <ns1:rPr lang="en-US" sz="1400" dirty="0">
+                <ns1:solidFill>
+                  <ns1:srgbClr val="59636E"/>
+                </ns1:solidFill>
+                <ns1:latin typeface="Arial" pitchFamily="34" charset="0"/>
+                <ns1:ea typeface="Arial" pitchFamily="34" charset="-122"/>
+                <ns1:cs typeface="Arial" pitchFamily="34" charset="-120"/>
+              </ns1:rPr>
+              <ns1:t>Check </ns1:t>
+            </ns1:r>
+            <ns1:pPr algn="l" indent="0" marL="0">
+              <ns1:lnSpc>
+                <ns1:spcPts val="1630"/>
+              </ns1:lnSpc>
+              <ns1:buNone/>
+            </ns1:pPr>
+            <ns1:r>
+              <ns1:rPr lang="en-US" sz="1400" b="1" dirty="0">
+                <ns1:solidFill>
+                  <ns1:srgbClr val="59636E"/>
+                </ns1:solidFill>
+                <ns1:latin typeface="Arial" pitchFamily="34" charset="0"/>
+                <ns1:ea typeface="Arial" pitchFamily="34" charset="-122"/>
+                <ns1:cs typeface="Arial" pitchFamily="34" charset="-120"/>
+              </ns1:rPr>
+              <ns1:t>Changes</ns1:t>
+            </ns1:r>
+            <ns1:pPr algn="l" indent="0" marL="0">
+              <ns1:lnSpc>
+                <ns1:spcPts val="1630"/>
+              </ns1:lnSpc>
+              <ns1:buNone/>
+            </ns1:pPr>
+            <ns1:r>
+              <ns1:rPr lang="en-US" sz="1400" dirty="0">
+                <ns1:solidFill>
+                  <ns1:srgbClr val="59636E"/>
+                </ns1:solidFill>
+                <ns1:latin typeface="Arial" pitchFamily="34" charset="0"/>
+                <ns1:ea typeface="Arial" pitchFamily="34" charset="-122"/>
+                <ns1:cs typeface="Arial" pitchFamily="34" charset="-120"/>
+              </ns1:rPr>
+              <ns1:t>, then </ns1:t>
+            </ns1:r>
+            <ns1:pPr algn="l" indent="0" marL="0">
+              <ns1:lnSpc>
+                <ns1:spcPts val="1630"/>
+              </ns1:lnSpc>
+              <ns1:buNone/>
+            </ns1:pPr>
+            <ns1:r>
+              <ns1:rPr lang="en-US" sz="1400" b="1" dirty="0">
+                <ns1:solidFill>
+                  <ns1:srgbClr val="0550AE"/>
+                </ns1:solidFill>
+                <ns1:latin typeface="Courier New" pitchFamily="34" charset="0"/>
+                <ns1:ea typeface="Courier New" pitchFamily="34" charset="-122"/>
+                <ns1:cs typeface="Courier New" pitchFamily="34" charset="-120"/>
+              </ns1:rPr>
+              <ns1:t>/skills reload</ns1:t>
+            </ns1:r>
+            <ns1:pPr algn="l" indent="0" marL="0">
+              <ns1:lnSpc>
+                <ns1:spcPts val="1630"/>
+              </ns1:lnSpc>
+              <ns1:buNone/>
+            </ns1:pPr>
+            <ns1:r>
+              <ns1:rPr lang="en-US" sz="1400" dirty="0">
+                <ns1:solidFill>
+                  <ns1:srgbClr val="59636E"/>
+                </ns1:solidFill>
+                <ns1:latin typeface="Arial" pitchFamily="34" charset="0"/>
+                <ns1:ea typeface="Arial" pitchFamily="34" charset="-122"/>
+                <ns1:cs typeface="Arial" pitchFamily="34" charset="-120"/>
+              </ns1:rPr>
+              <ns1:t>.</ns1:t>
+            </ns1:r>
+            <ns1:endParaRPr lang="en-US" sz="1400" dirty="0"/>
+          </ns1:p>
+        </ns0:txBody>
+      </ns0:sp>
+      <ns0:sp>
+        <ns0:nvSpPr>
+          <ns0:cNvPr id="26" name="Text 21"/>
+          <ns0:cNvSpPr/>
+          <ns0:nvPr/>
+        </ns0:nvSpPr>
+        <ns0:spPr>
+          <ns1:xfrm>
+            <ns1:off x="695176" y="4190702"/>
+            <ns1:ext cx="279350" cy="279350"/>
+          </ns1:xfrm>
+          <ns1:prstGeom prst="roundRect">
+            <ns1:avLst>
+              <ns1:gd name="adj" fmla="val 327331"/>
+            </ns1:avLst>
+          </ns1:prstGeom>
+          <ns1:solidFill>
+            <ns1:srgbClr val="8250DF"/>
+          </ns1:solidFill>
+          <ns1:ln/>
+        </ns0:spPr>
+        <ns0:txBody>
+          <ns1:bodyPr wrap="square" rtlCol="0" anchor="ctr"/>
+          <ns1:lstStyle/>
+          <ns1:p>
+            <ns1:pPr indent="0" marL="0">
+              <ns1:buNone/>
+            </ns1:pPr>
+            <ns1:endParaRPr lang="en-US" dirty="0"/>
+          </ns1:p>
+        </ns0:txBody>
+      </ns0:sp>
+      <ns0:sp>
+        <ns0:nvSpPr>
+          <ns0:cNvPr id="27" name="Text 22"/>
+          <ns0:cNvSpPr/>
+          <ns0:nvPr/>
+        </ns0:nvSpPr>
+        <ns0:spPr>
+          <ns1:xfrm>
+            <ns1:off x="789841" y="4235053"/>
+            <ns1:ext cx="90020" cy="190500"/>
+          </ns1:xfrm>
+          <ns1:prstGeom prst="rect">
+            <ns1:avLst/>
+          </ns1:prstGeom>
+          <ns1:noFill/>
+          <ns1:ln/>
+        </ns0:spPr>
+        <ns0:txBody>
+          <ns1:bodyPr wrap="square" lIns="0" tIns="0" rIns="0" bIns="0" rtlCol="0" anchor="t"/>
+          <ns1:lstStyle/>
+          <ns1:p>
+            <ns1:pPr algn="ctr" indent="0" marL="0">
+              <ns1:buNone/>
+            </ns1:pPr>
+            <ns1:r>
+              <ns1:rPr lang="en-US" sz="1250" b="1" dirty="0">
+                <ns1:solidFill>
+                  <ns1:srgbClr val="FFFFFF"/>
+                </ns1:solidFill>
+                <ns1:latin typeface="Arial" pitchFamily="34" charset="0"/>
+                <ns1:ea typeface="Arial" pitchFamily="34" charset="-122"/>
+                <ns1:cs typeface="Arial" pitchFamily="34" charset="-120"/>
+              </ns1:rPr>
+              <ns1:t>4</ns1:t>
+            </ns1:r>
+            <ns1:endParaRPr lang="en-US" sz="1250" dirty="0"/>
+          </ns1:p>
+        </ns0:txBody>
+      </ns0:sp>
+      <ns0:sp>
+        <ns0:nvSpPr>
+          <ns0:cNvPr id="28" name="Text 23"/>
+          <ns0:cNvSpPr/>
+          <ns0:nvPr/>
+        </ns0:nvSpPr>
+        <ns0:spPr>
+          <ns1:xfrm>
+            <ns1:off x="1152227" y="4222998"/>
+            <ns1:ext cx="2331720" cy="214610"/>
+          </ns1:xfrm>
+          <ns1:prstGeom prst="rect">
+            <ns1:avLst/>
+          </ns1:prstGeom>
+          <ns1:noFill/>
+          <ns1:ln/>
+        </ns0:spPr>
+        <ns0:txBody>
+          <ns1:bodyPr wrap="square" lIns="0" tIns="0" rIns="0" bIns="0" rtlCol="0" anchor="t"/>
+          <ns1:lstStyle/>
+          <ns1:p>
+            <ns1:pPr algn="l" indent="0" marL="0">
+              <ns1:lnSpc>
+                <ns1:spcPts val="1690"/>
+              </ns1:lnSpc>
+              <ns1:buNone/>
+            </ns1:pPr>
+            <ns1:r>
+              <ns1:rPr lang="en-US" sz="1500" b="1" dirty="0">
+                <ns1:solidFill>
+                  <ns1:srgbClr val="1F2328"/>
+                </ns1:solidFill>
+                <ns1:latin typeface="Arial" pitchFamily="34" charset="0"/>
+                <ns1:ea typeface="Arial" pitchFamily="34" charset="-122"/>
+                <ns1:cs typeface="Arial" pitchFamily="34" charset="-120"/>
+              </ns1:rPr>
+              <ns1:t>Review in Plan mode</ns1:t>
+            </ns1:r>
+            <ns1:endParaRPr lang="en-US" sz="1500" dirty="0"/>
+          </ns1:p>
+        </ns0:txBody>
+      </ns0:sp>
+      <ns0:sp>
+        <ns0:nvSpPr>
+          <ns0:cNvPr id="29" name="Text 24"/>
+          <ns0:cNvSpPr/>
+          <ns0:nvPr/>
+        </ns0:nvSpPr>
+        <ns0:spPr>
+          <ns1:xfrm>
+            <ns1:off x="3615928" y="4226868"/>
+            <ns1:ext cx="4929402" cy="207020"/>
+          </ns1:xfrm>
+          <ns1:prstGeom prst="rect">
+            <ns1:avLst/>
+          </ns1:prstGeom>
+          <ns1:noFill/>
+          <ns1:ln/>
+        </ns0:spPr>
+        <ns0:txBody>
+          <ns1:bodyPr wrap="square" lIns="0" tIns="0" rIns="0" bIns="0" rtlCol="0" anchor="t"/>
+          <ns1:lstStyle/>
+          <ns1:p>
+            <ns1:pPr algn="l" indent="0" marL="0">
+              <ns1:lnSpc>
+                <ns1:spcPts val="1630"/>
+              </ns1:lnSpc>
+              <ns1:buNone/>
+            </ns1:pPr>
+            <ns1:r>
+              <ns1:rPr lang="en-US" sz="1400" dirty="0">
+                <ns1:solidFill>
+                  <ns1:srgbClr val="59636E"/>
+                </ns1:solidFill>
+                <ns1:latin typeface="Arial" pitchFamily="34" charset="0"/>
+                <ns1:ea typeface="Arial" pitchFamily="34" charset="-122"/>
+                <ns1:cs typeface="Arial" pitchFamily="34" charset="-120"/>
+              </ns1:rPr>
+              <ns1:t>Confirm the skill loaded in the activity.</ns1:t>
+            </ns1:r>
+            <ns1:endParaRPr lang="en-US" sz="1400" dirty="0"/>
+          </ns1:p>
+        </ns0:txBody>
+      </ns0:sp>
+    </ns0:spTree>
+  </ns0:cSld>
+  <ns0:clrMapOvr>
+    <ns1:masterClrMapping/>
+  </ns0:clrMapOvr>
+</ns0:sld>
 </file>
 
 <file path=ppt/slides/slide9.xml><?xml version="1.0" encoding="utf-8"?>

--- a/slides/04-skills-custom-agents.pptx
+++ b/slides/04-skills-custom-agents.pptx
@@ -18,7 +18,6 @@
     <p:sldId id="266" r:id="rId12"/>
     <p:sldId id="267" r:id="rId13"/>
     <p:sldId id="268" r:id="rId14"/>
-    <p:sldId id="269" r:id="rId15"/>
     <p:sldId id="270" r:id="rId16"/>
     <p:sldId id="271" r:id="rId17"/>
   </p:sldIdLst>
@@ -781,7 +780,7 @@
           <ns1:p>
             <ns1:r>
               <ns1:rPr lang="en-US" dirty="0"/>
-              <ns1:t>Ask Copilot to create .github/agents/book-app-explainer.agent.md with the exact Markdown from the chapter, and to stop if the file already exists. Inspect it in Changes and confirm tools contains only read and search. Keep the description as a valid, indented YAML value if it wraps across lines. The name identifies it in the agent picker. The description states its purpose. The body defines behavior and a four-part answer format: what it does, how the data moves, one small example, and what the tests cover plus one manual check.</ns1:t>
+              <ns1:t>Ask Copilot to create .github/agents/book-app-explainer.agent.md with the exact Markdown from the chapter, and to stop if the file already exists. Inspect it in Changes and confirm tools contains only read and search. The tools list is the real limit: omitting it allows all available tools, and folder rules in the body guide the agent but are not a file-system sandbox. Keep the description as a valid, indented YAML value if it wraps across lines. The name identifies it in the agent picker. The description states its purpose. The body defines behavior and a four-part answer format: what it does, how the data moves, one small example, and what the tests cover plus one manual check.</ns1:t>
             </ns1:r>
             <ns1:endParaRPr lang="en-US" dirty="0"/>
           </ns1:p>
@@ -869,7 +868,7 @@
           <a:p>
             <a:r>
               <a:rPr lang="en-US" dirty="0"/>
-              <a:t>The app loads custom agents when it starts. Wait for active work in all sessions to finish, quit the GitHub Copilot app, open it again, and select this chapter's session. Closing the window is not the same as quitting. Then type slash agent and select book-app-explainer, and send the command. The screenshot shows the list before sending, so it still says Default agent; after sending, the live picker should show book-app-explainer. Ask it to explain how App.tsx keeps statistics aligned with filtered books, following its four-part format. A good answer traces filters through filterBooks to filteredBooks, and shows how that list reaches ReadingStats and the book cards. It separates test coverage from a manual check. No files change. Return to the default agent before the assignment.</a:t>
+              <a:t>The app loads custom agents when it starts. Wait for active work in all sessions to finish, quit the GitHub Copilot app, open it again, and select this chapter's session. Closing the window is not the same as quitting. Then type slash agent and select book-app-explainer, and send the command. The screenshot shows the list before sending, so it still says Default agent; after sending, the live picker should show book-app-explainer. Ask it to explain how App.tsx keeps statistics aligned with filtered books, following its four-part format. A good answer traces filters through filterBooks to filteredBooks, and shows how that list reaches ReadingStats and the book cards. It separates test coverage from a manual check. No files change. Return to the default agent before the assignment, and use it whenever you need to run tests, instead of widening the explainer tools.</a:t>
             </a:r>
             <a:endParaRPr lang="en-US" dirty="0"/>
           </a:p>
@@ -893,94 +892,6 @@
             <a:fld id="{F7021451-1387-4CA6-816F-3879F97B5CBC}" type="slidenum">
               <a:rPr lang="en-US"/>
               <a:t>13</a:t>
-            </a:fld>
-            <a:endParaRPr lang="en-US"/>
-          </a:p>
-        </p:txBody>
-      </p:sp>
-    </p:spTree>
-    <p:extLst>
-      <p:ext uri="{BB962C8B-B14F-4D97-AF65-F5344CB8AC3E}">
-        <p14:creationId xmlns:p14="http://schemas.microsoft.com/office/powerpoint/2010/main" val="1024086991"/>
-      </p:ext>
-    </p:extLst>
-  </p:cSld>
-  <p:clrMapOvr>
-    <a:masterClrMapping/>
-  </p:clrMapOvr>
-</p:notes>
-</file>
-
-<file path=ppt/notesSlides/notesSlide14.xml><?xml version="1.0" encoding="utf-8"?>
-<p:notes xmlns:a="http://schemas.openxmlformats.org/drawingml/2006/main" xmlns:r="http://schemas.openxmlformats.org/officeDocument/2006/relationships" xmlns:p="http://schemas.openxmlformats.org/presentationml/2006/main">
-  <p:cSld>
-    <p:spTree>
-      <p:nvGrpSpPr>
-        <p:cNvPr id="1" name=""/>
-        <p:cNvGrpSpPr/>
-        <p:nvPr/>
-      </p:nvGrpSpPr>
-      <p:grpSpPr>
-        <a:xfrm>
-          <a:off x="0" y="0"/>
-          <a:ext cx="0" cy="0"/>
-          <a:chOff x="0" y="0"/>
-          <a:chExt cx="0" cy="0"/>
-        </a:xfrm>
-      </p:grpSpPr>
-      <p:sp>
-        <p:nvSpPr>
-          <p:cNvPr id="2" name="Slide Image Placeholder 1"/>
-          <p:cNvSpPr>
-            <a:spLocks noGrp="1" noRot="1" noChangeAspect="1"/>
-          </p:cNvSpPr>
-          <p:nvPr>
-            <p:ph type="sldImg"/>
-          </p:nvPr>
-        </p:nvSpPr>
-        <p:spPr/>
-      </p:sp>
-      <p:sp>
-        <p:nvSpPr>
-          <p:cNvPr id="3" name="Notes Placeholder 2"/>
-          <p:cNvSpPr>
-            <a:spLocks noGrp="1"/>
-          </p:cNvSpPr>
-          <p:nvPr>
-            <p:ph type="body" idx="1"/>
-          </p:nvPr>
-        </p:nvSpPr>
-        <p:spPr/>
-        <p:txBody>
-          <a:bodyPr/>
-          <a:lstStyle/>
-          <a:p>
-            <a:r>
-              <a:rPr lang="en-US" dirty="0"/>
-              <a:t>The tools list is the real limit. The skill said review without editing, but only the agent tool list actually removes editing. Omitting the list allows all available tools. Instructions like only work in this folder guide the agent but are not a file-system sandbox. When you need to run tests, switch back to the default agent rather than widening the explainer.</a:t>
-            </a:r>
-            <a:endParaRPr lang="en-US" dirty="0"/>
-          </a:p>
-        </p:txBody>
-      </p:sp>
-      <p:sp>
-        <p:nvSpPr>
-          <p:cNvPr id="4" name="Slide Number Placeholder 3"/>
-          <p:cNvSpPr>
-            <a:spLocks noGrp="1"/>
-          </p:cNvSpPr>
-          <p:nvPr>
-            <p:ph type="sldNum" sz="quarter" idx="10"/>
-          </p:nvPr>
-        </p:nvSpPr>
-        <p:spPr/>
-        <p:txBody>
-          <a:bodyPr/>
-          <a:lstStyle/>
-          <a:p>
-            <a:fld id="{F7021451-1387-4CA6-816F-3879F97B5CBC}" type="slidenum">
-              <a:rPr lang="en-US"/>
-              <a:t>14</a:t>
             </a:fld>
             <a:endParaRPr lang="en-US"/>
           </a:p>
@@ -2769,7 +2680,7 @@
         </p:nvSpPr>
         <p:spPr>
           <a:xfrm>
-            <a:off x="711101" y="1279773"/>
+            <a:off x="711101" y="1645533"/>
             <a:ext cx="5570169" cy="209550"/>
           </a:xfrm>
           <a:prstGeom prst="rect">
@@ -2808,7 +2719,7 @@
         </p:nvSpPr>
         <p:spPr>
           <a:xfrm>
-            <a:off x="711101" y="1590824"/>
+            <a:off x="711101" y="1956584"/>
             <a:ext cx="5570169" cy="1168301"/>
           </a:xfrm>
           <a:prstGeom prst="rect">
@@ -2853,7 +2764,7 @@
         </p:nvSpPr>
         <p:spPr>
           <a:xfrm>
-            <a:off x="711101" y="2962275"/>
+            <a:off x="711101" y="3328035"/>
             <a:ext cx="609600" cy="63401"/>
           </a:xfrm>
           <a:prstGeom prst="roundRect">
@@ -2874,48 +2785,6 @@
               <a:buNone/>
             </a:pPr>
             <a:endParaRPr lang="en-US" dirty="0"/>
-          </a:p>
-        </p:txBody>
-      </p:sp>
-      <p:sp>
-        <p:nvSpPr>
-          <p:cNvPr id="12" name="Text 8"/>
-          <p:cNvSpPr/>
-          <p:nvPr/>
-        </p:nvSpPr>
-        <p:spPr>
-          <a:xfrm>
-            <a:off x="711101" y="3228826"/>
-            <a:ext cx="5570169" cy="634901"/>
-          </a:xfrm>
-          <a:prstGeom prst="rect">
-            <a:avLst/>
-          </a:prstGeom>
-          <a:noFill/>
-          <a:ln/>
-        </p:spPr>
-        <p:txBody>
-          <a:bodyPr wrap="square" lIns="0" tIns="0" rIns="0" bIns="0" rtlCol="0" anchor="t"/>
-          <a:lstStyle/>
-          <a:p>
-            <a:pPr algn="l" indent="0" marL="0">
-              <a:lnSpc>
-                <a:spcPts val="2500"/>
-              </a:lnSpc>
-              <a:buNone/>
-            </a:pPr>
-            <a:r>
-              <a:rPr lang="en-US" sz="1900" dirty="0">
-                <a:solidFill>
-                  <a:srgbClr val="59636E"/>
-                </a:solidFill>
-                <a:latin typeface="Arial" pitchFamily="34" charset="0"/>
-                <a:ea typeface="Arial" pitchFamily="34" charset="-122"/>
-                <a:cs typeface="Arial" pitchFamily="34" charset="-120"/>
-              </a:rPr>
-              <a:t>Give a specialist a clear role and only the tools that role needs.</a:t>
-            </a:r>
-            <a:endParaRPr lang="en-US" sz="1900" dirty="0"/>
           </a:p>
         </p:txBody>
       </p:sp>
@@ -6204,863 +6073,6 @@
 </p:sld>
 </file>
 
-<file path=ppt/slides/slide14.xml><?xml version="1.0" encoding="utf-8"?>
-<p:sld xmlns:a="http://schemas.openxmlformats.org/drawingml/2006/main" xmlns:r="http://schemas.openxmlformats.org/officeDocument/2006/relationships" xmlns:p="http://schemas.openxmlformats.org/presentationml/2006/main">
-  <p:cSld name="Slide 14">
-    <p:bg>
-      <p:bgPr>
-        <a:solidFill>
-          <a:srgbClr val="FFFFFF"/>
-        </a:solidFill>
-      </p:bgPr>
-    </p:bg>
-    <p:spTree>
-      <p:nvGrpSpPr>
-        <p:cNvPr id="1" name=""/>
-        <p:cNvGrpSpPr/>
-        <p:nvPr/>
-      </p:nvGrpSpPr>
-      <p:grpSpPr>
-        <a:xfrm>
-          <a:off x="0" y="0"/>
-          <a:ext cx="0" cy="0"/>
-          <a:chOff x="0" y="0"/>
-          <a:chExt cx="0" cy="0"/>
-        </a:xfrm>
-      </p:grpSpPr>
-      <p:pic>
-        <p:nvPicPr>
-          <p:cNvPr id="2" name="Image 0" descr="">
-            <a:extLst>
-              <a:ext uri="{C183D7F6-B498-43B3-948B-1728B52AA6E4}">
-                <adec:decorative xmlns:adec="http://schemas.microsoft.com/office/drawing/2017/decorative" val="1"/>
-              </a:ext>
-            </a:extLst>
-          </p:cNvPr>
-          <p:cNvPicPr>
-            <a:picLocks noChangeAspect="1"/>
-          </p:cNvPicPr>
-          <p:nvPr/>
-        </p:nvPicPr>
-        <p:blipFill>
-          <a:blip r:embed="rId1"/>
-          <a:stretch>
-            <a:fillRect/>
-          </a:stretch>
-        </p:blipFill>
-        <p:spPr>
-          <a:xfrm>
-            <a:off x="6349901" y="0"/>
-            <a:ext cx="2793950" cy="1308050"/>
-          </a:xfrm>
-          <a:prstGeom prst="rect">
-            <a:avLst/>
-          </a:prstGeom>
-        </p:spPr>
-      </p:pic>
-      <p:sp>
-        <p:nvSpPr>
-          <p:cNvPr id="3" name="Text 0"/>
-          <p:cNvSpPr/>
-          <p:nvPr/>
-        </p:nvSpPr>
-        <p:spPr>
-          <a:xfrm>
-            <a:off x="7340501" y="177701"/>
-            <a:ext cx="1168301" cy="279350"/>
-          </a:xfrm>
-          <a:prstGeom prst="roundRect">
-            <a:avLst>
-              <a:gd name="adj" fmla="val 22731"/>
-            </a:avLst>
-          </a:prstGeom>
-          <a:solidFill>
-            <a:srgbClr val="1A7F37"/>
-          </a:solidFill>
-          <a:ln/>
-        </p:spPr>
-        <p:txBody>
-          <a:bodyPr wrap="square" rtlCol="0" anchor="ctr"/>
-          <a:lstStyle/>
-          <a:p>
-            <a:pPr indent="0" marL="0">
-              <a:buNone/>
-            </a:pPr>
-            <a:endParaRPr lang="en-US" dirty="0"/>
-          </a:p>
-        </p:txBody>
-      </p:sp>
-      <p:sp>
-        <p:nvSpPr>
-          <p:cNvPr id="4" name="Text 1"/>
-          <p:cNvSpPr/>
-          <p:nvPr/>
-        </p:nvSpPr>
-        <p:spPr>
-          <a:xfrm>
-            <a:off x="7461041" y="231577"/>
-            <a:ext cx="927071" cy="171450"/>
-          </a:xfrm>
-          <a:prstGeom prst="rect">
-            <a:avLst/>
-          </a:prstGeom>
-          <a:noFill/>
-          <a:ln/>
-        </p:spPr>
-        <p:txBody>
-          <a:bodyPr wrap="square" lIns="0" tIns="0" rIns="0" bIns="0" rtlCol="0" anchor="t"/>
-          <a:lstStyle/>
-          <a:p>
-            <a:pPr algn="ctr" indent="0" marL="0">
-              <a:buNone/>
-            </a:pPr>
-            <a:r>
-              <a:rPr lang="en-US" sz="1150" b="1" dirty="0">
-                <a:solidFill>
-                  <a:srgbClr val="FFFFFF"/>
-                </a:solidFill>
-                <a:latin typeface="Arial" pitchFamily="34" charset="0"/>
-                <a:ea typeface="Arial" pitchFamily="34" charset="-122"/>
-                <a:cs typeface="Arial" pitchFamily="34" charset="-120"/>
-              </a:rPr>
-              <a:t>CHAPTER 04</a:t>
-            </a:r>
-            <a:endParaRPr lang="en-US" sz="1150" dirty="0"/>
-          </a:p>
-        </p:txBody>
-      </p:sp>
-      <p:pic>
-        <p:nvPicPr>
-          <p:cNvPr id="5" name="Image 1" descr="Open this chapter on GitHub">
-            <a:hlinkClick r:id="rId3" tooltip="https://github.com/github/copilot-app-for-beginners/tree/main/04-skills-custom-agents"/>
-          </p:cNvPr>
-          <p:cNvPicPr>
-            <a:picLocks noChangeAspect="1"/>
-          </p:cNvPicPr>
-          <p:nvPr/>
-        </p:nvPicPr>
-        <p:blipFill>
-          <a:blip r:embed="rId2"/>
-          <a:stretch>
-            <a:fillRect/>
-          </a:stretch>
-        </p:blipFill>
-        <p:spPr>
-          <a:xfrm>
-            <a:off x="8610600" y="165050"/>
-            <a:ext cx="304800" cy="304800"/>
-          </a:xfrm>
-          <a:prstGeom prst="rect">
-            <a:avLst/>
-          </a:prstGeom>
-        </p:spPr>
-      </p:pic>
-      <p:sp>
-        <p:nvSpPr>
-          <p:cNvPr id="6" name="Text 2"/>
-          <p:cNvSpPr/>
-          <p:nvPr/>
-        </p:nvSpPr>
-        <p:spPr>
-          <a:xfrm>
-            <a:off x="507950" y="381000"/>
-            <a:ext cx="8161020" cy="190500"/>
-          </a:xfrm>
-          <a:prstGeom prst="rect">
-            <a:avLst/>
-          </a:prstGeom>
-          <a:noFill/>
-          <a:ln/>
-        </p:spPr>
-        <p:txBody>
-          <a:bodyPr wrap="square" lIns="0" tIns="0" rIns="0" bIns="0" rtlCol="0" anchor="t"/>
-          <a:lstStyle/>
-          <a:p>
-            <a:pPr algn="l" indent="0" marL="0">
-              <a:buNone/>
-            </a:pPr>
-            <a:r>
-              <a:rPr lang="en-US" sz="1250" b="1" dirty="0">
-                <a:solidFill>
-                  <a:srgbClr val="8250DF"/>
-                </a:solidFill>
-                <a:latin typeface="Arial" pitchFamily="34" charset="0"/>
-                <a:ea typeface="Arial" pitchFamily="34" charset="-122"/>
-                <a:cs typeface="Arial" pitchFamily="34" charset="-120"/>
-              </a:rPr>
-              <a:t>LEAST PRIVILEGE</a:t>
-            </a:r>
-            <a:endParaRPr lang="en-US" sz="1250" dirty="0"/>
-          </a:p>
-        </p:txBody>
-      </p:sp>
-      <p:sp>
-        <p:nvSpPr>
-          <p:cNvPr id="7" name="Text 3"/>
-          <p:cNvSpPr/>
-          <p:nvPr/>
-        </p:nvSpPr>
-        <p:spPr>
-          <a:xfrm>
-            <a:off x="507950" y="622250"/>
-            <a:ext cx="8161020" cy="419100"/>
-          </a:xfrm>
-          <a:prstGeom prst="rect">
-            <a:avLst/>
-          </a:prstGeom>
-          <a:noFill/>
-          <a:ln/>
-        </p:spPr>
-        <p:txBody>
-          <a:bodyPr wrap="square" lIns="0" tIns="0" rIns="0" bIns="0" rtlCol="0" anchor="t"/>
-          <a:lstStyle/>
-          <a:p>
-            <a:pPr algn="l" indent="0" marL="0">
-              <a:lnSpc>
-                <a:spcPts val="3300"/>
-              </a:lnSpc>
-              <a:spcBef>
-                <a:spcPts val="400"/>
-              </a:spcBef>
-              <a:buNone/>
-            </a:pPr>
-            <a:r>
-              <a:rPr lang="en-US" sz="2800" b="1" dirty="0">
-                <a:solidFill>
-                  <a:srgbClr val="1F2328"/>
-                </a:solidFill>
-                <a:latin typeface="Arial" pitchFamily="34" charset="0"/>
-                <a:ea typeface="Arial" pitchFamily="34" charset="-122"/>
-                <a:cs typeface="Arial" pitchFamily="34" charset="-120"/>
-              </a:rPr>
-              <a:t>Give the agent only what it needs</a:t>
-            </a:r>
-            <a:endParaRPr lang="en-US" sz="2800" dirty="0"/>
-          </a:p>
-        </p:txBody>
-      </p:sp>
-      <p:sp>
-        <p:nvSpPr>
-          <p:cNvPr id="8" name="Text 4"/>
-          <p:cNvSpPr/>
-          <p:nvPr/>
-        </p:nvSpPr>
-        <p:spPr>
-          <a:xfrm>
-            <a:off x="507950" y="2263378"/>
-            <a:ext cx="2590800" cy="1365647"/>
-          </a:xfrm>
-          <a:prstGeom prst="roundRect">
-            <a:avLst>
-              <a:gd name="adj" fmla="val 9300"/>
-            </a:avLst>
-          </a:prstGeom>
-          <a:solidFill>
-            <a:srgbClr val="FFFFFF"/>
-          </a:solidFill>
-          <a:ln w="9525">
-            <a:solidFill>
-              <a:srgbClr val="8CE7A5"/>
-            </a:solidFill>
-          </a:ln>
-        </p:spPr>
-        <p:txBody>
-          <a:bodyPr wrap="square" rtlCol="0" anchor="ctr"/>
-          <a:lstStyle/>
-          <a:p>
-            <a:pPr indent="0" marL="0">
-              <a:buNone/>
-            </a:pPr>
-            <a:endParaRPr lang="en-US" dirty="0"/>
-          </a:p>
-        </p:txBody>
-      </p:sp>
-      <p:sp>
-        <p:nvSpPr>
-          <p:cNvPr id="9" name="Text 5"/>
-          <p:cNvSpPr/>
-          <p:nvPr/>
-        </p:nvSpPr>
-        <p:spPr>
-          <a:xfrm>
-            <a:off x="695176" y="2498229"/>
-            <a:ext cx="381000" cy="381000"/>
-          </a:xfrm>
-          <a:prstGeom prst="roundRect">
-            <a:avLst>
-              <a:gd name="adj" fmla="val 23333"/>
-            </a:avLst>
-          </a:prstGeom>
-          <a:solidFill>
-            <a:srgbClr val="DAFBE1"/>
-          </a:solidFill>
-          <a:ln/>
-        </p:spPr>
-        <p:txBody>
-          <a:bodyPr wrap="square" rtlCol="0" anchor="ctr"/>
-          <a:lstStyle/>
-          <a:p>
-            <a:pPr indent="0" marL="0">
-              <a:buNone/>
-            </a:pPr>
-            <a:endParaRPr lang="en-US" dirty="0"/>
-          </a:p>
-        </p:txBody>
-      </p:sp>
-      <p:pic>
-        <p:nvPicPr>
-          <p:cNvPr id="10" name="Image 2" descr="">
-            <a:extLst>
-              <a:ext uri="{C183D7F6-B498-43B3-948B-1728B52AA6E4}">
-                <adec:decorative xmlns:adec="http://schemas.microsoft.com/office/drawing/2017/decorative" val="1"/>
-              </a:ext>
-            </a:extLst>
-          </p:cNvPr>
-          <p:cNvPicPr>
-            <a:picLocks noChangeAspect="1"/>
-          </p:cNvPicPr>
-          <p:nvPr/>
-        </p:nvPicPr>
-        <p:blipFill>
-          <a:blip r:embed="rId4"/>
-          <a:stretch>
-            <a:fillRect/>
-          </a:stretch>
-        </p:blipFill>
-        <p:spPr>
-          <a:xfrm>
-            <a:off x="777776" y="2580829"/>
-            <a:ext cx="215801" cy="215801"/>
-          </a:xfrm>
-          <a:prstGeom prst="rect">
-            <a:avLst/>
-          </a:prstGeom>
-        </p:spPr>
-      </p:pic>
-      <p:sp>
-        <p:nvSpPr>
-          <p:cNvPr id="11" name="Text 6"/>
-          <p:cNvSpPr/>
-          <p:nvPr/>
-        </p:nvSpPr>
-        <p:spPr>
-          <a:xfrm>
-            <a:off x="1190476" y="2450604"/>
-            <a:ext cx="1755469" cy="476250"/>
-          </a:xfrm>
-          <a:prstGeom prst="rect">
-            <a:avLst/>
-          </a:prstGeom>
-          <a:noFill/>
-          <a:ln/>
-        </p:spPr>
-        <p:txBody>
-          <a:bodyPr wrap="square" lIns="0" tIns="0" rIns="0" bIns="0" rtlCol="0" anchor="t"/>
-          <a:lstStyle/>
-          <a:p>
-            <a:pPr algn="l" indent="0" marL="0">
-              <a:lnSpc>
-                <a:spcPts val="1800"/>
-              </a:lnSpc>
-              <a:buNone/>
-            </a:pPr>
-            <a:r>
-              <a:rPr lang="en-US" sz="1650" b="1" dirty="0">
-                <a:solidFill>
-                  <a:srgbClr val="0550AE"/>
-                </a:solidFill>
-                <a:latin typeface="Courier New" pitchFamily="34" charset="0"/>
-                <a:ea typeface="Courier New" pitchFamily="34" charset="-122"/>
-                <a:cs typeface="Courier New" pitchFamily="34" charset="-120"/>
-              </a:rPr>
-              <a:t>tools</a:t>
-            </a:r>
-            <a:pPr algn="l" indent="0" marL="0">
-              <a:lnSpc>
-                <a:spcPts val="1800"/>
-              </a:lnSpc>
-              <a:buNone/>
-            </a:pPr>
-            <a:r>
-              <a:rPr lang="en-US" sz="1650" dirty="0">
-                <a:solidFill>
-                  <a:srgbClr val="1F2328"/>
-                </a:solidFill>
-                <a:latin typeface="Arial" pitchFamily="34" charset="0"/>
-                <a:ea typeface="Arial" pitchFamily="34" charset="-122"/>
-                <a:cs typeface="Arial" pitchFamily="34" charset="-120"/>
-              </a:rPr>
-              <a:t> is the real limit</a:t>
-            </a:r>
-            <a:endParaRPr lang="en-US" sz="1650" dirty="0"/>
-          </a:p>
-        </p:txBody>
-      </p:sp>
-      <p:sp>
-        <p:nvSpPr>
-          <p:cNvPr id="12" name="Text 7"/>
-          <p:cNvSpPr/>
-          <p:nvPr/>
-        </p:nvSpPr>
-        <p:spPr>
-          <a:xfrm>
-            <a:off x="695176" y="3003054"/>
-            <a:ext cx="2260675" cy="438745"/>
-          </a:xfrm>
-          <a:prstGeom prst="rect">
-            <a:avLst/>
-          </a:prstGeom>
-          <a:noFill/>
-          <a:ln/>
-        </p:spPr>
-        <p:txBody>
-          <a:bodyPr wrap="square" lIns="0" tIns="0" rIns="0" bIns="0" rtlCol="0" anchor="t"/>
-          <a:lstStyle/>
-          <a:p>
-            <a:pPr algn="l" indent="0" marL="0">
-              <a:lnSpc>
-                <a:spcPts val="1690"/>
-              </a:lnSpc>
-              <a:buNone/>
-            </a:pPr>
-            <a:r>
-              <a:rPr lang="en-US" sz="1400" b="1" dirty="0">
-                <a:solidFill>
-                  <a:srgbClr val="0550AE"/>
-                </a:solidFill>
-                <a:latin typeface="Courier New" pitchFamily="34" charset="0"/>
-                <a:ea typeface="Courier New" pitchFamily="34" charset="-122"/>
-                <a:cs typeface="Courier New" pitchFamily="34" charset="-120"/>
-              </a:rPr>
-              <a:t>read</a:t>
-            </a:r>
-            <a:pPr algn="l" indent="0" marL="0">
-              <a:lnSpc>
-                <a:spcPts val="1690"/>
-              </a:lnSpc>
-              <a:buNone/>
-            </a:pPr>
-            <a:r>
-              <a:rPr lang="en-US" sz="1400" dirty="0">
-                <a:solidFill>
-                  <a:srgbClr val="59636E"/>
-                </a:solidFill>
-                <a:latin typeface="Arial" pitchFamily="34" charset="0"/>
-                <a:ea typeface="Arial" pitchFamily="34" charset="-122"/>
-                <a:cs typeface="Arial" pitchFamily="34" charset="-120"/>
-              </a:rPr>
-              <a:t> and </a:t>
-            </a:r>
-            <a:pPr algn="l" indent="0" marL="0">
-              <a:lnSpc>
-                <a:spcPts val="1690"/>
-              </a:lnSpc>
-              <a:buNone/>
-            </a:pPr>
-            <a:r>
-              <a:rPr lang="en-US" sz="1400" b="1" dirty="0">
-                <a:solidFill>
-                  <a:srgbClr val="0550AE"/>
-                </a:solidFill>
-                <a:latin typeface="Courier New" pitchFamily="34" charset="0"/>
-                <a:ea typeface="Courier New" pitchFamily="34" charset="-122"/>
-                <a:cs typeface="Courier New" pitchFamily="34" charset="-120"/>
-              </a:rPr>
-              <a:t>search</a:t>
-            </a:r>
-            <a:pPr algn="l" indent="0" marL="0">
-              <a:lnSpc>
-                <a:spcPts val="1690"/>
-              </a:lnSpc>
-              <a:buNone/>
-            </a:pPr>
-            <a:r>
-              <a:rPr lang="en-US" sz="1400" dirty="0">
-                <a:solidFill>
-                  <a:srgbClr val="59636E"/>
-                </a:solidFill>
-                <a:latin typeface="Arial" pitchFamily="34" charset="0"/>
-                <a:ea typeface="Arial" pitchFamily="34" charset="-122"/>
-                <a:cs typeface="Arial" pitchFamily="34" charset="-120"/>
-              </a:rPr>
-              <a:t> cannot edit files or run tests.</a:t>
-            </a:r>
-            <a:endParaRPr lang="en-US" sz="1400" dirty="0"/>
-          </a:p>
-        </p:txBody>
-      </p:sp>
-      <p:sp>
-        <p:nvSpPr>
-          <p:cNvPr id="13" name="Text 8"/>
-          <p:cNvSpPr/>
-          <p:nvPr/>
-        </p:nvSpPr>
-        <p:spPr>
-          <a:xfrm>
-            <a:off x="3276451" y="2263378"/>
-            <a:ext cx="2590949" cy="1365647"/>
-          </a:xfrm>
-          <a:prstGeom prst="roundRect">
-            <a:avLst>
-              <a:gd name="adj" fmla="val 9300"/>
-            </a:avLst>
-          </a:prstGeom>
-          <a:solidFill>
-            <a:srgbClr val="FFFFFF"/>
-          </a:solidFill>
-          <a:ln w="9525">
-            <a:solidFill>
-              <a:srgbClr val="FFCECB"/>
-            </a:solidFill>
-          </a:ln>
-        </p:spPr>
-        <p:txBody>
-          <a:bodyPr wrap="square" rtlCol="0" anchor="ctr"/>
-          <a:lstStyle/>
-          <a:p>
-            <a:pPr indent="0" marL="0">
-              <a:buNone/>
-            </a:pPr>
-            <a:endParaRPr lang="en-US" dirty="0"/>
-          </a:p>
-        </p:txBody>
-      </p:sp>
-      <p:sp>
-        <p:nvSpPr>
-          <p:cNvPr id="14" name="Text 9"/>
-          <p:cNvSpPr/>
-          <p:nvPr/>
-        </p:nvSpPr>
-        <p:spPr>
-          <a:xfrm>
-            <a:off x="3463677" y="2488704"/>
-            <a:ext cx="381000" cy="381000"/>
-          </a:xfrm>
-          <a:prstGeom prst="roundRect">
-            <a:avLst>
-              <a:gd name="adj" fmla="val 23333"/>
-            </a:avLst>
-          </a:prstGeom>
-          <a:solidFill>
-            <a:srgbClr val="FFEBE9"/>
-          </a:solidFill>
-          <a:ln/>
-        </p:spPr>
-        <p:txBody>
-          <a:bodyPr wrap="square" rtlCol="0" anchor="ctr"/>
-          <a:lstStyle/>
-          <a:p>
-            <a:pPr indent="0" marL="0">
-              <a:buNone/>
-            </a:pPr>
-            <a:endParaRPr lang="en-US" dirty="0"/>
-          </a:p>
-        </p:txBody>
-      </p:sp>
-      <p:pic>
-        <p:nvPicPr>
-          <p:cNvPr id="15" name="Image 3" descr="">
-            <a:extLst>
-              <a:ext uri="{C183D7F6-B498-43B3-948B-1728B52AA6E4}">
-                <adec:decorative xmlns:adec="http://schemas.microsoft.com/office/drawing/2017/decorative" val="1"/>
-              </a:ext>
-            </a:extLst>
-          </p:cNvPr>
-          <p:cNvPicPr>
-            <a:picLocks noChangeAspect="1"/>
-          </p:cNvPicPr>
-          <p:nvPr/>
-        </p:nvPicPr>
-        <p:blipFill>
-          <a:blip r:embed="rId5"/>
-          <a:stretch>
-            <a:fillRect/>
-          </a:stretch>
-        </p:blipFill>
-        <p:spPr>
-          <a:xfrm>
-            <a:off x="3546277" y="2571304"/>
-            <a:ext cx="215801" cy="215801"/>
-          </a:xfrm>
-          <a:prstGeom prst="rect">
-            <a:avLst/>
-          </a:prstGeom>
-        </p:spPr>
-      </p:pic>
-      <p:sp>
-        <p:nvSpPr>
-          <p:cNvPr id="16" name="Text 10"/>
-          <p:cNvSpPr/>
-          <p:nvPr/>
-        </p:nvSpPr>
-        <p:spPr>
-          <a:xfrm>
-            <a:off x="3958977" y="2450604"/>
-            <a:ext cx="1755621" cy="457200"/>
-          </a:xfrm>
-          <a:prstGeom prst="rect">
-            <a:avLst/>
-          </a:prstGeom>
-          <a:noFill/>
-          <a:ln/>
-        </p:spPr>
-        <p:txBody>
-          <a:bodyPr wrap="square" lIns="0" tIns="0" rIns="0" bIns="0" rtlCol="0" anchor="t"/>
-          <a:lstStyle/>
-          <a:p>
-            <a:pPr algn="l" indent="0" marL="0">
-              <a:lnSpc>
-                <a:spcPts val="1800"/>
-              </a:lnSpc>
-              <a:buNone/>
-            </a:pPr>
-            <a:r>
-              <a:rPr lang="en-US" sz="1650" b="1" dirty="0">
-                <a:solidFill>
-                  <a:srgbClr val="1F2328"/>
-                </a:solidFill>
-                <a:latin typeface="Arial" pitchFamily="34" charset="0"/>
-                <a:ea typeface="Arial" pitchFamily="34" charset="-122"/>
-                <a:cs typeface="Arial" pitchFamily="34" charset="-120"/>
-              </a:rPr>
-              <a:t>No list means all tools</a:t>
-            </a:r>
-            <a:endParaRPr lang="en-US" sz="1650" dirty="0"/>
-          </a:p>
-        </p:txBody>
-      </p:sp>
-      <p:sp>
-        <p:nvSpPr>
-          <p:cNvPr id="17" name="Text 11"/>
-          <p:cNvSpPr/>
-          <p:nvPr/>
-        </p:nvSpPr>
-        <p:spPr>
-          <a:xfrm>
-            <a:off x="3463677" y="2984004"/>
-            <a:ext cx="2260827" cy="429220"/>
-          </a:xfrm>
-          <a:prstGeom prst="rect">
-            <a:avLst/>
-          </a:prstGeom>
-          <a:noFill/>
-          <a:ln/>
-        </p:spPr>
-        <p:txBody>
-          <a:bodyPr wrap="square" lIns="0" tIns="0" rIns="0" bIns="0" rtlCol="0" anchor="t"/>
-          <a:lstStyle/>
-          <a:p>
-            <a:pPr algn="l" indent="0" marL="0">
-              <a:lnSpc>
-                <a:spcPts val="1690"/>
-              </a:lnSpc>
-              <a:buNone/>
-            </a:pPr>
-            <a:r>
-              <a:rPr lang="en-US" sz="1400" dirty="0">
-                <a:solidFill>
-                  <a:srgbClr val="59636E"/>
-                </a:solidFill>
-                <a:latin typeface="Arial" pitchFamily="34" charset="0"/>
-                <a:ea typeface="Arial" pitchFamily="34" charset="-122"/>
-                <a:cs typeface="Arial" pitchFamily="34" charset="-120"/>
-              </a:rPr>
-              <a:t>Always name the tools a role needs.</a:t>
-            </a:r>
-            <a:endParaRPr lang="en-US" sz="1400" dirty="0"/>
-          </a:p>
-        </p:txBody>
-      </p:sp>
-      <p:sp>
-        <p:nvSpPr>
-          <p:cNvPr id="18" name="Text 12"/>
-          <p:cNvSpPr/>
-          <p:nvPr/>
-        </p:nvSpPr>
-        <p:spPr>
-          <a:xfrm>
-            <a:off x="6045101" y="2263378"/>
-            <a:ext cx="2590800" cy="1365647"/>
-          </a:xfrm>
-          <a:prstGeom prst="roundRect">
-            <a:avLst>
-              <a:gd name="adj" fmla="val 9300"/>
-            </a:avLst>
-          </a:prstGeom>
-          <a:solidFill>
-            <a:srgbClr val="FFFFFF"/>
-          </a:solidFill>
-          <a:ln w="9525">
-            <a:solidFill>
-              <a:srgbClr val="9CD7FF"/>
-            </a:solidFill>
-          </a:ln>
-        </p:spPr>
-        <p:txBody>
-          <a:bodyPr wrap="square" rtlCol="0" anchor="ctr"/>
-          <a:lstStyle/>
-          <a:p>
-            <a:pPr indent="0" marL="0">
-              <a:buNone/>
-            </a:pPr>
-            <a:endParaRPr lang="en-US" dirty="0"/>
-          </a:p>
-        </p:txBody>
-      </p:sp>
-      <p:sp>
-        <p:nvSpPr>
-          <p:cNvPr id="19" name="Text 13"/>
-          <p:cNvSpPr/>
-          <p:nvPr/>
-        </p:nvSpPr>
-        <p:spPr>
-          <a:xfrm>
-            <a:off x="6232327" y="2450604"/>
-            <a:ext cx="381000" cy="381000"/>
-          </a:xfrm>
-          <a:prstGeom prst="roundRect">
-            <a:avLst>
-              <a:gd name="adj" fmla="val 23333"/>
-            </a:avLst>
-          </a:prstGeom>
-          <a:solidFill>
-            <a:srgbClr val="DDF4FF"/>
-          </a:solidFill>
-          <a:ln/>
-        </p:spPr>
-        <p:txBody>
-          <a:bodyPr wrap="square" rtlCol="0" anchor="ctr"/>
-          <a:lstStyle/>
-          <a:p>
-            <a:pPr indent="0" marL="0">
-              <a:buNone/>
-            </a:pPr>
-            <a:endParaRPr lang="en-US" dirty="0"/>
-          </a:p>
-        </p:txBody>
-      </p:sp>
-      <p:pic>
-        <p:nvPicPr>
-          <p:cNvPr id="20" name="Image 4" descr="">
-            <a:extLst>
-              <a:ext uri="{C183D7F6-B498-43B3-948B-1728B52AA6E4}">
-                <adec:decorative xmlns:adec="http://schemas.microsoft.com/office/drawing/2017/decorative" val="1"/>
-              </a:ext>
-            </a:extLst>
-          </p:cNvPr>
-          <p:cNvPicPr>
-            <a:picLocks noChangeAspect="1"/>
-          </p:cNvPicPr>
-          <p:nvPr/>
-        </p:nvPicPr>
-        <p:blipFill>
-          <a:blip r:embed="rId6"/>
-          <a:stretch>
-            <a:fillRect/>
-          </a:stretch>
-        </p:blipFill>
-        <p:spPr>
-          <a:xfrm>
-            <a:off x="6314926" y="2533204"/>
-            <a:ext cx="215801" cy="215801"/>
-          </a:xfrm>
-          <a:prstGeom prst="rect">
-            <a:avLst/>
-          </a:prstGeom>
-        </p:spPr>
-      </p:pic>
-      <p:sp>
-        <p:nvSpPr>
-          <p:cNvPr id="21" name="Text 14"/>
-          <p:cNvSpPr/>
-          <p:nvPr/>
-        </p:nvSpPr>
-        <p:spPr>
-          <a:xfrm>
-            <a:off x="6727627" y="2526804"/>
-            <a:ext cx="1437135" cy="228600"/>
-          </a:xfrm>
-          <a:prstGeom prst="rect">
-            <a:avLst/>
-          </a:prstGeom>
-          <a:noFill/>
-          <a:ln/>
-        </p:spPr>
-        <p:txBody>
-          <a:bodyPr wrap="square" lIns="0" tIns="0" rIns="0" bIns="0" rtlCol="0" anchor="t"/>
-          <a:lstStyle/>
-          <a:p>
-            <a:pPr algn="l" indent="0" marL="0">
-              <a:lnSpc>
-                <a:spcPts val="1800"/>
-              </a:lnSpc>
-              <a:buNone/>
-            </a:pPr>
-            <a:r>
-              <a:rPr lang="en-US" sz="1650" b="1" dirty="0">
-                <a:solidFill>
-                  <a:srgbClr val="1F2328"/>
-                </a:solidFill>
-                <a:latin typeface="Arial" pitchFamily="34" charset="0"/>
-                <a:ea typeface="Arial" pitchFamily="34" charset="-122"/>
-                <a:cs typeface="Arial" pitchFamily="34" charset="-120"/>
-              </a:rPr>
-              <a:t>Switch agents</a:t>
-            </a:r>
-            <a:endParaRPr lang="en-US" sz="1650" dirty="0"/>
-          </a:p>
-        </p:txBody>
-      </p:sp>
-      <p:sp>
-        <p:nvSpPr>
-          <p:cNvPr id="22" name="Text 15"/>
-          <p:cNvSpPr/>
-          <p:nvPr/>
-        </p:nvSpPr>
-        <p:spPr>
-          <a:xfrm>
-            <a:off x="6232327" y="2907804"/>
-            <a:ext cx="2260675" cy="429220"/>
-          </a:xfrm>
-          <a:prstGeom prst="rect">
-            <a:avLst/>
-          </a:prstGeom>
-          <a:noFill/>
-          <a:ln/>
-        </p:spPr>
-        <p:txBody>
-          <a:bodyPr wrap="square" lIns="0" tIns="0" rIns="0" bIns="0" rtlCol="0" anchor="t"/>
-          <a:lstStyle/>
-          <a:p>
-            <a:pPr algn="l" indent="0" marL="0">
-              <a:lnSpc>
-                <a:spcPts val="1690"/>
-              </a:lnSpc>
-              <a:buNone/>
-            </a:pPr>
-            <a:r>
-              <a:rPr lang="en-US" sz="1400" dirty="0">
-                <a:solidFill>
-                  <a:srgbClr val="59636E"/>
-                </a:solidFill>
-                <a:latin typeface="Arial" pitchFamily="34" charset="0"/>
-                <a:ea typeface="Arial" pitchFamily="34" charset="-122"/>
-                <a:cs typeface="Arial" pitchFamily="34" charset="-120"/>
-              </a:rPr>
-              <a:t>Use the default agent to run tests.</a:t>
-            </a:r>
-            <a:endParaRPr lang="en-US" sz="1400" dirty="0"/>
-          </a:p>
-        </p:txBody>
-      </p:sp>
-    </p:spTree>
-  </p:cSld>
-  <p:clrMapOvr>
-    <a:masterClrMapping/>
-  </p:clrMapOvr>
-</p:sld>
-</file>
-
 <file path=ppt/slides/slide15.xml><?xml version="1.0" encoding="utf-8"?>
 <p:sld xmlns:a="http://schemas.openxmlformats.org/drawingml/2006/main" xmlns:r="http://schemas.openxmlformats.org/officeDocument/2006/relationships" xmlns:p="http://schemas.openxmlformats.org/presentationml/2006/main">
   <p:cSld name="Slide 15">
@@ -11516,7 +10528,7 @@
         </p:nvSpPr>
         <p:spPr>
           <a:xfrm>
-            <a:off x="711101" y="1279773"/>
+            <a:off x="711101" y="1645533"/>
             <a:ext cx="5570169" cy="209550"/>
           </a:xfrm>
           <a:prstGeom prst="rect">
@@ -11555,7 +10567,7 @@
         </p:nvSpPr>
         <p:spPr>
           <a:xfrm>
-            <a:off x="711101" y="1590824"/>
+            <a:off x="711101" y="1956584"/>
             <a:ext cx="5570169" cy="1168301"/>
           </a:xfrm>
           <a:prstGeom prst="rect">
@@ -11600,7 +10612,7 @@
         </p:nvSpPr>
         <p:spPr>
           <a:xfrm>
-            <a:off x="711101" y="2962275"/>
+            <a:off x="711101" y="3328035"/>
             <a:ext cx="609600" cy="63401"/>
           </a:xfrm>
           <a:prstGeom prst="roundRect">
@@ -11621,48 +10633,6 @@
               <a:buNone/>
             </a:pPr>
             <a:endParaRPr lang="en-US" dirty="0"/>
-          </a:p>
-        </p:txBody>
-      </p:sp>
-      <p:sp>
-        <p:nvSpPr>
-          <p:cNvPr id="12" name="Text 8"/>
-          <p:cNvSpPr/>
-          <p:nvPr/>
-        </p:nvSpPr>
-        <p:spPr>
-          <a:xfrm>
-            <a:off x="711101" y="3228826"/>
-            <a:ext cx="5570169" cy="634901"/>
-          </a:xfrm>
-          <a:prstGeom prst="rect">
-            <a:avLst/>
-          </a:prstGeom>
-          <a:noFill/>
-          <a:ln/>
-        </p:spPr>
-        <p:txBody>
-          <a:bodyPr wrap="square" lIns="0" tIns="0" rIns="0" bIns="0" rtlCol="0" anchor="t"/>
-          <a:lstStyle/>
-          <a:p>
-            <a:pPr algn="l" indent="0" marL="0">
-              <a:lnSpc>
-                <a:spcPts val="2500"/>
-              </a:lnSpc>
-              <a:buNone/>
-            </a:pPr>
-            <a:r>
-              <a:rPr lang="en-US" sz="1900" dirty="0">
-                <a:solidFill>
-                  <a:srgbClr val="59636E"/>
-                </a:solidFill>
-                <a:latin typeface="Arial" pitchFamily="34" charset="0"/>
-                <a:ea typeface="Arial" pitchFamily="34" charset="-122"/>
-                <a:cs typeface="Arial" pitchFamily="34" charset="-120"/>
-              </a:rPr>
-              <a:t>Store a review checklist once, then apply it every time the task comes up.</a:t>
-            </a:r>
-            <a:endParaRPr lang="en-US" sz="1900" dirty="0"/>
           </a:p>
         </p:txBody>
       </p:sp>

--- a/slides/04-skills-custom-agents.pptx
+++ b/slides/04-skills-custom-agents.pptx
@@ -3084,8 +3084,8 @@
         </p:nvSpPr>
         <p:spPr>
           <a:xfrm>
-            <a:off x="511076" y="1700361"/>
-            <a:ext cx="4184600" cy="2821930"/>
+            <a:off x="2194560" y="1527048"/>
+            <a:ext cx="4754880" cy="3200400"/>
           </a:xfrm>
           <a:prstGeom prst="roundRect">
             <a:avLst>
@@ -3135,443 +3135,14 @@
         </p:blipFill>
         <p:spPr>
           <a:xfrm>
-            <a:off x="558701" y="1747986"/>
-            <a:ext cx="4089350" cy="2726680"/>
+            <a:off x="2240280" y="1572768"/>
+            <a:ext cx="4663440" cy="3108960"/>
           </a:xfrm>
           <a:prstGeom prst="rect">
             <a:avLst/>
           </a:prstGeom>
         </p:spPr>
       </p:pic>
-      <p:sp>
-        <p:nvSpPr>
-          <p:cNvPr id="11" name="Text 6"/>
-          <p:cNvSpPr/>
-          <p:nvPr/>
-        </p:nvSpPr>
-        <p:spPr>
-          <a:xfrm>
-            <a:off x="5003750" y="1986260"/>
-            <a:ext cx="381000" cy="381000"/>
-          </a:xfrm>
-          <a:prstGeom prst="roundRect">
-            <a:avLst>
-              <a:gd name="adj" fmla="val 23333"/>
-            </a:avLst>
-          </a:prstGeom>
-          <a:solidFill>
-            <a:srgbClr val="DAFBE1"/>
-          </a:solidFill>
-          <a:ln/>
-        </p:spPr>
-        <p:txBody>
-          <a:bodyPr wrap="square" rtlCol="0" anchor="ctr"/>
-          <a:lstStyle/>
-          <a:p>
-            <a:pPr indent="0" marL="0">
-              <a:buNone/>
-            </a:pPr>
-            <a:endParaRPr lang="en-US" dirty="0"/>
-          </a:p>
-        </p:txBody>
-      </p:sp>
-      <p:pic>
-        <p:nvPicPr>
-          <p:cNvPr id="12" name="Image 3" descr="">
-            <a:extLst>
-              <a:ext uri="{C183D7F6-B498-43B3-948B-1728B52AA6E4}">
-                <adec:decorative xmlns:adec="http://schemas.microsoft.com/office/drawing/2017/decorative" val="1"/>
-              </a:ext>
-            </a:extLst>
-          </p:cNvPr>
-          <p:cNvPicPr>
-            <a:picLocks noChangeAspect="1"/>
-          </p:cNvPicPr>
-          <p:nvPr/>
-        </p:nvPicPr>
-        <p:blipFill>
-          <a:blip r:embed="rId5"/>
-          <a:stretch>
-            <a:fillRect/>
-          </a:stretch>
-        </p:blipFill>
-        <p:spPr>
-          <a:xfrm>
-            <a:off x="5086350" y="2068860"/>
-            <a:ext cx="215801" cy="215801"/>
-          </a:xfrm>
-          <a:prstGeom prst="rect">
-            <a:avLst/>
-          </a:prstGeom>
-        </p:spPr>
-      </p:pic>
-      <p:sp>
-        <p:nvSpPr>
-          <p:cNvPr id="13" name="Text 7"/>
-          <p:cNvSpPr/>
-          <p:nvPr/>
-        </p:nvSpPr>
-        <p:spPr>
-          <a:xfrm>
-            <a:off x="5537150" y="1950839"/>
-            <a:ext cx="2582198" cy="228600"/>
-          </a:xfrm>
-          <a:prstGeom prst="rect">
-            <a:avLst/>
-          </a:prstGeom>
-          <a:noFill/>
-          <a:ln/>
-        </p:spPr>
-        <p:txBody>
-          <a:bodyPr wrap="square" lIns="0" tIns="0" rIns="0" bIns="0" rtlCol="0" anchor="t"/>
-          <a:lstStyle/>
-          <a:p>
-            <a:pPr algn="l" indent="0" marL="0">
-              <a:buNone/>
-            </a:pPr>
-            <a:r>
-              <a:rPr lang="en-US" sz="1550" b="1" dirty="0">
-                <a:solidFill>
-                  <a:srgbClr val="1F2328"/>
-                </a:solidFill>
-                <a:latin typeface="Arial" pitchFamily="34" charset="0"/>
-                <a:ea typeface="Arial" pitchFamily="34" charset="-122"/>
-                <a:cs typeface="Arial" pitchFamily="34" charset="-120"/>
-              </a:rPr>
-              <a:t>A defined role</a:t>
-            </a:r>
-            <a:endParaRPr lang="en-US" sz="1550" dirty="0"/>
-          </a:p>
-        </p:txBody>
-      </p:sp>
-      <p:sp>
-        <p:nvSpPr>
-          <p:cNvPr id="14" name="Text 8"/>
-          <p:cNvSpPr/>
-          <p:nvPr/>
-        </p:nvSpPr>
-        <p:spPr>
-          <a:xfrm>
-            <a:off x="5537150" y="2204740"/>
-            <a:ext cx="2582198" cy="198090"/>
-          </a:xfrm>
-          <a:prstGeom prst="rect">
-            <a:avLst/>
-          </a:prstGeom>
-          <a:noFill/>
-          <a:ln/>
-        </p:spPr>
-        <p:txBody>
-          <a:bodyPr wrap="square" lIns="0" tIns="0" rIns="0" bIns="0" rtlCol="0" anchor="t"/>
-          <a:lstStyle/>
-          <a:p>
-            <a:pPr algn="l" indent="0" marL="0">
-              <a:lnSpc>
-                <a:spcPts val="1560"/>
-              </a:lnSpc>
-              <a:buNone/>
-            </a:pPr>
-            <a:r>
-              <a:rPr lang="en-US" sz="1350" dirty="0">
-                <a:solidFill>
-                  <a:srgbClr val="59636E"/>
-                </a:solidFill>
-                <a:latin typeface="Arial" pitchFamily="34" charset="0"/>
-                <a:ea typeface="Arial" pitchFamily="34" charset="-122"/>
-                <a:cs typeface="Arial" pitchFamily="34" charset="-120"/>
-              </a:rPr>
-              <a:t>Review, testing, security, or docs.</a:t>
-            </a:r>
-            <a:endParaRPr lang="en-US" sz="1350" dirty="0"/>
-          </a:p>
-        </p:txBody>
-      </p:sp>
-      <p:sp>
-        <p:nvSpPr>
-          <p:cNvPr id="15" name="Text 9"/>
-          <p:cNvSpPr/>
-          <p:nvPr/>
-        </p:nvSpPr>
-        <p:spPr>
-          <a:xfrm>
-            <a:off x="5003750" y="2920752"/>
-            <a:ext cx="381000" cy="381000"/>
-          </a:xfrm>
-          <a:prstGeom prst="roundRect">
-            <a:avLst>
-              <a:gd name="adj" fmla="val 23333"/>
-            </a:avLst>
-          </a:prstGeom>
-          <a:solidFill>
-            <a:srgbClr val="DAFBE1"/>
-          </a:solidFill>
-          <a:ln/>
-        </p:spPr>
-        <p:txBody>
-          <a:bodyPr wrap="square" rtlCol="0" anchor="ctr"/>
-          <a:lstStyle/>
-          <a:p>
-            <a:pPr indent="0" marL="0">
-              <a:buNone/>
-            </a:pPr>
-            <a:endParaRPr lang="en-US" dirty="0"/>
-          </a:p>
-        </p:txBody>
-      </p:sp>
-      <p:pic>
-        <p:nvPicPr>
-          <p:cNvPr id="16" name="Image 4" descr="">
-            <a:extLst>
-              <a:ext uri="{C183D7F6-B498-43B3-948B-1728B52AA6E4}">
-                <adec:decorative xmlns:adec="http://schemas.microsoft.com/office/drawing/2017/decorative" val="1"/>
-              </a:ext>
-            </a:extLst>
-          </p:cNvPr>
-          <p:cNvPicPr>
-            <a:picLocks noChangeAspect="1"/>
-          </p:cNvPicPr>
-          <p:nvPr/>
-        </p:nvPicPr>
-        <p:blipFill>
-          <a:blip r:embed="rId6"/>
-          <a:stretch>
-            <a:fillRect/>
-          </a:stretch>
-        </p:blipFill>
-        <p:spPr>
-          <a:xfrm>
-            <a:off x="5086350" y="3003352"/>
-            <a:ext cx="215801" cy="215801"/>
-          </a:xfrm>
-          <a:prstGeom prst="rect">
-            <a:avLst/>
-          </a:prstGeom>
-        </p:spPr>
-      </p:pic>
-      <p:sp>
-        <p:nvSpPr>
-          <p:cNvPr id="17" name="Text 10"/>
-          <p:cNvSpPr/>
-          <p:nvPr/>
-        </p:nvSpPr>
-        <p:spPr>
-          <a:xfrm>
-            <a:off x="5537150" y="2885331"/>
-            <a:ext cx="2128909" cy="228600"/>
-          </a:xfrm>
-          <a:prstGeom prst="rect">
-            <a:avLst/>
-          </a:prstGeom>
-          <a:noFill/>
-          <a:ln/>
-        </p:spPr>
-        <p:txBody>
-          <a:bodyPr wrap="square" lIns="0" tIns="0" rIns="0" bIns="0" rtlCol="0" anchor="t"/>
-          <a:lstStyle/>
-          <a:p>
-            <a:pPr algn="l" indent="0" marL="0">
-              <a:buNone/>
-            </a:pPr>
-            <a:r>
-              <a:rPr lang="en-US" sz="1550" b="1" dirty="0">
-                <a:solidFill>
-                  <a:srgbClr val="1F2328"/>
-                </a:solidFill>
-                <a:latin typeface="Arial" pitchFamily="34" charset="0"/>
-                <a:ea typeface="Arial" pitchFamily="34" charset="-122"/>
-                <a:cs typeface="Arial" pitchFamily="34" charset="-120"/>
-              </a:rPr>
-              <a:t>The right tools</a:t>
-            </a:r>
-            <a:endParaRPr lang="en-US" sz="1550" dirty="0"/>
-          </a:p>
-        </p:txBody>
-      </p:sp>
-      <p:sp>
-        <p:nvSpPr>
-          <p:cNvPr id="18" name="Text 11"/>
-          <p:cNvSpPr/>
-          <p:nvPr/>
-        </p:nvSpPr>
-        <p:spPr>
-          <a:xfrm>
-            <a:off x="5537150" y="3139232"/>
-            <a:ext cx="2128909" cy="198090"/>
-          </a:xfrm>
-          <a:prstGeom prst="rect">
-            <a:avLst/>
-          </a:prstGeom>
-          <a:noFill/>
-          <a:ln/>
-        </p:spPr>
-        <p:txBody>
-          <a:bodyPr wrap="square" lIns="0" tIns="0" rIns="0" bIns="0" rtlCol="0" anchor="t"/>
-          <a:lstStyle/>
-          <a:p>
-            <a:pPr algn="l" indent="0" marL="0">
-              <a:lnSpc>
-                <a:spcPts val="1560"/>
-              </a:lnSpc>
-              <a:buNone/>
-            </a:pPr>
-            <a:r>
-              <a:rPr lang="en-US" sz="1350" dirty="0">
-                <a:solidFill>
-                  <a:srgbClr val="59636E"/>
-                </a:solidFill>
-                <a:latin typeface="Arial" pitchFamily="34" charset="0"/>
-                <a:ea typeface="Arial" pitchFamily="34" charset="-122"/>
-                <a:cs typeface="Arial" pitchFamily="34" charset="-120"/>
-              </a:rPr>
-              <a:t>Only what that job requires.</a:t>
-            </a:r>
-            <a:endParaRPr lang="en-US" sz="1350" dirty="0"/>
-          </a:p>
-        </p:txBody>
-      </p:sp>
-      <p:sp>
-        <p:nvSpPr>
-          <p:cNvPr id="19" name="Text 12"/>
-          <p:cNvSpPr/>
-          <p:nvPr/>
-        </p:nvSpPr>
-        <p:spPr>
-          <a:xfrm>
-            <a:off x="5003750" y="3855244"/>
-            <a:ext cx="381000" cy="381000"/>
-          </a:xfrm>
-          <a:prstGeom prst="roundRect">
-            <a:avLst>
-              <a:gd name="adj" fmla="val 23333"/>
-            </a:avLst>
-          </a:prstGeom>
-          <a:solidFill>
-            <a:srgbClr val="DAFBE1"/>
-          </a:solidFill>
-          <a:ln/>
-        </p:spPr>
-        <p:txBody>
-          <a:bodyPr wrap="square" rtlCol="0" anchor="ctr"/>
-          <a:lstStyle/>
-          <a:p>
-            <a:pPr indent="0" marL="0">
-              <a:buNone/>
-            </a:pPr>
-            <a:endParaRPr lang="en-US" dirty="0"/>
-          </a:p>
-        </p:txBody>
-      </p:sp>
-      <p:pic>
-        <p:nvPicPr>
-          <p:cNvPr id="20" name="Image 5" descr="">
-            <a:extLst>
-              <a:ext uri="{C183D7F6-B498-43B3-948B-1728B52AA6E4}">
-                <adec:decorative xmlns:adec="http://schemas.microsoft.com/office/drawing/2017/decorative" val="1"/>
-              </a:ext>
-            </a:extLst>
-          </p:cNvPr>
-          <p:cNvPicPr>
-            <a:picLocks noChangeAspect="1"/>
-          </p:cNvPicPr>
-          <p:nvPr/>
-        </p:nvPicPr>
-        <p:blipFill>
-          <a:blip r:embed="rId7"/>
-          <a:stretch>
-            <a:fillRect/>
-          </a:stretch>
-        </p:blipFill>
-        <p:spPr>
-          <a:xfrm>
-            <a:off x="5086350" y="3937843"/>
-            <a:ext cx="215801" cy="215801"/>
-          </a:xfrm>
-          <a:prstGeom prst="rect">
-            <a:avLst/>
-          </a:prstGeom>
-        </p:spPr>
-      </p:pic>
-      <p:sp>
-        <p:nvSpPr>
-          <p:cNvPr id="21" name="Text 13"/>
-          <p:cNvSpPr/>
-          <p:nvPr/>
-        </p:nvSpPr>
-        <p:spPr>
-          <a:xfrm>
-            <a:off x="5537150" y="3819823"/>
-            <a:ext cx="2410810" cy="228600"/>
-          </a:xfrm>
-          <a:prstGeom prst="rect">
-            <a:avLst/>
-          </a:prstGeom>
-          <a:noFill/>
-          <a:ln/>
-        </p:spPr>
-        <p:txBody>
-          <a:bodyPr wrap="square" lIns="0" tIns="0" rIns="0" bIns="0" rtlCol="0" anchor="t"/>
-          <a:lstStyle/>
-          <a:p>
-            <a:pPr algn="l" indent="0" marL="0">
-              <a:buNone/>
-            </a:pPr>
-            <a:r>
-              <a:rPr lang="en-US" sz="1550" b="1" dirty="0">
-                <a:solidFill>
-                  <a:srgbClr val="1F2328"/>
-                </a:solidFill>
-                <a:latin typeface="Arial" pitchFamily="34" charset="0"/>
-                <a:ea typeface="Arial" pitchFamily="34" charset="-122"/>
-                <a:cs typeface="Arial" pitchFamily="34" charset="-120"/>
-              </a:rPr>
-              <a:t>Clear instructions</a:t>
-            </a:r>
-            <a:endParaRPr lang="en-US" sz="1550" dirty="0"/>
-          </a:p>
-        </p:txBody>
-      </p:sp>
-      <p:sp>
-        <p:nvSpPr>
-          <p:cNvPr id="22" name="Text 14"/>
-          <p:cNvSpPr/>
-          <p:nvPr/>
-        </p:nvSpPr>
-        <p:spPr>
-          <a:xfrm>
-            <a:off x="5537150" y="4073723"/>
-            <a:ext cx="2410810" cy="198090"/>
-          </a:xfrm>
-          <a:prstGeom prst="rect">
-            <a:avLst/>
-          </a:prstGeom>
-          <a:noFill/>
-          <a:ln/>
-        </p:spPr>
-        <p:txBody>
-          <a:bodyPr wrap="square" lIns="0" tIns="0" rIns="0" bIns="0" rtlCol="0" anchor="t"/>
-          <a:lstStyle/>
-          <a:p>
-            <a:pPr algn="l" indent="0" marL="0">
-              <a:lnSpc>
-                <a:spcPts val="1560"/>
-              </a:lnSpc>
-              <a:buNone/>
-            </a:pPr>
-            <a:r>
-              <a:rPr lang="en-US" sz="1350" dirty="0">
-                <a:solidFill>
-                  <a:srgbClr val="59636E"/>
-                </a:solidFill>
-                <a:latin typeface="Arial" pitchFamily="34" charset="0"/>
-                <a:ea typeface="Arial" pitchFamily="34" charset="-122"/>
-                <a:cs typeface="Arial" pitchFamily="34" charset="-120"/>
-              </a:rPr>
-              <a:t>Defined once, used every time.</a:t>
-            </a:r>
-            <a:endParaRPr lang="en-US" sz="1350" dirty="0"/>
-          </a:p>
-        </p:txBody>
-      </p:sp>
     </p:spTree>
   </p:cSld>
   <p:clrMapOvr>
@@ -11671,8 +11242,8 @@
         </p:nvSpPr>
         <p:spPr>
           <a:xfrm>
-            <a:off x="511076" y="1421011"/>
-            <a:ext cx="4184600" cy="2821930"/>
+            <a:off x="2125980" y="1234440"/>
+            <a:ext cx="4892040" cy="3291840"/>
           </a:xfrm>
           <a:prstGeom prst="roundRect">
             <a:avLst>
@@ -11722,8 +11293,8 @@
         </p:blipFill>
         <p:spPr>
           <a:xfrm>
-            <a:off x="558701" y="1468636"/>
-            <a:ext cx="4089350" cy="2726680"/>
+            <a:off x="2171700" y="1280160"/>
+            <a:ext cx="4800600" cy="3200400"/>
           </a:xfrm>
           <a:prstGeom prst="rect">
             <a:avLst/>
@@ -11732,115 +11303,14 @@
       </p:pic>
       <p:sp>
         <p:nvSpPr>
-          <p:cNvPr id="10" name="Text 5"/>
-          <p:cNvSpPr/>
-          <p:nvPr/>
-        </p:nvSpPr>
-        <p:spPr>
-          <a:xfrm>
-            <a:off x="5003750" y="1937891"/>
-            <a:ext cx="381000" cy="381000"/>
-          </a:xfrm>
-          <a:prstGeom prst="roundRect">
-            <a:avLst>
-              <a:gd name="adj" fmla="val 23333"/>
-            </a:avLst>
-          </a:prstGeom>
-          <a:solidFill>
-            <a:srgbClr val="F6F8FA"/>
-          </a:solidFill>
-          <a:ln/>
-        </p:spPr>
-        <p:txBody>
-          <a:bodyPr wrap="square" rtlCol="0" anchor="ctr"/>
-          <a:lstStyle/>
-          <a:p>
-            <a:pPr indent="0" marL="0">
-              <a:buNone/>
-            </a:pPr>
-            <a:endParaRPr lang="en-US" dirty="0"/>
-          </a:p>
-        </p:txBody>
-      </p:sp>
-      <p:pic>
-        <p:nvPicPr>
-          <p:cNvPr id="11" name="Image 3" descr="">
-            <a:extLst>
-              <a:ext uri="{C183D7F6-B498-43B3-948B-1728B52AA6E4}">
-                <adec:decorative xmlns:adec="http://schemas.microsoft.com/office/drawing/2017/decorative" val="1"/>
-              </a:ext>
-            </a:extLst>
-          </p:cNvPr>
-          <p:cNvPicPr>
-            <a:picLocks noChangeAspect="1"/>
-          </p:cNvPicPr>
-          <p:nvPr/>
-        </p:nvPicPr>
-        <p:blipFill>
-          <a:blip r:embed="rId5"/>
-          <a:stretch>
-            <a:fillRect/>
-          </a:stretch>
-        </p:blipFill>
-        <p:spPr>
-          <a:xfrm>
-            <a:off x="5086350" y="2020491"/>
-            <a:ext cx="215801" cy="215801"/>
-          </a:xfrm>
-          <a:prstGeom prst="rect">
-            <a:avLst/>
-          </a:prstGeom>
-        </p:spPr>
-      </p:pic>
-      <p:sp>
-        <p:nvSpPr>
-          <p:cNvPr id="12" name="Text 6"/>
-          <p:cNvSpPr/>
-          <p:nvPr/>
-        </p:nvSpPr>
-        <p:spPr>
-          <a:xfrm>
-            <a:off x="5537150" y="1902470"/>
-            <a:ext cx="2362233" cy="228600"/>
-          </a:xfrm>
-          <a:prstGeom prst="rect">
-            <a:avLst/>
-          </a:prstGeom>
-          <a:noFill/>
-          <a:ln/>
-        </p:spPr>
-        <p:txBody>
-          <a:bodyPr wrap="square" lIns="0" tIns="0" rIns="0" bIns="0" rtlCol="0" anchor="t"/>
-          <a:lstStyle/>
-          <a:p>
-            <a:pPr algn="l" indent="0" marL="0">
-              <a:buNone/>
-            </a:pPr>
-            <a:r>
-              <a:rPr lang="en-US" sz="1550" b="1" dirty="0">
-                <a:solidFill>
-                  <a:srgbClr val="1F2328"/>
-                </a:solidFill>
-                <a:latin typeface="Arial" pitchFamily="34" charset="0"/>
-                <a:ea typeface="Arial" pitchFamily="34" charset="-122"/>
-                <a:cs typeface="Arial" pitchFamily="34" charset="-120"/>
-              </a:rPr>
-              <a:t>A one-off prompt</a:t>
-            </a:r>
-            <a:endParaRPr lang="en-US" sz="1550" dirty="0"/>
-          </a:p>
-        </p:txBody>
-      </p:sp>
-      <p:sp>
-        <p:nvSpPr>
-          <p:cNvPr id="13" name="Text 7"/>
-          <p:cNvSpPr/>
-          <p:nvPr/>
-        </p:nvSpPr>
-        <p:spPr>
-          <a:xfrm>
-            <a:off x="5537150" y="2156371"/>
-            <a:ext cx="2362233" cy="198090"/>
+          <p:cNvPr id="21" name="Text 13"/>
+          <p:cNvSpPr/>
+          <p:nvPr/>
+        </p:nvSpPr>
+        <p:spPr>
+          <a:xfrm>
+            <a:off x="1463040" y="4663440"/>
+            <a:ext cx="6400800" cy="256032"/>
           </a:xfrm>
           <a:prstGeom prst="rect">
             <a:avLst/>
@@ -11859,7 +11329,7 @@
               <a:buNone/>
             </a:pPr>
             <a:r>
-              <a:rPr lang="en-US" sz="1350" dirty="0">
+              <a:rPr lang="en-US" sz="1450" dirty="0">
                 <a:solidFill>
                   <a:srgbClr val="59636E"/>
                 </a:solidFill>
@@ -11867,293 +11337,7 @@
                 <a:ea typeface="Arial" pitchFamily="34" charset="-122"/>
                 <a:cs typeface="Arial" pitchFamily="34" charset="-120"/>
               </a:rPr>
-              <a:t>Helps once, then you retype it.</a:t>
-            </a:r>
-            <a:endParaRPr lang="en-US" sz="1350" dirty="0"/>
-          </a:p>
-        </p:txBody>
-      </p:sp>
-      <p:sp>
-        <p:nvSpPr>
-          <p:cNvPr id="14" name="Text 8"/>
-          <p:cNvSpPr/>
-          <p:nvPr/>
-        </p:nvSpPr>
-        <p:spPr>
-          <a:xfrm>
-            <a:off x="5003750" y="2717602"/>
-            <a:ext cx="381000" cy="381000"/>
-          </a:xfrm>
-          <a:prstGeom prst="roundRect">
-            <a:avLst>
-              <a:gd name="adj" fmla="val 23333"/>
-            </a:avLst>
-          </a:prstGeom>
-          <a:solidFill>
-            <a:srgbClr val="FBEFFF"/>
-          </a:solidFill>
-          <a:ln/>
-        </p:spPr>
-        <p:txBody>
-          <a:bodyPr wrap="square" rtlCol="0" anchor="ctr"/>
-          <a:lstStyle/>
-          <a:p>
-            <a:pPr indent="0" marL="0">
-              <a:buNone/>
-            </a:pPr>
-            <a:endParaRPr lang="en-US" dirty="0"/>
-          </a:p>
-        </p:txBody>
-      </p:sp>
-      <p:pic>
-        <p:nvPicPr>
-          <p:cNvPr id="15" name="Image 4" descr="">
-            <a:extLst>
-              <a:ext uri="{C183D7F6-B498-43B3-948B-1728B52AA6E4}">
-                <adec:decorative xmlns:adec="http://schemas.microsoft.com/office/drawing/2017/decorative" val="1"/>
-              </a:ext>
-            </a:extLst>
-          </p:cNvPr>
-          <p:cNvPicPr>
-            <a:picLocks noChangeAspect="1"/>
-          </p:cNvPicPr>
-          <p:nvPr/>
-        </p:nvPicPr>
-        <p:blipFill>
-          <a:blip r:embed="rId6"/>
-          <a:stretch>
-            <a:fillRect/>
-          </a:stretch>
-        </p:blipFill>
-        <p:spPr>
-          <a:xfrm>
-            <a:off x="5086350" y="2800201"/>
-            <a:ext cx="215801" cy="215801"/>
-          </a:xfrm>
-          <a:prstGeom prst="rect">
-            <a:avLst/>
-          </a:prstGeom>
-        </p:spPr>
-      </p:pic>
-      <p:sp>
-        <p:nvSpPr>
-          <p:cNvPr id="16" name="Text 9"/>
-          <p:cNvSpPr/>
-          <p:nvPr/>
-        </p:nvSpPr>
-        <p:spPr>
-          <a:xfrm>
-            <a:off x="5537150" y="2583061"/>
-            <a:ext cx="3160725" cy="228600"/>
-          </a:xfrm>
-          <a:prstGeom prst="rect">
-            <a:avLst/>
-          </a:prstGeom>
-          <a:noFill/>
-          <a:ln/>
-        </p:spPr>
-        <p:txBody>
-          <a:bodyPr wrap="square" lIns="0" tIns="0" rIns="0" bIns="0" rtlCol="0" anchor="t"/>
-          <a:lstStyle/>
-          <a:p>
-            <a:pPr algn="l" indent="0" marL="0">
-              <a:buNone/>
-            </a:pPr>
-            <a:r>
-              <a:rPr lang="en-US" sz="1550" b="1" dirty="0">
-                <a:solidFill>
-                  <a:srgbClr val="1F2328"/>
-                </a:solidFill>
-                <a:latin typeface="Arial" pitchFamily="34" charset="0"/>
-                <a:ea typeface="Arial" pitchFamily="34" charset="-122"/>
-                <a:cs typeface="Arial" pitchFamily="34" charset="-120"/>
-              </a:rPr>
-              <a:t>A skill</a:t>
-            </a:r>
-            <a:endParaRPr lang="en-US" sz="1550" dirty="0"/>
-          </a:p>
-        </p:txBody>
-      </p:sp>
-      <p:sp>
-        <p:nvSpPr>
-          <p:cNvPr id="17" name="Text 10"/>
-          <p:cNvSpPr/>
-          <p:nvPr/>
-        </p:nvSpPr>
-        <p:spPr>
-          <a:xfrm>
-            <a:off x="5537150" y="2836962"/>
-            <a:ext cx="3160725" cy="396180"/>
-          </a:xfrm>
-          <a:prstGeom prst="rect">
-            <a:avLst/>
-          </a:prstGeom>
-          <a:noFill/>
-          <a:ln/>
-        </p:spPr>
-        <p:txBody>
-          <a:bodyPr wrap="square" lIns="0" tIns="0" rIns="0" bIns="0" rtlCol="0" anchor="t"/>
-          <a:lstStyle/>
-          <a:p>
-            <a:pPr algn="l" indent="0" marL="0">
-              <a:lnSpc>
-                <a:spcPts val="1560"/>
-              </a:lnSpc>
-              <a:buNone/>
-            </a:pPr>
-            <a:r>
-              <a:rPr lang="en-US" sz="1350" dirty="0">
-                <a:solidFill>
-                  <a:srgbClr val="59636E"/>
-                </a:solidFill>
-                <a:latin typeface="Arial" pitchFamily="34" charset="0"/>
-                <a:ea typeface="Arial" pitchFamily="34" charset="-122"/>
-                <a:cs typeface="Arial" pitchFamily="34" charset="-120"/>
-              </a:rPr>
-              <a:t>Lives in the repo. Same guidance every time.</a:t>
-            </a:r>
-            <a:endParaRPr lang="en-US" sz="1350" dirty="0"/>
-          </a:p>
-        </p:txBody>
-      </p:sp>
-      <p:sp>
-        <p:nvSpPr>
-          <p:cNvPr id="18" name="Text 11"/>
-          <p:cNvSpPr/>
-          <p:nvPr/>
-        </p:nvSpPr>
-        <p:spPr>
-          <a:xfrm>
-            <a:off x="5003750" y="3497163"/>
-            <a:ext cx="381000" cy="381000"/>
-          </a:xfrm>
-          <a:prstGeom prst="roundRect">
-            <a:avLst>
-              <a:gd name="adj" fmla="val 23333"/>
-            </a:avLst>
-          </a:prstGeom>
-          <a:solidFill>
-            <a:srgbClr val="FBEFFF"/>
-          </a:solidFill>
-          <a:ln/>
-        </p:spPr>
-        <p:txBody>
-          <a:bodyPr wrap="square" rtlCol="0" anchor="ctr"/>
-          <a:lstStyle/>
-          <a:p>
-            <a:pPr indent="0" marL="0">
-              <a:buNone/>
-            </a:pPr>
-            <a:endParaRPr lang="en-US" dirty="0"/>
-          </a:p>
-        </p:txBody>
-      </p:sp>
-      <p:pic>
-        <p:nvPicPr>
-          <p:cNvPr id="19" name="Image 5" descr="">
-            <a:extLst>
-              <a:ext uri="{C183D7F6-B498-43B3-948B-1728B52AA6E4}">
-                <adec:decorative xmlns:adec="http://schemas.microsoft.com/office/drawing/2017/decorative" val="1"/>
-              </a:ext>
-            </a:extLst>
-          </p:cNvPr>
-          <p:cNvPicPr>
-            <a:picLocks noChangeAspect="1"/>
-          </p:cNvPicPr>
-          <p:nvPr/>
-        </p:nvPicPr>
-        <p:blipFill>
-          <a:blip r:embed="rId7"/>
-          <a:stretch>
-            <a:fillRect/>
-          </a:stretch>
-        </p:blipFill>
-        <p:spPr>
-          <a:xfrm>
-            <a:off x="5086350" y="3579763"/>
-            <a:ext cx="215801" cy="215801"/>
-          </a:xfrm>
-          <a:prstGeom prst="rect">
-            <a:avLst/>
-          </a:prstGeom>
-        </p:spPr>
-      </p:pic>
-      <p:sp>
-        <p:nvSpPr>
-          <p:cNvPr id="20" name="Text 12"/>
-          <p:cNvSpPr/>
-          <p:nvPr/>
-        </p:nvSpPr>
-        <p:spPr>
-          <a:xfrm>
-            <a:off x="5537150" y="3461742"/>
-            <a:ext cx="2734913" cy="228600"/>
-          </a:xfrm>
-          <a:prstGeom prst="rect">
-            <a:avLst/>
-          </a:prstGeom>
-          <a:noFill/>
-          <a:ln/>
-        </p:spPr>
-        <p:txBody>
-          <a:bodyPr wrap="square" lIns="0" tIns="0" rIns="0" bIns="0" rtlCol="0" anchor="t"/>
-          <a:lstStyle/>
-          <a:p>
-            <a:pPr algn="l" indent="0" marL="0">
-              <a:buNone/>
-            </a:pPr>
-            <a:r>
-              <a:rPr lang="en-US" sz="1550" b="1" dirty="0">
-                <a:solidFill>
-                  <a:srgbClr val="1F2328"/>
-                </a:solidFill>
-                <a:latin typeface="Arial" pitchFamily="34" charset="0"/>
-                <a:ea typeface="Arial" pitchFamily="34" charset="-122"/>
-                <a:cs typeface="Arial" pitchFamily="34" charset="-120"/>
-              </a:rPr>
-              <a:t>Shared through Git</a:t>
-            </a:r>
-            <a:endParaRPr lang="en-US" sz="1550" dirty="0"/>
-          </a:p>
-        </p:txBody>
-      </p:sp>
-      <p:sp>
-        <p:nvSpPr>
-          <p:cNvPr id="21" name="Text 13"/>
-          <p:cNvSpPr/>
-          <p:nvPr/>
-        </p:nvSpPr>
-        <p:spPr>
-          <a:xfrm>
-            <a:off x="5537150" y="3715643"/>
-            <a:ext cx="2734913" cy="198090"/>
-          </a:xfrm>
-          <a:prstGeom prst="rect">
-            <a:avLst/>
-          </a:prstGeom>
-          <a:noFill/>
-          <a:ln/>
-        </p:spPr>
-        <p:txBody>
-          <a:bodyPr wrap="square" lIns="0" tIns="0" rIns="0" bIns="0" rtlCol="0" anchor="t"/>
-          <a:lstStyle/>
-          <a:p>
-            <a:pPr algn="l" indent="0" marL="0">
-              <a:lnSpc>
-                <a:spcPts val="1560"/>
-              </a:lnSpc>
-              <a:buNone/>
-            </a:pPr>
-            <a:r>
-              <a:rPr lang="en-US" sz="1350" dirty="0">
-                <a:solidFill>
-                  <a:srgbClr val="59636E"/>
-                </a:solidFill>
-                <a:latin typeface="Arial" pitchFamily="34" charset="0"/>
-                <a:ea typeface="Arial" pitchFamily="34" charset="-122"/>
-                <a:cs typeface="Arial" pitchFamily="34" charset="-120"/>
-              </a:rPr>
-              <a:t>Your whole team gets the checklist.</a:t>
+              <a:t>Share repository skills with your team through Git.</a:t>
             </a:r>
             <a:endParaRPr lang="en-US" sz="1350" dirty="0"/>
           </a:p>
